--- a/decks/day1/module-2-foundry-portal.pptx
+++ b/decks/day1/module-2-foundry-portal.pptx
@@ -4328,7 +4328,7 @@
             <a:off x="365760" y="4343400"/>
             <a:ext cx="8412480" cy="457200"/>
           </a:xfrm>
-          <a:prstGeom prst="1">
+          <a:prstGeom prst="rect">
             <a:avLst/>
           </a:prstGeom>
           <a:solidFill>
@@ -5084,7 +5084,7 @@
             <a:off x="365760" y="1417320"/>
             <a:ext cx="8412480" cy="548640"/>
           </a:xfrm>
-          <a:prstGeom prst="1">
+          <a:prstGeom prst="rect">
             <a:avLst/>
           </a:prstGeom>
           <a:solidFill>

--- a/decks/day1/module-2-foundry-portal.pptx
+++ b/decks/day1/module-2-foundry-portal.pptx
@@ -5899,7 +5899,7 @@
                 <a:ea typeface="Calibri" pitchFamily="34" charset="-122"/>
                 <a:cs typeface="Calibri" pitchFamily="34" charset="-120"/>
               </a:rPr>
-              <a:t>Agent playground — test a PromptAgent or HostedAgent you've created in Foundry</a:t>
+              <a:t>Agent playground — test a Prompt agent or Hosted agent you've created in Foundry</a:t>
             </a:r>
             <a:endParaRPr lang="en-US" sz="1500" dirty="0"/>
           </a:p>

--- a/decks/day1/module-2-foundry-portal.pptx
+++ b/decks/day1/module-2-foundry-portal.pptx
@@ -20,9 +20,10 @@
     <p:sldId id="268" r:id="rId14"/>
     <p:sldId id="269" r:id="rId15"/>
     <p:sldId id="270" r:id="rId16"/>
+    <p:sldId id="271" r:id="rId17"/>
   </p:sldIdLst>
   <p:notesMasterIdLst>
-    <p:notesMasterId r:id="rId17"/>
+    <p:notesMasterId r:id="rId18"/>
   </p:notesMasterIdLst>
   <p:sldSz cx="9144000" cy="5143500"/>
   <p:notesSz cx="5143500" cy="9144000"/>
@@ -604,7 +605,7 @@
           <a:p>
             <a:r>
               <a:rPr lang="en-US" dirty="0"/>
-              <a:t>Bookmark this. We use it lightly today and go deep Day 2. Note: Toolbox = MCP under the hood; ties into Day 3 nicely.</a:t>
+              <a:t>Transition to portal areas we introduce today and revisit later.</a:t>
             </a:r>
             <a:endParaRPr lang="en-US" dirty="0"/>
           </a:p>
@@ -692,7 +693,7 @@
           <a:p>
             <a:r>
               <a:rPr lang="en-US" dirty="0"/>
-              <a:t>This is Day 2's main course. Just plant the flag.</a:t>
+              <a:t>Bookmark this. We use it lightly today and go deep Day 2. Note: Toolbox = MCP under the hood; ties into Day 3 nicely.</a:t>
             </a:r>
             <a:endParaRPr lang="en-US" dirty="0"/>
           </a:p>
@@ -780,7 +781,7 @@
           <a:p>
             <a:r>
               <a:rPr lang="en-US" dirty="0"/>
-              <a:t>Actions vs. Knowledge is the compass for Days 2–3. Actions maps to Day 3 (MCP). Knowledge maps to Day 2 (Foundry IQ, RAG).</a:t>
+              <a:t>This is Day 2's main course. Just plant the flag.</a:t>
             </a:r>
             <a:endParaRPr lang="en-US" dirty="0"/>
           </a:p>
@@ -868,7 +869,7 @@
           <a:p>
             <a:r>
               <a:rPr lang="en-US" dirty="0"/>
-              <a:t>Give attendees the diagnostic sequence: quota → RBAC → region. In that order.</a:t>
+              <a:t>Actions vs. Knowledge is the compass for Days 2–3. Actions maps to Day 3 (MCP). Knowledge maps to Day 2 (Foundry IQ, RAG).</a:t>
             </a:r>
             <a:endParaRPr lang="en-US" dirty="0"/>
           </a:p>
@@ -956,7 +957,7 @@
           <a:p>
             <a:r>
               <a:rPr lang="en-US" dirty="0"/>
-              <a:t>Screen share your portal. Move steadily. Ask attendees to raise a hand if they can't complete steps 1–4 during the demo.</a:t>
+              <a:t>Give attendees the diagnostic sequence: quota → RBAC → region. In that order.</a:t>
             </a:r>
             <a:endParaRPr lang="en-US" dirty="0"/>
           </a:p>
@@ -1044,7 +1045,7 @@
           <a:p>
             <a:r>
               <a:rPr lang="en-US" dirty="0"/>
-              <a:t>Short recap. Confirm everyone has their project endpoint copied.</a:t>
+              <a:t>Screen share your portal. Move steadily. Ask attendees to raise a hand if they can't complete steps 1–4 during the demo.</a:t>
             </a:r>
             <a:endParaRPr lang="en-US" dirty="0"/>
           </a:p>
@@ -1068,6 +1069,94 @@
             <a:fld id="{F7021451-1387-4CA6-816F-3879F97B5CBC}" type="slidenum">
               <a:rPr lang="en-US"/>
               <a:t>15</a:t>
+            </a:fld>
+            <a:endParaRPr lang="en-US"/>
+          </a:p>
+        </p:txBody>
+      </p:sp>
+    </p:spTree>
+    <p:extLst>
+      <p:ext uri="{BB962C8B-B14F-4D97-AF65-F5344CB8AC3E}">
+        <p14:creationId xmlns:p14="http://schemas.microsoft.com/office/powerpoint/2010/main" val="1024086991"/>
+      </p:ext>
+    </p:extLst>
+  </p:cSld>
+  <p:clrMapOvr>
+    <a:masterClrMapping/>
+  </p:clrMapOvr>
+</p:notes>
+</file>
+
+<file path=ppt/notesSlides/notesSlide16.xml><?xml version="1.0" encoding="utf-8"?>
+<p:notes xmlns:a="http://schemas.openxmlformats.org/drawingml/2006/main" xmlns:r="http://schemas.openxmlformats.org/officeDocument/2006/relationships" xmlns:p="http://schemas.openxmlformats.org/presentationml/2006/main">
+  <p:cSld>
+    <p:spTree>
+      <p:nvGrpSpPr>
+        <p:cNvPr id="1" name=""/>
+        <p:cNvGrpSpPr/>
+        <p:nvPr/>
+      </p:nvGrpSpPr>
+      <p:grpSpPr>
+        <a:xfrm>
+          <a:off x="0" y="0"/>
+          <a:ext cx="0" cy="0"/>
+          <a:chOff x="0" y="0"/>
+          <a:chExt cx="0" cy="0"/>
+        </a:xfrm>
+      </p:grpSpPr>
+      <p:sp>
+        <p:nvSpPr>
+          <p:cNvPr id="2" name="Slide Image Placeholder 1"/>
+          <p:cNvSpPr>
+            <a:spLocks noGrp="1" noRot="1" noChangeAspect="1"/>
+          </p:cNvSpPr>
+          <p:nvPr>
+            <p:ph type="sldImg"/>
+          </p:nvPr>
+        </p:nvSpPr>
+        <p:spPr/>
+      </p:sp>
+      <p:sp>
+        <p:nvSpPr>
+          <p:cNvPr id="3" name="Notes Placeholder 2"/>
+          <p:cNvSpPr>
+            <a:spLocks noGrp="1"/>
+          </p:cNvSpPr>
+          <p:nvPr>
+            <p:ph type="body" idx="1"/>
+          </p:nvPr>
+        </p:nvSpPr>
+        <p:spPr/>
+        <p:txBody>
+          <a:bodyPr/>
+          <a:lstStyle/>
+          <a:p>
+            <a:r>
+              <a:rPr lang="en-US" dirty="0"/>
+              <a:t>Short recap. Confirm everyone has their project endpoint copied.</a:t>
+            </a:r>
+            <a:endParaRPr lang="en-US" dirty="0"/>
+          </a:p>
+        </p:txBody>
+      </p:sp>
+      <p:sp>
+        <p:nvSpPr>
+          <p:cNvPr id="4" name="Slide Number Placeholder 3"/>
+          <p:cNvSpPr>
+            <a:spLocks noGrp="1"/>
+          </p:cNvSpPr>
+          <p:nvPr>
+            <p:ph type="sldNum" sz="quarter" idx="10"/>
+          </p:nvPr>
+        </p:nvSpPr>
+        <p:spPr/>
+        <p:txBody>
+          <a:bodyPr/>
+          <a:lstStyle/>
+          <a:p>
+            <a:fld id="{F7021451-1387-4CA6-816F-3879F97B5CBC}" type="slidenum">
+              <a:rPr lang="en-US"/>
+              <a:t>16</a:t>
             </a:fld>
             <a:endParaRPr lang="en-US"/>
           </a:p>
@@ -1220,7 +1309,7 @@
           <a:p>
             <a:r>
               <a:rPr lang="en-US" dirty="0"/>
-              <a:t>Emphasize: you always operate inside a project. If in doubt, 'what project are we in?'</a:t>
+              <a:t>This is the mental map for Foundry governance. Emphasize that connected resources (Storage, Key Vault, AI Search) are independent Azure resources — you manage their networking and access separately. The Foundry resource references them through connections.</a:t>
             </a:r>
             <a:endParaRPr lang="en-US" dirty="0"/>
           </a:p>
@@ -1308,7 +1397,7 @@
           <a:p>
             <a:r>
               <a:rPr lang="en-US" dirty="0"/>
-              <a:t>Show them where to grab this from the portal. Overview page → 'Endpoints and keys' or similar (verify current wording live).</a:t>
+              <a:t>Foundry User role was previously called Azure AI User — attendees may see either name during the rollout. RBAC scopes at both resource and project level; 401/403 in the lab almost always means missing Foundry User at the resource scope.</a:t>
             </a:r>
             <a:endParaRPr lang="en-US" dirty="0"/>
           </a:p>
@@ -1396,7 +1485,7 @@
           <a:p>
             <a:r>
               <a:rPr lang="en-US" dirty="0"/>
-              <a:t>Common gotcha — attendees pick a model, hit a region wall. Encourage confirming region + quota before deploying.</a:t>
+              <a:t>Show them where to grab this from the portal. Overview page → 'Endpoints and keys' or similar (verify current wording live).</a:t>
             </a:r>
             <a:endParaRPr lang="en-US" dirty="0"/>
           </a:p>
@@ -1484,7 +1573,7 @@
           <a:p>
             <a:r>
               <a:rPr lang="en-US" dirty="0"/>
-              <a:t>Deployment name != model name. Common source of confusion in the lab. Emphasize.</a:t>
+              <a:t>Common gotcha — attendees pick a model, hit a region wall. Encourage confirming region + quota before deploying.</a:t>
             </a:r>
             <a:endParaRPr lang="en-US" dirty="0"/>
           </a:p>
@@ -1572,7 +1661,7 @@
           <a:p>
             <a:r>
               <a:rPr lang="en-US" dirty="0"/>
-              <a:t>This is a debugging tip masquerading as a portal feature. Reinforce: iterate in the playground first.</a:t>
+              <a:t>Deployment name != model name. Common source of confusion in the lab. Emphasize.</a:t>
             </a:r>
             <a:endParaRPr lang="en-US" dirty="0"/>
           </a:p>
@@ -1660,7 +1749,7 @@
           <a:p>
             <a:r>
               <a:rPr lang="en-US" dirty="0"/>
-              <a:t>Just orient them. Deep material lands Day 2.</a:t>
+              <a:t>This is a debugging tip masquerading as a portal feature. Reinforce: iterate in the playground first.</a:t>
             </a:r>
             <a:endParaRPr lang="en-US" dirty="0"/>
           </a:p>
@@ -1748,7 +1837,7 @@
           <a:p>
             <a:r>
               <a:rPr lang="en-US" dirty="0"/>
-              <a:t>Transition to portal areas we introduce today and revisit later.</a:t>
+              <a:t>Reinforce the architecture slide: connections are Foundry's way of pointing at connected resources, which live under their own governance boundaries. If a Foundry-side connection fails, check the target resource's own network/access policies, not just Foundry's.</a:t>
             </a:r>
             <a:endParaRPr lang="en-US" dirty="0"/>
           </a:p>
@@ -2291,7 +2380,7 @@
     <p:bg>
       <p:bgPr>
         <a:solidFill>
-          <a:srgbClr val="FFFFFF"/>
+          <a:srgbClr val="1E2761"/>
         </a:solidFill>
       </p:bgPr>
     </p:bg>
@@ -2311,34 +2400,14 @@
       </p:grpSpPr>
       <p:sp>
         <p:nvSpPr>
-          <p:cNvPr id="2" name="Shape 0"/>
-          <p:cNvSpPr/>
-          <p:nvPr/>
-        </p:nvSpPr>
-        <p:spPr>
-          <a:xfrm>
-            <a:off x="0" y="0"/>
-            <a:ext cx="54864" cy="5143500"/>
-          </a:xfrm>
-          <a:prstGeom prst="rect">
-            <a:avLst/>
-          </a:prstGeom>
-          <a:solidFill>
-            <a:srgbClr val="1E2761"/>
-          </a:solidFill>
-          <a:ln/>
-        </p:spPr>
-      </p:sp>
-      <p:sp>
-        <p:nvSpPr>
-          <p:cNvPr id="3" name="Text 1"/>
-          <p:cNvSpPr/>
-          <p:nvPr/>
-        </p:nvSpPr>
-        <p:spPr>
-          <a:xfrm>
-            <a:off x="5669280" y="274320"/>
-            <a:ext cx="3291840" cy="274320"/>
+          <p:cNvPr id="2" name="Text 0"/>
+          <p:cNvSpPr/>
+          <p:nvPr/>
+        </p:nvSpPr>
+        <p:spPr>
+          <a:xfrm>
+            <a:off x="548640" y="2011680"/>
+            <a:ext cx="8046720" cy="1097280"/>
           </a:xfrm>
           <a:prstGeom prst="rect">
             <a:avLst/>
@@ -2347,76 +2416,37 @@
           <a:ln/>
         </p:spPr>
         <p:txBody>
-          <a:bodyPr wrap="square" lIns="0" tIns="0" rIns="0" bIns="0" rtlCol="0" anchor="ctr"/>
-          <a:lstStyle/>
-          <a:p>
-            <a:pPr algn="r" indent="0" marL="0">
-              <a:buNone/>
-            </a:pPr>
-            <a:r>
-              <a:rPr lang="en-US" sz="1000" dirty="0">
-                <a:solidFill>
-                  <a:srgbClr val="6B7280"/>
-                </a:solidFill>
-                <a:latin typeface="Calibri" pitchFamily="34" charset="0"/>
-                <a:ea typeface="Calibri" pitchFamily="34" charset="-122"/>
-                <a:cs typeface="Calibri" pitchFamily="34" charset="-120"/>
-              </a:rPr>
-              <a:t>Day 1 · Module 2</a:t>
-            </a:r>
-            <a:endParaRPr lang="en-US" sz="1000" dirty="0"/>
-          </a:p>
-        </p:txBody>
-      </p:sp>
-      <p:sp>
-        <p:nvSpPr>
-          <p:cNvPr id="4" name="Text 2"/>
-          <p:cNvSpPr/>
-          <p:nvPr/>
-        </p:nvSpPr>
-        <p:spPr>
-          <a:xfrm>
-            <a:off x="365760" y="320040"/>
-            <a:ext cx="6217920" cy="640080"/>
-          </a:xfrm>
-          <a:prstGeom prst="rect">
-            <a:avLst/>
-          </a:prstGeom>
-          <a:noFill/>
-          <a:ln/>
-        </p:spPr>
-        <p:txBody>
-          <a:bodyPr wrap="square" lIns="0" tIns="0" rIns="0" bIns="0" rtlCol="0" anchor="ctr"/>
+          <a:bodyPr wrap="square" rtlCol="0" anchor="ctr"/>
           <a:lstStyle/>
           <a:p>
             <a:pPr indent="0" marL="0">
               <a:buNone/>
             </a:pPr>
             <a:r>
-              <a:rPr lang="en-US" sz="2800" b="1" dirty="0">
-                <a:solidFill>
-                  <a:srgbClr val="1E2761"/>
-                </a:solidFill>
-                <a:latin typeface="Calibri" pitchFamily="34" charset="0"/>
-                <a:ea typeface="Calibri" pitchFamily="34" charset="-122"/>
-                <a:cs typeface="Calibri" pitchFamily="34" charset="-120"/>
-              </a:rPr>
-              <a:t>Foundry Toolbox (intro)</a:t>
-            </a:r>
-            <a:endParaRPr lang="en-US" sz="2800" dirty="0"/>
-          </a:p>
-        </p:txBody>
-      </p:sp>
-      <p:sp>
-        <p:nvSpPr>
-          <p:cNvPr id="5" name="Text 3"/>
-          <p:cNvSpPr/>
-          <p:nvPr/>
-        </p:nvSpPr>
-        <p:spPr>
-          <a:xfrm>
-            <a:off x="365760" y="1097280"/>
-            <a:ext cx="8412480" cy="3749040"/>
+              <a:rPr lang="en-US" sz="4000" b="1" dirty="0">
+                <a:solidFill>
+                  <a:srgbClr val="FFFFFF"/>
+                </a:solidFill>
+                <a:latin typeface="Calibri" pitchFamily="34" charset="0"/>
+                <a:ea typeface="Calibri" pitchFamily="34" charset="-122"/>
+                <a:cs typeface="Calibri" pitchFamily="34" charset="-120"/>
+              </a:rPr>
+              <a:t>Toolbox and Foundry IQ</a:t>
+            </a:r>
+            <a:endParaRPr lang="en-US" sz="4000" dirty="0"/>
+          </a:p>
+        </p:txBody>
+      </p:sp>
+      <p:sp>
+        <p:nvSpPr>
+          <p:cNvPr id="3" name="Text 1"/>
+          <p:cNvSpPr/>
+          <p:nvPr/>
+        </p:nvSpPr>
+        <p:spPr>
+          <a:xfrm>
+            <a:off x="548640" y="3108960"/>
+            <a:ext cx="8046720" cy="548640"/>
           </a:xfrm>
           <a:prstGeom prst="rect">
             <a:avLst/>
@@ -2428,88 +2458,21 @@
           <a:bodyPr wrap="square" rtlCol="0" anchor="ctr"/>
           <a:lstStyle/>
           <a:p>
-            <a:pPr marL="342900" indent="-342900">
-              <a:spcAft>
-                <a:spcPts val="600"/>
-              </a:spcAft>
-              <a:buSzPct val="100000"/>
-              <a:buChar char="•"/>
-            </a:pPr>
-            <a:r>
-              <a:rPr lang="en-US" sz="1500" dirty="0">
-                <a:solidFill>
-                  <a:srgbClr val="212121"/>
-                </a:solidFill>
-                <a:latin typeface="Calibri" pitchFamily="34" charset="0"/>
-                <a:ea typeface="Calibri" pitchFamily="34" charset="-122"/>
-                <a:cs typeface="Calibri" pitchFamily="34" charset="-120"/>
-              </a:rPr>
-              <a:t>Curated catalog of ready-to-use tools an agent can attach to</a:t>
-            </a:r>
-            <a:endParaRPr lang="en-US" sz="1500" dirty="0"/>
-          </a:p>
-          <a:p>
-            <a:pPr marL="342900" indent="-342900">
-              <a:spcAft>
-                <a:spcPts val="600"/>
-              </a:spcAft>
-              <a:buSzPct val="100000"/>
-              <a:buChar char="•"/>
-            </a:pPr>
-            <a:r>
-              <a:rPr lang="en-US" sz="1500" dirty="0">
-                <a:solidFill>
-                  <a:srgbClr val="212121"/>
-                </a:solidFill>
-                <a:latin typeface="Calibri" pitchFamily="34" charset="0"/>
-                <a:ea typeface="Calibri" pitchFamily="34" charset="-122"/>
-                <a:cs typeface="Calibri" pitchFamily="34" charset="-120"/>
-              </a:rPr>
-              <a:t>Includes: code interpreter, file search, Bing search, SharePoint, Fabric, Graph, custom skills</a:t>
-            </a:r>
-            <a:endParaRPr lang="en-US" sz="1500" dirty="0"/>
-          </a:p>
-          <a:p>
-            <a:pPr marL="342900" indent="-342900">
-              <a:spcAft>
-                <a:spcPts val="600"/>
-              </a:spcAft>
-              <a:buSzPct val="100000"/>
-              <a:buChar char="•"/>
-            </a:pPr>
-            <a:r>
-              <a:rPr lang="en-US" sz="1500" dirty="0">
-                <a:solidFill>
-                  <a:srgbClr val="212121"/>
-                </a:solidFill>
-                <a:latin typeface="Calibri" pitchFamily="34" charset="0"/>
-                <a:ea typeface="Calibri" pitchFamily="34" charset="-122"/>
-                <a:cs typeface="Calibri" pitchFamily="34" charset="-120"/>
-              </a:rPr>
-              <a:t>Exposed to MAF over an MCP endpoint (same protocol as Day 3)</a:t>
-            </a:r>
-            <a:endParaRPr lang="en-US" sz="1500" dirty="0"/>
-          </a:p>
-          <a:p>
-            <a:pPr marL="342900" indent="-342900">
-              <a:spcAft>
-                <a:spcPts val="600"/>
-              </a:spcAft>
-              <a:buSzPct val="100000"/>
-              <a:buChar char="•"/>
-            </a:pPr>
-            <a:r>
-              <a:rPr lang="en-US" sz="1500" dirty="0">
-                <a:solidFill>
-                  <a:srgbClr val="212121"/>
-                </a:solidFill>
-                <a:latin typeface="Calibri" pitchFamily="34" charset="0"/>
-                <a:ea typeface="Calibri" pitchFamily="34" charset="-122"/>
-                <a:cs typeface="Calibri" pitchFamily="34" charset="-120"/>
-              </a:rPr>
-              <a:t>Attach Toolbox tools to a Foundry-hosted agent from the portal, or from code</a:t>
-            </a:r>
-            <a:endParaRPr lang="en-US" sz="1500" dirty="0"/>
+            <a:pPr indent="0" marL="0">
+              <a:buNone/>
+            </a:pPr>
+            <a:r>
+              <a:rPr lang="en-US" sz="1800" dirty="0">
+                <a:solidFill>
+                  <a:srgbClr val="CADCFC"/>
+                </a:solidFill>
+                <a:latin typeface="Calibri" pitchFamily="34" charset="0"/>
+                <a:ea typeface="Calibri" pitchFamily="34" charset="-122"/>
+                <a:cs typeface="Calibri" pitchFamily="34" charset="-120"/>
+              </a:rPr>
+              <a:t>Introductions only — Days 2–3 go deep</a:t>
+            </a:r>
+            <a:endParaRPr lang="en-US" sz="1800" dirty="0"/>
           </a:p>
         </p:txBody>
       </p:sp>
@@ -2637,7 +2600,7 @@
                 <a:ea typeface="Calibri" pitchFamily="34" charset="-122"/>
                 <a:cs typeface="Calibri" pitchFamily="34" charset="-120"/>
               </a:rPr>
-              <a:t>Foundry IQ (intro)</a:t>
+              <a:t>Foundry Toolbox (intro)</a:t>
             </a:r>
             <a:endParaRPr lang="en-US" sz="2800" dirty="0"/>
           </a:p>
@@ -2680,7 +2643,7 @@
                 <a:ea typeface="Calibri" pitchFamily="34" charset="-122"/>
                 <a:cs typeface="Calibri" pitchFamily="34" charset="-120"/>
               </a:rPr>
-              <a:t>The knowledge / grounding layer of Foundry</a:t>
+              <a:t>Curated catalog of ready-to-use tools an agent can attach to</a:t>
             </a:r>
             <a:endParaRPr lang="en-US" sz="1500" dirty="0"/>
           </a:p>
@@ -2701,7 +2664,7 @@
                 <a:ea typeface="Calibri" pitchFamily="34" charset="-122"/>
                 <a:cs typeface="Calibri" pitchFamily="34" charset="-120"/>
               </a:rPr>
-              <a:t>Unified retrieval across enterprise sources — AI Search indexes, SharePoint, OneLake / Fabric, and more</a:t>
+              <a:t>Includes: code interpreter, file search, Bing search, SharePoint, Fabric, Graph, custom skills</a:t>
             </a:r>
             <a:endParaRPr lang="en-US" sz="1500" dirty="0"/>
           </a:p>
@@ -2722,7 +2685,7 @@
                 <a:ea typeface="Calibri" pitchFamily="34" charset="-122"/>
                 <a:cs typeface="Calibri" pitchFamily="34" charset="-120"/>
               </a:rPr>
-              <a:t>Alternative to hand-rolling a RAG pipeline per source</a:t>
+              <a:t>Exposed to MAF over an MCP endpoint (same protocol as Day 3)</a:t>
             </a:r>
             <a:endParaRPr lang="en-US" sz="1500" dirty="0"/>
           </a:p>
@@ -2743,7 +2706,7 @@
                 <a:ea typeface="Calibri" pitchFamily="34" charset="-122"/>
                 <a:cs typeface="Calibri" pitchFamily="34" charset="-120"/>
               </a:rPr>
-              <a:t>Agents that use it get grounded answers with citations, without you writing retrieval code</a:t>
+              <a:t>Attach Toolbox tools to a Foundry-hosted agent from the portal, or from code</a:t>
             </a:r>
             <a:endParaRPr lang="en-US" sz="1500" dirty="0"/>
           </a:p>
@@ -2873,6 +2836,242 @@
                 <a:ea typeface="Calibri" pitchFamily="34" charset="-122"/>
                 <a:cs typeface="Calibri" pitchFamily="34" charset="-120"/>
               </a:rPr>
+              <a:t>Foundry IQ (intro)</a:t>
+            </a:r>
+            <a:endParaRPr lang="en-US" sz="2800" dirty="0"/>
+          </a:p>
+        </p:txBody>
+      </p:sp>
+      <p:sp>
+        <p:nvSpPr>
+          <p:cNvPr id="5" name="Text 3"/>
+          <p:cNvSpPr/>
+          <p:nvPr/>
+        </p:nvSpPr>
+        <p:spPr>
+          <a:xfrm>
+            <a:off x="365760" y="1097280"/>
+            <a:ext cx="8412480" cy="3749040"/>
+          </a:xfrm>
+          <a:prstGeom prst="rect">
+            <a:avLst/>
+          </a:prstGeom>
+          <a:noFill/>
+          <a:ln/>
+        </p:spPr>
+        <p:txBody>
+          <a:bodyPr wrap="square" rtlCol="0" anchor="ctr"/>
+          <a:lstStyle/>
+          <a:p>
+            <a:pPr marL="342900" indent="-342900">
+              <a:spcAft>
+                <a:spcPts val="600"/>
+              </a:spcAft>
+              <a:buSzPct val="100000"/>
+              <a:buChar char="•"/>
+            </a:pPr>
+            <a:r>
+              <a:rPr lang="en-US" sz="1500" dirty="0">
+                <a:solidFill>
+                  <a:srgbClr val="212121"/>
+                </a:solidFill>
+                <a:latin typeface="Calibri" pitchFamily="34" charset="0"/>
+                <a:ea typeface="Calibri" pitchFamily="34" charset="-122"/>
+                <a:cs typeface="Calibri" pitchFamily="34" charset="-120"/>
+              </a:rPr>
+              <a:t>The knowledge / grounding layer of Foundry</a:t>
+            </a:r>
+            <a:endParaRPr lang="en-US" sz="1500" dirty="0"/>
+          </a:p>
+          <a:p>
+            <a:pPr marL="342900" indent="-342900">
+              <a:spcAft>
+                <a:spcPts val="600"/>
+              </a:spcAft>
+              <a:buSzPct val="100000"/>
+              <a:buChar char="•"/>
+            </a:pPr>
+            <a:r>
+              <a:rPr lang="en-US" sz="1500" dirty="0">
+                <a:solidFill>
+                  <a:srgbClr val="212121"/>
+                </a:solidFill>
+                <a:latin typeface="Calibri" pitchFamily="34" charset="0"/>
+                <a:ea typeface="Calibri" pitchFamily="34" charset="-122"/>
+                <a:cs typeface="Calibri" pitchFamily="34" charset="-120"/>
+              </a:rPr>
+              <a:t>Unified retrieval across enterprise sources — AI Search indexes, SharePoint, OneLake / Fabric, and more</a:t>
+            </a:r>
+            <a:endParaRPr lang="en-US" sz="1500" dirty="0"/>
+          </a:p>
+          <a:p>
+            <a:pPr marL="342900" indent="-342900">
+              <a:spcAft>
+                <a:spcPts val="600"/>
+              </a:spcAft>
+              <a:buSzPct val="100000"/>
+              <a:buChar char="•"/>
+            </a:pPr>
+            <a:r>
+              <a:rPr lang="en-US" sz="1500" dirty="0">
+                <a:solidFill>
+                  <a:srgbClr val="212121"/>
+                </a:solidFill>
+                <a:latin typeface="Calibri" pitchFamily="34" charset="0"/>
+                <a:ea typeface="Calibri" pitchFamily="34" charset="-122"/>
+                <a:cs typeface="Calibri" pitchFamily="34" charset="-120"/>
+              </a:rPr>
+              <a:t>Alternative to hand-rolling a RAG pipeline per source</a:t>
+            </a:r>
+            <a:endParaRPr lang="en-US" sz="1500" dirty="0"/>
+          </a:p>
+          <a:p>
+            <a:pPr marL="342900" indent="-342900">
+              <a:spcAft>
+                <a:spcPts val="600"/>
+              </a:spcAft>
+              <a:buSzPct val="100000"/>
+              <a:buChar char="•"/>
+            </a:pPr>
+            <a:r>
+              <a:rPr lang="en-US" sz="1500" dirty="0">
+                <a:solidFill>
+                  <a:srgbClr val="212121"/>
+                </a:solidFill>
+                <a:latin typeface="Calibri" pitchFamily="34" charset="0"/>
+                <a:ea typeface="Calibri" pitchFamily="34" charset="-122"/>
+                <a:cs typeface="Calibri" pitchFamily="34" charset="-120"/>
+              </a:rPr>
+              <a:t>Agents that use it get grounded answers with citations, without you writing retrieval code</a:t>
+            </a:r>
+            <a:endParaRPr lang="en-US" sz="1500" dirty="0"/>
+          </a:p>
+        </p:txBody>
+      </p:sp>
+    </p:spTree>
+  </p:cSld>
+  <p:clrMapOvr>
+    <a:masterClrMapping/>
+  </p:clrMapOvr>
+</p:sld>
+</file>
+
+<file path=ppt/slides/slide13.xml><?xml version="1.0" encoding="utf-8"?>
+<p:sld xmlns:a="http://schemas.openxmlformats.org/drawingml/2006/main" xmlns:r="http://schemas.openxmlformats.org/officeDocument/2006/relationships" xmlns:p="http://schemas.openxmlformats.org/presentationml/2006/main">
+  <p:cSld name="Slide 13">
+    <p:bg>
+      <p:bgPr>
+        <a:solidFill>
+          <a:srgbClr val="FFFFFF"/>
+        </a:solidFill>
+      </p:bgPr>
+    </p:bg>
+    <p:spTree>
+      <p:nvGrpSpPr>
+        <p:cNvPr id="1" name=""/>
+        <p:cNvGrpSpPr/>
+        <p:nvPr/>
+      </p:nvGrpSpPr>
+      <p:grpSpPr>
+        <a:xfrm>
+          <a:off x="0" y="0"/>
+          <a:ext cx="0" cy="0"/>
+          <a:chOff x="0" y="0"/>
+          <a:chExt cx="0" cy="0"/>
+        </a:xfrm>
+      </p:grpSpPr>
+      <p:sp>
+        <p:nvSpPr>
+          <p:cNvPr id="2" name="Shape 0"/>
+          <p:cNvSpPr/>
+          <p:nvPr/>
+        </p:nvSpPr>
+        <p:spPr>
+          <a:xfrm>
+            <a:off x="0" y="0"/>
+            <a:ext cx="54864" cy="5143500"/>
+          </a:xfrm>
+          <a:prstGeom prst="rect">
+            <a:avLst/>
+          </a:prstGeom>
+          <a:solidFill>
+            <a:srgbClr val="1E2761"/>
+          </a:solidFill>
+          <a:ln/>
+        </p:spPr>
+      </p:sp>
+      <p:sp>
+        <p:nvSpPr>
+          <p:cNvPr id="3" name="Text 1"/>
+          <p:cNvSpPr/>
+          <p:nvPr/>
+        </p:nvSpPr>
+        <p:spPr>
+          <a:xfrm>
+            <a:off x="5669280" y="274320"/>
+            <a:ext cx="3291840" cy="274320"/>
+          </a:xfrm>
+          <a:prstGeom prst="rect">
+            <a:avLst/>
+          </a:prstGeom>
+          <a:noFill/>
+          <a:ln/>
+        </p:spPr>
+        <p:txBody>
+          <a:bodyPr wrap="square" lIns="0" tIns="0" rIns="0" bIns="0" rtlCol="0" anchor="ctr"/>
+          <a:lstStyle/>
+          <a:p>
+            <a:pPr algn="r" indent="0" marL="0">
+              <a:buNone/>
+            </a:pPr>
+            <a:r>
+              <a:rPr lang="en-US" sz="1000" dirty="0">
+                <a:solidFill>
+                  <a:srgbClr val="6B7280"/>
+                </a:solidFill>
+                <a:latin typeface="Calibri" pitchFamily="34" charset="0"/>
+                <a:ea typeface="Calibri" pitchFamily="34" charset="-122"/>
+                <a:cs typeface="Calibri" pitchFamily="34" charset="-120"/>
+              </a:rPr>
+              <a:t>Day 1 · Module 2</a:t>
+            </a:r>
+            <a:endParaRPr lang="en-US" sz="1000" dirty="0"/>
+          </a:p>
+        </p:txBody>
+      </p:sp>
+      <p:sp>
+        <p:nvSpPr>
+          <p:cNvPr id="4" name="Text 2"/>
+          <p:cNvSpPr/>
+          <p:nvPr/>
+        </p:nvSpPr>
+        <p:spPr>
+          <a:xfrm>
+            <a:off x="365760" y="320040"/>
+            <a:ext cx="6217920" cy="640080"/>
+          </a:xfrm>
+          <a:prstGeom prst="rect">
+            <a:avLst/>
+          </a:prstGeom>
+          <a:noFill/>
+          <a:ln/>
+        </p:spPr>
+        <p:txBody>
+          <a:bodyPr wrap="square" lIns="0" tIns="0" rIns="0" bIns="0" rtlCol="0" anchor="ctr"/>
+          <a:lstStyle/>
+          <a:p>
+            <a:pPr indent="0" marL="0">
+              <a:buNone/>
+            </a:pPr>
+            <a:r>
+              <a:rPr lang="en-US" sz="2800" b="1" dirty="0">
+                <a:solidFill>
+                  <a:srgbClr val="1E2761"/>
+                </a:solidFill>
+                <a:latin typeface="Calibri" pitchFamily="34" charset="0"/>
+                <a:ea typeface="Calibri" pitchFamily="34" charset="-122"/>
+                <a:cs typeface="Calibri" pitchFamily="34" charset="-120"/>
+              </a:rPr>
               <a:t>Two axes to remember</a:t>
             </a:r>
             <a:endParaRPr lang="en-US" sz="2800" dirty="0"/>
@@ -2881,7 +3080,7 @@
       </p:sp>
       <p:graphicFrame>
         <p:nvGraphicFramePr>
-          <p:cNvPr id="13" name="Table 0"/>
+          <p:cNvPr id="14" name="Table 0"/>
           <p:cNvGraphicFramePr>
             <a:graphicFrameLocks noGrp="1"/>
           </p:cNvGraphicFramePr>
@@ -3536,242 +3735,6 @@
 </p:sld>
 </file>
 
-<file path=ppt/slides/slide13.xml><?xml version="1.0" encoding="utf-8"?>
-<p:sld xmlns:a="http://schemas.openxmlformats.org/drawingml/2006/main" xmlns:r="http://schemas.openxmlformats.org/officeDocument/2006/relationships" xmlns:p="http://schemas.openxmlformats.org/presentationml/2006/main">
-  <p:cSld name="Slide 13">
-    <p:bg>
-      <p:bgPr>
-        <a:solidFill>
-          <a:srgbClr val="FFFFFF"/>
-        </a:solidFill>
-      </p:bgPr>
-    </p:bg>
-    <p:spTree>
-      <p:nvGrpSpPr>
-        <p:cNvPr id="1" name=""/>
-        <p:cNvGrpSpPr/>
-        <p:nvPr/>
-      </p:nvGrpSpPr>
-      <p:grpSpPr>
-        <a:xfrm>
-          <a:off x="0" y="0"/>
-          <a:ext cx="0" cy="0"/>
-          <a:chOff x="0" y="0"/>
-          <a:chExt cx="0" cy="0"/>
-        </a:xfrm>
-      </p:grpSpPr>
-      <p:sp>
-        <p:nvSpPr>
-          <p:cNvPr id="2" name="Shape 0"/>
-          <p:cNvSpPr/>
-          <p:nvPr/>
-        </p:nvSpPr>
-        <p:spPr>
-          <a:xfrm>
-            <a:off x="0" y="0"/>
-            <a:ext cx="54864" cy="5143500"/>
-          </a:xfrm>
-          <a:prstGeom prst="rect">
-            <a:avLst/>
-          </a:prstGeom>
-          <a:solidFill>
-            <a:srgbClr val="1E2761"/>
-          </a:solidFill>
-          <a:ln/>
-        </p:spPr>
-      </p:sp>
-      <p:sp>
-        <p:nvSpPr>
-          <p:cNvPr id="3" name="Text 1"/>
-          <p:cNvSpPr/>
-          <p:nvPr/>
-        </p:nvSpPr>
-        <p:spPr>
-          <a:xfrm>
-            <a:off x="5669280" y="274320"/>
-            <a:ext cx="3291840" cy="274320"/>
-          </a:xfrm>
-          <a:prstGeom prst="rect">
-            <a:avLst/>
-          </a:prstGeom>
-          <a:noFill/>
-          <a:ln/>
-        </p:spPr>
-        <p:txBody>
-          <a:bodyPr wrap="square" lIns="0" tIns="0" rIns="0" bIns="0" rtlCol="0" anchor="ctr"/>
-          <a:lstStyle/>
-          <a:p>
-            <a:pPr algn="r" indent="0" marL="0">
-              <a:buNone/>
-            </a:pPr>
-            <a:r>
-              <a:rPr lang="en-US" sz="1000" dirty="0">
-                <a:solidFill>
-                  <a:srgbClr val="6B7280"/>
-                </a:solidFill>
-                <a:latin typeface="Calibri" pitchFamily="34" charset="0"/>
-                <a:ea typeface="Calibri" pitchFamily="34" charset="-122"/>
-                <a:cs typeface="Calibri" pitchFamily="34" charset="-120"/>
-              </a:rPr>
-              <a:t>Day 1 · Module 2</a:t>
-            </a:r>
-            <a:endParaRPr lang="en-US" sz="1000" dirty="0"/>
-          </a:p>
-        </p:txBody>
-      </p:sp>
-      <p:sp>
-        <p:nvSpPr>
-          <p:cNvPr id="4" name="Text 2"/>
-          <p:cNvSpPr/>
-          <p:nvPr/>
-        </p:nvSpPr>
-        <p:spPr>
-          <a:xfrm>
-            <a:off x="365760" y="320040"/>
-            <a:ext cx="6217920" cy="640080"/>
-          </a:xfrm>
-          <a:prstGeom prst="rect">
-            <a:avLst/>
-          </a:prstGeom>
-          <a:noFill/>
-          <a:ln/>
-        </p:spPr>
-        <p:txBody>
-          <a:bodyPr wrap="square" lIns="0" tIns="0" rIns="0" bIns="0" rtlCol="0" anchor="ctr"/>
-          <a:lstStyle/>
-          <a:p>
-            <a:pPr indent="0" marL="0">
-              <a:buNone/>
-            </a:pPr>
-            <a:r>
-              <a:rPr lang="en-US" sz="2800" b="1" dirty="0">
-                <a:solidFill>
-                  <a:srgbClr val="1E2761"/>
-                </a:solidFill>
-                <a:latin typeface="Calibri" pitchFamily="34" charset="0"/>
-                <a:ea typeface="Calibri" pitchFamily="34" charset="-122"/>
-                <a:cs typeface="Calibri" pitchFamily="34" charset="-120"/>
-              </a:rPr>
-              <a:t>Common portal gotchas</a:t>
-            </a:r>
-            <a:endParaRPr lang="en-US" sz="2800" dirty="0"/>
-          </a:p>
-        </p:txBody>
-      </p:sp>
-      <p:sp>
-        <p:nvSpPr>
-          <p:cNvPr id="5" name="Text 3"/>
-          <p:cNvSpPr/>
-          <p:nvPr/>
-        </p:nvSpPr>
-        <p:spPr>
-          <a:xfrm>
-            <a:off x="365760" y="1097280"/>
-            <a:ext cx="8412480" cy="3749040"/>
-          </a:xfrm>
-          <a:prstGeom prst="rect">
-            <a:avLst/>
-          </a:prstGeom>
-          <a:noFill/>
-          <a:ln/>
-        </p:spPr>
-        <p:txBody>
-          <a:bodyPr wrap="square" rtlCol="0" anchor="ctr"/>
-          <a:lstStyle/>
-          <a:p>
-            <a:pPr marL="342900" indent="-342900">
-              <a:spcAft>
-                <a:spcPts val="600"/>
-              </a:spcAft>
-              <a:buSzPct val="100000"/>
-              <a:buChar char="•"/>
-            </a:pPr>
-            <a:r>
-              <a:rPr lang="en-US" sz="1500" dirty="0">
-                <a:solidFill>
-                  <a:srgbClr val="212121"/>
-                </a:solidFill>
-                <a:latin typeface="Calibri" pitchFamily="34" charset="0"/>
-                <a:ea typeface="Calibri" pitchFamily="34" charset="-122"/>
-                <a:cs typeface="Calibri" pitchFamily="34" charset="-120"/>
-              </a:rPr>
-              <a:t>Quota errors on deployment — request a bump in the region before Day 1</a:t>
-            </a:r>
-            <a:endParaRPr lang="en-US" sz="1500" dirty="0"/>
-          </a:p>
-          <a:p>
-            <a:pPr marL="342900" indent="-342900">
-              <a:spcAft>
-                <a:spcPts val="600"/>
-              </a:spcAft>
-              <a:buSzPct val="100000"/>
-              <a:buChar char="•"/>
-            </a:pPr>
-            <a:r>
-              <a:rPr lang="en-US" sz="1500" dirty="0">
-                <a:solidFill>
-                  <a:srgbClr val="212121"/>
-                </a:solidFill>
-                <a:latin typeface="Calibri" pitchFamily="34" charset="0"/>
-                <a:ea typeface="Calibri" pitchFamily="34" charset="-122"/>
-                <a:cs typeface="Calibri" pitchFamily="34" charset="-120"/>
-              </a:rPr>
-              <a:t>Missing role assignments — attendees need at least Azure AI User on the project (401/403 usually means this)</a:t>
-            </a:r>
-            <a:endParaRPr lang="en-US" sz="1500" dirty="0"/>
-          </a:p>
-          <a:p>
-            <a:pPr marL="342900" indent="-342900">
-              <a:spcAft>
-                <a:spcPts val="600"/>
-              </a:spcAft>
-              <a:buSzPct val="100000"/>
-              <a:buChar char="•"/>
-            </a:pPr>
-            <a:r>
-              <a:rPr lang="en-US" sz="1500" dirty="0">
-                <a:solidFill>
-                  <a:srgbClr val="212121"/>
-                </a:solidFill>
-                <a:latin typeface="Calibri" pitchFamily="34" charset="0"/>
-                <a:ea typeface="Calibri" pitchFamily="34" charset="-122"/>
-                <a:cs typeface="Calibri" pitchFamily="34" charset="-120"/>
-              </a:rPr>
-              <a:t>Region mismatch — model deployment region must be reachable by IQ / AI Search</a:t>
-            </a:r>
-            <a:endParaRPr lang="en-US" sz="1500" dirty="0"/>
-          </a:p>
-          <a:p>
-            <a:pPr marL="342900" indent="-342900">
-              <a:spcAft>
-                <a:spcPts val="600"/>
-              </a:spcAft>
-              <a:buSzPct val="100000"/>
-              <a:buChar char="•"/>
-            </a:pPr>
-            <a:r>
-              <a:rPr lang="en-US" sz="1500" dirty="0">
-                <a:solidFill>
-                  <a:srgbClr val="212121"/>
-                </a:solidFill>
-                <a:latin typeface="Calibri" pitchFamily="34" charset="0"/>
-                <a:ea typeface="Calibri" pitchFamily="34" charset="-122"/>
-                <a:cs typeface="Calibri" pitchFamily="34" charset="-120"/>
-              </a:rPr>
-              <a:t>Preview features move — Toolbox and parts of IQ are evolving; trust running code over screenshots</a:t>
-            </a:r>
-            <a:endParaRPr lang="en-US" sz="1500" dirty="0"/>
-          </a:p>
-        </p:txBody>
-      </p:sp>
-    </p:spTree>
-  </p:cSld>
-  <p:clrMapOvr>
-    <a:masterClrMapping/>
-  </p:clrMapOvr>
-</p:sld>
-</file>
-
 <file path=ppt/slides/slide14.xml><?xml version="1.0" encoding="utf-8"?>
 <p:sld xmlns:a="http://schemas.openxmlformats.org/drawingml/2006/main" xmlns:r="http://schemas.openxmlformats.org/officeDocument/2006/relationships" xmlns:p="http://schemas.openxmlformats.org/presentationml/2006/main">
   <p:cSld name="Slide 14">
@@ -3888,7 +3851,7 @@
                 <a:ea typeface="Calibri" pitchFamily="34" charset="-122"/>
                 <a:cs typeface="Calibri" pitchFamily="34" charset="-120"/>
               </a:rPr>
-              <a:t>Live walkthrough (in the portal now)</a:t>
+              <a:t>Common portal gotchas</a:t>
             </a:r>
             <a:endParaRPr lang="en-US" sz="2800" dirty="0"/>
           </a:p>
@@ -3931,7 +3894,7 @@
                 <a:ea typeface="Calibri" pitchFamily="34" charset="-122"/>
                 <a:cs typeface="Calibri" pitchFamily="34" charset="-120"/>
               </a:rPr>
-              <a:t>Sign into ai.azure.com and open a project</a:t>
+              <a:t>Quota errors on deployment — request a bump in the region before Day 1</a:t>
             </a:r>
             <a:endParaRPr lang="en-US" sz="1500" dirty="0"/>
           </a:p>
@@ -3952,7 +3915,7 @@
                 <a:ea typeface="Calibri" pitchFamily="34" charset="-122"/>
                 <a:cs typeface="Calibri" pitchFamily="34" charset="-120"/>
               </a:rPr>
-              <a:t>Deploy a model</a:t>
+              <a:t>Missing role assignments — attendees need at least Foundry User (previously Azure AI User) at the Foundry resource scope; 401/403 usually means this</a:t>
             </a:r>
             <a:endParaRPr lang="en-US" sz="1500" dirty="0"/>
           </a:p>
@@ -3973,7 +3936,7 @@
                 <a:ea typeface="Calibri" pitchFamily="34" charset="-122"/>
                 <a:cs typeface="Calibri" pitchFamily="34" charset="-120"/>
               </a:rPr>
-              <a:t>Copy the project endpoint</a:t>
+              <a:t>Region mismatch — model deployment region must be reachable by IQ / AI Search</a:t>
             </a:r>
             <a:endParaRPr lang="en-US" sz="1500" dirty="0"/>
           </a:p>
@@ -3994,90 +3957,9 @@
                 <a:ea typeface="Calibri" pitchFamily="34" charset="-122"/>
                 <a:cs typeface="Calibri" pitchFamily="34" charset="-120"/>
               </a:rPr>
-              <a:t>Open the chat playground; send a test prompt</a:t>
+              <a:t>Preview features move — Toolbox and parts of IQ are evolving; trust running code over screenshots</a:t>
             </a:r>
             <a:endParaRPr lang="en-US" sz="1500" dirty="0"/>
-          </a:p>
-          <a:p>
-            <a:pPr marL="342900" indent="-342900">
-              <a:spcAft>
-                <a:spcPts val="600"/>
-              </a:spcAft>
-              <a:buSzPct val="100000"/>
-              <a:buChar char="•"/>
-            </a:pPr>
-            <a:r>
-              <a:rPr lang="en-US" sz="1500" dirty="0">
-                <a:solidFill>
-                  <a:srgbClr val="212121"/>
-                </a:solidFill>
-                <a:latin typeface="Calibri" pitchFamily="34" charset="0"/>
-                <a:ea typeface="Calibri" pitchFamily="34" charset="-122"/>
-                <a:cs typeface="Calibri" pitchFamily="34" charset="-120"/>
-              </a:rPr>
-              <a:t>Show the Toolbox catalog and one entry</a:t>
-            </a:r>
-            <a:endParaRPr lang="en-US" sz="1500" dirty="0"/>
-          </a:p>
-          <a:p>
-            <a:pPr marL="342900" indent="-342900">
-              <a:spcAft>
-                <a:spcPts val="600"/>
-              </a:spcAft>
-              <a:buSzPct val="100000"/>
-              <a:buChar char="•"/>
-            </a:pPr>
-            <a:r>
-              <a:rPr lang="en-US" sz="1500" dirty="0">
-                <a:solidFill>
-                  <a:srgbClr val="212121"/>
-                </a:solidFill>
-                <a:latin typeface="Calibri" pitchFamily="34" charset="0"/>
-                <a:ea typeface="Calibri" pitchFamily="34" charset="-122"/>
-                <a:cs typeface="Calibri" pitchFamily="34" charset="-120"/>
-              </a:rPr>
-              <a:t>Show the Foundry IQ landing page and one pre-provisioned knowledge source</a:t>
-            </a:r>
-            <a:endParaRPr lang="en-US" sz="1500" dirty="0"/>
-          </a:p>
-        </p:txBody>
-      </p:sp>
-      <p:sp>
-        <p:nvSpPr>
-          <p:cNvPr id="6" name="Text 4"/>
-          <p:cNvSpPr/>
-          <p:nvPr/>
-        </p:nvSpPr>
-        <p:spPr>
-          <a:xfrm>
-            <a:off x="365760" y="4206240"/>
-            <a:ext cx="8412480" cy="457200"/>
-          </a:xfrm>
-          <a:prstGeom prst="rect">
-            <a:avLst/>
-          </a:prstGeom>
-          <a:noFill/>
-          <a:ln/>
-        </p:spPr>
-        <p:txBody>
-          <a:bodyPr wrap="square" rtlCol="0" anchor="ctr"/>
-          <a:lstStyle/>
-          <a:p>
-            <a:pPr indent="0" marL="0">
-              <a:buNone/>
-            </a:pPr>
-            <a:r>
-              <a:rPr lang="en-US" sz="1400" b="1" i="1" dirty="0">
-                <a:solidFill>
-                  <a:srgbClr val="1E2761"/>
-                </a:solidFill>
-                <a:latin typeface="Calibri" pitchFamily="34" charset="0"/>
-                <a:ea typeface="Calibri" pitchFamily="34" charset="-122"/>
-                <a:cs typeface="Calibri" pitchFamily="34" charset="-120"/>
-              </a:rPr>
-              <a:t>Attendees: do steps 1–4 on your own sub before the module ends.</a:t>
-            </a:r>
-            <a:endParaRPr lang="en-US" sz="1400" dirty="0"/>
           </a:p>
         </p:txBody>
       </p:sp>
@@ -4205,6 +4087,323 @@
                 <a:ea typeface="Calibri" pitchFamily="34" charset="-122"/>
                 <a:cs typeface="Calibri" pitchFamily="34" charset="-120"/>
               </a:rPr>
+              <a:t>Live walkthrough (in the portal now)</a:t>
+            </a:r>
+            <a:endParaRPr lang="en-US" sz="2800" dirty="0"/>
+          </a:p>
+        </p:txBody>
+      </p:sp>
+      <p:sp>
+        <p:nvSpPr>
+          <p:cNvPr id="5" name="Text 3"/>
+          <p:cNvSpPr/>
+          <p:nvPr/>
+        </p:nvSpPr>
+        <p:spPr>
+          <a:xfrm>
+            <a:off x="365760" y="1097280"/>
+            <a:ext cx="8412480" cy="3749040"/>
+          </a:xfrm>
+          <a:prstGeom prst="rect">
+            <a:avLst/>
+          </a:prstGeom>
+          <a:noFill/>
+          <a:ln/>
+        </p:spPr>
+        <p:txBody>
+          <a:bodyPr wrap="square" rtlCol="0" anchor="ctr"/>
+          <a:lstStyle/>
+          <a:p>
+            <a:pPr marL="342900" indent="-342900">
+              <a:spcAft>
+                <a:spcPts val="600"/>
+              </a:spcAft>
+              <a:buSzPct val="100000"/>
+              <a:buChar char="•"/>
+            </a:pPr>
+            <a:r>
+              <a:rPr lang="en-US" sz="1500" dirty="0">
+                <a:solidFill>
+                  <a:srgbClr val="212121"/>
+                </a:solidFill>
+                <a:latin typeface="Calibri" pitchFamily="34" charset="0"/>
+                <a:ea typeface="Calibri" pitchFamily="34" charset="-122"/>
+                <a:cs typeface="Calibri" pitchFamily="34" charset="-120"/>
+              </a:rPr>
+              <a:t>Sign into ai.azure.com and open a project</a:t>
+            </a:r>
+            <a:endParaRPr lang="en-US" sz="1500" dirty="0"/>
+          </a:p>
+          <a:p>
+            <a:pPr marL="342900" indent="-342900">
+              <a:spcAft>
+                <a:spcPts val="600"/>
+              </a:spcAft>
+              <a:buSzPct val="100000"/>
+              <a:buChar char="•"/>
+            </a:pPr>
+            <a:r>
+              <a:rPr lang="en-US" sz="1500" dirty="0">
+                <a:solidFill>
+                  <a:srgbClr val="212121"/>
+                </a:solidFill>
+                <a:latin typeface="Calibri" pitchFamily="34" charset="0"/>
+                <a:ea typeface="Calibri" pitchFamily="34" charset="-122"/>
+                <a:cs typeface="Calibri" pitchFamily="34" charset="-120"/>
+              </a:rPr>
+              <a:t>Deploy a model</a:t>
+            </a:r>
+            <a:endParaRPr lang="en-US" sz="1500" dirty="0"/>
+          </a:p>
+          <a:p>
+            <a:pPr marL="342900" indent="-342900">
+              <a:spcAft>
+                <a:spcPts val="600"/>
+              </a:spcAft>
+              <a:buSzPct val="100000"/>
+              <a:buChar char="•"/>
+            </a:pPr>
+            <a:r>
+              <a:rPr lang="en-US" sz="1500" dirty="0">
+                <a:solidFill>
+                  <a:srgbClr val="212121"/>
+                </a:solidFill>
+                <a:latin typeface="Calibri" pitchFamily="34" charset="0"/>
+                <a:ea typeface="Calibri" pitchFamily="34" charset="-122"/>
+                <a:cs typeface="Calibri" pitchFamily="34" charset="-120"/>
+              </a:rPr>
+              <a:t>Copy the project endpoint</a:t>
+            </a:r>
+            <a:endParaRPr lang="en-US" sz="1500" dirty="0"/>
+          </a:p>
+          <a:p>
+            <a:pPr marL="342900" indent="-342900">
+              <a:spcAft>
+                <a:spcPts val="600"/>
+              </a:spcAft>
+              <a:buSzPct val="100000"/>
+              <a:buChar char="•"/>
+            </a:pPr>
+            <a:r>
+              <a:rPr lang="en-US" sz="1500" dirty="0">
+                <a:solidFill>
+                  <a:srgbClr val="212121"/>
+                </a:solidFill>
+                <a:latin typeface="Calibri" pitchFamily="34" charset="0"/>
+                <a:ea typeface="Calibri" pitchFamily="34" charset="-122"/>
+                <a:cs typeface="Calibri" pitchFamily="34" charset="-120"/>
+              </a:rPr>
+              <a:t>Open the chat playground; send a test prompt</a:t>
+            </a:r>
+            <a:endParaRPr lang="en-US" sz="1500" dirty="0"/>
+          </a:p>
+          <a:p>
+            <a:pPr marL="342900" indent="-342900">
+              <a:spcAft>
+                <a:spcPts val="600"/>
+              </a:spcAft>
+              <a:buSzPct val="100000"/>
+              <a:buChar char="•"/>
+            </a:pPr>
+            <a:r>
+              <a:rPr lang="en-US" sz="1500" dirty="0">
+                <a:solidFill>
+                  <a:srgbClr val="212121"/>
+                </a:solidFill>
+                <a:latin typeface="Calibri" pitchFamily="34" charset="0"/>
+                <a:ea typeface="Calibri" pitchFamily="34" charset="-122"/>
+                <a:cs typeface="Calibri" pitchFamily="34" charset="-120"/>
+              </a:rPr>
+              <a:t>Show the Toolbox catalog and one entry</a:t>
+            </a:r>
+            <a:endParaRPr lang="en-US" sz="1500" dirty="0"/>
+          </a:p>
+          <a:p>
+            <a:pPr marL="342900" indent="-342900">
+              <a:spcAft>
+                <a:spcPts val="600"/>
+              </a:spcAft>
+              <a:buSzPct val="100000"/>
+              <a:buChar char="•"/>
+            </a:pPr>
+            <a:r>
+              <a:rPr lang="en-US" sz="1500" dirty="0">
+                <a:solidFill>
+                  <a:srgbClr val="212121"/>
+                </a:solidFill>
+                <a:latin typeface="Calibri" pitchFamily="34" charset="0"/>
+                <a:ea typeface="Calibri" pitchFamily="34" charset="-122"/>
+                <a:cs typeface="Calibri" pitchFamily="34" charset="-120"/>
+              </a:rPr>
+              <a:t>Show the Foundry IQ landing page and one pre-provisioned knowledge source</a:t>
+            </a:r>
+            <a:endParaRPr lang="en-US" sz="1500" dirty="0"/>
+          </a:p>
+        </p:txBody>
+      </p:sp>
+      <p:sp>
+        <p:nvSpPr>
+          <p:cNvPr id="6" name="Text 4"/>
+          <p:cNvSpPr/>
+          <p:nvPr/>
+        </p:nvSpPr>
+        <p:spPr>
+          <a:xfrm>
+            <a:off x="365760" y="4206240"/>
+            <a:ext cx="8412480" cy="457200"/>
+          </a:xfrm>
+          <a:prstGeom prst="rect">
+            <a:avLst/>
+          </a:prstGeom>
+          <a:noFill/>
+          <a:ln/>
+        </p:spPr>
+        <p:txBody>
+          <a:bodyPr wrap="square" rtlCol="0" anchor="ctr"/>
+          <a:lstStyle/>
+          <a:p>
+            <a:pPr indent="0" marL="0">
+              <a:buNone/>
+            </a:pPr>
+            <a:r>
+              <a:rPr lang="en-US" sz="1400" b="1" i="1" dirty="0">
+                <a:solidFill>
+                  <a:srgbClr val="1E2761"/>
+                </a:solidFill>
+                <a:latin typeface="Calibri" pitchFamily="34" charset="0"/>
+                <a:ea typeface="Calibri" pitchFamily="34" charset="-122"/>
+                <a:cs typeface="Calibri" pitchFamily="34" charset="-120"/>
+              </a:rPr>
+              <a:t>Attendees: do steps 1–4 on your own sub before the module ends.</a:t>
+            </a:r>
+            <a:endParaRPr lang="en-US" sz="1400" dirty="0"/>
+          </a:p>
+        </p:txBody>
+      </p:sp>
+    </p:spTree>
+  </p:cSld>
+  <p:clrMapOvr>
+    <a:masterClrMapping/>
+  </p:clrMapOvr>
+</p:sld>
+</file>
+
+<file path=ppt/slides/slide16.xml><?xml version="1.0" encoding="utf-8"?>
+<p:sld xmlns:a="http://schemas.openxmlformats.org/drawingml/2006/main" xmlns:r="http://schemas.openxmlformats.org/officeDocument/2006/relationships" xmlns:p="http://schemas.openxmlformats.org/presentationml/2006/main">
+  <p:cSld name="Slide 16">
+    <p:bg>
+      <p:bgPr>
+        <a:solidFill>
+          <a:srgbClr val="FFFFFF"/>
+        </a:solidFill>
+      </p:bgPr>
+    </p:bg>
+    <p:spTree>
+      <p:nvGrpSpPr>
+        <p:cNvPr id="1" name=""/>
+        <p:cNvGrpSpPr/>
+        <p:nvPr/>
+      </p:nvGrpSpPr>
+      <p:grpSpPr>
+        <a:xfrm>
+          <a:off x="0" y="0"/>
+          <a:ext cx="0" cy="0"/>
+          <a:chOff x="0" y="0"/>
+          <a:chExt cx="0" cy="0"/>
+        </a:xfrm>
+      </p:grpSpPr>
+      <p:sp>
+        <p:nvSpPr>
+          <p:cNvPr id="2" name="Shape 0"/>
+          <p:cNvSpPr/>
+          <p:nvPr/>
+        </p:nvSpPr>
+        <p:spPr>
+          <a:xfrm>
+            <a:off x="0" y="0"/>
+            <a:ext cx="54864" cy="5143500"/>
+          </a:xfrm>
+          <a:prstGeom prst="rect">
+            <a:avLst/>
+          </a:prstGeom>
+          <a:solidFill>
+            <a:srgbClr val="1E2761"/>
+          </a:solidFill>
+          <a:ln/>
+        </p:spPr>
+      </p:sp>
+      <p:sp>
+        <p:nvSpPr>
+          <p:cNvPr id="3" name="Text 1"/>
+          <p:cNvSpPr/>
+          <p:nvPr/>
+        </p:nvSpPr>
+        <p:spPr>
+          <a:xfrm>
+            <a:off x="5669280" y="274320"/>
+            <a:ext cx="3291840" cy="274320"/>
+          </a:xfrm>
+          <a:prstGeom prst="rect">
+            <a:avLst/>
+          </a:prstGeom>
+          <a:noFill/>
+          <a:ln/>
+        </p:spPr>
+        <p:txBody>
+          <a:bodyPr wrap="square" lIns="0" tIns="0" rIns="0" bIns="0" rtlCol="0" anchor="ctr"/>
+          <a:lstStyle/>
+          <a:p>
+            <a:pPr algn="r" indent="0" marL="0">
+              <a:buNone/>
+            </a:pPr>
+            <a:r>
+              <a:rPr lang="en-US" sz="1000" dirty="0">
+                <a:solidFill>
+                  <a:srgbClr val="6B7280"/>
+                </a:solidFill>
+                <a:latin typeface="Calibri" pitchFamily="34" charset="0"/>
+                <a:ea typeface="Calibri" pitchFamily="34" charset="-122"/>
+                <a:cs typeface="Calibri" pitchFamily="34" charset="-120"/>
+              </a:rPr>
+              <a:t>Day 1 · Module 2</a:t>
+            </a:r>
+            <a:endParaRPr lang="en-US" sz="1000" dirty="0"/>
+          </a:p>
+        </p:txBody>
+      </p:sp>
+      <p:sp>
+        <p:nvSpPr>
+          <p:cNvPr id="4" name="Text 2"/>
+          <p:cNvSpPr/>
+          <p:nvPr/>
+        </p:nvSpPr>
+        <p:spPr>
+          <a:xfrm>
+            <a:off x="365760" y="320040"/>
+            <a:ext cx="6217920" cy="640080"/>
+          </a:xfrm>
+          <a:prstGeom prst="rect">
+            <a:avLst/>
+          </a:prstGeom>
+          <a:noFill/>
+          <a:ln/>
+        </p:spPr>
+        <p:txBody>
+          <a:bodyPr wrap="square" lIns="0" tIns="0" rIns="0" bIns="0" rtlCol="0" anchor="ctr"/>
+          <a:lstStyle/>
+          <a:p>
+            <a:pPr indent="0" marL="0">
+              <a:buNone/>
+            </a:pPr>
+            <a:r>
+              <a:rPr lang="en-US" sz="2800" b="1" dirty="0">
+                <a:solidFill>
+                  <a:srgbClr val="1E2761"/>
+                </a:solidFill>
+                <a:latin typeface="Calibri" pitchFamily="34" charset="0"/>
+                <a:ea typeface="Calibri" pitchFamily="34" charset="-122"/>
+                <a:cs typeface="Calibri" pitchFamily="34" charset="-120"/>
+              </a:rPr>
               <a:t>Takeaways</a:t>
             </a:r>
             <a:endParaRPr lang="en-US" sz="2800" dirty="0"/>
@@ -4771,7 +4970,7 @@
                 <a:ea typeface="Calibri" pitchFamily="34" charset="-122"/>
                 <a:cs typeface="Calibri" pitchFamily="34" charset="-120"/>
               </a:rPr>
-              <a:t>The Foundry hierarchy</a:t>
+              <a:t>Foundry resource architecture</a:t>
             </a:r>
             <a:endParaRPr lang="en-US" sz="2800" dirty="0"/>
           </a:p>
@@ -4779,14 +4978,39 @@
       </p:sp>
       <p:sp>
         <p:nvSpPr>
-          <p:cNvPr id="5" name="Text 3"/>
-          <p:cNvSpPr/>
-          <p:nvPr/>
-        </p:nvSpPr>
-        <p:spPr>
-          <a:xfrm>
-            <a:off x="365760" y="1097280"/>
-            <a:ext cx="8412480" cy="3749040"/>
+          <p:cNvPr id="5" name="Shape 3"/>
+          <p:cNvSpPr/>
+          <p:nvPr/>
+        </p:nvSpPr>
+        <p:spPr>
+          <a:xfrm>
+            <a:off x="365760" y="1051560"/>
+            <a:ext cx="5120640" cy="3108960"/>
+          </a:xfrm>
+          <a:prstGeom prst="rect">
+            <a:avLst/>
+          </a:prstGeom>
+          <a:solidFill>
+            <a:srgbClr val="FFFFFF"/>
+          </a:solidFill>
+          <a:ln w="25400">
+            <a:solidFill>
+              <a:srgbClr val="1E2761"/>
+            </a:solidFill>
+            <a:prstDash val="solid"/>
+          </a:ln>
+        </p:spPr>
+      </p:sp>
+      <p:sp>
+        <p:nvSpPr>
+          <p:cNvPr id="6" name="Text 4"/>
+          <p:cNvSpPr/>
+          <p:nvPr/>
+        </p:nvSpPr>
+        <p:spPr>
+          <a:xfrm>
+            <a:off x="457200" y="1124712"/>
+            <a:ext cx="4937760" cy="320040"/>
           </a:xfrm>
           <a:prstGeom prst="rect">
             <a:avLst/>
@@ -4795,18 +5019,300 @@
           <a:ln/>
         </p:spPr>
         <p:txBody>
-          <a:bodyPr wrap="square" rtlCol="0" anchor="ctr"/>
-          <a:lstStyle/>
-          <a:p>
-            <a:pPr marL="342900" indent="-342900">
-              <a:spcAft>
-                <a:spcPts val="600"/>
-              </a:spcAft>
-              <a:buSzPct val="100000"/>
-              <a:buChar char="•"/>
-            </a:pPr>
-            <a:r>
-              <a:rPr lang="en-US" sz="1500" dirty="0">
+          <a:bodyPr wrap="square" lIns="0" tIns="0" rIns="0" bIns="0" rtlCol="0" anchor="ctr"/>
+          <a:lstStyle/>
+          <a:p>
+            <a:pPr indent="0" marL="0">
+              <a:buNone/>
+            </a:pPr>
+            <a:r>
+              <a:rPr lang="en-US" sz="1300" b="1" dirty="0">
+                <a:solidFill>
+                  <a:srgbClr val="1E2761"/>
+                </a:solidFill>
+                <a:latin typeface="Calibri" pitchFamily="34" charset="0"/>
+                <a:ea typeface="Calibri" pitchFamily="34" charset="-122"/>
+                <a:cs typeface="Calibri" pitchFamily="34" charset="-120"/>
+              </a:rPr>
+              <a:t>Foundry resource · governance boundary</a:t>
+            </a:r>
+            <a:endParaRPr lang="en-US" sz="1300" dirty="0"/>
+          </a:p>
+        </p:txBody>
+      </p:sp>
+      <p:sp>
+        <p:nvSpPr>
+          <p:cNvPr id="7" name="Shape 5"/>
+          <p:cNvSpPr/>
+          <p:nvPr/>
+        </p:nvSpPr>
+        <p:spPr>
+          <a:xfrm>
+            <a:off x="502920" y="1554480"/>
+            <a:ext cx="1554480" cy="365760"/>
+          </a:xfrm>
+          <a:prstGeom prst="roundRect">
+            <a:avLst>
+              <a:gd name="adj" fmla="val 20000"/>
+            </a:avLst>
+          </a:prstGeom>
+          <a:solidFill>
+            <a:srgbClr val="CADCFC"/>
+          </a:solidFill>
+          <a:ln/>
+        </p:spPr>
+      </p:sp>
+      <p:sp>
+        <p:nvSpPr>
+          <p:cNvPr id="8" name="Text 6"/>
+          <p:cNvSpPr/>
+          <p:nvPr/>
+        </p:nvSpPr>
+        <p:spPr>
+          <a:xfrm>
+            <a:off x="502920" y="1554480"/>
+            <a:ext cx="1554480" cy="365760"/>
+          </a:xfrm>
+          <a:prstGeom prst="rect">
+            <a:avLst/>
+          </a:prstGeom>
+          <a:noFill/>
+          <a:ln/>
+        </p:spPr>
+        <p:txBody>
+          <a:bodyPr wrap="square" lIns="0" tIns="0" rIns="0" bIns="0" rtlCol="0" anchor="ctr"/>
+          <a:lstStyle/>
+          <a:p>
+            <a:pPr algn="ctr" indent="0" marL="0">
+              <a:buNone/>
+            </a:pPr>
+            <a:r>
+              <a:rPr lang="en-US" sz="1000" b="1" dirty="0">
+                <a:solidFill>
+                  <a:srgbClr val="1E2761"/>
+                </a:solidFill>
+                <a:latin typeface="Calibri" pitchFamily="34" charset="0"/>
+                <a:ea typeface="Calibri" pitchFamily="34" charset="-122"/>
+                <a:cs typeface="Calibri" pitchFamily="34" charset="-120"/>
+              </a:rPr>
+              <a:t>Model deployments</a:t>
+            </a:r>
+            <a:endParaRPr lang="en-US" sz="1000" dirty="0"/>
+          </a:p>
+        </p:txBody>
+      </p:sp>
+      <p:sp>
+        <p:nvSpPr>
+          <p:cNvPr id="9" name="Shape 7"/>
+          <p:cNvSpPr/>
+          <p:nvPr/>
+        </p:nvSpPr>
+        <p:spPr>
+          <a:xfrm>
+            <a:off x="2148840" y="1554480"/>
+            <a:ext cx="1554480" cy="365760"/>
+          </a:xfrm>
+          <a:prstGeom prst="roundRect">
+            <a:avLst>
+              <a:gd name="adj" fmla="val 20000"/>
+            </a:avLst>
+          </a:prstGeom>
+          <a:solidFill>
+            <a:srgbClr val="CADCFC"/>
+          </a:solidFill>
+          <a:ln/>
+        </p:spPr>
+      </p:sp>
+      <p:sp>
+        <p:nvSpPr>
+          <p:cNvPr id="10" name="Text 8"/>
+          <p:cNvSpPr/>
+          <p:nvPr/>
+        </p:nvSpPr>
+        <p:spPr>
+          <a:xfrm>
+            <a:off x="2148840" y="1554480"/>
+            <a:ext cx="1554480" cy="365760"/>
+          </a:xfrm>
+          <a:prstGeom prst="rect">
+            <a:avLst/>
+          </a:prstGeom>
+          <a:noFill/>
+          <a:ln/>
+        </p:spPr>
+        <p:txBody>
+          <a:bodyPr wrap="square" lIns="0" tIns="0" rIns="0" bIns="0" rtlCol="0" anchor="ctr"/>
+          <a:lstStyle/>
+          <a:p>
+            <a:pPr algn="ctr" indent="0" marL="0">
+              <a:buNone/>
+            </a:pPr>
+            <a:r>
+              <a:rPr lang="en-US" sz="1000" b="1" dirty="0">
+                <a:solidFill>
+                  <a:srgbClr val="1E2761"/>
+                </a:solidFill>
+                <a:latin typeface="Calibri" pitchFamily="34" charset="0"/>
+                <a:ea typeface="Calibri" pitchFamily="34" charset="-122"/>
+                <a:cs typeface="Calibri" pitchFamily="34" charset="-120"/>
+              </a:rPr>
+              <a:t>Security &amp; networking</a:t>
+            </a:r>
+            <a:endParaRPr lang="en-US" sz="1000" dirty="0"/>
+          </a:p>
+        </p:txBody>
+      </p:sp>
+      <p:sp>
+        <p:nvSpPr>
+          <p:cNvPr id="11" name="Shape 9"/>
+          <p:cNvSpPr/>
+          <p:nvPr/>
+        </p:nvSpPr>
+        <p:spPr>
+          <a:xfrm>
+            <a:off x="3794760" y="1554480"/>
+            <a:ext cx="1554480" cy="365760"/>
+          </a:xfrm>
+          <a:prstGeom prst="roundRect">
+            <a:avLst>
+              <a:gd name="adj" fmla="val 20000"/>
+            </a:avLst>
+          </a:prstGeom>
+          <a:solidFill>
+            <a:srgbClr val="CADCFC"/>
+          </a:solidFill>
+          <a:ln/>
+        </p:spPr>
+      </p:sp>
+      <p:sp>
+        <p:nvSpPr>
+          <p:cNvPr id="12" name="Text 10"/>
+          <p:cNvSpPr/>
+          <p:nvPr/>
+        </p:nvSpPr>
+        <p:spPr>
+          <a:xfrm>
+            <a:off x="3794760" y="1554480"/>
+            <a:ext cx="1554480" cy="365760"/>
+          </a:xfrm>
+          <a:prstGeom prst="rect">
+            <a:avLst/>
+          </a:prstGeom>
+          <a:noFill/>
+          <a:ln/>
+        </p:spPr>
+        <p:txBody>
+          <a:bodyPr wrap="square" lIns="0" tIns="0" rIns="0" bIns="0" rtlCol="0" anchor="ctr"/>
+          <a:lstStyle/>
+          <a:p>
+            <a:pPr algn="ctr" indent="0" marL="0">
+              <a:buNone/>
+            </a:pPr>
+            <a:r>
+              <a:rPr lang="en-US" sz="1000" b="1" dirty="0">
+                <a:solidFill>
+                  <a:srgbClr val="1E2761"/>
+                </a:solidFill>
+                <a:latin typeface="Calibri" pitchFamily="34" charset="0"/>
+                <a:ea typeface="Calibri" pitchFamily="34" charset="-122"/>
+                <a:cs typeface="Calibri" pitchFamily="34" charset="-120"/>
+              </a:rPr>
+              <a:t>Connections</a:t>
+            </a:r>
+            <a:endParaRPr lang="en-US" sz="1000" dirty="0"/>
+          </a:p>
+        </p:txBody>
+      </p:sp>
+      <p:sp>
+        <p:nvSpPr>
+          <p:cNvPr id="13" name="Shape 11"/>
+          <p:cNvSpPr/>
+          <p:nvPr/>
+        </p:nvSpPr>
+        <p:spPr>
+          <a:xfrm>
+            <a:off x="502920" y="2103120"/>
+            <a:ext cx="4846320" cy="1920240"/>
+          </a:xfrm>
+          <a:prstGeom prst="rect">
+            <a:avLst/>
+          </a:prstGeom>
+          <a:solidFill>
+            <a:srgbClr val="F3F4F6"/>
+          </a:solidFill>
+          <a:ln w="12700">
+            <a:solidFill>
+              <a:srgbClr val="1E2761"/>
+            </a:solidFill>
+            <a:prstDash val="dash"/>
+          </a:ln>
+        </p:spPr>
+      </p:sp>
+      <p:sp>
+        <p:nvSpPr>
+          <p:cNvPr id="14" name="Text 12"/>
+          <p:cNvSpPr/>
+          <p:nvPr/>
+        </p:nvSpPr>
+        <p:spPr>
+          <a:xfrm>
+            <a:off x="594360" y="2176272"/>
+            <a:ext cx="4663440" cy="292608"/>
+          </a:xfrm>
+          <a:prstGeom prst="rect">
+            <a:avLst/>
+          </a:prstGeom>
+          <a:noFill/>
+          <a:ln/>
+        </p:spPr>
+        <p:txBody>
+          <a:bodyPr wrap="square" lIns="0" tIns="0" rIns="0" bIns="0" rtlCol="0" anchor="ctr"/>
+          <a:lstStyle/>
+          <a:p>
+            <a:pPr indent="0" marL="0">
+              <a:buNone/>
+            </a:pPr>
+            <a:r>
+              <a:rPr lang="en-US" sz="1200" b="1" dirty="0">
+                <a:solidFill>
+                  <a:srgbClr val="1E2761"/>
+                </a:solidFill>
+                <a:latin typeface="Calibri" pitchFamily="34" charset="0"/>
+                <a:ea typeface="Calibri" pitchFamily="34" charset="-122"/>
+                <a:cs typeface="Calibri" pitchFamily="34" charset="-120"/>
+              </a:rPr>
+              <a:t>Project · development boundary</a:t>
+            </a:r>
+            <a:endParaRPr lang="en-US" sz="1200" dirty="0"/>
+          </a:p>
+        </p:txBody>
+      </p:sp>
+      <p:sp>
+        <p:nvSpPr>
+          <p:cNvPr id="15" name="Text 13"/>
+          <p:cNvSpPr/>
+          <p:nvPr/>
+        </p:nvSpPr>
+        <p:spPr>
+          <a:xfrm>
+            <a:off x="594360" y="2560320"/>
+            <a:ext cx="4663440" cy="457200"/>
+          </a:xfrm>
+          <a:prstGeom prst="rect">
+            <a:avLst/>
+          </a:prstGeom>
+          <a:noFill/>
+          <a:ln/>
+        </p:spPr>
+        <p:txBody>
+          <a:bodyPr wrap="square" lIns="0" tIns="0" rIns="0" bIns="0" rtlCol="0" anchor="ctr"/>
+          <a:lstStyle/>
+          <a:p>
+            <a:pPr indent="0" marL="0">
+              <a:buNone/>
+            </a:pPr>
+            <a:r>
+              <a:rPr lang="en-US" sz="1100" i="1" dirty="0">
                 <a:solidFill>
                   <a:srgbClr val="212121"/>
                 </a:solidFill>
@@ -4814,20 +5320,141 @@
                 <a:ea typeface="Calibri" pitchFamily="34" charset="-122"/>
                 <a:cs typeface="Calibri" pitchFamily="34" charset="-120"/>
               </a:rPr>
-              <a:t>Tenant — your Entra tenant</a:t>
-            </a:r>
-            <a:endParaRPr lang="en-US" sz="1500" dirty="0"/>
-          </a:p>
-          <a:p>
-            <a:pPr marL="342900" indent="-342900">
-              <a:spcAft>
-                <a:spcPts val="600"/>
-              </a:spcAft>
-              <a:buSzPct val="100000"/>
-              <a:buChar char="•"/>
-            </a:pPr>
-            <a:r>
-              <a:rPr lang="en-US" sz="1500" dirty="0">
+              <a:t>Project assets: files · agents · evaluations</a:t>
+            </a:r>
+            <a:endParaRPr lang="en-US" sz="1100" dirty="0"/>
+          </a:p>
+        </p:txBody>
+      </p:sp>
+      <p:sp>
+        <p:nvSpPr>
+          <p:cNvPr id="16" name="Text 14"/>
+          <p:cNvSpPr/>
+          <p:nvPr/>
+        </p:nvSpPr>
+        <p:spPr>
+          <a:xfrm>
+            <a:off x="5852160" y="1124712"/>
+            <a:ext cx="2926080" cy="274320"/>
+          </a:xfrm>
+          <a:prstGeom prst="rect">
+            <a:avLst/>
+          </a:prstGeom>
+          <a:noFill/>
+          <a:ln/>
+        </p:spPr>
+        <p:txBody>
+          <a:bodyPr wrap="square" lIns="0" tIns="0" rIns="0" bIns="0" rtlCol="0" anchor="ctr"/>
+          <a:lstStyle/>
+          <a:p>
+            <a:pPr indent="0" marL="0">
+              <a:buNone/>
+            </a:pPr>
+            <a:r>
+              <a:rPr lang="en-US" sz="1300" b="1" dirty="0">
+                <a:solidFill>
+                  <a:srgbClr val="1E2761"/>
+                </a:solidFill>
+                <a:latin typeface="Calibri" pitchFamily="34" charset="0"/>
+                <a:ea typeface="Calibri" pitchFamily="34" charset="-122"/>
+                <a:cs typeface="Calibri" pitchFamily="34" charset="-120"/>
+              </a:rPr>
+              <a:t>Connected resources</a:t>
+            </a:r>
+            <a:endParaRPr lang="en-US" sz="1300" dirty="0"/>
+          </a:p>
+        </p:txBody>
+      </p:sp>
+      <p:sp>
+        <p:nvSpPr>
+          <p:cNvPr id="17" name="Text 15"/>
+          <p:cNvSpPr/>
+          <p:nvPr/>
+        </p:nvSpPr>
+        <p:spPr>
+          <a:xfrm>
+            <a:off x="5852160" y="1417320"/>
+            <a:ext cx="2926080" cy="274320"/>
+          </a:xfrm>
+          <a:prstGeom prst="rect">
+            <a:avLst/>
+          </a:prstGeom>
+          <a:noFill/>
+          <a:ln/>
+        </p:spPr>
+        <p:txBody>
+          <a:bodyPr wrap="square" lIns="0" tIns="0" rIns="0" bIns="0" rtlCol="0" anchor="ctr"/>
+          <a:lstStyle/>
+          <a:p>
+            <a:pPr indent="0" marL="0">
+              <a:buNone/>
+            </a:pPr>
+            <a:r>
+              <a:rPr lang="en-US" sz="1000" i="1" dirty="0">
+                <a:solidFill>
+                  <a:srgbClr val="6B7280"/>
+                </a:solidFill>
+                <a:latin typeface="Calibri" pitchFamily="34" charset="0"/>
+                <a:ea typeface="Calibri" pitchFamily="34" charset="-122"/>
+                <a:cs typeface="Calibri" pitchFamily="34" charset="-120"/>
+              </a:rPr>
+              <a:t>separate Azure resources · own governance</a:t>
+            </a:r>
+            <a:endParaRPr lang="en-US" sz="1000" dirty="0"/>
+          </a:p>
+        </p:txBody>
+      </p:sp>
+      <p:sp>
+        <p:nvSpPr>
+          <p:cNvPr id="18" name="Shape 16"/>
+          <p:cNvSpPr/>
+          <p:nvPr/>
+        </p:nvSpPr>
+        <p:spPr>
+          <a:xfrm>
+            <a:off x="5852160" y="1828800"/>
+            <a:ext cx="2926080" cy="640080"/>
+          </a:xfrm>
+          <a:prstGeom prst="rect">
+            <a:avLst/>
+          </a:prstGeom>
+          <a:solidFill>
+            <a:srgbClr val="FFFFFF"/>
+          </a:solidFill>
+          <a:ln w="12700">
+            <a:solidFill>
+              <a:srgbClr val="D1D5DB"/>
+            </a:solidFill>
+            <a:prstDash val="dash"/>
+          </a:ln>
+        </p:spPr>
+      </p:sp>
+      <p:sp>
+        <p:nvSpPr>
+          <p:cNvPr id="19" name="Text 17"/>
+          <p:cNvSpPr/>
+          <p:nvPr/>
+        </p:nvSpPr>
+        <p:spPr>
+          <a:xfrm>
+            <a:off x="5852160" y="1828800"/>
+            <a:ext cx="2926080" cy="640080"/>
+          </a:xfrm>
+          <a:prstGeom prst="rect">
+            <a:avLst/>
+          </a:prstGeom>
+          <a:noFill/>
+          <a:ln/>
+        </p:spPr>
+        <p:txBody>
+          <a:bodyPr wrap="square" lIns="0" tIns="0" rIns="0" bIns="0" rtlCol="0" anchor="ctr"/>
+          <a:lstStyle/>
+          <a:p>
+            <a:pPr algn="ctr" indent="0" marL="0">
+              <a:buNone/>
+            </a:pPr>
+            <a:r>
+              <a:rPr lang="en-US" sz="1200" b="1" dirty="0">
                 <a:solidFill>
                   <a:srgbClr val="212121"/>
                 </a:solidFill>
@@ -4835,20 +5462,63 @@
                 <a:ea typeface="Calibri" pitchFamily="34" charset="-122"/>
                 <a:cs typeface="Calibri" pitchFamily="34" charset="-120"/>
               </a:rPr>
-              <a:t>Subscription — Azure subscription that pays for resources</a:t>
-            </a:r>
-            <a:endParaRPr lang="en-US" sz="1500" dirty="0"/>
-          </a:p>
-          <a:p>
-            <a:pPr marL="342900" indent="-342900">
-              <a:spcAft>
-                <a:spcPts val="600"/>
-              </a:spcAft>
-              <a:buSzPct val="100000"/>
-              <a:buChar char="•"/>
-            </a:pPr>
-            <a:r>
-              <a:rPr lang="en-US" sz="1500" dirty="0">
+              <a:t>Azure Storage</a:t>
+            </a:r>
+            <a:endParaRPr lang="en-US" sz="1200" dirty="0"/>
+          </a:p>
+        </p:txBody>
+      </p:sp>
+      <p:sp>
+        <p:nvSpPr>
+          <p:cNvPr id="20" name="Shape 18"/>
+          <p:cNvSpPr/>
+          <p:nvPr/>
+        </p:nvSpPr>
+        <p:spPr>
+          <a:xfrm>
+            <a:off x="5852160" y="2606040"/>
+            <a:ext cx="2926080" cy="640080"/>
+          </a:xfrm>
+          <a:prstGeom prst="rect">
+            <a:avLst/>
+          </a:prstGeom>
+          <a:solidFill>
+            <a:srgbClr val="FFFFFF"/>
+          </a:solidFill>
+          <a:ln w="12700">
+            <a:solidFill>
+              <a:srgbClr val="D1D5DB"/>
+            </a:solidFill>
+            <a:prstDash val="dash"/>
+          </a:ln>
+        </p:spPr>
+      </p:sp>
+      <p:sp>
+        <p:nvSpPr>
+          <p:cNvPr id="21" name="Text 19"/>
+          <p:cNvSpPr/>
+          <p:nvPr/>
+        </p:nvSpPr>
+        <p:spPr>
+          <a:xfrm>
+            <a:off x="5852160" y="2606040"/>
+            <a:ext cx="2926080" cy="640080"/>
+          </a:xfrm>
+          <a:prstGeom prst="rect">
+            <a:avLst/>
+          </a:prstGeom>
+          <a:noFill/>
+          <a:ln/>
+        </p:spPr>
+        <p:txBody>
+          <a:bodyPr wrap="square" lIns="0" tIns="0" rIns="0" bIns="0" rtlCol="0" anchor="ctr"/>
+          <a:lstStyle/>
+          <a:p>
+            <a:pPr algn="ctr" indent="0" marL="0">
+              <a:buNone/>
+            </a:pPr>
+            <a:r>
+              <a:rPr lang="en-US" sz="1200" b="1" dirty="0">
                 <a:solidFill>
                   <a:srgbClr val="212121"/>
                 </a:solidFill>
@@ -4856,20 +5526,63 @@
                 <a:ea typeface="Calibri" pitchFamily="34" charset="-122"/>
                 <a:cs typeface="Calibri" pitchFamily="34" charset="-120"/>
               </a:rPr>
-              <a:t>Resource group — where Foundry resources live</a:t>
-            </a:r>
-            <a:endParaRPr lang="en-US" sz="1500" dirty="0"/>
-          </a:p>
-          <a:p>
-            <a:pPr marL="342900" indent="-342900">
-              <a:spcAft>
-                <a:spcPts val="600"/>
-              </a:spcAft>
-              <a:buSzPct val="100000"/>
-              <a:buChar char="•"/>
-            </a:pPr>
-            <a:r>
-              <a:rPr lang="en-US" sz="1500" dirty="0">
+              <a:t>Azure Key Vault</a:t>
+            </a:r>
+            <a:endParaRPr lang="en-US" sz="1200" dirty="0"/>
+          </a:p>
+        </p:txBody>
+      </p:sp>
+      <p:sp>
+        <p:nvSpPr>
+          <p:cNvPr id="22" name="Shape 20"/>
+          <p:cNvSpPr/>
+          <p:nvPr/>
+        </p:nvSpPr>
+        <p:spPr>
+          <a:xfrm>
+            <a:off x="5852160" y="3383280"/>
+            <a:ext cx="2926080" cy="640080"/>
+          </a:xfrm>
+          <a:prstGeom prst="rect">
+            <a:avLst/>
+          </a:prstGeom>
+          <a:solidFill>
+            <a:srgbClr val="FFFFFF"/>
+          </a:solidFill>
+          <a:ln w="12700">
+            <a:solidFill>
+              <a:srgbClr val="D1D5DB"/>
+            </a:solidFill>
+            <a:prstDash val="dash"/>
+          </a:ln>
+        </p:spPr>
+      </p:sp>
+      <p:sp>
+        <p:nvSpPr>
+          <p:cNvPr id="23" name="Text 21"/>
+          <p:cNvSpPr/>
+          <p:nvPr/>
+        </p:nvSpPr>
+        <p:spPr>
+          <a:xfrm>
+            <a:off x="5852160" y="3383280"/>
+            <a:ext cx="2926080" cy="640080"/>
+          </a:xfrm>
+          <a:prstGeom prst="rect">
+            <a:avLst/>
+          </a:prstGeom>
+          <a:noFill/>
+          <a:ln/>
+        </p:spPr>
+        <p:txBody>
+          <a:bodyPr wrap="square" lIns="0" tIns="0" rIns="0" bIns="0" rtlCol="0" anchor="ctr"/>
+          <a:lstStyle/>
+          <a:p>
+            <a:pPr algn="ctr" indent="0" marL="0">
+              <a:buNone/>
+            </a:pPr>
+            <a:r>
+              <a:rPr lang="en-US" sz="1200" b="1" dirty="0">
                 <a:solidFill>
                   <a:srgbClr val="212121"/>
                 </a:solidFill>
@@ -4877,30 +5590,82 @@
                 <a:ea typeface="Calibri" pitchFamily="34" charset="-122"/>
                 <a:cs typeface="Calibri" pitchFamily="34" charset="-120"/>
               </a:rPr>
-              <a:t>Foundry project — the unit of collaboration; also the URL MAF connects to</a:t>
-            </a:r>
-            <a:endParaRPr lang="en-US" sz="1500" dirty="0"/>
-          </a:p>
-          <a:p>
-            <a:pPr marL="342900" indent="-342900">
-              <a:spcAft>
-                <a:spcPts val="600"/>
-              </a:spcAft>
-              <a:buSzPct val="100000"/>
-              <a:buChar char="•"/>
-            </a:pPr>
-            <a:r>
-              <a:rPr lang="en-US" sz="1500" dirty="0">
-                <a:solidFill>
-                  <a:srgbClr val="212121"/>
-                </a:solidFill>
-                <a:latin typeface="Calibri" pitchFamily="34" charset="0"/>
-                <a:ea typeface="Calibri" pitchFamily="34" charset="-122"/>
-                <a:cs typeface="Calibri" pitchFamily="34" charset="-120"/>
-              </a:rPr>
-              <a:t>Model deployments — instances of a specific model callable from your project</a:t>
-            </a:r>
-            <a:endParaRPr lang="en-US" sz="1500" dirty="0"/>
+              <a:t>Azure AI Search</a:t>
+            </a:r>
+            <a:endParaRPr lang="en-US" sz="1200" dirty="0"/>
+          </a:p>
+        </p:txBody>
+      </p:sp>
+      <p:sp>
+        <p:nvSpPr>
+          <p:cNvPr id="24" name="Shape 22"/>
+          <p:cNvSpPr/>
+          <p:nvPr/>
+        </p:nvSpPr>
+        <p:spPr>
+          <a:xfrm>
+            <a:off x="365760" y="4297680"/>
+            <a:ext cx="8412480" cy="502920"/>
+          </a:xfrm>
+          <a:prstGeom prst="rect">
+            <a:avLst/>
+          </a:prstGeom>
+          <a:solidFill>
+            <a:srgbClr val="CADCFC"/>
+          </a:solidFill>
+          <a:ln/>
+        </p:spPr>
+      </p:sp>
+      <p:sp>
+        <p:nvSpPr>
+          <p:cNvPr id="25" name="Text 23"/>
+          <p:cNvSpPr/>
+          <p:nvPr/>
+        </p:nvSpPr>
+        <p:spPr>
+          <a:xfrm>
+            <a:off x="502920" y="4343400"/>
+            <a:ext cx="8138160" cy="411480"/>
+          </a:xfrm>
+          <a:prstGeom prst="rect">
+            <a:avLst/>
+          </a:prstGeom>
+          <a:noFill/>
+          <a:ln/>
+        </p:spPr>
+        <p:txBody>
+          <a:bodyPr wrap="square" lIns="0" tIns="0" rIns="0" bIns="0" rtlCol="0" anchor="ctr"/>
+          <a:lstStyle/>
+          <a:p>
+            <a:pPr indent="0" marL="0">
+              <a:buNone/>
+            </a:pPr>
+            <a:r>
+              <a:rPr lang="en-US" sz="1200" b="1" dirty="0">
+                <a:solidFill>
+                  <a:srgbClr val="1E2761"/>
+                </a:solidFill>
+                <a:latin typeface="Calibri" pitchFamily="34" charset="0"/>
+                <a:ea typeface="Calibri" pitchFamily="34" charset="-122"/>
+                <a:cs typeface="Calibri" pitchFamily="34" charset="-120"/>
+              </a:rPr>
+              <a:t>Four layers to know: </a:t>
+            </a:r>
+            <a:pPr indent="0" marL="0">
+              <a:buNone/>
+            </a:pPr>
+            <a:r>
+              <a:rPr lang="en-US" sz="1200" dirty="0">
+                <a:solidFill>
+                  <a:srgbClr val="1E2761"/>
+                </a:solidFill>
+                <a:latin typeface="Calibri" pitchFamily="34" charset="0"/>
+                <a:ea typeface="Calibri" pitchFamily="34" charset="-122"/>
+                <a:cs typeface="Calibri" pitchFamily="34" charset="-120"/>
+              </a:rPr>
+              <a:t>Foundry resource → project → project assets → connected resources. Connected resources have their own networking and access policies.</a:t>
+            </a:r>
+            <a:endParaRPr lang="en-US" sz="1200" dirty="0"/>
           </a:p>
         </p:txBody>
       </p:sp>
@@ -5028,7 +5793,7 @@
                 <a:ea typeface="Calibri" pitchFamily="34" charset="-122"/>
                 <a:cs typeface="Calibri" pitchFamily="34" charset="-120"/>
               </a:rPr>
-              <a:t>Project endpoints</a:t>
+              <a:t>What lives where · starter RBAC</a:t>
             </a:r>
             <a:endParaRPr lang="en-US" sz="2800" dirty="0"/>
           </a:p>
@@ -5042,8 +5807,8 @@
         </p:nvSpPr>
         <p:spPr>
           <a:xfrm>
-            <a:off x="365760" y="1051560"/>
-            <a:ext cx="8412480" cy="365760"/>
+            <a:off x="365760" y="1097280"/>
+            <a:ext cx="4069080" cy="365760"/>
           </a:xfrm>
           <a:prstGeom prst="rect">
             <a:avLst/>
@@ -5052,62 +5817,37 @@
           <a:ln/>
         </p:spPr>
         <p:txBody>
-          <a:bodyPr wrap="square" rtlCol="0" anchor="ctr"/>
+          <a:bodyPr wrap="square" lIns="0" tIns="0" rIns="0" bIns="0" rtlCol="0" anchor="ctr"/>
           <a:lstStyle/>
           <a:p>
             <a:pPr indent="0" marL="0">
               <a:buNone/>
             </a:pPr>
             <a:r>
-              <a:rPr lang="en-US" sz="1500" dirty="0">
-                <a:solidFill>
-                  <a:srgbClr val="212121"/>
-                </a:solidFill>
-                <a:latin typeface="Calibri" pitchFamily="34" charset="0"/>
-                <a:ea typeface="Calibri" pitchFamily="34" charset="-122"/>
-                <a:cs typeface="Calibri" pitchFamily="34" charset="-120"/>
-              </a:rPr>
-              <a:t>Every Foundry project has an endpoint like:</a:t>
-            </a:r>
-            <a:endParaRPr lang="en-US" sz="1500" dirty="0"/>
-          </a:p>
-        </p:txBody>
-      </p:sp>
-      <p:sp>
-        <p:nvSpPr>
-          <p:cNvPr id="6" name="Shape 4"/>
-          <p:cNvSpPr/>
-          <p:nvPr/>
-        </p:nvSpPr>
-        <p:spPr>
-          <a:xfrm>
-            <a:off x="365760" y="1417320"/>
-            <a:ext cx="8412480" cy="548640"/>
-          </a:xfrm>
-          <a:prstGeom prst="rect">
-            <a:avLst/>
-          </a:prstGeom>
-          <a:solidFill>
-            <a:srgbClr val="F3F4F6"/>
-          </a:solidFill>
-          <a:ln w="6350">
-            <a:solidFill>
-              <a:srgbClr val="D1D5DB"/>
-            </a:solidFill>
-            <a:prstDash val="solid"/>
-          </a:ln>
-        </p:spPr>
-      </p:sp>
-      <p:sp>
-        <p:nvSpPr>
-          <p:cNvPr id="7" name="Text 5"/>
-          <p:cNvSpPr/>
-          <p:nvPr/>
-        </p:nvSpPr>
-        <p:spPr>
-          <a:xfrm>
-            <a:off x="502920" y="1508760"/>
-            <a:ext cx="8138160" cy="365760"/>
+              <a:rPr lang="en-US" sz="2000" b="1" dirty="0">
+                <a:solidFill>
+                  <a:srgbClr val="1E2761"/>
+                </a:solidFill>
+                <a:latin typeface="Calibri" pitchFamily="34" charset="0"/>
+                <a:ea typeface="Calibri" pitchFamily="34" charset="-122"/>
+                <a:cs typeface="Calibri" pitchFamily="34" charset="-120"/>
+              </a:rPr>
+              <a:t>Foundry resource level</a:t>
+            </a:r>
+            <a:endParaRPr lang="en-US" sz="2000" dirty="0"/>
+          </a:p>
+        </p:txBody>
+      </p:sp>
+      <p:sp>
+        <p:nvSpPr>
+          <p:cNvPr id="6" name="Text 4"/>
+          <p:cNvSpPr/>
+          <p:nvPr/>
+        </p:nvSpPr>
+        <p:spPr>
+          <a:xfrm>
+            <a:off x="4709160" y="1097280"/>
+            <a:ext cx="4069080" cy="365760"/>
           </a:xfrm>
           <a:prstGeom prst="rect">
             <a:avLst/>
@@ -5116,24 +5856,130 @@
           <a:ln/>
         </p:spPr>
         <p:txBody>
-          <a:bodyPr wrap="square" lIns="0" tIns="0" rIns="0" bIns="0" rtlCol="0" anchor="t"/>
+          <a:bodyPr wrap="square" lIns="0" tIns="0" rIns="0" bIns="0" rtlCol="0" anchor="ctr"/>
           <a:lstStyle/>
           <a:p>
             <a:pPr indent="0" marL="0">
               <a:buNone/>
             </a:pPr>
             <a:r>
-              <a:rPr lang="en-US" sz="1800" dirty="0">
+              <a:rPr lang="en-US" sz="2000" b="1" dirty="0">
+                <a:solidFill>
+                  <a:srgbClr val="1E2761"/>
+                </a:solidFill>
+                <a:latin typeface="Calibri" pitchFamily="34" charset="0"/>
+                <a:ea typeface="Calibri" pitchFamily="34" charset="-122"/>
+                <a:cs typeface="Calibri" pitchFamily="34" charset="-120"/>
+              </a:rPr>
+              <a:t>Project level</a:t>
+            </a:r>
+            <a:endParaRPr lang="en-US" sz="2000" dirty="0"/>
+          </a:p>
+        </p:txBody>
+      </p:sp>
+      <p:sp>
+        <p:nvSpPr>
+          <p:cNvPr id="7" name="Text 5"/>
+          <p:cNvSpPr/>
+          <p:nvPr/>
+        </p:nvSpPr>
+        <p:spPr>
+          <a:xfrm>
+            <a:off x="365760" y="1554480"/>
+            <a:ext cx="4069080" cy="3291840"/>
+          </a:xfrm>
+          <a:prstGeom prst="rect">
+            <a:avLst/>
+          </a:prstGeom>
+          <a:noFill/>
+          <a:ln/>
+        </p:spPr>
+        <p:txBody>
+          <a:bodyPr wrap="square" rtlCol="0" anchor="ctr"/>
+          <a:lstStyle/>
+          <a:p>
+            <a:pPr marL="342900" indent="-342900">
+              <a:spcAft>
+                <a:spcPts val="600"/>
+              </a:spcAft>
+              <a:buSzPct val="100000"/>
+              <a:buChar char="•"/>
+            </a:pPr>
+            <a:r>
+              <a:rPr lang="en-US" sz="1500" dirty="0">
                 <a:solidFill>
                   <a:srgbClr val="212121"/>
                 </a:solidFill>
-                <a:latin typeface="Consolas" pitchFamily="34" charset="0"/>
-                <a:ea typeface="Consolas" pitchFamily="34" charset="-122"/>
-                <a:cs typeface="Consolas" pitchFamily="34" charset="-120"/>
-              </a:rPr>
-              <a:t>https://&lt;project-name&gt;.services.ai.azure.com</a:t>
-            </a:r>
-            <a:endParaRPr lang="en-US" sz="1800" dirty="0"/>
+                <a:latin typeface="Calibri" pitchFamily="34" charset="0"/>
+                <a:ea typeface="Calibri" pitchFamily="34" charset="-122"/>
+                <a:cs typeface="Calibri" pitchFamily="34" charset="-120"/>
+              </a:rPr>
+              <a:t>Model deployments</a:t>
+            </a:r>
+            <a:endParaRPr lang="en-US" sz="1500" dirty="0"/>
+          </a:p>
+          <a:p>
+            <a:pPr marL="342900" indent="-342900">
+              <a:spcAft>
+                <a:spcPts val="600"/>
+              </a:spcAft>
+              <a:buSzPct val="100000"/>
+              <a:buChar char="•"/>
+            </a:pPr>
+            <a:r>
+              <a:rPr lang="en-US" sz="1500" dirty="0">
+                <a:solidFill>
+                  <a:srgbClr val="212121"/>
+                </a:solidFill>
+                <a:latin typeface="Calibri" pitchFamily="34" charset="0"/>
+                <a:ea typeface="Calibri" pitchFamily="34" charset="-122"/>
+                <a:cs typeface="Calibri" pitchFamily="34" charset="-120"/>
+              </a:rPr>
+              <a:t>Security &amp; networking</a:t>
+            </a:r>
+            <a:endParaRPr lang="en-US" sz="1500" dirty="0"/>
+          </a:p>
+          <a:p>
+            <a:pPr marL="342900" indent="-342900">
+              <a:spcAft>
+                <a:spcPts val="600"/>
+              </a:spcAft>
+              <a:buSzPct val="100000"/>
+              <a:buChar char="•"/>
+            </a:pPr>
+            <a:r>
+              <a:rPr lang="en-US" sz="1500" dirty="0">
+                <a:solidFill>
+                  <a:srgbClr val="212121"/>
+                </a:solidFill>
+                <a:latin typeface="Calibri" pitchFamily="34" charset="0"/>
+                <a:ea typeface="Calibri" pitchFamily="34" charset="-122"/>
+                <a:cs typeface="Calibri" pitchFamily="34" charset="-120"/>
+              </a:rPr>
+              <a:t>Connections to connected resources</a:t>
+            </a:r>
+            <a:endParaRPr lang="en-US" sz="1500" dirty="0"/>
+          </a:p>
+          <a:p>
+            <a:pPr marL="342900" indent="-342900">
+              <a:spcAft>
+                <a:spcPts val="600"/>
+              </a:spcAft>
+              <a:buSzPct val="100000"/>
+              <a:buChar char="•"/>
+            </a:pPr>
+            <a:r>
+              <a:rPr lang="en-US" sz="1500" dirty="0">
+                <a:solidFill>
+                  <a:srgbClr val="212121"/>
+                </a:solidFill>
+                <a:latin typeface="Calibri" pitchFamily="34" charset="0"/>
+                <a:ea typeface="Calibri" pitchFamily="34" charset="-122"/>
+                <a:cs typeface="Calibri" pitchFamily="34" charset="-120"/>
+              </a:rPr>
+              <a:t>Resource-scoped RBAC roles (Foundry User, Foundry Owner)</a:t>
+            </a:r>
+            <a:endParaRPr lang="en-US" sz="1500" dirty="0"/>
           </a:p>
         </p:txBody>
       </p:sp>
@@ -5145,8 +5991,8 @@
         </p:nvSpPr>
         <p:spPr>
           <a:xfrm>
-            <a:off x="365760" y="2194560"/>
-            <a:ext cx="8412480" cy="1371600"/>
+            <a:off x="4709160" y="1554480"/>
+            <a:ext cx="4069080" cy="3291840"/>
           </a:xfrm>
           <a:prstGeom prst="rect">
             <a:avLst/>
@@ -5156,23 +6002,191 @@
         </p:spPr>
         <p:txBody>
           <a:bodyPr wrap="square" rtlCol="0" anchor="ctr"/>
+          <a:lstStyle/>
+          <a:p>
+            <a:pPr marL="342900" indent="-342900">
+              <a:spcAft>
+                <a:spcPts val="600"/>
+              </a:spcAft>
+              <a:buSzPct val="100000"/>
+              <a:buChar char="•"/>
+            </a:pPr>
+            <a:r>
+              <a:rPr lang="en-US" sz="1500" dirty="0">
+                <a:solidFill>
+                  <a:srgbClr val="212121"/>
+                </a:solidFill>
+                <a:latin typeface="Calibri" pitchFamily="34" charset="0"/>
+                <a:ea typeface="Calibri" pitchFamily="34" charset="-122"/>
+                <a:cs typeface="Calibri" pitchFamily="34" charset="-120"/>
+              </a:rPr>
+              <a:t>Agents (Prompt agents, Hosted agents)</a:t>
+            </a:r>
+            <a:endParaRPr lang="en-US" sz="1500" dirty="0"/>
+          </a:p>
+          <a:p>
+            <a:pPr marL="342900" indent="-342900">
+              <a:spcAft>
+                <a:spcPts val="600"/>
+              </a:spcAft>
+              <a:buSzPct val="100000"/>
+              <a:buChar char="•"/>
+            </a:pPr>
+            <a:r>
+              <a:rPr lang="en-US" sz="1500" dirty="0">
+                <a:solidFill>
+                  <a:srgbClr val="212121"/>
+                </a:solidFill>
+                <a:latin typeface="Calibri" pitchFamily="34" charset="0"/>
+                <a:ea typeface="Calibri" pitchFamily="34" charset="-122"/>
+                <a:cs typeface="Calibri" pitchFamily="34" charset="-120"/>
+              </a:rPr>
+              <a:t>Files</a:t>
+            </a:r>
+            <a:endParaRPr lang="en-US" sz="1500" dirty="0"/>
+          </a:p>
+          <a:p>
+            <a:pPr marL="342900" indent="-342900">
+              <a:spcAft>
+                <a:spcPts val="600"/>
+              </a:spcAft>
+              <a:buSzPct val="100000"/>
+              <a:buChar char="•"/>
+            </a:pPr>
+            <a:r>
+              <a:rPr lang="en-US" sz="1500" dirty="0">
+                <a:solidFill>
+                  <a:srgbClr val="212121"/>
+                </a:solidFill>
+                <a:latin typeface="Calibri" pitchFamily="34" charset="0"/>
+                <a:ea typeface="Calibri" pitchFamily="34" charset="-122"/>
+                <a:cs typeface="Calibri" pitchFamily="34" charset="-120"/>
+              </a:rPr>
+              <a:t>Evaluations</a:t>
+            </a:r>
+            <a:endParaRPr lang="en-US" sz="1500" dirty="0"/>
+          </a:p>
+          <a:p>
+            <a:pPr marL="342900" indent="-342900">
+              <a:spcAft>
+                <a:spcPts val="600"/>
+              </a:spcAft>
+              <a:buSzPct val="100000"/>
+              <a:buChar char="•"/>
+            </a:pPr>
+            <a:r>
+              <a:rPr lang="en-US" sz="1500" dirty="0">
+                <a:solidFill>
+                  <a:srgbClr val="212121"/>
+                </a:solidFill>
+                <a:latin typeface="Calibri" pitchFamily="34" charset="0"/>
+                <a:ea typeface="Calibri" pitchFamily="34" charset="-122"/>
+                <a:cs typeface="Calibri" pitchFamily="34" charset="-120"/>
+              </a:rPr>
+              <a:t>Project-scoped RBAC assignments</a:t>
+            </a:r>
+            <a:endParaRPr lang="en-US" sz="1500" dirty="0"/>
+          </a:p>
+        </p:txBody>
+      </p:sp>
+      <p:sp>
+        <p:nvSpPr>
+          <p:cNvPr id="9" name="Shape 7"/>
+          <p:cNvSpPr/>
+          <p:nvPr/>
+        </p:nvSpPr>
+        <p:spPr>
+          <a:xfrm>
+            <a:off x="365760" y="4160520"/>
+            <a:ext cx="8412480" cy="548640"/>
+          </a:xfrm>
+          <a:prstGeom prst="rect">
+            <a:avLst/>
+          </a:prstGeom>
+          <a:solidFill>
+            <a:srgbClr val="CADCFC"/>
+          </a:solidFill>
+          <a:ln/>
+        </p:spPr>
+      </p:sp>
+      <p:sp>
+        <p:nvSpPr>
+          <p:cNvPr id="10" name="Text 8"/>
+          <p:cNvSpPr/>
+          <p:nvPr/>
+        </p:nvSpPr>
+        <p:spPr>
+          <a:xfrm>
+            <a:off x="502920" y="4206240"/>
+            <a:ext cx="8138160" cy="457200"/>
+          </a:xfrm>
+          <a:prstGeom prst="rect">
+            <a:avLst/>
+          </a:prstGeom>
+          <a:noFill/>
+          <a:ln/>
+        </p:spPr>
+        <p:txBody>
+          <a:bodyPr wrap="square" lIns="0" tIns="0" rIns="0" bIns="0" rtlCol="0" anchor="ctr"/>
           <a:lstStyle/>
           <a:p>
             <a:pPr indent="0" marL="0">
               <a:buNone/>
             </a:pPr>
             <a:r>
-              <a:rPr lang="en-US" sz="1500" dirty="0">
-                <a:solidFill>
-                  <a:srgbClr val="212121"/>
-                </a:solidFill>
-                <a:latin typeface="Calibri" pitchFamily="34" charset="0"/>
-                <a:ea typeface="Calibri" pitchFamily="34" charset="-122"/>
-                <a:cs typeface="Calibri" pitchFamily="34" charset="-120"/>
-              </a:rPr>
-              <a:t>Set this as FOUNDRY_PROJECT_ENDPOINT in every lab's .env. MAF connects with this endpoint plus a credential — AzureCliCredential in dev, managed identity in production.</a:t>
-            </a:r>
-            <a:endParaRPr lang="en-US" sz="1500" dirty="0"/>
+              <a:rPr lang="en-US" sz="1200" b="1" dirty="0">
+                <a:solidFill>
+                  <a:srgbClr val="1E2761"/>
+                </a:solidFill>
+                <a:latin typeface="Calibri" pitchFamily="34" charset="0"/>
+                <a:ea typeface="Calibri" pitchFamily="34" charset="-122"/>
+                <a:cs typeface="Calibri" pitchFamily="34" charset="-120"/>
+              </a:rPr>
+              <a:t>Starter RBAC: </a:t>
+            </a:r>
+            <a:pPr indent="0" marL="0">
+              <a:buNone/>
+            </a:pPr>
+            <a:r>
+              <a:rPr lang="en-US" sz="1200" dirty="0">
+                <a:solidFill>
+                  <a:srgbClr val="1E2761"/>
+                </a:solidFill>
+                <a:latin typeface="Calibri" pitchFamily="34" charset="0"/>
+                <a:ea typeface="Calibri" pitchFamily="34" charset="-122"/>
+                <a:cs typeface="Calibri" pitchFamily="34" charset="-120"/>
+              </a:rPr>
+              <a:t>assign every developer </a:t>
+            </a:r>
+            <a:pPr indent="0" marL="0">
+              <a:buNone/>
+            </a:pPr>
+            <a:r>
+              <a:rPr lang="en-US" sz="1200" b="1" dirty="0">
+                <a:solidFill>
+                  <a:srgbClr val="1E2761"/>
+                </a:solidFill>
+                <a:latin typeface="Calibri" pitchFamily="34" charset="0"/>
+                <a:ea typeface="Calibri" pitchFamily="34" charset="-122"/>
+                <a:cs typeface="Calibri" pitchFamily="34" charset="-120"/>
+              </a:rPr>
+              <a:t>Foundry User</a:t>
+            </a:r>
+            <a:pPr indent="0" marL="0">
+              <a:buNone/>
+            </a:pPr>
+            <a:r>
+              <a:rPr lang="en-US" sz="1200" dirty="0">
+                <a:solidFill>
+                  <a:srgbClr val="1E2761"/>
+                </a:solidFill>
+                <a:latin typeface="Calibri" pitchFamily="34" charset="0"/>
+                <a:ea typeface="Calibri" pitchFamily="34" charset="-122"/>
+                <a:cs typeface="Calibri" pitchFamily="34" charset="-120"/>
+              </a:rPr>
+              <a:t> at the Foundry resource scope. That covers Day 1 lab access. Fine-grained project-scoped roles come later.</a:t>
+            </a:r>
+            <a:endParaRPr lang="en-US" sz="1200" dirty="0"/>
           </a:p>
         </p:txBody>
       </p:sp>
@@ -5300,7 +6314,7 @@
                 <a:ea typeface="Calibri" pitchFamily="34" charset="-122"/>
                 <a:cs typeface="Calibri" pitchFamily="34" charset="-120"/>
               </a:rPr>
-              <a:t>Model catalog</a:t>
+              <a:t>Project endpoints</a:t>
             </a:r>
             <a:endParaRPr lang="en-US" sz="2800" dirty="0"/>
           </a:p>
@@ -5314,8 +6328,8 @@
         </p:nvSpPr>
         <p:spPr>
           <a:xfrm>
-            <a:off x="365760" y="1097280"/>
-            <a:ext cx="8412480" cy="3749040"/>
+            <a:off x="365760" y="1051560"/>
+            <a:ext cx="8412480" cy="365760"/>
           </a:xfrm>
           <a:prstGeom prst="rect">
             <a:avLst/>
@@ -5327,12 +6341,8 @@
           <a:bodyPr wrap="square" rtlCol="0" anchor="ctr"/>
           <a:lstStyle/>
           <a:p>
-            <a:pPr marL="342900" indent="-342900">
-              <a:spcAft>
-                <a:spcPts val="600"/>
-              </a:spcAft>
-              <a:buSzPct val="100000"/>
-              <a:buChar char="•"/>
+            <a:pPr indent="0" marL="0">
+              <a:buNone/>
             </a:pPr>
             <a:r>
               <a:rPr lang="en-US" sz="1500" dirty="0">
@@ -5343,17 +6353,99 @@
                 <a:ea typeface="Calibri" pitchFamily="34" charset="-122"/>
                 <a:cs typeface="Calibri" pitchFamily="34" charset="-120"/>
               </a:rPr>
-              <a:t>Browse frontier models (OpenAI, Meta, Mistral, others by region)</a:t>
+              <a:t>Every Foundry project has an endpoint like:</a:t>
             </a:r>
             <a:endParaRPr lang="en-US" sz="1500" dirty="0"/>
           </a:p>
-          <a:p>
-            <a:pPr marL="342900" indent="-342900">
-              <a:spcAft>
-                <a:spcPts val="600"/>
-              </a:spcAft>
-              <a:buSzPct val="100000"/>
-              <a:buChar char="•"/>
+        </p:txBody>
+      </p:sp>
+      <p:sp>
+        <p:nvSpPr>
+          <p:cNvPr id="6" name="Shape 4"/>
+          <p:cNvSpPr/>
+          <p:nvPr/>
+        </p:nvSpPr>
+        <p:spPr>
+          <a:xfrm>
+            <a:off x="365760" y="1417320"/>
+            <a:ext cx="8412480" cy="548640"/>
+          </a:xfrm>
+          <a:prstGeom prst="rect">
+            <a:avLst/>
+          </a:prstGeom>
+          <a:solidFill>
+            <a:srgbClr val="F3F4F6"/>
+          </a:solidFill>
+          <a:ln w="6350">
+            <a:solidFill>
+              <a:srgbClr val="D1D5DB"/>
+            </a:solidFill>
+            <a:prstDash val="solid"/>
+          </a:ln>
+        </p:spPr>
+      </p:sp>
+      <p:sp>
+        <p:nvSpPr>
+          <p:cNvPr id="7" name="Text 5"/>
+          <p:cNvSpPr/>
+          <p:nvPr/>
+        </p:nvSpPr>
+        <p:spPr>
+          <a:xfrm>
+            <a:off x="502920" y="1508760"/>
+            <a:ext cx="8138160" cy="365760"/>
+          </a:xfrm>
+          <a:prstGeom prst="rect">
+            <a:avLst/>
+          </a:prstGeom>
+          <a:noFill/>
+          <a:ln/>
+        </p:spPr>
+        <p:txBody>
+          <a:bodyPr wrap="square" lIns="0" tIns="0" rIns="0" bIns="0" rtlCol="0" anchor="t"/>
+          <a:lstStyle/>
+          <a:p>
+            <a:pPr indent="0" marL="0">
+              <a:buNone/>
+            </a:pPr>
+            <a:r>
+              <a:rPr lang="en-US" sz="1800" dirty="0">
+                <a:solidFill>
+                  <a:srgbClr val="212121"/>
+                </a:solidFill>
+                <a:latin typeface="Consolas" pitchFamily="34" charset="0"/>
+                <a:ea typeface="Consolas" pitchFamily="34" charset="-122"/>
+                <a:cs typeface="Consolas" pitchFamily="34" charset="-120"/>
+              </a:rPr>
+              <a:t>https://&lt;project-name&gt;.services.ai.azure.com</a:t>
+            </a:r>
+            <a:endParaRPr lang="en-US" sz="1800" dirty="0"/>
+          </a:p>
+        </p:txBody>
+      </p:sp>
+      <p:sp>
+        <p:nvSpPr>
+          <p:cNvPr id="8" name="Text 6"/>
+          <p:cNvSpPr/>
+          <p:nvPr/>
+        </p:nvSpPr>
+        <p:spPr>
+          <a:xfrm>
+            <a:off x="365760" y="2194560"/>
+            <a:ext cx="8412480" cy="1371600"/>
+          </a:xfrm>
+          <a:prstGeom prst="rect">
+            <a:avLst/>
+          </a:prstGeom>
+          <a:noFill/>
+          <a:ln/>
+        </p:spPr>
+        <p:txBody>
+          <a:bodyPr wrap="square" rtlCol="0" anchor="ctr"/>
+          <a:lstStyle/>
+          <a:p>
+            <a:pPr indent="0" marL="0">
+              <a:buNone/>
             </a:pPr>
             <a:r>
               <a:rPr lang="en-US" sz="1500" dirty="0">
@@ -5364,49 +6456,7 @@
                 <a:ea typeface="Calibri" pitchFamily="34" charset="-122"/>
                 <a:cs typeface="Calibri" pitchFamily="34" charset="-120"/>
               </a:rPr>
-              <a:t>Filter by capability — chat, embeddings, vision, etc.</a:t>
-            </a:r>
-            <a:endParaRPr lang="en-US" sz="1500" dirty="0"/>
-          </a:p>
-          <a:p>
-            <a:pPr marL="342900" indent="-342900">
-              <a:spcAft>
-                <a:spcPts val="600"/>
-              </a:spcAft>
-              <a:buSzPct val="100000"/>
-              <a:buChar char="•"/>
-            </a:pPr>
-            <a:r>
-              <a:rPr lang="en-US" sz="1500" dirty="0">
-                <a:solidFill>
-                  <a:srgbClr val="212121"/>
-                </a:solidFill>
-                <a:latin typeface="Calibri" pitchFamily="34" charset="0"/>
-                <a:ea typeface="Calibri" pitchFamily="34" charset="-122"/>
-                <a:cs typeface="Calibri" pitchFamily="34" charset="-120"/>
-              </a:rPr>
-              <a:t>See region availability, pricing tier, context window</a:t>
-            </a:r>
-            <a:endParaRPr lang="en-US" sz="1500" dirty="0"/>
-          </a:p>
-          <a:p>
-            <a:pPr marL="342900" indent="-342900">
-              <a:spcAft>
-                <a:spcPts val="600"/>
-              </a:spcAft>
-              <a:buSzPct val="100000"/>
-              <a:buChar char="•"/>
-            </a:pPr>
-            <a:r>
-              <a:rPr lang="en-US" sz="1500" dirty="0">
-                <a:solidFill>
-                  <a:srgbClr val="212121"/>
-                </a:solidFill>
-                <a:latin typeface="Calibri" pitchFamily="34" charset="0"/>
-                <a:ea typeface="Calibri" pitchFamily="34" charset="-122"/>
-                <a:cs typeface="Calibri" pitchFamily="34" charset="-120"/>
-              </a:rPr>
-              <a:t>Not every model is available in every region — check region and quota first</a:t>
+              <a:t>Set this as FOUNDRY_PROJECT_ENDPOINT in every lab's .env. MAF connects with this endpoint plus a credential — AzureCliCredential in dev, managed identity in production.</a:t>
             </a:r>
             <a:endParaRPr lang="en-US" sz="1500" dirty="0"/>
           </a:p>
@@ -5536,7 +6586,7 @@
                 <a:ea typeface="Calibri" pitchFamily="34" charset="-122"/>
                 <a:cs typeface="Calibri" pitchFamily="34" charset="-120"/>
               </a:rPr>
-              <a:t>Model deployments</a:t>
+              <a:t>Model catalog</a:t>
             </a:r>
             <a:endParaRPr lang="en-US" sz="2800" dirty="0"/>
           </a:p>
@@ -5571,7 +6621,7 @@
               <a:buChar char="•"/>
             </a:pPr>
             <a:r>
-              <a:rPr lang="en-US" sz="1400" dirty="0">
+              <a:rPr lang="en-US" sz="1500" dirty="0">
                 <a:solidFill>
                   <a:srgbClr val="212121"/>
                 </a:solidFill>
@@ -5579,9 +6629,9 @@
                 <a:ea typeface="Calibri" pitchFamily="34" charset="-122"/>
                 <a:cs typeface="Calibri" pitchFamily="34" charset="-120"/>
               </a:rPr>
-              <a:t>A deployment is a named, callable instance of a specific model</a:t>
-            </a:r>
-            <a:endParaRPr lang="en-US" sz="1400" dirty="0"/>
+              <a:t>Browse frontier models (OpenAI, Meta, Mistral, others by region)</a:t>
+            </a:r>
+            <a:endParaRPr lang="en-US" sz="1500" dirty="0"/>
           </a:p>
           <a:p>
             <a:pPr marL="342900" indent="-342900">
@@ -5592,7 +6642,7 @@
               <a:buChar char="•"/>
             </a:pPr>
             <a:r>
-              <a:rPr lang="en-US" sz="1400" dirty="0">
+              <a:rPr lang="en-US" sz="1500" dirty="0">
                 <a:solidFill>
                   <a:srgbClr val="212121"/>
                 </a:solidFill>
@@ -5600,93 +6650,9 @@
                 <a:ea typeface="Calibri" pitchFamily="34" charset="-122"/>
                 <a:cs typeface="Calibri" pitchFamily="34" charset="-120"/>
               </a:rPr>
-              <a:t>Each deployment has:</a:t>
-            </a:r>
-            <a:endParaRPr lang="en-US" sz="1400" dirty="0"/>
-          </a:p>
-          <a:p>
-            <a:pPr lvl="1" marL="685800" indent="-342900">
-              <a:spcAft>
-                <a:spcPts val="600"/>
-              </a:spcAft>
-              <a:buSzPct val="100000"/>
-              <a:buChar char="•"/>
-            </a:pPr>
-            <a:r>
-              <a:rPr lang="en-US" sz="1400" dirty="0">
-                <a:solidFill>
-                  <a:srgbClr val="212121"/>
-                </a:solidFill>
-                <a:latin typeface="Calibri" pitchFamily="34" charset="0"/>
-                <a:ea typeface="Calibri" pitchFamily="34" charset="-122"/>
-                <a:cs typeface="Calibri" pitchFamily="34" charset="-120"/>
-              </a:rPr>
-              <a:t>Deployment name — what you pass to MAF as model=…</a:t>
-            </a:r>
-            <a:endParaRPr lang="en-US" sz="1400" dirty="0"/>
-          </a:p>
-          <a:p>
-            <a:pPr lvl="1" marL="685800" indent="-342900">
-              <a:spcAft>
-                <a:spcPts val="600"/>
-              </a:spcAft>
-              <a:buSzPct val="100000"/>
-              <a:buChar char="•"/>
-            </a:pPr>
-            <a:r>
-              <a:rPr lang="en-US" sz="1400" dirty="0">
-                <a:solidFill>
-                  <a:srgbClr val="212121"/>
-                </a:solidFill>
-                <a:latin typeface="Calibri" pitchFamily="34" charset="0"/>
-                <a:ea typeface="Calibri" pitchFamily="34" charset="-122"/>
-                <a:cs typeface="Calibri" pitchFamily="34" charset="-120"/>
-              </a:rPr>
-              <a:t>Model version</a:t>
-            </a:r>
-            <a:endParaRPr lang="en-US" sz="1400" dirty="0"/>
-          </a:p>
-          <a:p>
-            <a:pPr lvl="1" marL="685800" indent="-342900">
-              <a:spcAft>
-                <a:spcPts val="600"/>
-              </a:spcAft>
-              <a:buSzPct val="100000"/>
-              <a:buChar char="•"/>
-            </a:pPr>
-            <a:r>
-              <a:rPr lang="en-US" sz="1400" dirty="0">
-                <a:solidFill>
-                  <a:srgbClr val="212121"/>
-                </a:solidFill>
-                <a:latin typeface="Calibri" pitchFamily="34" charset="0"/>
-                <a:ea typeface="Calibri" pitchFamily="34" charset="-122"/>
-                <a:cs typeface="Calibri" pitchFamily="34" charset="-120"/>
-              </a:rPr>
-              <a:t>Capacity — tokens per minute</a:t>
-            </a:r>
-            <a:endParaRPr lang="en-US" sz="1400" dirty="0"/>
-          </a:p>
-          <a:p>
-            <a:pPr lvl="1" marL="685800" indent="-342900">
-              <a:spcAft>
-                <a:spcPts val="600"/>
-              </a:spcAft>
-              <a:buSzPct val="100000"/>
-              <a:buChar char="•"/>
-            </a:pPr>
-            <a:r>
-              <a:rPr lang="en-US" sz="1400" dirty="0">
-                <a:solidFill>
-                  <a:srgbClr val="212121"/>
-                </a:solidFill>
-                <a:latin typeface="Calibri" pitchFamily="34" charset="0"/>
-                <a:ea typeface="Calibri" pitchFamily="34" charset="-122"/>
-                <a:cs typeface="Calibri" pitchFamily="34" charset="-120"/>
-              </a:rPr>
-              <a:t>Region — inherited from the project</a:t>
-            </a:r>
-            <a:endParaRPr lang="en-US" sz="1400" dirty="0"/>
+              <a:t>Filter by capability — chat, embeddings, vision, etc.</a:t>
+            </a:r>
+            <a:endParaRPr lang="en-US" sz="1500" dirty="0"/>
           </a:p>
           <a:p>
             <a:pPr marL="342900" indent="-342900">
@@ -5697,7 +6663,7 @@
               <a:buChar char="•"/>
             </a:pPr>
             <a:r>
-              <a:rPr lang="en-US" sz="1400" dirty="0">
+              <a:rPr lang="en-US" sz="1500" dirty="0">
                 <a:solidFill>
                   <a:srgbClr val="212121"/>
                 </a:solidFill>
@@ -5705,9 +6671,30 @@
                 <a:ea typeface="Calibri" pitchFamily="34" charset="-122"/>
                 <a:cs typeface="Calibri" pitchFamily="34" charset="-120"/>
               </a:rPr>
-              <a:t>Rule of thumb: one deployment per (model, role) pair. Don't share prod and dev.</a:t>
-            </a:r>
-            <a:endParaRPr lang="en-US" sz="1400" dirty="0"/>
+              <a:t>See region availability, pricing tier, context window</a:t>
+            </a:r>
+            <a:endParaRPr lang="en-US" sz="1500" dirty="0"/>
+          </a:p>
+          <a:p>
+            <a:pPr marL="342900" indent="-342900">
+              <a:spcAft>
+                <a:spcPts val="600"/>
+              </a:spcAft>
+              <a:buSzPct val="100000"/>
+              <a:buChar char="•"/>
+            </a:pPr>
+            <a:r>
+              <a:rPr lang="en-US" sz="1500" dirty="0">
+                <a:solidFill>
+                  <a:srgbClr val="212121"/>
+                </a:solidFill>
+                <a:latin typeface="Calibri" pitchFamily="34" charset="0"/>
+                <a:ea typeface="Calibri" pitchFamily="34" charset="-122"/>
+                <a:cs typeface="Calibri" pitchFamily="34" charset="-120"/>
+              </a:rPr>
+              <a:t>Not every model is available in every region — check region and quota first</a:t>
+            </a:r>
+            <a:endParaRPr lang="en-US" sz="1500" dirty="0"/>
           </a:p>
         </p:txBody>
       </p:sp>
@@ -5835,7 +6822,7 @@
                 <a:ea typeface="Calibri" pitchFamily="34" charset="-122"/>
                 <a:cs typeface="Calibri" pitchFamily="34" charset="-120"/>
               </a:rPr>
-              <a:t>Playgrounds</a:t>
+              <a:t>Model deployments</a:t>
             </a:r>
             <a:endParaRPr lang="en-US" sz="2800" dirty="0"/>
           </a:p>
@@ -5870,7 +6857,7 @@
               <a:buChar char="•"/>
             </a:pPr>
             <a:r>
-              <a:rPr lang="en-US" sz="1500" dirty="0">
+              <a:rPr lang="en-US" sz="1400" dirty="0">
                 <a:solidFill>
                   <a:srgbClr val="212121"/>
                 </a:solidFill>
@@ -5878,9 +6865,9 @@
                 <a:ea typeface="Calibri" pitchFamily="34" charset="-122"/>
                 <a:cs typeface="Calibri" pitchFamily="34" charset="-120"/>
               </a:rPr>
-              <a:t>Chat playground — test a deployed model interactively</a:t>
-            </a:r>
-            <a:endParaRPr lang="en-US" sz="1500" dirty="0"/>
+              <a:t>A deployment is a named, callable instance of a specific model</a:t>
+            </a:r>
+            <a:endParaRPr lang="en-US" sz="1400" dirty="0"/>
           </a:p>
           <a:p>
             <a:pPr marL="342900" indent="-342900">
@@ -5891,7 +6878,7 @@
               <a:buChar char="•"/>
             </a:pPr>
             <a:r>
-              <a:rPr lang="en-US" sz="1500" dirty="0">
+              <a:rPr lang="en-US" sz="1400" dirty="0">
                 <a:solidFill>
                   <a:srgbClr val="212121"/>
                 </a:solidFill>
@@ -5899,9 +6886,93 @@
                 <a:ea typeface="Calibri" pitchFamily="34" charset="-122"/>
                 <a:cs typeface="Calibri" pitchFamily="34" charset="-120"/>
               </a:rPr>
-              <a:t>Agent playground — test a Prompt agent or Hosted agent you've created in Foundry</a:t>
-            </a:r>
-            <a:endParaRPr lang="en-US" sz="1500" dirty="0"/>
+              <a:t>Each deployment has:</a:t>
+            </a:r>
+            <a:endParaRPr lang="en-US" sz="1400" dirty="0"/>
+          </a:p>
+          <a:p>
+            <a:pPr lvl="1" marL="685800" indent="-342900">
+              <a:spcAft>
+                <a:spcPts val="600"/>
+              </a:spcAft>
+              <a:buSzPct val="100000"/>
+              <a:buChar char="•"/>
+            </a:pPr>
+            <a:r>
+              <a:rPr lang="en-US" sz="1400" dirty="0">
+                <a:solidFill>
+                  <a:srgbClr val="212121"/>
+                </a:solidFill>
+                <a:latin typeface="Calibri" pitchFamily="34" charset="0"/>
+                <a:ea typeface="Calibri" pitchFamily="34" charset="-122"/>
+                <a:cs typeface="Calibri" pitchFamily="34" charset="-120"/>
+              </a:rPr>
+              <a:t>Deployment name — what you pass to MAF as model=…</a:t>
+            </a:r>
+            <a:endParaRPr lang="en-US" sz="1400" dirty="0"/>
+          </a:p>
+          <a:p>
+            <a:pPr lvl="1" marL="685800" indent="-342900">
+              <a:spcAft>
+                <a:spcPts val="600"/>
+              </a:spcAft>
+              <a:buSzPct val="100000"/>
+              <a:buChar char="•"/>
+            </a:pPr>
+            <a:r>
+              <a:rPr lang="en-US" sz="1400" dirty="0">
+                <a:solidFill>
+                  <a:srgbClr val="212121"/>
+                </a:solidFill>
+                <a:latin typeface="Calibri" pitchFamily="34" charset="0"/>
+                <a:ea typeface="Calibri" pitchFamily="34" charset="-122"/>
+                <a:cs typeface="Calibri" pitchFamily="34" charset="-120"/>
+              </a:rPr>
+              <a:t>Model version</a:t>
+            </a:r>
+            <a:endParaRPr lang="en-US" sz="1400" dirty="0"/>
+          </a:p>
+          <a:p>
+            <a:pPr lvl="1" marL="685800" indent="-342900">
+              <a:spcAft>
+                <a:spcPts val="600"/>
+              </a:spcAft>
+              <a:buSzPct val="100000"/>
+              <a:buChar char="•"/>
+            </a:pPr>
+            <a:r>
+              <a:rPr lang="en-US" sz="1400" dirty="0">
+                <a:solidFill>
+                  <a:srgbClr val="212121"/>
+                </a:solidFill>
+                <a:latin typeface="Calibri" pitchFamily="34" charset="0"/>
+                <a:ea typeface="Calibri" pitchFamily="34" charset="-122"/>
+                <a:cs typeface="Calibri" pitchFamily="34" charset="-120"/>
+              </a:rPr>
+              <a:t>Capacity — tokens per minute</a:t>
+            </a:r>
+            <a:endParaRPr lang="en-US" sz="1400" dirty="0"/>
+          </a:p>
+          <a:p>
+            <a:pPr lvl="1" marL="685800" indent="-342900">
+              <a:spcAft>
+                <a:spcPts val="600"/>
+              </a:spcAft>
+              <a:buSzPct val="100000"/>
+              <a:buChar char="•"/>
+            </a:pPr>
+            <a:r>
+              <a:rPr lang="en-US" sz="1400" dirty="0">
+                <a:solidFill>
+                  <a:srgbClr val="212121"/>
+                </a:solidFill>
+                <a:latin typeface="Calibri" pitchFamily="34" charset="0"/>
+                <a:ea typeface="Calibri" pitchFamily="34" charset="-122"/>
+                <a:cs typeface="Calibri" pitchFamily="34" charset="-120"/>
+              </a:rPr>
+              <a:t>Region — inherited from the project</a:t>
+            </a:r>
+            <a:endParaRPr lang="en-US" sz="1400" dirty="0"/>
           </a:p>
           <a:p>
             <a:pPr marL="342900" indent="-342900">
@@ -5912,7 +6983,7 @@
               <a:buChar char="•"/>
             </a:pPr>
             <a:r>
-              <a:rPr lang="en-US" sz="1500" dirty="0">
+              <a:rPr lang="en-US" sz="1400" dirty="0">
                 <a:solidFill>
                   <a:srgbClr val="212121"/>
                 </a:solidFill>
@@ -5920,51 +6991,9 @@
                 <a:ea typeface="Calibri" pitchFamily="34" charset="-122"/>
                 <a:cs typeface="Calibri" pitchFamily="34" charset="-120"/>
               </a:rPr>
-              <a:t>Prompt flow / evaluation playgrounds — for testing eval configurations</a:t>
-            </a:r>
-            <a:endParaRPr lang="en-US" sz="1500" dirty="0"/>
-          </a:p>
-          <a:p>
-            <a:pPr marL="342900" indent="-342900">
-              <a:spcAft>
-                <a:spcPts val="600"/>
-              </a:spcAft>
-              <a:buSzPct val="100000"/>
-              <a:buChar char="•"/>
-            </a:pPr>
-            <a:r>
-              <a:rPr lang="en-US" sz="1500" dirty="0">
-                <a:solidFill>
-                  <a:srgbClr val="212121"/>
-                </a:solidFill>
-                <a:latin typeface="Calibri" pitchFamily="34" charset="0"/>
-                <a:ea typeface="Calibri" pitchFamily="34" charset="-122"/>
-                <a:cs typeface="Calibri" pitchFamily="34" charset="-120"/>
-              </a:rPr>
-              <a:t>Use playgrounds to sanity-check before writing agent code</a:t>
-            </a:r>
-            <a:endParaRPr lang="en-US" sz="1500" dirty="0"/>
-          </a:p>
-          <a:p>
-            <a:pPr marL="342900" indent="-342900">
-              <a:spcAft>
-                <a:spcPts val="600"/>
-              </a:spcAft>
-              <a:buSzPct val="100000"/>
-              <a:buChar char="•"/>
-            </a:pPr>
-            <a:r>
-              <a:rPr lang="en-US" sz="1500" dirty="0">
-                <a:solidFill>
-                  <a:srgbClr val="212121"/>
-                </a:solidFill>
-                <a:latin typeface="Calibri" pitchFamily="34" charset="0"/>
-                <a:ea typeface="Calibri" pitchFamily="34" charset="-122"/>
-                <a:cs typeface="Calibri" pitchFamily="34" charset="-120"/>
-              </a:rPr>
-              <a:t>If it doesn't work in the playground, it won't work in MAF either</a:t>
-            </a:r>
-            <a:endParaRPr lang="en-US" sz="1500" dirty="0"/>
+              <a:t>Rule of thumb: one deployment per (model, role) pair. Don't share prod and dev.</a:t>
+            </a:r>
+            <a:endParaRPr lang="en-US" sz="1400" dirty="0"/>
           </a:p>
         </p:txBody>
       </p:sp>
@@ -6092,7 +7121,7 @@
                 <a:ea typeface="Calibri" pitchFamily="34" charset="-122"/>
                 <a:cs typeface="Calibri" pitchFamily="34" charset="-120"/>
               </a:rPr>
-              <a:t>Connections</a:t>
+              <a:t>Playgrounds</a:t>
             </a:r>
             <a:endParaRPr lang="en-US" sz="2800" dirty="0"/>
           </a:p>
@@ -6135,7 +7164,7 @@
                 <a:ea typeface="Calibri" pitchFamily="34" charset="-122"/>
                 <a:cs typeface="Calibri" pitchFamily="34" charset="-120"/>
               </a:rPr>
-              <a:t>Connections are how a Foundry project reaches other Azure resources — AI Search, storage, Fabric, and more</a:t>
+              <a:t>Chat playground — test a deployed model interactively</a:t>
             </a:r>
             <a:endParaRPr lang="en-US" sz="1500" dirty="0"/>
           </a:p>
@@ -6156,7 +7185,7 @@
                 <a:ea typeface="Calibri" pitchFamily="34" charset="-122"/>
                 <a:cs typeface="Calibri" pitchFamily="34" charset="-120"/>
               </a:rPr>
-              <a:t>Configure once per project; agents inherit them</a:t>
+              <a:t>Agent playground — test a Prompt agent or Hosted agent you've created in Foundry</a:t>
             </a:r>
             <a:endParaRPr lang="en-US" sz="1500" dirty="0"/>
           </a:p>
@@ -6177,7 +7206,7 @@
                 <a:ea typeface="Calibri" pitchFamily="34" charset="-122"/>
                 <a:cs typeface="Calibri" pitchFamily="34" charset="-120"/>
               </a:rPr>
-              <a:t>Auth via managed identity or service principal — never long-lived keys in production</a:t>
+              <a:t>Prompt flow / evaluation playgrounds — for testing eval configurations</a:t>
             </a:r>
             <a:endParaRPr lang="en-US" sz="1500" dirty="0"/>
           </a:p>
@@ -6198,7 +7227,28 @@
                 <a:ea typeface="Calibri" pitchFamily="34" charset="-122"/>
                 <a:cs typeface="Calibri" pitchFamily="34" charset="-120"/>
               </a:rPr>
-              <a:t>We wire connections for Foundry IQ knowledge sources on Day 2</a:t>
+              <a:t>Use playgrounds to sanity-check before writing agent code</a:t>
+            </a:r>
+            <a:endParaRPr lang="en-US" sz="1500" dirty="0"/>
+          </a:p>
+          <a:p>
+            <a:pPr marL="342900" indent="-342900">
+              <a:spcAft>
+                <a:spcPts val="600"/>
+              </a:spcAft>
+              <a:buSzPct val="100000"/>
+              <a:buChar char="•"/>
+            </a:pPr>
+            <a:r>
+              <a:rPr lang="en-US" sz="1500" dirty="0">
+                <a:solidFill>
+                  <a:srgbClr val="212121"/>
+                </a:solidFill>
+                <a:latin typeface="Calibri" pitchFamily="34" charset="0"/>
+                <a:ea typeface="Calibri" pitchFamily="34" charset="-122"/>
+                <a:cs typeface="Calibri" pitchFamily="34" charset="-120"/>
+              </a:rPr>
+              <a:t>If it doesn't work in the playground, it won't work in MAF either</a:t>
             </a:r>
             <a:endParaRPr lang="en-US" sz="1500" dirty="0"/>
           </a:p>
@@ -6218,7 +7268,7 @@
     <p:bg>
       <p:bgPr>
         <a:solidFill>
-          <a:srgbClr val="1E2761"/>
+          <a:srgbClr val="FFFFFF"/>
         </a:solidFill>
       </p:bgPr>
     </p:bg>
@@ -6238,14 +7288,34 @@
       </p:grpSpPr>
       <p:sp>
         <p:nvSpPr>
-          <p:cNvPr id="2" name="Text 0"/>
-          <p:cNvSpPr/>
-          <p:nvPr/>
-        </p:nvSpPr>
-        <p:spPr>
-          <a:xfrm>
-            <a:off x="548640" y="2011680"/>
-            <a:ext cx="8046720" cy="1097280"/>
+          <p:cNvPr id="2" name="Shape 0"/>
+          <p:cNvSpPr/>
+          <p:nvPr/>
+        </p:nvSpPr>
+        <p:spPr>
+          <a:xfrm>
+            <a:off x="0" y="0"/>
+            <a:ext cx="54864" cy="5143500"/>
+          </a:xfrm>
+          <a:prstGeom prst="rect">
+            <a:avLst/>
+          </a:prstGeom>
+          <a:solidFill>
+            <a:srgbClr val="1E2761"/>
+          </a:solidFill>
+          <a:ln/>
+        </p:spPr>
+      </p:sp>
+      <p:sp>
+        <p:nvSpPr>
+          <p:cNvPr id="3" name="Text 1"/>
+          <p:cNvSpPr/>
+          <p:nvPr/>
+        </p:nvSpPr>
+        <p:spPr>
+          <a:xfrm>
+            <a:off x="5669280" y="274320"/>
+            <a:ext cx="3291840" cy="274320"/>
           </a:xfrm>
           <a:prstGeom prst="rect">
             <a:avLst/>
@@ -6254,37 +7324,76 @@
           <a:ln/>
         </p:spPr>
         <p:txBody>
-          <a:bodyPr wrap="square" rtlCol="0" anchor="ctr"/>
+          <a:bodyPr wrap="square" lIns="0" tIns="0" rIns="0" bIns="0" rtlCol="0" anchor="ctr"/>
+          <a:lstStyle/>
+          <a:p>
+            <a:pPr algn="r" indent="0" marL="0">
+              <a:buNone/>
+            </a:pPr>
+            <a:r>
+              <a:rPr lang="en-US" sz="1000" dirty="0">
+                <a:solidFill>
+                  <a:srgbClr val="6B7280"/>
+                </a:solidFill>
+                <a:latin typeface="Calibri" pitchFamily="34" charset="0"/>
+                <a:ea typeface="Calibri" pitchFamily="34" charset="-122"/>
+                <a:cs typeface="Calibri" pitchFamily="34" charset="-120"/>
+              </a:rPr>
+              <a:t>Day 1 · Module 2</a:t>
+            </a:r>
+            <a:endParaRPr lang="en-US" sz="1000" dirty="0"/>
+          </a:p>
+        </p:txBody>
+      </p:sp>
+      <p:sp>
+        <p:nvSpPr>
+          <p:cNvPr id="4" name="Text 2"/>
+          <p:cNvSpPr/>
+          <p:nvPr/>
+        </p:nvSpPr>
+        <p:spPr>
+          <a:xfrm>
+            <a:off x="365760" y="320040"/>
+            <a:ext cx="6217920" cy="640080"/>
+          </a:xfrm>
+          <a:prstGeom prst="rect">
+            <a:avLst/>
+          </a:prstGeom>
+          <a:noFill/>
+          <a:ln/>
+        </p:spPr>
+        <p:txBody>
+          <a:bodyPr wrap="square" lIns="0" tIns="0" rIns="0" bIns="0" rtlCol="0" anchor="ctr"/>
           <a:lstStyle/>
           <a:p>
             <a:pPr indent="0" marL="0">
               <a:buNone/>
             </a:pPr>
             <a:r>
-              <a:rPr lang="en-US" sz="4000" b="1" dirty="0">
-                <a:solidFill>
-                  <a:srgbClr val="FFFFFF"/>
-                </a:solidFill>
-                <a:latin typeface="Calibri" pitchFamily="34" charset="0"/>
-                <a:ea typeface="Calibri" pitchFamily="34" charset="-122"/>
-                <a:cs typeface="Calibri" pitchFamily="34" charset="-120"/>
-              </a:rPr>
-              <a:t>Toolbox and Foundry IQ</a:t>
-            </a:r>
-            <a:endParaRPr lang="en-US" sz="4000" dirty="0"/>
-          </a:p>
-        </p:txBody>
-      </p:sp>
-      <p:sp>
-        <p:nvSpPr>
-          <p:cNvPr id="3" name="Text 1"/>
-          <p:cNvSpPr/>
-          <p:nvPr/>
-        </p:nvSpPr>
-        <p:spPr>
-          <a:xfrm>
-            <a:off x="548640" y="3108960"/>
-            <a:ext cx="8046720" cy="548640"/>
+              <a:rPr lang="en-US" sz="2800" b="1" dirty="0">
+                <a:solidFill>
+                  <a:srgbClr val="1E2761"/>
+                </a:solidFill>
+                <a:latin typeface="Calibri" pitchFamily="34" charset="0"/>
+                <a:ea typeface="Calibri" pitchFamily="34" charset="-122"/>
+                <a:cs typeface="Calibri" pitchFamily="34" charset="-120"/>
+              </a:rPr>
+              <a:t>Connections</a:t>
+            </a:r>
+            <a:endParaRPr lang="en-US" sz="2800" dirty="0"/>
+          </a:p>
+        </p:txBody>
+      </p:sp>
+      <p:sp>
+        <p:nvSpPr>
+          <p:cNvPr id="5" name="Text 3"/>
+          <p:cNvSpPr/>
+          <p:nvPr/>
+        </p:nvSpPr>
+        <p:spPr>
+          <a:xfrm>
+            <a:off x="365760" y="1097280"/>
+            <a:ext cx="8412480" cy="3749040"/>
           </a:xfrm>
           <a:prstGeom prst="rect">
             <a:avLst/>
@@ -6296,21 +7405,109 @@
           <a:bodyPr wrap="square" rtlCol="0" anchor="ctr"/>
           <a:lstStyle/>
           <a:p>
-            <a:pPr indent="0" marL="0">
-              <a:buNone/>
-            </a:pPr>
-            <a:r>
-              <a:rPr lang="en-US" sz="1800" dirty="0">
-                <a:solidFill>
-                  <a:srgbClr val="CADCFC"/>
-                </a:solidFill>
-                <a:latin typeface="Calibri" pitchFamily="34" charset="0"/>
-                <a:ea typeface="Calibri" pitchFamily="34" charset="-122"/>
-                <a:cs typeface="Calibri" pitchFamily="34" charset="-120"/>
-              </a:rPr>
-              <a:t>Introductions only — Days 2–3 go deep</a:t>
-            </a:r>
-            <a:endParaRPr lang="en-US" sz="1800" dirty="0"/>
+            <a:pPr marL="342900" indent="-342900">
+              <a:spcAft>
+                <a:spcPts val="600"/>
+              </a:spcAft>
+              <a:buSzPct val="100000"/>
+              <a:buChar char="•"/>
+            </a:pPr>
+            <a:r>
+              <a:rPr lang="en-US" sz="1500" dirty="0">
+                <a:solidFill>
+                  <a:srgbClr val="212121"/>
+                </a:solidFill>
+                <a:latin typeface="Calibri" pitchFamily="34" charset="0"/>
+                <a:ea typeface="Calibri" pitchFamily="34" charset="-122"/>
+                <a:cs typeface="Calibri" pitchFamily="34" charset="-120"/>
+              </a:rPr>
+              <a:t>How a Foundry resource references other Azure services — AI Search, Storage, Key Vault, Fabric, and more</a:t>
+            </a:r>
+            <a:endParaRPr lang="en-US" sz="1500" dirty="0"/>
+          </a:p>
+          <a:p>
+            <a:pPr marL="342900" indent="-342900">
+              <a:spcAft>
+                <a:spcPts val="600"/>
+              </a:spcAft>
+              <a:buSzPct val="100000"/>
+              <a:buChar char="•"/>
+            </a:pPr>
+            <a:r>
+              <a:rPr lang="en-US" sz="1500" dirty="0">
+                <a:solidFill>
+                  <a:srgbClr val="212121"/>
+                </a:solidFill>
+                <a:latin typeface="Calibri" pitchFamily="34" charset="0"/>
+                <a:ea typeface="Calibri" pitchFamily="34" charset="-122"/>
+                <a:cs typeface="Calibri" pitchFamily="34" charset="-120"/>
+              </a:rPr>
+              <a:t>Each connected resource is a separate Azure resource with its own networking and access policies</a:t>
+            </a:r>
+            <a:endParaRPr lang="en-US" sz="1500" dirty="0"/>
+          </a:p>
+          <a:p>
+            <a:pPr marL="342900" indent="-342900">
+              <a:spcAft>
+                <a:spcPts val="600"/>
+              </a:spcAft>
+              <a:buSzPct val="100000"/>
+              <a:buChar char="•"/>
+            </a:pPr>
+            <a:r>
+              <a:rPr lang="en-US" sz="1500" dirty="0">
+                <a:solidFill>
+                  <a:srgbClr val="212121"/>
+                </a:solidFill>
+                <a:latin typeface="Calibri" pitchFamily="34" charset="0"/>
+                <a:ea typeface="Calibri" pitchFamily="34" charset="-122"/>
+                <a:cs typeface="Calibri" pitchFamily="34" charset="-120"/>
+              </a:rPr>
+              <a:t>Configured on the Foundry resource; projects inherit them</a:t>
+            </a:r>
+            <a:endParaRPr lang="en-US" sz="1500" dirty="0"/>
+          </a:p>
+          <a:p>
+            <a:pPr marL="342900" indent="-342900">
+              <a:spcAft>
+                <a:spcPts val="600"/>
+              </a:spcAft>
+              <a:buSzPct val="100000"/>
+              <a:buChar char="•"/>
+            </a:pPr>
+            <a:r>
+              <a:rPr lang="en-US" sz="1500" dirty="0">
+                <a:solidFill>
+                  <a:srgbClr val="212121"/>
+                </a:solidFill>
+                <a:latin typeface="Calibri" pitchFamily="34" charset="0"/>
+                <a:ea typeface="Calibri" pitchFamily="34" charset="-122"/>
+                <a:cs typeface="Calibri" pitchFamily="34" charset="-120"/>
+              </a:rPr>
+              <a:t>Auth via managed identity or service principal — never long-lived keys in production</a:t>
+            </a:r>
+            <a:endParaRPr lang="en-US" sz="1500" dirty="0"/>
+          </a:p>
+          <a:p>
+            <a:pPr marL="342900" indent="-342900">
+              <a:spcAft>
+                <a:spcPts val="600"/>
+              </a:spcAft>
+              <a:buSzPct val="100000"/>
+              <a:buChar char="•"/>
+            </a:pPr>
+            <a:r>
+              <a:rPr lang="en-US" sz="1500" dirty="0">
+                <a:solidFill>
+                  <a:srgbClr val="212121"/>
+                </a:solidFill>
+                <a:latin typeface="Calibri" pitchFamily="34" charset="0"/>
+                <a:ea typeface="Calibri" pitchFamily="34" charset="-122"/>
+                <a:cs typeface="Calibri" pitchFamily="34" charset="-120"/>
+              </a:rPr>
+              <a:t>We wire connections for Foundry IQ knowledge sources on Day 2</a:t>
+            </a:r>
+            <a:endParaRPr lang="en-US" sz="1500" dirty="0"/>
           </a:p>
         </p:txBody>
       </p:sp>

--- a/decks/day1/module-2-foundry-portal.pptx
+++ b/decks/day1/module-2-foundry-portal.pptx
@@ -1309,7 +1309,7 @@
           <a:p>
             <a:r>
               <a:rPr lang="en-US" dirty="0"/>
-              <a:t>This is the mental map for Foundry governance. Emphasize that connected resources (Storage, Key Vault, AI Search) are independent Azure resources — you manage their networking and access separately. The Foundry resource references them through connections.</a:t>
+              <a:t>Diagram from Microsoft Learn (foundry/concepts/architecture). Walk the four layers explicitly: (1) Foundry resource is the governance boundary — deployments, security, connections. (2) Projects are development boundaries nested inside. (3) Project assets are files, agents, evaluations. (4) Connected resources (Storage, Key Vault, AI Search) are separate Azure resources with their own governance — you manage networking and access for them independently.</a:t>
             </a:r>
             <a:endParaRPr lang="en-US" dirty="0"/>
           </a:p>
@@ -4976,41 +4976,40 @@
           </a:p>
         </p:txBody>
       </p:sp>
-      <p:sp>
-        <p:nvSpPr>
-          <p:cNvPr id="5" name="Shape 3"/>
-          <p:cNvSpPr/>
-          <p:nvPr/>
-        </p:nvSpPr>
-        <p:spPr>
-          <a:xfrm>
-            <a:off x="365760" y="1051560"/>
-            <a:ext cx="5120640" cy="3108960"/>
-          </a:xfrm>
-          <a:prstGeom prst="rect">
-            <a:avLst/>
-          </a:prstGeom>
-          <a:solidFill>
-            <a:srgbClr val="FFFFFF"/>
-          </a:solidFill>
-          <a:ln w="25400">
-            <a:solidFill>
-              <a:srgbClr val="1E2761"/>
-            </a:solidFill>
-            <a:prstDash val="solid"/>
-          </a:ln>
-        </p:spPr>
-      </p:sp>
-      <p:sp>
-        <p:nvSpPr>
-          <p:cNvPr id="6" name="Text 4"/>
-          <p:cNvSpPr/>
-          <p:nvPr/>
-        </p:nvSpPr>
-        <p:spPr>
-          <a:xfrm>
-            <a:off x="457200" y="1124712"/>
-            <a:ext cx="4937760" cy="320040"/>
+      <p:pic>
+        <p:nvPicPr>
+          <p:cNvPr id="5" name="Image 0" descr="[object Object]">    </p:cNvPr>
+          <p:cNvPicPr>
+            <a:picLocks noChangeAspect="1"/>
+          </p:cNvPicPr>
+          <p:nvPr/>
+        </p:nvPicPr>
+        <p:blipFill>
+          <a:blip r:embed="rId1"/>
+          <a:stretch>
+            <a:fillRect/>
+          </a:stretch>
+        </p:blipFill>
+        <p:spPr>
+          <a:xfrm>
+            <a:off x="2013575" y="1097280"/>
+            <a:ext cx="5116850" cy="3291840"/>
+          </a:xfrm>
+          <a:prstGeom prst="rect">
+            <a:avLst/>
+          </a:prstGeom>
+        </p:spPr>
+      </p:pic>
+      <p:sp>
+        <p:nvSpPr>
+          <p:cNvPr id="6" name="Text 3"/>
+          <p:cNvSpPr/>
+          <p:nvPr/>
+        </p:nvSpPr>
+        <p:spPr>
+          <a:xfrm>
+            <a:off x="365760" y="4434840"/>
+            <a:ext cx="8412480" cy="228600"/>
           </a:xfrm>
           <a:prstGeom prst="rect">
             <a:avLst/>
@@ -5022,39 +5021,37 @@
           <a:bodyPr wrap="square" lIns="0" tIns="0" rIns="0" bIns="0" rtlCol="0" anchor="ctr"/>
           <a:lstStyle/>
           <a:p>
-            <a:pPr indent="0" marL="0">
+            <a:pPr algn="ctr" indent="0" marL="0">
               <a:buNone/>
             </a:pPr>
             <a:r>
-              <a:rPr lang="en-US" sz="1300" b="1" dirty="0">
-                <a:solidFill>
-                  <a:srgbClr val="1E2761"/>
-                </a:solidFill>
-                <a:latin typeface="Calibri" pitchFamily="34" charset="0"/>
-                <a:ea typeface="Calibri" pitchFamily="34" charset="-122"/>
-                <a:cs typeface="Calibri" pitchFamily="34" charset="-120"/>
-              </a:rPr>
-              <a:t>Foundry resource · governance boundary</a:t>
-            </a:r>
-            <a:endParaRPr lang="en-US" sz="1300" dirty="0"/>
-          </a:p>
-        </p:txBody>
-      </p:sp>
-      <p:sp>
-        <p:nvSpPr>
-          <p:cNvPr id="7" name="Shape 5"/>
-          <p:cNvSpPr/>
-          <p:nvPr/>
-        </p:nvSpPr>
-        <p:spPr>
-          <a:xfrm>
-            <a:off x="502920" y="1554480"/>
-            <a:ext cx="1554480" cy="365760"/>
-          </a:xfrm>
-          <a:prstGeom prst="roundRect">
-            <a:avLst>
-              <a:gd name="adj" fmla="val 20000"/>
-            </a:avLst>
+              <a:rPr lang="en-US" sz="900" i="1" dirty="0">
+                <a:solidFill>
+                  <a:srgbClr val="6B7280"/>
+                </a:solidFill>
+                <a:latin typeface="Calibri" pitchFamily="34" charset="0"/>
+                <a:ea typeface="Calibri" pitchFamily="34" charset="-122"/>
+                <a:cs typeface="Calibri" pitchFamily="34" charset="-120"/>
+              </a:rPr>
+              <a:t>Diagram: Microsoft Learn · aka.ms/foundry/architecture</a:t>
+            </a:r>
+            <a:endParaRPr lang="en-US" sz="900" dirty="0"/>
+          </a:p>
+        </p:txBody>
+      </p:sp>
+      <p:sp>
+        <p:nvSpPr>
+          <p:cNvPr id="7" name="Shape 4"/>
+          <p:cNvSpPr/>
+          <p:nvPr/>
+        </p:nvSpPr>
+        <p:spPr>
+          <a:xfrm>
+            <a:off x="365760" y="4617720"/>
+            <a:ext cx="8412480" cy="457200"/>
+          </a:xfrm>
+          <a:prstGeom prst="rect">
+            <a:avLst/>
           </a:prstGeom>
           <a:solidFill>
             <a:srgbClr val="CADCFC"/>
@@ -5064,568 +5061,14 @@
       </p:sp>
       <p:sp>
         <p:nvSpPr>
-          <p:cNvPr id="8" name="Text 6"/>
-          <p:cNvSpPr/>
-          <p:nvPr/>
-        </p:nvSpPr>
-        <p:spPr>
-          <a:xfrm>
-            <a:off x="502920" y="1554480"/>
-            <a:ext cx="1554480" cy="365760"/>
-          </a:xfrm>
-          <a:prstGeom prst="rect">
-            <a:avLst/>
-          </a:prstGeom>
-          <a:noFill/>
-          <a:ln/>
-        </p:spPr>
-        <p:txBody>
-          <a:bodyPr wrap="square" lIns="0" tIns="0" rIns="0" bIns="0" rtlCol="0" anchor="ctr"/>
-          <a:lstStyle/>
-          <a:p>
-            <a:pPr algn="ctr" indent="0" marL="0">
-              <a:buNone/>
-            </a:pPr>
-            <a:r>
-              <a:rPr lang="en-US" sz="1000" b="1" dirty="0">
-                <a:solidFill>
-                  <a:srgbClr val="1E2761"/>
-                </a:solidFill>
-                <a:latin typeface="Calibri" pitchFamily="34" charset="0"/>
-                <a:ea typeface="Calibri" pitchFamily="34" charset="-122"/>
-                <a:cs typeface="Calibri" pitchFamily="34" charset="-120"/>
-              </a:rPr>
-              <a:t>Model deployments</a:t>
-            </a:r>
-            <a:endParaRPr lang="en-US" sz="1000" dirty="0"/>
-          </a:p>
-        </p:txBody>
-      </p:sp>
-      <p:sp>
-        <p:nvSpPr>
-          <p:cNvPr id="9" name="Shape 7"/>
-          <p:cNvSpPr/>
-          <p:nvPr/>
-        </p:nvSpPr>
-        <p:spPr>
-          <a:xfrm>
-            <a:off x="2148840" y="1554480"/>
-            <a:ext cx="1554480" cy="365760"/>
-          </a:xfrm>
-          <a:prstGeom prst="roundRect">
-            <a:avLst>
-              <a:gd name="adj" fmla="val 20000"/>
-            </a:avLst>
-          </a:prstGeom>
-          <a:solidFill>
-            <a:srgbClr val="CADCFC"/>
-          </a:solidFill>
-          <a:ln/>
-        </p:spPr>
-      </p:sp>
-      <p:sp>
-        <p:nvSpPr>
-          <p:cNvPr id="10" name="Text 8"/>
-          <p:cNvSpPr/>
-          <p:nvPr/>
-        </p:nvSpPr>
-        <p:spPr>
-          <a:xfrm>
-            <a:off x="2148840" y="1554480"/>
-            <a:ext cx="1554480" cy="365760"/>
-          </a:xfrm>
-          <a:prstGeom prst="rect">
-            <a:avLst/>
-          </a:prstGeom>
-          <a:noFill/>
-          <a:ln/>
-        </p:spPr>
-        <p:txBody>
-          <a:bodyPr wrap="square" lIns="0" tIns="0" rIns="0" bIns="0" rtlCol="0" anchor="ctr"/>
-          <a:lstStyle/>
-          <a:p>
-            <a:pPr algn="ctr" indent="0" marL="0">
-              <a:buNone/>
-            </a:pPr>
-            <a:r>
-              <a:rPr lang="en-US" sz="1000" b="1" dirty="0">
-                <a:solidFill>
-                  <a:srgbClr val="1E2761"/>
-                </a:solidFill>
-                <a:latin typeface="Calibri" pitchFamily="34" charset="0"/>
-                <a:ea typeface="Calibri" pitchFamily="34" charset="-122"/>
-                <a:cs typeface="Calibri" pitchFamily="34" charset="-120"/>
-              </a:rPr>
-              <a:t>Security &amp; networking</a:t>
-            </a:r>
-            <a:endParaRPr lang="en-US" sz="1000" dirty="0"/>
-          </a:p>
-        </p:txBody>
-      </p:sp>
-      <p:sp>
-        <p:nvSpPr>
-          <p:cNvPr id="11" name="Shape 9"/>
-          <p:cNvSpPr/>
-          <p:nvPr/>
-        </p:nvSpPr>
-        <p:spPr>
-          <a:xfrm>
-            <a:off x="3794760" y="1554480"/>
-            <a:ext cx="1554480" cy="365760"/>
-          </a:xfrm>
-          <a:prstGeom prst="roundRect">
-            <a:avLst>
-              <a:gd name="adj" fmla="val 20000"/>
-            </a:avLst>
-          </a:prstGeom>
-          <a:solidFill>
-            <a:srgbClr val="CADCFC"/>
-          </a:solidFill>
-          <a:ln/>
-        </p:spPr>
-      </p:sp>
-      <p:sp>
-        <p:nvSpPr>
-          <p:cNvPr id="12" name="Text 10"/>
-          <p:cNvSpPr/>
-          <p:nvPr/>
-        </p:nvSpPr>
-        <p:spPr>
-          <a:xfrm>
-            <a:off x="3794760" y="1554480"/>
-            <a:ext cx="1554480" cy="365760"/>
-          </a:xfrm>
-          <a:prstGeom prst="rect">
-            <a:avLst/>
-          </a:prstGeom>
-          <a:noFill/>
-          <a:ln/>
-        </p:spPr>
-        <p:txBody>
-          <a:bodyPr wrap="square" lIns="0" tIns="0" rIns="0" bIns="0" rtlCol="0" anchor="ctr"/>
-          <a:lstStyle/>
-          <a:p>
-            <a:pPr algn="ctr" indent="0" marL="0">
-              <a:buNone/>
-            </a:pPr>
-            <a:r>
-              <a:rPr lang="en-US" sz="1000" b="1" dirty="0">
-                <a:solidFill>
-                  <a:srgbClr val="1E2761"/>
-                </a:solidFill>
-                <a:latin typeface="Calibri" pitchFamily="34" charset="0"/>
-                <a:ea typeface="Calibri" pitchFamily="34" charset="-122"/>
-                <a:cs typeface="Calibri" pitchFamily="34" charset="-120"/>
-              </a:rPr>
-              <a:t>Connections</a:t>
-            </a:r>
-            <a:endParaRPr lang="en-US" sz="1000" dirty="0"/>
-          </a:p>
-        </p:txBody>
-      </p:sp>
-      <p:sp>
-        <p:nvSpPr>
-          <p:cNvPr id="13" name="Shape 11"/>
-          <p:cNvSpPr/>
-          <p:nvPr/>
-        </p:nvSpPr>
-        <p:spPr>
-          <a:xfrm>
-            <a:off x="502920" y="2103120"/>
-            <a:ext cx="4846320" cy="1920240"/>
-          </a:xfrm>
-          <a:prstGeom prst="rect">
-            <a:avLst/>
-          </a:prstGeom>
-          <a:solidFill>
-            <a:srgbClr val="F3F4F6"/>
-          </a:solidFill>
-          <a:ln w="12700">
-            <a:solidFill>
-              <a:srgbClr val="1E2761"/>
-            </a:solidFill>
-            <a:prstDash val="dash"/>
-          </a:ln>
-        </p:spPr>
-      </p:sp>
-      <p:sp>
-        <p:nvSpPr>
-          <p:cNvPr id="14" name="Text 12"/>
-          <p:cNvSpPr/>
-          <p:nvPr/>
-        </p:nvSpPr>
-        <p:spPr>
-          <a:xfrm>
-            <a:off x="594360" y="2176272"/>
-            <a:ext cx="4663440" cy="292608"/>
-          </a:xfrm>
-          <a:prstGeom prst="rect">
-            <a:avLst/>
-          </a:prstGeom>
-          <a:noFill/>
-          <a:ln/>
-        </p:spPr>
-        <p:txBody>
-          <a:bodyPr wrap="square" lIns="0" tIns="0" rIns="0" bIns="0" rtlCol="0" anchor="ctr"/>
-          <a:lstStyle/>
-          <a:p>
-            <a:pPr indent="0" marL="0">
-              <a:buNone/>
-            </a:pPr>
-            <a:r>
-              <a:rPr lang="en-US" sz="1200" b="1" dirty="0">
-                <a:solidFill>
-                  <a:srgbClr val="1E2761"/>
-                </a:solidFill>
-                <a:latin typeface="Calibri" pitchFamily="34" charset="0"/>
-                <a:ea typeface="Calibri" pitchFamily="34" charset="-122"/>
-                <a:cs typeface="Calibri" pitchFamily="34" charset="-120"/>
-              </a:rPr>
-              <a:t>Project · development boundary</a:t>
-            </a:r>
-            <a:endParaRPr lang="en-US" sz="1200" dirty="0"/>
-          </a:p>
-        </p:txBody>
-      </p:sp>
-      <p:sp>
-        <p:nvSpPr>
-          <p:cNvPr id="15" name="Text 13"/>
-          <p:cNvSpPr/>
-          <p:nvPr/>
-        </p:nvSpPr>
-        <p:spPr>
-          <a:xfrm>
-            <a:off x="594360" y="2560320"/>
-            <a:ext cx="4663440" cy="457200"/>
-          </a:xfrm>
-          <a:prstGeom prst="rect">
-            <a:avLst/>
-          </a:prstGeom>
-          <a:noFill/>
-          <a:ln/>
-        </p:spPr>
-        <p:txBody>
-          <a:bodyPr wrap="square" lIns="0" tIns="0" rIns="0" bIns="0" rtlCol="0" anchor="ctr"/>
-          <a:lstStyle/>
-          <a:p>
-            <a:pPr indent="0" marL="0">
-              <a:buNone/>
-            </a:pPr>
-            <a:r>
-              <a:rPr lang="en-US" sz="1100" i="1" dirty="0">
-                <a:solidFill>
-                  <a:srgbClr val="212121"/>
-                </a:solidFill>
-                <a:latin typeface="Calibri" pitchFamily="34" charset="0"/>
-                <a:ea typeface="Calibri" pitchFamily="34" charset="-122"/>
-                <a:cs typeface="Calibri" pitchFamily="34" charset="-120"/>
-              </a:rPr>
-              <a:t>Project assets: files · agents · evaluations</a:t>
-            </a:r>
-            <a:endParaRPr lang="en-US" sz="1100" dirty="0"/>
-          </a:p>
-        </p:txBody>
-      </p:sp>
-      <p:sp>
-        <p:nvSpPr>
-          <p:cNvPr id="16" name="Text 14"/>
-          <p:cNvSpPr/>
-          <p:nvPr/>
-        </p:nvSpPr>
-        <p:spPr>
-          <a:xfrm>
-            <a:off x="5852160" y="1124712"/>
-            <a:ext cx="2926080" cy="274320"/>
-          </a:xfrm>
-          <a:prstGeom prst="rect">
-            <a:avLst/>
-          </a:prstGeom>
-          <a:noFill/>
-          <a:ln/>
-        </p:spPr>
-        <p:txBody>
-          <a:bodyPr wrap="square" lIns="0" tIns="0" rIns="0" bIns="0" rtlCol="0" anchor="ctr"/>
-          <a:lstStyle/>
-          <a:p>
-            <a:pPr indent="0" marL="0">
-              <a:buNone/>
-            </a:pPr>
-            <a:r>
-              <a:rPr lang="en-US" sz="1300" b="1" dirty="0">
-                <a:solidFill>
-                  <a:srgbClr val="1E2761"/>
-                </a:solidFill>
-                <a:latin typeface="Calibri" pitchFamily="34" charset="0"/>
-                <a:ea typeface="Calibri" pitchFamily="34" charset="-122"/>
-                <a:cs typeface="Calibri" pitchFamily="34" charset="-120"/>
-              </a:rPr>
-              <a:t>Connected resources</a:t>
-            </a:r>
-            <a:endParaRPr lang="en-US" sz="1300" dirty="0"/>
-          </a:p>
-        </p:txBody>
-      </p:sp>
-      <p:sp>
-        <p:nvSpPr>
-          <p:cNvPr id="17" name="Text 15"/>
-          <p:cNvSpPr/>
-          <p:nvPr/>
-        </p:nvSpPr>
-        <p:spPr>
-          <a:xfrm>
-            <a:off x="5852160" y="1417320"/>
-            <a:ext cx="2926080" cy="274320"/>
-          </a:xfrm>
-          <a:prstGeom prst="rect">
-            <a:avLst/>
-          </a:prstGeom>
-          <a:noFill/>
-          <a:ln/>
-        </p:spPr>
-        <p:txBody>
-          <a:bodyPr wrap="square" lIns="0" tIns="0" rIns="0" bIns="0" rtlCol="0" anchor="ctr"/>
-          <a:lstStyle/>
-          <a:p>
-            <a:pPr indent="0" marL="0">
-              <a:buNone/>
-            </a:pPr>
-            <a:r>
-              <a:rPr lang="en-US" sz="1000" i="1" dirty="0">
-                <a:solidFill>
-                  <a:srgbClr val="6B7280"/>
-                </a:solidFill>
-                <a:latin typeface="Calibri" pitchFamily="34" charset="0"/>
-                <a:ea typeface="Calibri" pitchFamily="34" charset="-122"/>
-                <a:cs typeface="Calibri" pitchFamily="34" charset="-120"/>
-              </a:rPr>
-              <a:t>separate Azure resources · own governance</a:t>
-            </a:r>
-            <a:endParaRPr lang="en-US" sz="1000" dirty="0"/>
-          </a:p>
-        </p:txBody>
-      </p:sp>
-      <p:sp>
-        <p:nvSpPr>
-          <p:cNvPr id="18" name="Shape 16"/>
-          <p:cNvSpPr/>
-          <p:nvPr/>
-        </p:nvSpPr>
-        <p:spPr>
-          <a:xfrm>
-            <a:off x="5852160" y="1828800"/>
-            <a:ext cx="2926080" cy="640080"/>
-          </a:xfrm>
-          <a:prstGeom prst="rect">
-            <a:avLst/>
-          </a:prstGeom>
-          <a:solidFill>
-            <a:srgbClr val="FFFFFF"/>
-          </a:solidFill>
-          <a:ln w="12700">
-            <a:solidFill>
-              <a:srgbClr val="D1D5DB"/>
-            </a:solidFill>
-            <a:prstDash val="dash"/>
-          </a:ln>
-        </p:spPr>
-      </p:sp>
-      <p:sp>
-        <p:nvSpPr>
-          <p:cNvPr id="19" name="Text 17"/>
-          <p:cNvSpPr/>
-          <p:nvPr/>
-        </p:nvSpPr>
-        <p:spPr>
-          <a:xfrm>
-            <a:off x="5852160" y="1828800"/>
-            <a:ext cx="2926080" cy="640080"/>
-          </a:xfrm>
-          <a:prstGeom prst="rect">
-            <a:avLst/>
-          </a:prstGeom>
-          <a:noFill/>
-          <a:ln/>
-        </p:spPr>
-        <p:txBody>
-          <a:bodyPr wrap="square" lIns="0" tIns="0" rIns="0" bIns="0" rtlCol="0" anchor="ctr"/>
-          <a:lstStyle/>
-          <a:p>
-            <a:pPr algn="ctr" indent="0" marL="0">
-              <a:buNone/>
-            </a:pPr>
-            <a:r>
-              <a:rPr lang="en-US" sz="1200" b="1" dirty="0">
-                <a:solidFill>
-                  <a:srgbClr val="212121"/>
-                </a:solidFill>
-                <a:latin typeface="Calibri" pitchFamily="34" charset="0"/>
-                <a:ea typeface="Calibri" pitchFamily="34" charset="-122"/>
-                <a:cs typeface="Calibri" pitchFamily="34" charset="-120"/>
-              </a:rPr>
-              <a:t>Azure Storage</a:t>
-            </a:r>
-            <a:endParaRPr lang="en-US" sz="1200" dirty="0"/>
-          </a:p>
-        </p:txBody>
-      </p:sp>
-      <p:sp>
-        <p:nvSpPr>
-          <p:cNvPr id="20" name="Shape 18"/>
-          <p:cNvSpPr/>
-          <p:nvPr/>
-        </p:nvSpPr>
-        <p:spPr>
-          <a:xfrm>
-            <a:off x="5852160" y="2606040"/>
-            <a:ext cx="2926080" cy="640080"/>
-          </a:xfrm>
-          <a:prstGeom prst="rect">
-            <a:avLst/>
-          </a:prstGeom>
-          <a:solidFill>
-            <a:srgbClr val="FFFFFF"/>
-          </a:solidFill>
-          <a:ln w="12700">
-            <a:solidFill>
-              <a:srgbClr val="D1D5DB"/>
-            </a:solidFill>
-            <a:prstDash val="dash"/>
-          </a:ln>
-        </p:spPr>
-      </p:sp>
-      <p:sp>
-        <p:nvSpPr>
-          <p:cNvPr id="21" name="Text 19"/>
-          <p:cNvSpPr/>
-          <p:nvPr/>
-        </p:nvSpPr>
-        <p:spPr>
-          <a:xfrm>
-            <a:off x="5852160" y="2606040"/>
-            <a:ext cx="2926080" cy="640080"/>
-          </a:xfrm>
-          <a:prstGeom prst="rect">
-            <a:avLst/>
-          </a:prstGeom>
-          <a:noFill/>
-          <a:ln/>
-        </p:spPr>
-        <p:txBody>
-          <a:bodyPr wrap="square" lIns="0" tIns="0" rIns="0" bIns="0" rtlCol="0" anchor="ctr"/>
-          <a:lstStyle/>
-          <a:p>
-            <a:pPr algn="ctr" indent="0" marL="0">
-              <a:buNone/>
-            </a:pPr>
-            <a:r>
-              <a:rPr lang="en-US" sz="1200" b="1" dirty="0">
-                <a:solidFill>
-                  <a:srgbClr val="212121"/>
-                </a:solidFill>
-                <a:latin typeface="Calibri" pitchFamily="34" charset="0"/>
-                <a:ea typeface="Calibri" pitchFamily="34" charset="-122"/>
-                <a:cs typeface="Calibri" pitchFamily="34" charset="-120"/>
-              </a:rPr>
-              <a:t>Azure Key Vault</a:t>
-            </a:r>
-            <a:endParaRPr lang="en-US" sz="1200" dirty="0"/>
-          </a:p>
-        </p:txBody>
-      </p:sp>
-      <p:sp>
-        <p:nvSpPr>
-          <p:cNvPr id="22" name="Shape 20"/>
-          <p:cNvSpPr/>
-          <p:nvPr/>
-        </p:nvSpPr>
-        <p:spPr>
-          <a:xfrm>
-            <a:off x="5852160" y="3383280"/>
-            <a:ext cx="2926080" cy="640080"/>
-          </a:xfrm>
-          <a:prstGeom prst="rect">
-            <a:avLst/>
-          </a:prstGeom>
-          <a:solidFill>
-            <a:srgbClr val="FFFFFF"/>
-          </a:solidFill>
-          <a:ln w="12700">
-            <a:solidFill>
-              <a:srgbClr val="D1D5DB"/>
-            </a:solidFill>
-            <a:prstDash val="dash"/>
-          </a:ln>
-        </p:spPr>
-      </p:sp>
-      <p:sp>
-        <p:nvSpPr>
-          <p:cNvPr id="23" name="Text 21"/>
-          <p:cNvSpPr/>
-          <p:nvPr/>
-        </p:nvSpPr>
-        <p:spPr>
-          <a:xfrm>
-            <a:off x="5852160" y="3383280"/>
-            <a:ext cx="2926080" cy="640080"/>
-          </a:xfrm>
-          <a:prstGeom prst="rect">
-            <a:avLst/>
-          </a:prstGeom>
-          <a:noFill/>
-          <a:ln/>
-        </p:spPr>
-        <p:txBody>
-          <a:bodyPr wrap="square" lIns="0" tIns="0" rIns="0" bIns="0" rtlCol="0" anchor="ctr"/>
-          <a:lstStyle/>
-          <a:p>
-            <a:pPr algn="ctr" indent="0" marL="0">
-              <a:buNone/>
-            </a:pPr>
-            <a:r>
-              <a:rPr lang="en-US" sz="1200" b="1" dirty="0">
-                <a:solidFill>
-                  <a:srgbClr val="212121"/>
-                </a:solidFill>
-                <a:latin typeface="Calibri" pitchFamily="34" charset="0"/>
-                <a:ea typeface="Calibri" pitchFamily="34" charset="-122"/>
-                <a:cs typeface="Calibri" pitchFamily="34" charset="-120"/>
-              </a:rPr>
-              <a:t>Azure AI Search</a:t>
-            </a:r>
-            <a:endParaRPr lang="en-US" sz="1200" dirty="0"/>
-          </a:p>
-        </p:txBody>
-      </p:sp>
-      <p:sp>
-        <p:nvSpPr>
-          <p:cNvPr id="24" name="Shape 22"/>
-          <p:cNvSpPr/>
-          <p:nvPr/>
-        </p:nvSpPr>
-        <p:spPr>
-          <a:xfrm>
-            <a:off x="365760" y="4297680"/>
-            <a:ext cx="8412480" cy="502920"/>
-          </a:xfrm>
-          <a:prstGeom prst="rect">
-            <a:avLst/>
-          </a:prstGeom>
-          <a:solidFill>
-            <a:srgbClr val="CADCFC"/>
-          </a:solidFill>
-          <a:ln/>
-        </p:spPr>
-      </p:sp>
-      <p:sp>
-        <p:nvSpPr>
-          <p:cNvPr id="25" name="Text 23"/>
-          <p:cNvSpPr/>
-          <p:nvPr/>
-        </p:nvSpPr>
-        <p:spPr>
-          <a:xfrm>
-            <a:off x="502920" y="4343400"/>
-            <a:ext cx="8138160" cy="411480"/>
+          <p:cNvPr id="8" name="Text 5"/>
+          <p:cNvSpPr/>
+          <p:nvPr/>
+        </p:nvSpPr>
+        <p:spPr>
+          <a:xfrm>
+            <a:off x="502920" y="4645152"/>
+            <a:ext cx="8138160" cy="402336"/>
           </a:xfrm>
           <a:prstGeom prst="rect">
             <a:avLst/>

--- a/decks/day1/module-2-foundry-portal.pptx
+++ b/decks/day1/module-2-foundry-portal.pptx
@@ -517,7 +517,11 @@
           <a:p>
             <a:r>
               <a:rPr lang="en-US" dirty="0"/>
-              <a:t>This module is mostly a live walkthrough. Slides are attendee reference. Have your portal open, share screen early.</a:t>
+              <a:t>• Mostly a live walkthrough — share screen early
+• Slides are attendee reference, not primary teaching
+• Have the Foundry portal open before this module starts
+• Have at least one existing project + model deployment ready to show
+• Time budget: 45 min — 25 in portal, 20 on slides for reference</a:t>
             </a:r>
             <a:endParaRPr lang="en-US" dirty="0"/>
           </a:p>
@@ -693,7 +697,11 @@
           <a:p>
             <a:r>
               <a:rPr lang="en-US" dirty="0"/>
-              <a:t>Bookmark this. We use it lightly today and go deep Day 2. Note: Toolbox = MCP under the hood; ties into Day 3 nicely.</a:t>
+              <a:t>• Bookmark: Toolbox = curated tool/connector catalog for agents
+• We use it lightly today (Part B of the lab) and go deep Day 2
+• Interesting fact for later: Toolbox is exposed via an MCP endpoint under the hood
+• That ties Toolbox and Day 3's MCP topic together neatly
+• Toolbox samples: web search, code interpreter, file search, SharePoint, Fabric, Graph</a:t>
             </a:r>
             <a:endParaRPr lang="en-US" dirty="0"/>
           </a:p>
@@ -781,7 +789,12 @@
           <a:p>
             <a:r>
               <a:rPr lang="en-US" dirty="0"/>
-              <a:t>This is Day 2's main course. Just plant the flag.</a:t>
+              <a:t>• Bookmark: Foundry IQ = enterprise knowledge and grounding layer
+• Day 2 is IQ's main course — don't teach it here
+• The pitch: unified retrieval across your enterprise data
+• Alternative to building a RAG pipeline per source
+• Grounded answers with citations, without writing retrieval code
+• Preview status — call out that some parts are moving fast</a:t>
             </a:r>
             <a:endParaRPr lang="en-US" dirty="0"/>
           </a:p>
@@ -869,7 +882,12 @@
           <a:p>
             <a:r>
               <a:rPr lang="en-US" dirty="0"/>
-              <a:t>Actions vs. Knowledge is the compass for Days 2–3. Actions maps to Day 3 (MCP). Knowledge maps to Day 2 (Foundry IQ, RAG).</a:t>
+              <a:t>• The two-axis mental model attendees should carry all week
+• Actions = how the agent DOES things — Toolbox, MCP, function tools
+• Knowledge = how the agent KNOWS things — Foundry IQ, RAG
+• Day 2 = Knowledge deep dive
+• Day 3 = Actions deep dive (MCP)
+• When something breaks, ask: is this an Actions problem or a Knowledge problem?</a:t>
             </a:r>
             <a:endParaRPr lang="en-US" dirty="0"/>
           </a:p>
@@ -957,7 +975,12 @@
           <a:p>
             <a:r>
               <a:rPr lang="en-US" dirty="0"/>
-              <a:t>Give attendees the diagnostic sequence: quota → RBAC → region. In that order.</a:t>
+              <a:t>• Give attendees the diagnostic sequence in a fixed order:
+•   1. Quota — is your region out of capacity?
+•   2. RBAC — do you have Foundry User at the resource scope?
+•   3. Region — does the model live in your region?
+• This ordering catches ~90% of Day 1 lab failures
+• Preview features move — trust running code over screenshots</a:t>
             </a:r>
             <a:endParaRPr lang="en-US" dirty="0"/>
           </a:p>
@@ -1045,7 +1068,12 @@
           <a:p>
             <a:r>
               <a:rPr lang="en-US" dirty="0"/>
-              <a:t>Screen share your portal. Move steadily. Ask attendees to raise a hand if they can't complete steps 1–4 during the demo.</a:t>
+              <a:t>• Screen share the portal — this is a live demo, not a slide read
+• Move steadily, don't linger
+• Ask attendees to do steps 1–4 alongside you
+• Ask them to raise a hand (or emoji in chat) if they hit a block
+• Fix blocks in real time — do NOT let them accumulate to async time
+• Steps 5–6 (Toolbox, IQ) are demo-only for today</a:t>
             </a:r>
             <a:endParaRPr lang="en-US" dirty="0"/>
           </a:p>
@@ -1221,7 +1249,10 @@
           <a:p>
             <a:r>
               <a:rPr lang="en-US" dirty="0"/>
-              <a:t>Set expectations: recognize, not master. The goal is to make Modules 4–6 make sense in context.</a:t>
+              <a:t>• Goal: recognize the surfaces, not master any of them
+• Attendees just need to feel oriented enough for Modules 4–6
+• Deep material lands Days 2–3 (IQ, Toolbox) and Module 6 today (agent types)
+• Attendees should walk out with: their project endpoint + one deployment name</a:t>
             </a:r>
             <a:endParaRPr lang="en-US" dirty="0"/>
           </a:p>
@@ -1309,7 +1340,16 @@
           <a:p>
             <a:r>
               <a:rPr lang="en-US" dirty="0"/>
-              <a:t>Diagram from Microsoft Learn (foundry/concepts/architecture). Walk the four layers explicitly: (1) Foundry resource is the governance boundary — deployments, security, connections. (2) Projects are development boundaries nested inside. (3) Project assets are files, agents, evaluations. (4) Connected resources (Storage, Key Vault, AI Search) are separate Azure resources with their own governance — you manage networking and access for them independently.</a:t>
+              <a:t>• Canonical diagram from Microsoft Learn — walk it in this order:
+• (1) Foundry resource = the outer box = governance boundary
+•   → contains: model deployments, security &amp; networking, connections
+• (2) Project = the inner dashed box = development boundary
+•   → contains: agents, files, evaluations (project assets)
+• (3) Connected resources on the right (Storage, Key Vault, AI Search)
+•   → separate Azure resources, separate governance boundaries
+•   → Foundry references them via connections, doesn't own them
+• Emphasize: 'connected resources have their own networking and access policies'
+• Common failure: Foundry connection works, but the target resource's firewall blocks — check the target resource's own policies</a:t>
             </a:r>
             <a:endParaRPr lang="en-US" dirty="0"/>
           </a:p>
@@ -1397,7 +1437,12 @@
           <a:p>
             <a:r>
               <a:rPr lang="en-US" dirty="0"/>
-              <a:t>Foundry User role was previously called Azure AI User — attendees may see either name during the rollout. RBAC scopes at both resource and project level; 401/403 in the lab almost always means missing Foundry User at the resource scope.</a:t>
+              <a:t>• Starter RBAC for the lab: Foundry User at the Foundry resource scope
+• Foundry User was previously named Azure AI User — attendees may see either during rollout
+• RBAC scopes at BOTH resource level and project level
+• Day 1 lab access is covered by the resource-scope assignment
+• 401 / 403 in the lab almost always = missing Foundry User at resource scope
+• If facilitator hears '401' in chat: 'check RBAC first, then endpoint, then deployment name'</a:t>
             </a:r>
             <a:endParaRPr lang="en-US" dirty="0"/>
           </a:p>
@@ -1485,7 +1530,12 @@
           <a:p>
             <a:r>
               <a:rPr lang="en-US" dirty="0"/>
-              <a:t>Show them where to grab this from the portal. Overview page → 'Endpoints and keys' or similar (verify current wording live).</a:t>
+              <a:t>• Show attendees where the project endpoint lives in the portal
+• Path (verify live — portal wording moves): Overview → Endpoints and keys
+• Have them copy it now — they'll need it in every lab
+• Format: https://&lt;project&gt;.services.ai.azure.com
+• Never commit this to source control — it belongs in .env
+• The credential (AzureCliCredential) authenticates against this endpoint</a:t>
             </a:r>
             <a:endParaRPr lang="en-US" dirty="0"/>
           </a:p>
@@ -1573,7 +1623,12 @@
           <a:p>
             <a:r>
               <a:rPr lang="en-US" dirty="0"/>
-              <a:t>Common gotcha — attendees pick a model, hit a region wall. Encourage confirming region + quota before deploying.</a:t>
+              <a:t>• Common gotcha: attendee picks a model, hits a region availability wall
+• Not every model is available in every region
+• Not every model has capacity in every region even when available
+• Sequence: pick region → confirm model availability → confirm quota → deploy
+• If attendee can't deploy: check region and quota first, not model choice
+• Ignite 2026 will likely shift which models are where — check current state before workshop</a:t>
             </a:r>
             <a:endParaRPr lang="en-US" dirty="0"/>
           </a:p>
@@ -1661,7 +1716,13 @@
           <a:p>
             <a:r>
               <a:rPr lang="en-US" dirty="0"/>
-              <a:t>Deployment name != model name. Common source of confusion in the lab. Emphasize.</a:t>
+              <a:t>• The #1 confusion in the Day 1 lab: deployment name ≠ model name
+• Model name: 'gpt-4o'
+• Deployment name: whatever *you* named the deployment in the portal
+• In MAF, you pass the DEPLOYMENT name as model= — not the model name
+• In the .env file, FOUNDRY_MODEL = the deployment name
+• Have attendees copy the exact deployment name from Portal → Deployments now
+• Rule of thumb: one deployment per (model, role) pair — don't share prod and dev</a:t>
             </a:r>
             <a:endParaRPr lang="en-US" dirty="0"/>
           </a:p>
@@ -1749,7 +1810,12 @@
           <a:p>
             <a:r>
               <a:rPr lang="en-US" dirty="0"/>
-              <a:t>This is a debugging tip masquerading as a portal feature. Reinforce: iterate in the playground first.</a:t>
+              <a:t>• This slide is really a debugging tip
+• Reinforce: iterate in the playground BEFORE writing agent code
+• If a prompt doesn't work in the playground, it won't work in MAF
+• Cheap iteration loop: playground → prompt fix → playground → deploy
+• Attendees who skip this waste a lot of time debugging things that were prompt issues
+• Three playgrounds worth knowing: chat, agent, evaluation</a:t>
             </a:r>
             <a:endParaRPr lang="en-US" dirty="0"/>
           </a:p>
@@ -1837,7 +1903,12 @@
           <a:p>
             <a:r>
               <a:rPr lang="en-US" dirty="0"/>
-              <a:t>Reinforce the architecture slide: connections are Foundry's way of pointing at connected resources, which live under their own governance boundaries. If a Foundry-side connection fails, check the target resource's own network/access policies, not just Foundry's.</a:t>
+              <a:t>• Reinforce the architecture diagram: connections = Foundry pointing at connected resources
+• Connected resources have their OWN governance boundaries
+• When a connection fails, check the target resource's policies first
+• Auth: managed identity or service principal — NO long-lived keys in production
+• Configured on the Foundry resource; projects inherit them
+• We'll wire IQ knowledge-source connections on Day 2</a:t>
             </a:r>
             <a:endParaRPr lang="en-US" dirty="0"/>
           </a:p>

--- a/decks/day1/module-2-foundry-portal.pptx
+++ b/decks/day1/module-2-foundry-portal.pptx
@@ -21,9 +21,10 @@
     <p:sldId id="269" r:id="rId15"/>
     <p:sldId id="270" r:id="rId16"/>
     <p:sldId id="271" r:id="rId17"/>
+    <p:sldId id="272" r:id="rId18"/>
   </p:sldIdLst>
   <p:notesMasterIdLst>
-    <p:notesMasterId r:id="rId18"/>
+    <p:notesMasterId r:id="rId19"/>
   </p:notesMasterIdLst>
   <p:sldSz cx="9144000" cy="5143500"/>
   <p:notesSz cx="5143500" cy="9144000"/>
@@ -882,12 +883,12 @@
           <a:p>
             <a:r>
               <a:rPr lang="en-US" dirty="0"/>
-              <a:t>• The two-axis mental model attendees should carry all week
-• Actions = how the agent DOES things — Toolbox, MCP, function tools
-• Knowledge = how the agent KNOWS things — Foundry IQ, RAG
-• Day 2 = Knowledge deep dive
-• Day 3 = Actions deep dive (MCP)
-• When something breaks, ask: is this an Actions problem or a Knowledge problem?</a:t>
+              <a:t>• Awareness slide — Day 5 goes deep
+• Point out: attendees don't have to configure anything for Prompt or Hosted agents; tracing is on by default
+• For Path C (your own code), you enable OTel yourself — Day 5 covers this
+• A trace makes the abstract concrete: attendees literally SEE their model + tool calls
+• Best debugging tool most attendees haven't tried yet
+• Preview only — don't over-teach; they'll click into a trace in Part B</a:t>
             </a:r>
             <a:endParaRPr lang="en-US" dirty="0"/>
           </a:p>
@@ -975,12 +976,12 @@
           <a:p>
             <a:r>
               <a:rPr lang="en-US" dirty="0"/>
-              <a:t>• Give attendees the diagnostic sequence in a fixed order:
-•   1. Quota — is your region out of capacity?
-•   2. RBAC — do you have Foundry User at the resource scope?
-•   3. Region — does the model live in your region?
-• This ordering catches ~90% of Day 1 lab failures
-• Preview features move — trust running code over screenshots</a:t>
+              <a:t>• The two-axis mental model attendees should carry all week
+• Actions = how the agent DOES things — Toolbox, MCP, function tools
+• Knowledge = how the agent KNOWS things — Foundry IQ, RAG
+• Day 2 = Knowledge deep dive
+• Day 3 = Actions deep dive (MCP)
+• When something breaks, ask: is this an Actions problem or a Knowledge problem?</a:t>
             </a:r>
             <a:endParaRPr lang="en-US" dirty="0"/>
           </a:p>
@@ -1068,12 +1069,12 @@
           <a:p>
             <a:r>
               <a:rPr lang="en-US" dirty="0"/>
-              <a:t>• Screen share the portal — this is a live demo, not a slide read
-• Move steadily, don't linger
-• Ask attendees to do steps 1–4 alongside you
-• Ask them to raise a hand (or emoji in chat) if they hit a block
-• Fix blocks in real time — do NOT let them accumulate to async time
-• Steps 5–6 (Toolbox, IQ) are demo-only for today</a:t>
+              <a:t>• Give attendees the diagnostic sequence in a fixed order:
+•   1. Quota — is your region out of capacity?
+•   2. RBAC — do you have Foundry User at the resource scope?
+•   3. Region — does the model live in your region?
+• This ordering catches ~90% of Day 1 lab failures
+• Preview features move — trust running code over screenshots</a:t>
             </a:r>
             <a:endParaRPr lang="en-US" dirty="0"/>
           </a:p>
@@ -1161,7 +1162,12 @@
           <a:p>
             <a:r>
               <a:rPr lang="en-US" dirty="0"/>
-              <a:t>Short recap. Confirm everyone has their project endpoint copied.</a:t>
+              <a:t>• Screen share the portal — this is a live demo, not a slide read
+• Move steadily, don't linger
+• Ask attendees to do steps 1–4 alongside you
+• Ask them to raise a hand (or emoji in chat) if they hit a block
+• Fix blocks in real time — do NOT let them accumulate to async time
+• Steps 5–6 (Toolbox, IQ) are demo-only for today</a:t>
             </a:r>
             <a:endParaRPr lang="en-US" dirty="0"/>
           </a:p>
@@ -1185,6 +1191,94 @@
             <a:fld id="{F7021451-1387-4CA6-816F-3879F97B5CBC}" type="slidenum">
               <a:rPr lang="en-US"/>
               <a:t>16</a:t>
+            </a:fld>
+            <a:endParaRPr lang="en-US"/>
+          </a:p>
+        </p:txBody>
+      </p:sp>
+    </p:spTree>
+    <p:extLst>
+      <p:ext uri="{BB962C8B-B14F-4D97-AF65-F5344CB8AC3E}">
+        <p14:creationId xmlns:p14="http://schemas.microsoft.com/office/powerpoint/2010/main" val="1024086991"/>
+      </p:ext>
+    </p:extLst>
+  </p:cSld>
+  <p:clrMapOvr>
+    <a:masterClrMapping/>
+  </p:clrMapOvr>
+</p:notes>
+</file>
+
+<file path=ppt/notesSlides/notesSlide17.xml><?xml version="1.0" encoding="utf-8"?>
+<p:notes xmlns:a="http://schemas.openxmlformats.org/drawingml/2006/main" xmlns:r="http://schemas.openxmlformats.org/officeDocument/2006/relationships" xmlns:p="http://schemas.openxmlformats.org/presentationml/2006/main">
+  <p:cSld>
+    <p:spTree>
+      <p:nvGrpSpPr>
+        <p:cNvPr id="1" name=""/>
+        <p:cNvGrpSpPr/>
+        <p:nvPr/>
+      </p:nvGrpSpPr>
+      <p:grpSpPr>
+        <a:xfrm>
+          <a:off x="0" y="0"/>
+          <a:ext cx="0" cy="0"/>
+          <a:chOff x="0" y="0"/>
+          <a:chExt cx="0" cy="0"/>
+        </a:xfrm>
+      </p:grpSpPr>
+      <p:sp>
+        <p:nvSpPr>
+          <p:cNvPr id="2" name="Slide Image Placeholder 1"/>
+          <p:cNvSpPr>
+            <a:spLocks noGrp="1" noRot="1" noChangeAspect="1"/>
+          </p:cNvSpPr>
+          <p:nvPr>
+            <p:ph type="sldImg"/>
+          </p:nvPr>
+        </p:nvSpPr>
+        <p:spPr/>
+      </p:sp>
+      <p:sp>
+        <p:nvSpPr>
+          <p:cNvPr id="3" name="Notes Placeholder 2"/>
+          <p:cNvSpPr>
+            <a:spLocks noGrp="1"/>
+          </p:cNvSpPr>
+          <p:nvPr>
+            <p:ph type="body" idx="1"/>
+          </p:nvPr>
+        </p:nvSpPr>
+        <p:spPr/>
+        <p:txBody>
+          <a:bodyPr/>
+          <a:lstStyle/>
+          <a:p>
+            <a:r>
+              <a:rPr lang="en-US" dirty="0"/>
+              <a:t>Short recap. Confirm everyone has their project endpoint copied.</a:t>
+            </a:r>
+            <a:endParaRPr lang="en-US" dirty="0"/>
+          </a:p>
+        </p:txBody>
+      </p:sp>
+      <p:sp>
+        <p:nvSpPr>
+          <p:cNvPr id="4" name="Slide Number Placeholder 3"/>
+          <p:cNvSpPr>
+            <a:spLocks noGrp="1"/>
+          </p:cNvSpPr>
+          <p:nvPr>
+            <p:ph type="sldNum" sz="quarter" idx="10"/>
+          </p:nvPr>
+        </p:nvSpPr>
+        <p:spPr/>
+        <p:txBody>
+          <a:bodyPr/>
+          <a:lstStyle/>
+          <a:p>
+            <a:fld id="{F7021451-1387-4CA6-816F-3879F97B5CBC}" type="slidenum">
+              <a:rPr lang="en-US"/>
+              <a:t>17</a:t>
             </a:fld>
             <a:endParaRPr lang="en-US"/>
           </a:p>
@@ -3143,6 +3237,263 @@
                 <a:ea typeface="Calibri" pitchFamily="34" charset="-122"/>
                 <a:cs typeface="Calibri" pitchFamily="34" charset="-120"/>
               </a:rPr>
+              <a:t>Observability — preview</a:t>
+            </a:r>
+            <a:endParaRPr lang="en-US" sz="2800" dirty="0"/>
+          </a:p>
+        </p:txBody>
+      </p:sp>
+      <p:sp>
+        <p:nvSpPr>
+          <p:cNvPr id="5" name="Text 3"/>
+          <p:cNvSpPr/>
+          <p:nvPr/>
+        </p:nvSpPr>
+        <p:spPr>
+          <a:xfrm>
+            <a:off x="365760" y="1097280"/>
+            <a:ext cx="8412480" cy="3749040"/>
+          </a:xfrm>
+          <a:prstGeom prst="rect">
+            <a:avLst/>
+          </a:prstGeom>
+          <a:noFill/>
+          <a:ln/>
+        </p:spPr>
+        <p:txBody>
+          <a:bodyPr wrap="square" rtlCol="0" anchor="ctr"/>
+          <a:lstStyle/>
+          <a:p>
+            <a:pPr marL="342900" indent="-342900">
+              <a:spcAft>
+                <a:spcPts val="600"/>
+              </a:spcAft>
+              <a:buSzPct val="100000"/>
+              <a:buChar char="•"/>
+            </a:pPr>
+            <a:r>
+              <a:rPr lang="en-US" sz="1500" dirty="0">
+                <a:solidFill>
+                  <a:srgbClr val="212121"/>
+                </a:solidFill>
+                <a:latin typeface="Calibri" pitchFamily="34" charset="0"/>
+                <a:ea typeface="Calibri" pitchFamily="34" charset="-122"/>
+                <a:cs typeface="Calibri" pitchFamily="34" charset="-120"/>
+              </a:rPr>
+              <a:t>Every agent run in Foundry emits a trace — no code to enable, built-in for Prompt and Hosted agents</a:t>
+            </a:r>
+            <a:endParaRPr lang="en-US" sz="1500" dirty="0"/>
+          </a:p>
+          <a:p>
+            <a:pPr marL="342900" indent="-342900">
+              <a:spcAft>
+                <a:spcPts val="600"/>
+              </a:spcAft>
+              <a:buSzPct val="100000"/>
+              <a:buChar char="•"/>
+            </a:pPr>
+            <a:r>
+              <a:rPr lang="en-US" sz="1500" dirty="0">
+                <a:solidFill>
+                  <a:srgbClr val="212121"/>
+                </a:solidFill>
+                <a:latin typeface="Calibri" pitchFamily="34" charset="0"/>
+                <a:ea typeface="Calibri" pitchFamily="34" charset="-122"/>
+                <a:cs typeface="Calibri" pitchFamily="34" charset="-120"/>
+              </a:rPr>
+              <a:t>A trace records: model calls, tool invocations, decisions, latency, tokens, and errors</a:t>
+            </a:r>
+            <a:endParaRPr lang="en-US" sz="1500" dirty="0"/>
+          </a:p>
+          <a:p>
+            <a:pPr marL="342900" indent="-342900">
+              <a:spcAft>
+                <a:spcPts val="600"/>
+              </a:spcAft>
+              <a:buSzPct val="100000"/>
+              <a:buChar char="•"/>
+            </a:pPr>
+            <a:r>
+              <a:rPr lang="en-US" sz="1500" dirty="0">
+                <a:solidFill>
+                  <a:srgbClr val="212121"/>
+                </a:solidFill>
+                <a:latin typeface="Calibri" pitchFamily="34" charset="0"/>
+                <a:ea typeface="Calibri" pitchFamily="34" charset="-122"/>
+                <a:cs typeface="Calibri" pitchFamily="34" charset="-120"/>
+              </a:rPr>
+              <a:t>View traces in the Foundry portal (Tracing / Observability), or ship them to Application Insights</a:t>
+            </a:r>
+            <a:endParaRPr lang="en-US" sz="1500" dirty="0"/>
+          </a:p>
+          <a:p>
+            <a:pPr marL="342900" indent="-342900">
+              <a:spcAft>
+                <a:spcPts val="600"/>
+              </a:spcAft>
+              <a:buSzPct val="100000"/>
+              <a:buChar char="•"/>
+            </a:pPr>
+            <a:r>
+              <a:rPr lang="en-US" sz="1500" dirty="0">
+                <a:solidFill>
+                  <a:srgbClr val="212121"/>
+                </a:solidFill>
+                <a:latin typeface="Calibri" pitchFamily="34" charset="0"/>
+                <a:ea typeface="Calibri" pitchFamily="34" charset="-122"/>
+                <a:cs typeface="Calibri" pitchFamily="34" charset="-120"/>
+              </a:rPr>
+              <a:t>OpenTelemetry semantics under the hood — same spans you'd expect from any OTel-instrumented service</a:t>
+            </a:r>
+            <a:endParaRPr lang="en-US" sz="1500" dirty="0"/>
+          </a:p>
+          <a:p>
+            <a:pPr marL="342900" indent="-342900">
+              <a:spcAft>
+                <a:spcPts val="600"/>
+              </a:spcAft>
+              <a:buSzPct val="100000"/>
+              <a:buChar char="•"/>
+            </a:pPr>
+            <a:r>
+              <a:rPr lang="en-US" sz="1500" dirty="0">
+                <a:solidFill>
+                  <a:srgbClr val="212121"/>
+                </a:solidFill>
+                <a:latin typeface="Calibri" pitchFamily="34" charset="0"/>
+                <a:ea typeface="Calibri" pitchFamily="34" charset="-122"/>
+                <a:cs typeface="Calibri" pitchFamily="34" charset="-120"/>
+              </a:rPr>
+              <a:t>You'll open a real trace in Part B of today's lab; Day 5 goes deep on production observability</a:t>
+            </a:r>
+            <a:endParaRPr lang="en-US" sz="1500" dirty="0"/>
+          </a:p>
+        </p:txBody>
+      </p:sp>
+    </p:spTree>
+  </p:cSld>
+  <p:clrMapOvr>
+    <a:masterClrMapping/>
+  </p:clrMapOvr>
+</p:sld>
+</file>
+
+<file path=ppt/slides/slide14.xml><?xml version="1.0" encoding="utf-8"?>
+<p:sld xmlns:a="http://schemas.openxmlformats.org/drawingml/2006/main" xmlns:r="http://schemas.openxmlformats.org/officeDocument/2006/relationships" xmlns:p="http://schemas.openxmlformats.org/presentationml/2006/main">
+  <p:cSld name="Slide 14">
+    <p:bg>
+      <p:bgPr>
+        <a:solidFill>
+          <a:srgbClr val="FFFFFF"/>
+        </a:solidFill>
+      </p:bgPr>
+    </p:bg>
+    <p:spTree>
+      <p:nvGrpSpPr>
+        <p:cNvPr id="1" name=""/>
+        <p:cNvGrpSpPr/>
+        <p:nvPr/>
+      </p:nvGrpSpPr>
+      <p:grpSpPr>
+        <a:xfrm>
+          <a:off x="0" y="0"/>
+          <a:ext cx="0" cy="0"/>
+          <a:chOff x="0" y="0"/>
+          <a:chExt cx="0" cy="0"/>
+        </a:xfrm>
+      </p:grpSpPr>
+      <p:sp>
+        <p:nvSpPr>
+          <p:cNvPr id="2" name="Shape 0"/>
+          <p:cNvSpPr/>
+          <p:nvPr/>
+        </p:nvSpPr>
+        <p:spPr>
+          <a:xfrm>
+            <a:off x="0" y="0"/>
+            <a:ext cx="54864" cy="5143500"/>
+          </a:xfrm>
+          <a:prstGeom prst="rect">
+            <a:avLst/>
+          </a:prstGeom>
+          <a:solidFill>
+            <a:srgbClr val="1E2761"/>
+          </a:solidFill>
+          <a:ln/>
+        </p:spPr>
+      </p:sp>
+      <p:sp>
+        <p:nvSpPr>
+          <p:cNvPr id="3" name="Text 1"/>
+          <p:cNvSpPr/>
+          <p:nvPr/>
+        </p:nvSpPr>
+        <p:spPr>
+          <a:xfrm>
+            <a:off x="5669280" y="274320"/>
+            <a:ext cx="3291840" cy="274320"/>
+          </a:xfrm>
+          <a:prstGeom prst="rect">
+            <a:avLst/>
+          </a:prstGeom>
+          <a:noFill/>
+          <a:ln/>
+        </p:spPr>
+        <p:txBody>
+          <a:bodyPr wrap="square" lIns="0" tIns="0" rIns="0" bIns="0" rtlCol="0" anchor="ctr"/>
+          <a:lstStyle/>
+          <a:p>
+            <a:pPr algn="r" indent="0" marL="0">
+              <a:buNone/>
+            </a:pPr>
+            <a:r>
+              <a:rPr lang="en-US" sz="1000" dirty="0">
+                <a:solidFill>
+                  <a:srgbClr val="6B7280"/>
+                </a:solidFill>
+                <a:latin typeface="Calibri" pitchFamily="34" charset="0"/>
+                <a:ea typeface="Calibri" pitchFamily="34" charset="-122"/>
+                <a:cs typeface="Calibri" pitchFamily="34" charset="-120"/>
+              </a:rPr>
+              <a:t>Day 1 · Module 2</a:t>
+            </a:r>
+            <a:endParaRPr lang="en-US" sz="1000" dirty="0"/>
+          </a:p>
+        </p:txBody>
+      </p:sp>
+      <p:sp>
+        <p:nvSpPr>
+          <p:cNvPr id="4" name="Text 2"/>
+          <p:cNvSpPr/>
+          <p:nvPr/>
+        </p:nvSpPr>
+        <p:spPr>
+          <a:xfrm>
+            <a:off x="365760" y="320040"/>
+            <a:ext cx="6217920" cy="640080"/>
+          </a:xfrm>
+          <a:prstGeom prst="rect">
+            <a:avLst/>
+          </a:prstGeom>
+          <a:noFill/>
+          <a:ln/>
+        </p:spPr>
+        <p:txBody>
+          <a:bodyPr wrap="square" lIns="0" tIns="0" rIns="0" bIns="0" rtlCol="0" anchor="ctr"/>
+          <a:lstStyle/>
+          <a:p>
+            <a:pPr indent="0" marL="0">
+              <a:buNone/>
+            </a:pPr>
+            <a:r>
+              <a:rPr lang="en-US" sz="2800" b="1" dirty="0">
+                <a:solidFill>
+                  <a:srgbClr val="1E2761"/>
+                </a:solidFill>
+                <a:latin typeface="Calibri" pitchFamily="34" charset="0"/>
+                <a:ea typeface="Calibri" pitchFamily="34" charset="-122"/>
+                <a:cs typeface="Calibri" pitchFamily="34" charset="-120"/>
+              </a:rPr>
               <a:t>Two axes to remember</a:t>
             </a:r>
             <a:endParaRPr lang="en-US" sz="2800" dirty="0"/>
@@ -3151,7 +3502,7 @@
       </p:sp>
       <p:graphicFrame>
         <p:nvGraphicFramePr>
-          <p:cNvPr id="14" name="Table 0"/>
+          <p:cNvPr id="15" name="Table 0"/>
           <p:cNvGraphicFramePr>
             <a:graphicFrameLocks noGrp="1"/>
           </p:cNvGraphicFramePr>
@@ -3806,242 +4157,6 @@
 </p:sld>
 </file>
 
-<file path=ppt/slides/slide14.xml><?xml version="1.0" encoding="utf-8"?>
-<p:sld xmlns:a="http://schemas.openxmlformats.org/drawingml/2006/main" xmlns:r="http://schemas.openxmlformats.org/officeDocument/2006/relationships" xmlns:p="http://schemas.openxmlformats.org/presentationml/2006/main">
-  <p:cSld name="Slide 14">
-    <p:bg>
-      <p:bgPr>
-        <a:solidFill>
-          <a:srgbClr val="FFFFFF"/>
-        </a:solidFill>
-      </p:bgPr>
-    </p:bg>
-    <p:spTree>
-      <p:nvGrpSpPr>
-        <p:cNvPr id="1" name=""/>
-        <p:cNvGrpSpPr/>
-        <p:nvPr/>
-      </p:nvGrpSpPr>
-      <p:grpSpPr>
-        <a:xfrm>
-          <a:off x="0" y="0"/>
-          <a:ext cx="0" cy="0"/>
-          <a:chOff x="0" y="0"/>
-          <a:chExt cx="0" cy="0"/>
-        </a:xfrm>
-      </p:grpSpPr>
-      <p:sp>
-        <p:nvSpPr>
-          <p:cNvPr id="2" name="Shape 0"/>
-          <p:cNvSpPr/>
-          <p:nvPr/>
-        </p:nvSpPr>
-        <p:spPr>
-          <a:xfrm>
-            <a:off x="0" y="0"/>
-            <a:ext cx="54864" cy="5143500"/>
-          </a:xfrm>
-          <a:prstGeom prst="rect">
-            <a:avLst/>
-          </a:prstGeom>
-          <a:solidFill>
-            <a:srgbClr val="1E2761"/>
-          </a:solidFill>
-          <a:ln/>
-        </p:spPr>
-      </p:sp>
-      <p:sp>
-        <p:nvSpPr>
-          <p:cNvPr id="3" name="Text 1"/>
-          <p:cNvSpPr/>
-          <p:nvPr/>
-        </p:nvSpPr>
-        <p:spPr>
-          <a:xfrm>
-            <a:off x="5669280" y="274320"/>
-            <a:ext cx="3291840" cy="274320"/>
-          </a:xfrm>
-          <a:prstGeom prst="rect">
-            <a:avLst/>
-          </a:prstGeom>
-          <a:noFill/>
-          <a:ln/>
-        </p:spPr>
-        <p:txBody>
-          <a:bodyPr wrap="square" lIns="0" tIns="0" rIns="0" bIns="0" rtlCol="0" anchor="ctr"/>
-          <a:lstStyle/>
-          <a:p>
-            <a:pPr algn="r" indent="0" marL="0">
-              <a:buNone/>
-            </a:pPr>
-            <a:r>
-              <a:rPr lang="en-US" sz="1000" dirty="0">
-                <a:solidFill>
-                  <a:srgbClr val="6B7280"/>
-                </a:solidFill>
-                <a:latin typeface="Calibri" pitchFamily="34" charset="0"/>
-                <a:ea typeface="Calibri" pitchFamily="34" charset="-122"/>
-                <a:cs typeface="Calibri" pitchFamily="34" charset="-120"/>
-              </a:rPr>
-              <a:t>Day 1 · Module 2</a:t>
-            </a:r>
-            <a:endParaRPr lang="en-US" sz="1000" dirty="0"/>
-          </a:p>
-        </p:txBody>
-      </p:sp>
-      <p:sp>
-        <p:nvSpPr>
-          <p:cNvPr id="4" name="Text 2"/>
-          <p:cNvSpPr/>
-          <p:nvPr/>
-        </p:nvSpPr>
-        <p:spPr>
-          <a:xfrm>
-            <a:off x="365760" y="320040"/>
-            <a:ext cx="6217920" cy="640080"/>
-          </a:xfrm>
-          <a:prstGeom prst="rect">
-            <a:avLst/>
-          </a:prstGeom>
-          <a:noFill/>
-          <a:ln/>
-        </p:spPr>
-        <p:txBody>
-          <a:bodyPr wrap="square" lIns="0" tIns="0" rIns="0" bIns="0" rtlCol="0" anchor="ctr"/>
-          <a:lstStyle/>
-          <a:p>
-            <a:pPr indent="0" marL="0">
-              <a:buNone/>
-            </a:pPr>
-            <a:r>
-              <a:rPr lang="en-US" sz="2800" b="1" dirty="0">
-                <a:solidFill>
-                  <a:srgbClr val="1E2761"/>
-                </a:solidFill>
-                <a:latin typeface="Calibri" pitchFamily="34" charset="0"/>
-                <a:ea typeface="Calibri" pitchFamily="34" charset="-122"/>
-                <a:cs typeface="Calibri" pitchFamily="34" charset="-120"/>
-              </a:rPr>
-              <a:t>Common portal gotchas</a:t>
-            </a:r>
-            <a:endParaRPr lang="en-US" sz="2800" dirty="0"/>
-          </a:p>
-        </p:txBody>
-      </p:sp>
-      <p:sp>
-        <p:nvSpPr>
-          <p:cNvPr id="5" name="Text 3"/>
-          <p:cNvSpPr/>
-          <p:nvPr/>
-        </p:nvSpPr>
-        <p:spPr>
-          <a:xfrm>
-            <a:off x="365760" y="1097280"/>
-            <a:ext cx="8412480" cy="3749040"/>
-          </a:xfrm>
-          <a:prstGeom prst="rect">
-            <a:avLst/>
-          </a:prstGeom>
-          <a:noFill/>
-          <a:ln/>
-        </p:spPr>
-        <p:txBody>
-          <a:bodyPr wrap="square" rtlCol="0" anchor="ctr"/>
-          <a:lstStyle/>
-          <a:p>
-            <a:pPr marL="342900" indent="-342900">
-              <a:spcAft>
-                <a:spcPts val="600"/>
-              </a:spcAft>
-              <a:buSzPct val="100000"/>
-              <a:buChar char="•"/>
-            </a:pPr>
-            <a:r>
-              <a:rPr lang="en-US" sz="1500" dirty="0">
-                <a:solidFill>
-                  <a:srgbClr val="212121"/>
-                </a:solidFill>
-                <a:latin typeface="Calibri" pitchFamily="34" charset="0"/>
-                <a:ea typeface="Calibri" pitchFamily="34" charset="-122"/>
-                <a:cs typeface="Calibri" pitchFamily="34" charset="-120"/>
-              </a:rPr>
-              <a:t>Quota errors on deployment — request a bump in the region before Day 1</a:t>
-            </a:r>
-            <a:endParaRPr lang="en-US" sz="1500" dirty="0"/>
-          </a:p>
-          <a:p>
-            <a:pPr marL="342900" indent="-342900">
-              <a:spcAft>
-                <a:spcPts val="600"/>
-              </a:spcAft>
-              <a:buSzPct val="100000"/>
-              <a:buChar char="•"/>
-            </a:pPr>
-            <a:r>
-              <a:rPr lang="en-US" sz="1500" dirty="0">
-                <a:solidFill>
-                  <a:srgbClr val="212121"/>
-                </a:solidFill>
-                <a:latin typeface="Calibri" pitchFamily="34" charset="0"/>
-                <a:ea typeface="Calibri" pitchFamily="34" charset="-122"/>
-                <a:cs typeface="Calibri" pitchFamily="34" charset="-120"/>
-              </a:rPr>
-              <a:t>Missing role assignments — attendees need at least Foundry User (previously Azure AI User) at the Foundry resource scope; 401/403 usually means this</a:t>
-            </a:r>
-            <a:endParaRPr lang="en-US" sz="1500" dirty="0"/>
-          </a:p>
-          <a:p>
-            <a:pPr marL="342900" indent="-342900">
-              <a:spcAft>
-                <a:spcPts val="600"/>
-              </a:spcAft>
-              <a:buSzPct val="100000"/>
-              <a:buChar char="•"/>
-            </a:pPr>
-            <a:r>
-              <a:rPr lang="en-US" sz="1500" dirty="0">
-                <a:solidFill>
-                  <a:srgbClr val="212121"/>
-                </a:solidFill>
-                <a:latin typeface="Calibri" pitchFamily="34" charset="0"/>
-                <a:ea typeface="Calibri" pitchFamily="34" charset="-122"/>
-                <a:cs typeface="Calibri" pitchFamily="34" charset="-120"/>
-              </a:rPr>
-              <a:t>Region mismatch — model deployment region must be reachable by IQ / AI Search</a:t>
-            </a:r>
-            <a:endParaRPr lang="en-US" sz="1500" dirty="0"/>
-          </a:p>
-          <a:p>
-            <a:pPr marL="342900" indent="-342900">
-              <a:spcAft>
-                <a:spcPts val="600"/>
-              </a:spcAft>
-              <a:buSzPct val="100000"/>
-              <a:buChar char="•"/>
-            </a:pPr>
-            <a:r>
-              <a:rPr lang="en-US" sz="1500" dirty="0">
-                <a:solidFill>
-                  <a:srgbClr val="212121"/>
-                </a:solidFill>
-                <a:latin typeface="Calibri" pitchFamily="34" charset="0"/>
-                <a:ea typeface="Calibri" pitchFamily="34" charset="-122"/>
-                <a:cs typeface="Calibri" pitchFamily="34" charset="-120"/>
-              </a:rPr>
-              <a:t>Preview features move — Toolbox and parts of IQ are evolving; trust running code over screenshots</a:t>
-            </a:r>
-            <a:endParaRPr lang="en-US" sz="1500" dirty="0"/>
-          </a:p>
-        </p:txBody>
-      </p:sp>
-    </p:spTree>
-  </p:cSld>
-  <p:clrMapOvr>
-    <a:masterClrMapping/>
-  </p:clrMapOvr>
-</p:sld>
-</file>
-
 <file path=ppt/slides/slide15.xml><?xml version="1.0" encoding="utf-8"?>
 <p:sld xmlns:a="http://schemas.openxmlformats.org/drawingml/2006/main" xmlns:r="http://schemas.openxmlformats.org/officeDocument/2006/relationships" xmlns:p="http://schemas.openxmlformats.org/presentationml/2006/main">
   <p:cSld name="Slide 15">
@@ -4158,7 +4273,7 @@
                 <a:ea typeface="Calibri" pitchFamily="34" charset="-122"/>
                 <a:cs typeface="Calibri" pitchFamily="34" charset="-120"/>
               </a:rPr>
-              <a:t>Live walkthrough (in the portal now)</a:t>
+              <a:t>Common portal gotchas</a:t>
             </a:r>
             <a:endParaRPr lang="en-US" sz="2800" dirty="0"/>
           </a:p>
@@ -4201,7 +4316,7 @@
                 <a:ea typeface="Calibri" pitchFamily="34" charset="-122"/>
                 <a:cs typeface="Calibri" pitchFamily="34" charset="-120"/>
               </a:rPr>
-              <a:t>Sign into ai.azure.com and open a project</a:t>
+              <a:t>Quota errors on deployment — request a bump in the region before Day 1</a:t>
             </a:r>
             <a:endParaRPr lang="en-US" sz="1500" dirty="0"/>
           </a:p>
@@ -4222,7 +4337,7 @@
                 <a:ea typeface="Calibri" pitchFamily="34" charset="-122"/>
                 <a:cs typeface="Calibri" pitchFamily="34" charset="-120"/>
               </a:rPr>
-              <a:t>Deploy a model</a:t>
+              <a:t>Missing role assignments — attendees need at least Foundry User (previously Azure AI User) at the Foundry resource scope; 401/403 usually means this</a:t>
             </a:r>
             <a:endParaRPr lang="en-US" sz="1500" dirty="0"/>
           </a:p>
@@ -4243,7 +4358,7 @@
                 <a:ea typeface="Calibri" pitchFamily="34" charset="-122"/>
                 <a:cs typeface="Calibri" pitchFamily="34" charset="-120"/>
               </a:rPr>
-              <a:t>Copy the project endpoint</a:t>
+              <a:t>Region mismatch — model deployment region must be reachable by IQ / AI Search</a:t>
             </a:r>
             <a:endParaRPr lang="en-US" sz="1500" dirty="0"/>
           </a:p>
@@ -4264,90 +4379,9 @@
                 <a:ea typeface="Calibri" pitchFamily="34" charset="-122"/>
                 <a:cs typeface="Calibri" pitchFamily="34" charset="-120"/>
               </a:rPr>
-              <a:t>Open the chat playground; send a test prompt</a:t>
+              <a:t>Preview features move — Toolbox and parts of IQ are evolving; trust running code over screenshots</a:t>
             </a:r>
             <a:endParaRPr lang="en-US" sz="1500" dirty="0"/>
-          </a:p>
-          <a:p>
-            <a:pPr marL="342900" indent="-342900">
-              <a:spcAft>
-                <a:spcPts val="600"/>
-              </a:spcAft>
-              <a:buSzPct val="100000"/>
-              <a:buChar char="•"/>
-            </a:pPr>
-            <a:r>
-              <a:rPr lang="en-US" sz="1500" dirty="0">
-                <a:solidFill>
-                  <a:srgbClr val="212121"/>
-                </a:solidFill>
-                <a:latin typeface="Calibri" pitchFamily="34" charset="0"/>
-                <a:ea typeface="Calibri" pitchFamily="34" charset="-122"/>
-                <a:cs typeface="Calibri" pitchFamily="34" charset="-120"/>
-              </a:rPr>
-              <a:t>Show the Toolbox catalog and one entry</a:t>
-            </a:r>
-            <a:endParaRPr lang="en-US" sz="1500" dirty="0"/>
-          </a:p>
-          <a:p>
-            <a:pPr marL="342900" indent="-342900">
-              <a:spcAft>
-                <a:spcPts val="600"/>
-              </a:spcAft>
-              <a:buSzPct val="100000"/>
-              <a:buChar char="•"/>
-            </a:pPr>
-            <a:r>
-              <a:rPr lang="en-US" sz="1500" dirty="0">
-                <a:solidFill>
-                  <a:srgbClr val="212121"/>
-                </a:solidFill>
-                <a:latin typeface="Calibri" pitchFamily="34" charset="0"/>
-                <a:ea typeface="Calibri" pitchFamily="34" charset="-122"/>
-                <a:cs typeface="Calibri" pitchFamily="34" charset="-120"/>
-              </a:rPr>
-              <a:t>Show the Foundry IQ landing page and one pre-provisioned knowledge source</a:t>
-            </a:r>
-            <a:endParaRPr lang="en-US" sz="1500" dirty="0"/>
-          </a:p>
-        </p:txBody>
-      </p:sp>
-      <p:sp>
-        <p:nvSpPr>
-          <p:cNvPr id="6" name="Text 4"/>
-          <p:cNvSpPr/>
-          <p:nvPr/>
-        </p:nvSpPr>
-        <p:spPr>
-          <a:xfrm>
-            <a:off x="365760" y="4206240"/>
-            <a:ext cx="8412480" cy="457200"/>
-          </a:xfrm>
-          <a:prstGeom prst="rect">
-            <a:avLst/>
-          </a:prstGeom>
-          <a:noFill/>
-          <a:ln/>
-        </p:spPr>
-        <p:txBody>
-          <a:bodyPr wrap="square" rtlCol="0" anchor="ctr"/>
-          <a:lstStyle/>
-          <a:p>
-            <a:pPr indent="0" marL="0">
-              <a:buNone/>
-            </a:pPr>
-            <a:r>
-              <a:rPr lang="en-US" sz="1400" b="1" i="1" dirty="0">
-                <a:solidFill>
-                  <a:srgbClr val="1E2761"/>
-                </a:solidFill>
-                <a:latin typeface="Calibri" pitchFamily="34" charset="0"/>
-                <a:ea typeface="Calibri" pitchFamily="34" charset="-122"/>
-                <a:cs typeface="Calibri" pitchFamily="34" charset="-120"/>
-              </a:rPr>
-              <a:t>Attendees: do steps 1–4 on your own sub before the module ends.</a:t>
-            </a:r>
-            <a:endParaRPr lang="en-US" sz="1400" dirty="0"/>
           </a:p>
         </p:txBody>
       </p:sp>
@@ -4362,6 +4396,323 @@
 <file path=ppt/slides/slide16.xml><?xml version="1.0" encoding="utf-8"?>
 <p:sld xmlns:a="http://schemas.openxmlformats.org/drawingml/2006/main" xmlns:r="http://schemas.openxmlformats.org/officeDocument/2006/relationships" xmlns:p="http://schemas.openxmlformats.org/presentationml/2006/main">
   <p:cSld name="Slide 16">
+    <p:bg>
+      <p:bgPr>
+        <a:solidFill>
+          <a:srgbClr val="FFFFFF"/>
+        </a:solidFill>
+      </p:bgPr>
+    </p:bg>
+    <p:spTree>
+      <p:nvGrpSpPr>
+        <p:cNvPr id="1" name=""/>
+        <p:cNvGrpSpPr/>
+        <p:nvPr/>
+      </p:nvGrpSpPr>
+      <p:grpSpPr>
+        <a:xfrm>
+          <a:off x="0" y="0"/>
+          <a:ext cx="0" cy="0"/>
+          <a:chOff x="0" y="0"/>
+          <a:chExt cx="0" cy="0"/>
+        </a:xfrm>
+      </p:grpSpPr>
+      <p:sp>
+        <p:nvSpPr>
+          <p:cNvPr id="2" name="Shape 0"/>
+          <p:cNvSpPr/>
+          <p:nvPr/>
+        </p:nvSpPr>
+        <p:spPr>
+          <a:xfrm>
+            <a:off x="0" y="0"/>
+            <a:ext cx="54864" cy="5143500"/>
+          </a:xfrm>
+          <a:prstGeom prst="rect">
+            <a:avLst/>
+          </a:prstGeom>
+          <a:solidFill>
+            <a:srgbClr val="1E2761"/>
+          </a:solidFill>
+          <a:ln/>
+        </p:spPr>
+      </p:sp>
+      <p:sp>
+        <p:nvSpPr>
+          <p:cNvPr id="3" name="Text 1"/>
+          <p:cNvSpPr/>
+          <p:nvPr/>
+        </p:nvSpPr>
+        <p:spPr>
+          <a:xfrm>
+            <a:off x="5669280" y="274320"/>
+            <a:ext cx="3291840" cy="274320"/>
+          </a:xfrm>
+          <a:prstGeom prst="rect">
+            <a:avLst/>
+          </a:prstGeom>
+          <a:noFill/>
+          <a:ln/>
+        </p:spPr>
+        <p:txBody>
+          <a:bodyPr wrap="square" lIns="0" tIns="0" rIns="0" bIns="0" rtlCol="0" anchor="ctr"/>
+          <a:lstStyle/>
+          <a:p>
+            <a:pPr algn="r" indent="0" marL="0">
+              <a:buNone/>
+            </a:pPr>
+            <a:r>
+              <a:rPr lang="en-US" sz="1000" dirty="0">
+                <a:solidFill>
+                  <a:srgbClr val="6B7280"/>
+                </a:solidFill>
+                <a:latin typeface="Calibri" pitchFamily="34" charset="0"/>
+                <a:ea typeface="Calibri" pitchFamily="34" charset="-122"/>
+                <a:cs typeface="Calibri" pitchFamily="34" charset="-120"/>
+              </a:rPr>
+              <a:t>Day 1 · Module 2</a:t>
+            </a:r>
+            <a:endParaRPr lang="en-US" sz="1000" dirty="0"/>
+          </a:p>
+        </p:txBody>
+      </p:sp>
+      <p:sp>
+        <p:nvSpPr>
+          <p:cNvPr id="4" name="Text 2"/>
+          <p:cNvSpPr/>
+          <p:nvPr/>
+        </p:nvSpPr>
+        <p:spPr>
+          <a:xfrm>
+            <a:off x="365760" y="320040"/>
+            <a:ext cx="6217920" cy="640080"/>
+          </a:xfrm>
+          <a:prstGeom prst="rect">
+            <a:avLst/>
+          </a:prstGeom>
+          <a:noFill/>
+          <a:ln/>
+        </p:spPr>
+        <p:txBody>
+          <a:bodyPr wrap="square" lIns="0" tIns="0" rIns="0" bIns="0" rtlCol="0" anchor="ctr"/>
+          <a:lstStyle/>
+          <a:p>
+            <a:pPr indent="0" marL="0">
+              <a:buNone/>
+            </a:pPr>
+            <a:r>
+              <a:rPr lang="en-US" sz="2800" b="1" dirty="0">
+                <a:solidFill>
+                  <a:srgbClr val="1E2761"/>
+                </a:solidFill>
+                <a:latin typeface="Calibri" pitchFamily="34" charset="0"/>
+                <a:ea typeface="Calibri" pitchFamily="34" charset="-122"/>
+                <a:cs typeface="Calibri" pitchFamily="34" charset="-120"/>
+              </a:rPr>
+              <a:t>Live walkthrough (in the portal now)</a:t>
+            </a:r>
+            <a:endParaRPr lang="en-US" sz="2800" dirty="0"/>
+          </a:p>
+        </p:txBody>
+      </p:sp>
+      <p:sp>
+        <p:nvSpPr>
+          <p:cNvPr id="5" name="Text 3"/>
+          <p:cNvSpPr/>
+          <p:nvPr/>
+        </p:nvSpPr>
+        <p:spPr>
+          <a:xfrm>
+            <a:off x="365760" y="1097280"/>
+            <a:ext cx="8412480" cy="3749040"/>
+          </a:xfrm>
+          <a:prstGeom prst="rect">
+            <a:avLst/>
+          </a:prstGeom>
+          <a:noFill/>
+          <a:ln/>
+        </p:spPr>
+        <p:txBody>
+          <a:bodyPr wrap="square" rtlCol="0" anchor="ctr"/>
+          <a:lstStyle/>
+          <a:p>
+            <a:pPr marL="342900" indent="-342900">
+              <a:spcAft>
+                <a:spcPts val="600"/>
+              </a:spcAft>
+              <a:buSzPct val="100000"/>
+              <a:buChar char="•"/>
+            </a:pPr>
+            <a:r>
+              <a:rPr lang="en-US" sz="1500" dirty="0">
+                <a:solidFill>
+                  <a:srgbClr val="212121"/>
+                </a:solidFill>
+                <a:latin typeface="Calibri" pitchFamily="34" charset="0"/>
+                <a:ea typeface="Calibri" pitchFamily="34" charset="-122"/>
+                <a:cs typeface="Calibri" pitchFamily="34" charset="-120"/>
+              </a:rPr>
+              <a:t>Sign into ai.azure.com and open a project</a:t>
+            </a:r>
+            <a:endParaRPr lang="en-US" sz="1500" dirty="0"/>
+          </a:p>
+          <a:p>
+            <a:pPr marL="342900" indent="-342900">
+              <a:spcAft>
+                <a:spcPts val="600"/>
+              </a:spcAft>
+              <a:buSzPct val="100000"/>
+              <a:buChar char="•"/>
+            </a:pPr>
+            <a:r>
+              <a:rPr lang="en-US" sz="1500" dirty="0">
+                <a:solidFill>
+                  <a:srgbClr val="212121"/>
+                </a:solidFill>
+                <a:latin typeface="Calibri" pitchFamily="34" charset="0"/>
+                <a:ea typeface="Calibri" pitchFamily="34" charset="-122"/>
+                <a:cs typeface="Calibri" pitchFamily="34" charset="-120"/>
+              </a:rPr>
+              <a:t>Deploy a model</a:t>
+            </a:r>
+            <a:endParaRPr lang="en-US" sz="1500" dirty="0"/>
+          </a:p>
+          <a:p>
+            <a:pPr marL="342900" indent="-342900">
+              <a:spcAft>
+                <a:spcPts val="600"/>
+              </a:spcAft>
+              <a:buSzPct val="100000"/>
+              <a:buChar char="•"/>
+            </a:pPr>
+            <a:r>
+              <a:rPr lang="en-US" sz="1500" dirty="0">
+                <a:solidFill>
+                  <a:srgbClr val="212121"/>
+                </a:solidFill>
+                <a:latin typeface="Calibri" pitchFamily="34" charset="0"/>
+                <a:ea typeface="Calibri" pitchFamily="34" charset="-122"/>
+                <a:cs typeface="Calibri" pitchFamily="34" charset="-120"/>
+              </a:rPr>
+              <a:t>Copy the project endpoint</a:t>
+            </a:r>
+            <a:endParaRPr lang="en-US" sz="1500" dirty="0"/>
+          </a:p>
+          <a:p>
+            <a:pPr marL="342900" indent="-342900">
+              <a:spcAft>
+                <a:spcPts val="600"/>
+              </a:spcAft>
+              <a:buSzPct val="100000"/>
+              <a:buChar char="•"/>
+            </a:pPr>
+            <a:r>
+              <a:rPr lang="en-US" sz="1500" dirty="0">
+                <a:solidFill>
+                  <a:srgbClr val="212121"/>
+                </a:solidFill>
+                <a:latin typeface="Calibri" pitchFamily="34" charset="0"/>
+                <a:ea typeface="Calibri" pitchFamily="34" charset="-122"/>
+                <a:cs typeface="Calibri" pitchFamily="34" charset="-120"/>
+              </a:rPr>
+              <a:t>Open the chat playground; send a test prompt</a:t>
+            </a:r>
+            <a:endParaRPr lang="en-US" sz="1500" dirty="0"/>
+          </a:p>
+          <a:p>
+            <a:pPr marL="342900" indent="-342900">
+              <a:spcAft>
+                <a:spcPts val="600"/>
+              </a:spcAft>
+              <a:buSzPct val="100000"/>
+              <a:buChar char="•"/>
+            </a:pPr>
+            <a:r>
+              <a:rPr lang="en-US" sz="1500" dirty="0">
+                <a:solidFill>
+                  <a:srgbClr val="212121"/>
+                </a:solidFill>
+                <a:latin typeface="Calibri" pitchFamily="34" charset="0"/>
+                <a:ea typeface="Calibri" pitchFamily="34" charset="-122"/>
+                <a:cs typeface="Calibri" pitchFamily="34" charset="-120"/>
+              </a:rPr>
+              <a:t>Show the Toolbox catalog and one entry</a:t>
+            </a:r>
+            <a:endParaRPr lang="en-US" sz="1500" dirty="0"/>
+          </a:p>
+          <a:p>
+            <a:pPr marL="342900" indent="-342900">
+              <a:spcAft>
+                <a:spcPts val="600"/>
+              </a:spcAft>
+              <a:buSzPct val="100000"/>
+              <a:buChar char="•"/>
+            </a:pPr>
+            <a:r>
+              <a:rPr lang="en-US" sz="1500" dirty="0">
+                <a:solidFill>
+                  <a:srgbClr val="212121"/>
+                </a:solidFill>
+                <a:latin typeface="Calibri" pitchFamily="34" charset="0"/>
+                <a:ea typeface="Calibri" pitchFamily="34" charset="-122"/>
+                <a:cs typeface="Calibri" pitchFamily="34" charset="-120"/>
+              </a:rPr>
+              <a:t>Show the Foundry IQ landing page and one pre-provisioned knowledge source</a:t>
+            </a:r>
+            <a:endParaRPr lang="en-US" sz="1500" dirty="0"/>
+          </a:p>
+        </p:txBody>
+      </p:sp>
+      <p:sp>
+        <p:nvSpPr>
+          <p:cNvPr id="6" name="Text 4"/>
+          <p:cNvSpPr/>
+          <p:nvPr/>
+        </p:nvSpPr>
+        <p:spPr>
+          <a:xfrm>
+            <a:off x="365760" y="4206240"/>
+            <a:ext cx="8412480" cy="457200"/>
+          </a:xfrm>
+          <a:prstGeom prst="rect">
+            <a:avLst/>
+          </a:prstGeom>
+          <a:noFill/>
+          <a:ln/>
+        </p:spPr>
+        <p:txBody>
+          <a:bodyPr wrap="square" rtlCol="0" anchor="ctr"/>
+          <a:lstStyle/>
+          <a:p>
+            <a:pPr indent="0" marL="0">
+              <a:buNone/>
+            </a:pPr>
+            <a:r>
+              <a:rPr lang="en-US" sz="1400" b="1" i="1" dirty="0">
+                <a:solidFill>
+                  <a:srgbClr val="1E2761"/>
+                </a:solidFill>
+                <a:latin typeface="Calibri" pitchFamily="34" charset="0"/>
+                <a:ea typeface="Calibri" pitchFamily="34" charset="-122"/>
+                <a:cs typeface="Calibri" pitchFamily="34" charset="-120"/>
+              </a:rPr>
+              <a:t>Attendees: do steps 1–4 on your own sub before the module ends.</a:t>
+            </a:r>
+            <a:endParaRPr lang="en-US" sz="1400" dirty="0"/>
+          </a:p>
+        </p:txBody>
+      </p:sp>
+    </p:spTree>
+  </p:cSld>
+  <p:clrMapOvr>
+    <a:masterClrMapping/>
+  </p:clrMapOvr>
+</p:sld>
+</file>
+
+<file path=ppt/slides/slide17.xml><?xml version="1.0" encoding="utf-8"?>
+<p:sld xmlns:a="http://schemas.openxmlformats.org/drawingml/2006/main" xmlns:r="http://schemas.openxmlformats.org/officeDocument/2006/relationships" xmlns:p="http://schemas.openxmlformats.org/presentationml/2006/main">
+  <p:cSld name="Slide 17">
     <p:bg>
       <p:bgPr>
         <a:solidFill>

--- a/decks/day1/module-2-foundry-portal.pptx
+++ b/decks/day1/module-2-foundry-portal.pptx
@@ -22,9 +22,10 @@
     <p:sldId id="270" r:id="rId16"/>
     <p:sldId id="271" r:id="rId17"/>
     <p:sldId id="272" r:id="rId18"/>
+    <p:sldId id="273" r:id="rId19"/>
   </p:sldIdLst>
   <p:notesMasterIdLst>
-    <p:notesMasterId r:id="rId19"/>
+    <p:notesMasterId r:id="rId20"/>
   </p:notesMasterIdLst>
   <p:sldSz cx="9144000" cy="5143500"/>
   <p:notesSz cx="5143500" cy="9144000"/>
@@ -1069,12 +1070,15 @@
           <a:p>
             <a:r>
               <a:rPr lang="en-US" dirty="0"/>
-              <a:t>• Give attendees the diagnostic sequence in a fixed order:
-•   1. Quota — is your region out of capacity?
-•   2. RBAC — do you have Foundry User at the resource scope?
-•   3. Region — does the model live in your region?
-• This ordering catches ~90% of Day 1 lab failures
-• Preview features move — trust running code over screenshots</a:t>
+              <a:t>• Codifies the Publix operating norm — attendees should nod along
+• Portal is fine for: exploring, playground, tracing, monitoring
+• Code is the norm for: creating anything, deploying anything, changing anything
+• az CLI = the general Azure command line
+• azd = Azure Developer CLI, higher-level (deploy an app end-to-end)
+• SDK = for programmatic operations from your code (creating agents, indexes, etc.)
+• Terraform is Publix's default IaC — out of scope for this workshop's content
+• In today's lab: Part A creates the Prompt agent with the SDK, not the portal
+• Day 5 deployment: az / azd paths lead, not portal deploy</a:t>
             </a:r>
             <a:endParaRPr lang="en-US" dirty="0"/>
           </a:p>
@@ -1162,12 +1166,12 @@
           <a:p>
             <a:r>
               <a:rPr lang="en-US" dirty="0"/>
-              <a:t>• Screen share the portal — this is a live demo, not a slide read
-• Move steadily, don't linger
-• Ask attendees to do steps 1–4 alongside you
-• Ask them to raise a hand (or emoji in chat) if they hit a block
-• Fix blocks in real time — do NOT let them accumulate to async time
-• Steps 5–6 (Toolbox, IQ) are demo-only for today</a:t>
+              <a:t>• Give attendees the diagnostic sequence in a fixed order:
+•   1. Quota — is your region out of capacity?
+•   2. RBAC — do you have Foundry User at the resource scope?
+•   3. Region — does the model live in your region?
+• This ordering catches ~90% of Day 1 lab failures
+• Preview features move — trust running code over screenshots</a:t>
             </a:r>
             <a:endParaRPr lang="en-US" dirty="0"/>
           </a:p>
@@ -1255,7 +1259,12 @@
           <a:p>
             <a:r>
               <a:rPr lang="en-US" dirty="0"/>
-              <a:t>Short recap. Confirm everyone has their project endpoint copied.</a:t>
+              <a:t>• Screen share the portal — this is a live demo, not a slide read
+• Move steadily, don't linger
+• Ask attendees to do steps 1–4 alongside you
+• Ask them to raise a hand (or emoji in chat) if they hit a block
+• Fix blocks in real time — do NOT let them accumulate to async time
+• Steps 5–6 (Toolbox, IQ) are demo-only for today</a:t>
             </a:r>
             <a:endParaRPr lang="en-US" dirty="0"/>
           </a:p>
@@ -1279,6 +1288,94 @@
             <a:fld id="{F7021451-1387-4CA6-816F-3879F97B5CBC}" type="slidenum">
               <a:rPr lang="en-US"/>
               <a:t>17</a:t>
+            </a:fld>
+            <a:endParaRPr lang="en-US"/>
+          </a:p>
+        </p:txBody>
+      </p:sp>
+    </p:spTree>
+    <p:extLst>
+      <p:ext uri="{BB962C8B-B14F-4D97-AF65-F5344CB8AC3E}">
+        <p14:creationId xmlns:p14="http://schemas.microsoft.com/office/powerpoint/2010/main" val="1024086991"/>
+      </p:ext>
+    </p:extLst>
+  </p:cSld>
+  <p:clrMapOvr>
+    <a:masterClrMapping/>
+  </p:clrMapOvr>
+</p:notes>
+</file>
+
+<file path=ppt/notesSlides/notesSlide18.xml><?xml version="1.0" encoding="utf-8"?>
+<p:notes xmlns:a="http://schemas.openxmlformats.org/drawingml/2006/main" xmlns:r="http://schemas.openxmlformats.org/officeDocument/2006/relationships" xmlns:p="http://schemas.openxmlformats.org/presentationml/2006/main">
+  <p:cSld>
+    <p:spTree>
+      <p:nvGrpSpPr>
+        <p:cNvPr id="1" name=""/>
+        <p:cNvGrpSpPr/>
+        <p:nvPr/>
+      </p:nvGrpSpPr>
+      <p:grpSpPr>
+        <a:xfrm>
+          <a:off x="0" y="0"/>
+          <a:ext cx="0" cy="0"/>
+          <a:chOff x="0" y="0"/>
+          <a:chExt cx="0" cy="0"/>
+        </a:xfrm>
+      </p:grpSpPr>
+      <p:sp>
+        <p:nvSpPr>
+          <p:cNvPr id="2" name="Slide Image Placeholder 1"/>
+          <p:cNvSpPr>
+            <a:spLocks noGrp="1" noRot="1" noChangeAspect="1"/>
+          </p:cNvSpPr>
+          <p:nvPr>
+            <p:ph type="sldImg"/>
+          </p:nvPr>
+        </p:nvSpPr>
+        <p:spPr/>
+      </p:sp>
+      <p:sp>
+        <p:nvSpPr>
+          <p:cNvPr id="3" name="Notes Placeholder 2"/>
+          <p:cNvSpPr>
+            <a:spLocks noGrp="1"/>
+          </p:cNvSpPr>
+          <p:nvPr>
+            <p:ph type="body" idx="1"/>
+          </p:nvPr>
+        </p:nvSpPr>
+        <p:spPr/>
+        <p:txBody>
+          <a:bodyPr/>
+          <a:lstStyle/>
+          <a:p>
+            <a:r>
+              <a:rPr lang="en-US" dirty="0"/>
+              <a:t>Short recap. Confirm everyone has their project endpoint copied.</a:t>
+            </a:r>
+            <a:endParaRPr lang="en-US" dirty="0"/>
+          </a:p>
+        </p:txBody>
+      </p:sp>
+      <p:sp>
+        <p:nvSpPr>
+          <p:cNvPr id="4" name="Slide Number Placeholder 3"/>
+          <p:cNvSpPr>
+            <a:spLocks noGrp="1"/>
+          </p:cNvSpPr>
+          <p:nvPr>
+            <p:ph type="sldNum" sz="quarter" idx="10"/>
+          </p:nvPr>
+        </p:nvSpPr>
+        <p:spPr/>
+        <p:txBody>
+          <a:bodyPr/>
+          <a:lstStyle/>
+          <a:p>
+            <a:fld id="{F7021451-1387-4CA6-816F-3879F97B5CBC}" type="slidenum">
+              <a:rPr lang="en-US"/>
+              <a:t>18</a:t>
             </a:fld>
             <a:endParaRPr lang="en-US"/>
           </a:p>
@@ -4273,7 +4370,7 @@
                 <a:ea typeface="Calibri" pitchFamily="34" charset="-122"/>
                 <a:cs typeface="Calibri" pitchFamily="34" charset="-120"/>
               </a:rPr>
-              <a:t>Common portal gotchas</a:t>
+              <a:t>Portal for learning · CLI for production</a:t>
             </a:r>
             <a:endParaRPr lang="en-US" sz="2800" dirty="0"/>
           </a:p>
@@ -4287,8 +4384,125 @@
         </p:nvSpPr>
         <p:spPr>
           <a:xfrm>
-            <a:off x="365760" y="1097280"/>
-            <a:ext cx="8412480" cy="3749040"/>
+            <a:off x="365760" y="1051560"/>
+            <a:ext cx="8412480" cy="502920"/>
+          </a:xfrm>
+          <a:prstGeom prst="rect">
+            <a:avLst/>
+          </a:prstGeom>
+          <a:noFill/>
+          <a:ln/>
+        </p:spPr>
+        <p:txBody>
+          <a:bodyPr wrap="square" rtlCol="0" anchor="ctr"/>
+          <a:lstStyle/>
+          <a:p>
+            <a:pPr indent="0" marL="0">
+              <a:buNone/>
+            </a:pPr>
+            <a:r>
+              <a:rPr lang="en-US" sz="1400" i="1" dirty="0">
+                <a:solidFill>
+                  <a:srgbClr val="212121"/>
+                </a:solidFill>
+                <a:latin typeface="Calibri" pitchFamily="34" charset="0"/>
+                <a:ea typeface="Calibri" pitchFamily="34" charset="-122"/>
+                <a:cs typeface="Calibri" pitchFamily="34" charset="-120"/>
+              </a:rPr>
+              <a:t>The portal is a great teacher and a great debugger. For creating resources and shipping changes, real teams use code.</a:t>
+            </a:r>
+            <a:endParaRPr lang="en-US" sz="1400" dirty="0"/>
+          </a:p>
+        </p:txBody>
+      </p:sp>
+      <p:sp>
+        <p:nvSpPr>
+          <p:cNvPr id="6" name="Text 4"/>
+          <p:cNvSpPr/>
+          <p:nvPr/>
+        </p:nvSpPr>
+        <p:spPr>
+          <a:xfrm>
+            <a:off x="365760" y="1691640"/>
+            <a:ext cx="4069080" cy="365760"/>
+          </a:xfrm>
+          <a:prstGeom prst="rect">
+            <a:avLst/>
+          </a:prstGeom>
+          <a:noFill/>
+          <a:ln/>
+        </p:spPr>
+        <p:txBody>
+          <a:bodyPr wrap="square" lIns="0" tIns="0" rIns="0" bIns="0" rtlCol="0" anchor="ctr"/>
+          <a:lstStyle/>
+          <a:p>
+            <a:pPr indent="0" marL="0">
+              <a:buNone/>
+            </a:pPr>
+            <a:r>
+              <a:rPr lang="en-US" sz="2000" b="1" dirty="0">
+                <a:solidFill>
+                  <a:srgbClr val="1E2761"/>
+                </a:solidFill>
+                <a:latin typeface="Calibri" pitchFamily="34" charset="0"/>
+                <a:ea typeface="Calibri" pitchFamily="34" charset="-122"/>
+                <a:cs typeface="Calibri" pitchFamily="34" charset="-120"/>
+              </a:rPr>
+              <a:t>Use the portal for</a:t>
+            </a:r>
+            <a:endParaRPr lang="en-US" sz="2000" dirty="0"/>
+          </a:p>
+        </p:txBody>
+      </p:sp>
+      <p:sp>
+        <p:nvSpPr>
+          <p:cNvPr id="7" name="Text 5"/>
+          <p:cNvSpPr/>
+          <p:nvPr/>
+        </p:nvSpPr>
+        <p:spPr>
+          <a:xfrm>
+            <a:off x="4709160" y="1691640"/>
+            <a:ext cx="4069080" cy="365760"/>
+          </a:xfrm>
+          <a:prstGeom prst="rect">
+            <a:avLst/>
+          </a:prstGeom>
+          <a:noFill/>
+          <a:ln/>
+        </p:spPr>
+        <p:txBody>
+          <a:bodyPr wrap="square" lIns="0" tIns="0" rIns="0" bIns="0" rtlCol="0" anchor="ctr"/>
+          <a:lstStyle/>
+          <a:p>
+            <a:pPr indent="0" marL="0">
+              <a:buNone/>
+            </a:pPr>
+            <a:r>
+              <a:rPr lang="en-US" sz="2000" b="1" dirty="0">
+                <a:solidFill>
+                  <a:srgbClr val="1E2761"/>
+                </a:solidFill>
+                <a:latin typeface="Calibri" pitchFamily="34" charset="0"/>
+                <a:ea typeface="Calibri" pitchFamily="34" charset="-122"/>
+                <a:cs typeface="Calibri" pitchFamily="34" charset="-120"/>
+              </a:rPr>
+              <a:t>Use az / azd / SDK for</a:t>
+            </a:r>
+            <a:endParaRPr lang="en-US" sz="2000" dirty="0"/>
+          </a:p>
+        </p:txBody>
+      </p:sp>
+      <p:sp>
+        <p:nvSpPr>
+          <p:cNvPr id="8" name="Text 6"/>
+          <p:cNvSpPr/>
+          <p:nvPr/>
+        </p:nvSpPr>
+        <p:spPr>
+          <a:xfrm>
+            <a:off x="365760" y="2148840"/>
+            <a:ext cx="4069080" cy="2103120"/>
           </a:xfrm>
           <a:prstGeom prst="rect">
             <a:avLst/>
@@ -4316,7 +4530,7 @@
                 <a:ea typeface="Calibri" pitchFamily="34" charset="-122"/>
                 <a:cs typeface="Calibri" pitchFamily="34" charset="-120"/>
               </a:rPr>
-              <a:t>Quota errors on deployment — request a bump in the region before Day 1</a:t>
+              <a:t>Exploring what Foundry can do</a:t>
             </a:r>
             <a:endParaRPr lang="en-US" sz="1500" dirty="0"/>
           </a:p>
@@ -4337,7 +4551,7 @@
                 <a:ea typeface="Calibri" pitchFamily="34" charset="-122"/>
                 <a:cs typeface="Calibri" pitchFamily="34" charset="-120"/>
               </a:rPr>
-              <a:t>Missing role assignments — attendees need at least Foundry User (previously Azure AI User) at the Foundry resource scope; 401/403 usually means this</a:t>
+              <a:t>Sanity-checking a prompt in the playground</a:t>
             </a:r>
             <a:endParaRPr lang="en-US" sz="1500" dirty="0"/>
           </a:p>
@@ -4358,7 +4572,7 @@
                 <a:ea typeface="Calibri" pitchFamily="34" charset="-122"/>
                 <a:cs typeface="Calibri" pitchFamily="34" charset="-120"/>
               </a:rPr>
-              <a:t>Region mismatch — model deployment region must be reachable by IQ / AI Search</a:t>
+              <a:t>Inspecting a trace when something goes wrong</a:t>
             </a:r>
             <a:endParaRPr lang="en-US" sz="1500" dirty="0"/>
           </a:p>
@@ -4379,9 +4593,188 @@
                 <a:ea typeface="Calibri" pitchFamily="34" charset="-122"/>
                 <a:cs typeface="Calibri" pitchFamily="34" charset="-120"/>
               </a:rPr>
-              <a:t>Preview features move — Toolbox and parts of IQ are evolving; trust running code over screenshots</a:t>
+              <a:t>Monitoring dashboards and metrics</a:t>
             </a:r>
             <a:endParaRPr lang="en-US" sz="1500" dirty="0"/>
+          </a:p>
+        </p:txBody>
+      </p:sp>
+      <p:sp>
+        <p:nvSpPr>
+          <p:cNvPr id="9" name="Text 7"/>
+          <p:cNvSpPr/>
+          <p:nvPr/>
+        </p:nvSpPr>
+        <p:spPr>
+          <a:xfrm>
+            <a:off x="4709160" y="2148840"/>
+            <a:ext cx="4069080" cy="2103120"/>
+          </a:xfrm>
+          <a:prstGeom prst="rect">
+            <a:avLst/>
+          </a:prstGeom>
+          <a:noFill/>
+          <a:ln/>
+        </p:spPr>
+        <p:txBody>
+          <a:bodyPr wrap="square" rtlCol="0" anchor="ctr"/>
+          <a:lstStyle/>
+          <a:p>
+            <a:pPr marL="342900" indent="-342900">
+              <a:spcAft>
+                <a:spcPts val="600"/>
+              </a:spcAft>
+              <a:buSzPct val="100000"/>
+              <a:buChar char="•"/>
+            </a:pPr>
+            <a:r>
+              <a:rPr lang="en-US" sz="1500" dirty="0">
+                <a:solidFill>
+                  <a:srgbClr val="212121"/>
+                </a:solidFill>
+                <a:latin typeface="Calibri" pitchFamily="34" charset="0"/>
+                <a:ea typeface="Calibri" pitchFamily="34" charset="-122"/>
+                <a:cs typeface="Calibri" pitchFamily="34" charset="-120"/>
+              </a:rPr>
+              <a:t>Creating projects, deployments, agents</a:t>
+            </a:r>
+            <a:endParaRPr lang="en-US" sz="1500" dirty="0"/>
+          </a:p>
+          <a:p>
+            <a:pPr marL="342900" indent="-342900">
+              <a:spcAft>
+                <a:spcPts val="600"/>
+              </a:spcAft>
+              <a:buSzPct val="100000"/>
+              <a:buChar char="•"/>
+            </a:pPr>
+            <a:r>
+              <a:rPr lang="en-US" sz="1500" dirty="0">
+                <a:solidFill>
+                  <a:srgbClr val="212121"/>
+                </a:solidFill>
+                <a:latin typeface="Calibri" pitchFamily="34" charset="0"/>
+                <a:ea typeface="Calibri" pitchFamily="34" charset="-122"/>
+                <a:cs typeface="Calibri" pitchFamily="34" charset="-120"/>
+              </a:rPr>
+              <a:t>Wiring connections to Storage / Key Vault / AI Search</a:t>
+            </a:r>
+            <a:endParaRPr lang="en-US" sz="1500" dirty="0"/>
+          </a:p>
+          <a:p>
+            <a:pPr marL="342900" indent="-342900">
+              <a:spcAft>
+                <a:spcPts val="600"/>
+              </a:spcAft>
+              <a:buSzPct val="100000"/>
+              <a:buChar char="•"/>
+            </a:pPr>
+            <a:r>
+              <a:rPr lang="en-US" sz="1500" dirty="0">
+                <a:solidFill>
+                  <a:srgbClr val="212121"/>
+                </a:solidFill>
+                <a:latin typeface="Calibri" pitchFamily="34" charset="0"/>
+                <a:ea typeface="Calibri" pitchFamily="34" charset="-122"/>
+                <a:cs typeface="Calibri" pitchFamily="34" charset="-120"/>
+              </a:rPr>
+              <a:t>Deploying Hosted agents (zip + Foundry portal is a shortcut; azd / az is the norm)</a:t>
+            </a:r>
+            <a:endParaRPr lang="en-US" sz="1500" dirty="0"/>
+          </a:p>
+          <a:p>
+            <a:pPr marL="342900" indent="-342900">
+              <a:spcAft>
+                <a:spcPts val="600"/>
+              </a:spcAft>
+              <a:buSzPct val="100000"/>
+              <a:buChar char="•"/>
+            </a:pPr>
+            <a:r>
+              <a:rPr lang="en-US" sz="1500" dirty="0">
+                <a:solidFill>
+                  <a:srgbClr val="212121"/>
+                </a:solidFill>
+                <a:latin typeface="Calibri" pitchFamily="34" charset="0"/>
+                <a:ea typeface="Calibri" pitchFamily="34" charset="-122"/>
+                <a:cs typeface="Calibri" pitchFamily="34" charset="-120"/>
+              </a:rPr>
+              <a:t>Anything that needs a repeatable, reviewable change</a:t>
+            </a:r>
+            <a:endParaRPr lang="en-US" sz="1500" dirty="0"/>
+          </a:p>
+        </p:txBody>
+      </p:sp>
+      <p:sp>
+        <p:nvSpPr>
+          <p:cNvPr id="10" name="Shape 8"/>
+          <p:cNvSpPr/>
+          <p:nvPr/>
+        </p:nvSpPr>
+        <p:spPr>
+          <a:xfrm>
+            <a:off x="365760" y="4343400"/>
+            <a:ext cx="8412480" cy="457200"/>
+          </a:xfrm>
+          <a:prstGeom prst="rect">
+            <a:avLst/>
+          </a:prstGeom>
+          <a:solidFill>
+            <a:srgbClr val="CADCFC"/>
+          </a:solidFill>
+          <a:ln/>
+        </p:spPr>
+      </p:sp>
+      <p:sp>
+        <p:nvSpPr>
+          <p:cNvPr id="11" name="Text 9"/>
+          <p:cNvSpPr/>
+          <p:nvPr/>
+        </p:nvSpPr>
+        <p:spPr>
+          <a:xfrm>
+            <a:off x="502920" y="4370832"/>
+            <a:ext cx="8138160" cy="402336"/>
+          </a:xfrm>
+          <a:prstGeom prst="rect">
+            <a:avLst/>
+          </a:prstGeom>
+          <a:noFill/>
+          <a:ln/>
+        </p:spPr>
+        <p:txBody>
+          <a:bodyPr wrap="square" lIns="0" tIns="0" rIns="0" bIns="0" rtlCol="0" anchor="ctr"/>
+          <a:lstStyle/>
+          <a:p>
+            <a:pPr indent="0" marL="0">
+              <a:buNone/>
+            </a:pPr>
+            <a:r>
+              <a:rPr lang="en-US" sz="1200" b="1" dirty="0">
+                <a:solidFill>
+                  <a:srgbClr val="1E2761"/>
+                </a:solidFill>
+                <a:latin typeface="Calibri" pitchFamily="34" charset="0"/>
+                <a:ea typeface="Calibri" pitchFamily="34" charset="-122"/>
+                <a:cs typeface="Calibri" pitchFamily="34" charset="-120"/>
+              </a:rPr>
+              <a:t>Publix operating norm: </a:t>
+            </a:r>
+            <a:pPr indent="0" marL="0">
+              <a:buNone/>
+            </a:pPr>
+            <a:r>
+              <a:rPr lang="en-US" sz="1200" dirty="0">
+                <a:solidFill>
+                  <a:srgbClr val="1E2761"/>
+                </a:solidFill>
+                <a:latin typeface="Calibri" pitchFamily="34" charset="0"/>
+                <a:ea typeface="Calibri" pitchFamily="34" charset="-122"/>
+                <a:cs typeface="Calibri" pitchFamily="34" charset="-120"/>
+              </a:rPr>
+              <a:t>resource creation and programmatic operations live in code. Every lab this week reflects that.</a:t>
+            </a:r>
+            <a:endParaRPr lang="en-US" sz="1200" dirty="0"/>
           </a:p>
         </p:txBody>
       </p:sp>
@@ -4509,7 +4902,7 @@
                 <a:ea typeface="Calibri" pitchFamily="34" charset="-122"/>
                 <a:cs typeface="Calibri" pitchFamily="34" charset="-120"/>
               </a:rPr>
-              <a:t>Live walkthrough (in the portal now)</a:t>
+              <a:t>Common portal gotchas</a:t>
             </a:r>
             <a:endParaRPr lang="en-US" sz="2800" dirty="0"/>
           </a:p>
@@ -4552,7 +4945,7 @@
                 <a:ea typeface="Calibri" pitchFamily="34" charset="-122"/>
                 <a:cs typeface="Calibri" pitchFamily="34" charset="-120"/>
               </a:rPr>
-              <a:t>Sign into ai.azure.com and open a project</a:t>
+              <a:t>Quota errors on deployment — request a bump in the region before Day 1</a:t>
             </a:r>
             <a:endParaRPr lang="en-US" sz="1500" dirty="0"/>
           </a:p>
@@ -4573,7 +4966,7 @@
                 <a:ea typeface="Calibri" pitchFamily="34" charset="-122"/>
                 <a:cs typeface="Calibri" pitchFamily="34" charset="-120"/>
               </a:rPr>
-              <a:t>Deploy a model</a:t>
+              <a:t>Missing role assignments — attendees need at least Foundry User (previously Azure AI User) at the Foundry resource scope; 401/403 usually means this</a:t>
             </a:r>
             <a:endParaRPr lang="en-US" sz="1500" dirty="0"/>
           </a:p>
@@ -4594,7 +4987,7 @@
                 <a:ea typeface="Calibri" pitchFamily="34" charset="-122"/>
                 <a:cs typeface="Calibri" pitchFamily="34" charset="-120"/>
               </a:rPr>
-              <a:t>Copy the project endpoint</a:t>
+              <a:t>Region mismatch — model deployment region must be reachable by IQ / AI Search</a:t>
             </a:r>
             <a:endParaRPr lang="en-US" sz="1500" dirty="0"/>
           </a:p>
@@ -4615,90 +5008,9 @@
                 <a:ea typeface="Calibri" pitchFamily="34" charset="-122"/>
                 <a:cs typeface="Calibri" pitchFamily="34" charset="-120"/>
               </a:rPr>
-              <a:t>Open the chat playground; send a test prompt</a:t>
+              <a:t>Preview features move — Toolbox and parts of IQ are evolving; trust running code over screenshots</a:t>
             </a:r>
             <a:endParaRPr lang="en-US" sz="1500" dirty="0"/>
-          </a:p>
-          <a:p>
-            <a:pPr marL="342900" indent="-342900">
-              <a:spcAft>
-                <a:spcPts val="600"/>
-              </a:spcAft>
-              <a:buSzPct val="100000"/>
-              <a:buChar char="•"/>
-            </a:pPr>
-            <a:r>
-              <a:rPr lang="en-US" sz="1500" dirty="0">
-                <a:solidFill>
-                  <a:srgbClr val="212121"/>
-                </a:solidFill>
-                <a:latin typeface="Calibri" pitchFamily="34" charset="0"/>
-                <a:ea typeface="Calibri" pitchFamily="34" charset="-122"/>
-                <a:cs typeface="Calibri" pitchFamily="34" charset="-120"/>
-              </a:rPr>
-              <a:t>Show the Toolbox catalog and one entry</a:t>
-            </a:r>
-            <a:endParaRPr lang="en-US" sz="1500" dirty="0"/>
-          </a:p>
-          <a:p>
-            <a:pPr marL="342900" indent="-342900">
-              <a:spcAft>
-                <a:spcPts val="600"/>
-              </a:spcAft>
-              <a:buSzPct val="100000"/>
-              <a:buChar char="•"/>
-            </a:pPr>
-            <a:r>
-              <a:rPr lang="en-US" sz="1500" dirty="0">
-                <a:solidFill>
-                  <a:srgbClr val="212121"/>
-                </a:solidFill>
-                <a:latin typeface="Calibri" pitchFamily="34" charset="0"/>
-                <a:ea typeface="Calibri" pitchFamily="34" charset="-122"/>
-                <a:cs typeface="Calibri" pitchFamily="34" charset="-120"/>
-              </a:rPr>
-              <a:t>Show the Foundry IQ landing page and one pre-provisioned knowledge source</a:t>
-            </a:r>
-            <a:endParaRPr lang="en-US" sz="1500" dirty="0"/>
-          </a:p>
-        </p:txBody>
-      </p:sp>
-      <p:sp>
-        <p:nvSpPr>
-          <p:cNvPr id="6" name="Text 4"/>
-          <p:cNvSpPr/>
-          <p:nvPr/>
-        </p:nvSpPr>
-        <p:spPr>
-          <a:xfrm>
-            <a:off x="365760" y="4206240"/>
-            <a:ext cx="8412480" cy="457200"/>
-          </a:xfrm>
-          <a:prstGeom prst="rect">
-            <a:avLst/>
-          </a:prstGeom>
-          <a:noFill/>
-          <a:ln/>
-        </p:spPr>
-        <p:txBody>
-          <a:bodyPr wrap="square" rtlCol="0" anchor="ctr"/>
-          <a:lstStyle/>
-          <a:p>
-            <a:pPr indent="0" marL="0">
-              <a:buNone/>
-            </a:pPr>
-            <a:r>
-              <a:rPr lang="en-US" sz="1400" b="1" i="1" dirty="0">
-                <a:solidFill>
-                  <a:srgbClr val="1E2761"/>
-                </a:solidFill>
-                <a:latin typeface="Calibri" pitchFamily="34" charset="0"/>
-                <a:ea typeface="Calibri" pitchFamily="34" charset="-122"/>
-                <a:cs typeface="Calibri" pitchFamily="34" charset="-120"/>
-              </a:rPr>
-              <a:t>Attendees: do steps 1–4 on your own sub before the module ends.</a:t>
-            </a:r>
-            <a:endParaRPr lang="en-US" sz="1400" dirty="0"/>
           </a:p>
         </p:txBody>
       </p:sp>
@@ -4713,6 +5025,323 @@
 <file path=ppt/slides/slide17.xml><?xml version="1.0" encoding="utf-8"?>
 <p:sld xmlns:a="http://schemas.openxmlformats.org/drawingml/2006/main" xmlns:r="http://schemas.openxmlformats.org/officeDocument/2006/relationships" xmlns:p="http://schemas.openxmlformats.org/presentationml/2006/main">
   <p:cSld name="Slide 17">
+    <p:bg>
+      <p:bgPr>
+        <a:solidFill>
+          <a:srgbClr val="FFFFFF"/>
+        </a:solidFill>
+      </p:bgPr>
+    </p:bg>
+    <p:spTree>
+      <p:nvGrpSpPr>
+        <p:cNvPr id="1" name=""/>
+        <p:cNvGrpSpPr/>
+        <p:nvPr/>
+      </p:nvGrpSpPr>
+      <p:grpSpPr>
+        <a:xfrm>
+          <a:off x="0" y="0"/>
+          <a:ext cx="0" cy="0"/>
+          <a:chOff x="0" y="0"/>
+          <a:chExt cx="0" cy="0"/>
+        </a:xfrm>
+      </p:grpSpPr>
+      <p:sp>
+        <p:nvSpPr>
+          <p:cNvPr id="2" name="Shape 0"/>
+          <p:cNvSpPr/>
+          <p:nvPr/>
+        </p:nvSpPr>
+        <p:spPr>
+          <a:xfrm>
+            <a:off x="0" y="0"/>
+            <a:ext cx="54864" cy="5143500"/>
+          </a:xfrm>
+          <a:prstGeom prst="rect">
+            <a:avLst/>
+          </a:prstGeom>
+          <a:solidFill>
+            <a:srgbClr val="1E2761"/>
+          </a:solidFill>
+          <a:ln/>
+        </p:spPr>
+      </p:sp>
+      <p:sp>
+        <p:nvSpPr>
+          <p:cNvPr id="3" name="Text 1"/>
+          <p:cNvSpPr/>
+          <p:nvPr/>
+        </p:nvSpPr>
+        <p:spPr>
+          <a:xfrm>
+            <a:off x="5669280" y="274320"/>
+            <a:ext cx="3291840" cy="274320"/>
+          </a:xfrm>
+          <a:prstGeom prst="rect">
+            <a:avLst/>
+          </a:prstGeom>
+          <a:noFill/>
+          <a:ln/>
+        </p:spPr>
+        <p:txBody>
+          <a:bodyPr wrap="square" lIns="0" tIns="0" rIns="0" bIns="0" rtlCol="0" anchor="ctr"/>
+          <a:lstStyle/>
+          <a:p>
+            <a:pPr algn="r" indent="0" marL="0">
+              <a:buNone/>
+            </a:pPr>
+            <a:r>
+              <a:rPr lang="en-US" sz="1000" dirty="0">
+                <a:solidFill>
+                  <a:srgbClr val="6B7280"/>
+                </a:solidFill>
+                <a:latin typeface="Calibri" pitchFamily="34" charset="0"/>
+                <a:ea typeface="Calibri" pitchFamily="34" charset="-122"/>
+                <a:cs typeface="Calibri" pitchFamily="34" charset="-120"/>
+              </a:rPr>
+              <a:t>Day 1 · Module 2</a:t>
+            </a:r>
+            <a:endParaRPr lang="en-US" sz="1000" dirty="0"/>
+          </a:p>
+        </p:txBody>
+      </p:sp>
+      <p:sp>
+        <p:nvSpPr>
+          <p:cNvPr id="4" name="Text 2"/>
+          <p:cNvSpPr/>
+          <p:nvPr/>
+        </p:nvSpPr>
+        <p:spPr>
+          <a:xfrm>
+            <a:off x="365760" y="320040"/>
+            <a:ext cx="6217920" cy="640080"/>
+          </a:xfrm>
+          <a:prstGeom prst="rect">
+            <a:avLst/>
+          </a:prstGeom>
+          <a:noFill/>
+          <a:ln/>
+        </p:spPr>
+        <p:txBody>
+          <a:bodyPr wrap="square" lIns="0" tIns="0" rIns="0" bIns="0" rtlCol="0" anchor="ctr"/>
+          <a:lstStyle/>
+          <a:p>
+            <a:pPr indent="0" marL="0">
+              <a:buNone/>
+            </a:pPr>
+            <a:r>
+              <a:rPr lang="en-US" sz="2800" b="1" dirty="0">
+                <a:solidFill>
+                  <a:srgbClr val="1E2761"/>
+                </a:solidFill>
+                <a:latin typeface="Calibri" pitchFamily="34" charset="0"/>
+                <a:ea typeface="Calibri" pitchFamily="34" charset="-122"/>
+                <a:cs typeface="Calibri" pitchFamily="34" charset="-120"/>
+              </a:rPr>
+              <a:t>Live walkthrough (in the portal now)</a:t>
+            </a:r>
+            <a:endParaRPr lang="en-US" sz="2800" dirty="0"/>
+          </a:p>
+        </p:txBody>
+      </p:sp>
+      <p:sp>
+        <p:nvSpPr>
+          <p:cNvPr id="5" name="Text 3"/>
+          <p:cNvSpPr/>
+          <p:nvPr/>
+        </p:nvSpPr>
+        <p:spPr>
+          <a:xfrm>
+            <a:off x="365760" y="1097280"/>
+            <a:ext cx="8412480" cy="3749040"/>
+          </a:xfrm>
+          <a:prstGeom prst="rect">
+            <a:avLst/>
+          </a:prstGeom>
+          <a:noFill/>
+          <a:ln/>
+        </p:spPr>
+        <p:txBody>
+          <a:bodyPr wrap="square" rtlCol="0" anchor="ctr"/>
+          <a:lstStyle/>
+          <a:p>
+            <a:pPr marL="342900" indent="-342900">
+              <a:spcAft>
+                <a:spcPts val="600"/>
+              </a:spcAft>
+              <a:buSzPct val="100000"/>
+              <a:buChar char="•"/>
+            </a:pPr>
+            <a:r>
+              <a:rPr lang="en-US" sz="1500" dirty="0">
+                <a:solidFill>
+                  <a:srgbClr val="212121"/>
+                </a:solidFill>
+                <a:latin typeface="Calibri" pitchFamily="34" charset="0"/>
+                <a:ea typeface="Calibri" pitchFamily="34" charset="-122"/>
+                <a:cs typeface="Calibri" pitchFamily="34" charset="-120"/>
+              </a:rPr>
+              <a:t>Sign into ai.azure.com and open a project</a:t>
+            </a:r>
+            <a:endParaRPr lang="en-US" sz="1500" dirty="0"/>
+          </a:p>
+          <a:p>
+            <a:pPr marL="342900" indent="-342900">
+              <a:spcAft>
+                <a:spcPts val="600"/>
+              </a:spcAft>
+              <a:buSzPct val="100000"/>
+              <a:buChar char="•"/>
+            </a:pPr>
+            <a:r>
+              <a:rPr lang="en-US" sz="1500" dirty="0">
+                <a:solidFill>
+                  <a:srgbClr val="212121"/>
+                </a:solidFill>
+                <a:latin typeface="Calibri" pitchFamily="34" charset="0"/>
+                <a:ea typeface="Calibri" pitchFamily="34" charset="-122"/>
+                <a:cs typeface="Calibri" pitchFamily="34" charset="-120"/>
+              </a:rPr>
+              <a:t>Deploy a model</a:t>
+            </a:r>
+            <a:endParaRPr lang="en-US" sz="1500" dirty="0"/>
+          </a:p>
+          <a:p>
+            <a:pPr marL="342900" indent="-342900">
+              <a:spcAft>
+                <a:spcPts val="600"/>
+              </a:spcAft>
+              <a:buSzPct val="100000"/>
+              <a:buChar char="•"/>
+            </a:pPr>
+            <a:r>
+              <a:rPr lang="en-US" sz="1500" dirty="0">
+                <a:solidFill>
+                  <a:srgbClr val="212121"/>
+                </a:solidFill>
+                <a:latin typeface="Calibri" pitchFamily="34" charset="0"/>
+                <a:ea typeface="Calibri" pitchFamily="34" charset="-122"/>
+                <a:cs typeface="Calibri" pitchFamily="34" charset="-120"/>
+              </a:rPr>
+              <a:t>Copy the project endpoint</a:t>
+            </a:r>
+            <a:endParaRPr lang="en-US" sz="1500" dirty="0"/>
+          </a:p>
+          <a:p>
+            <a:pPr marL="342900" indent="-342900">
+              <a:spcAft>
+                <a:spcPts val="600"/>
+              </a:spcAft>
+              <a:buSzPct val="100000"/>
+              <a:buChar char="•"/>
+            </a:pPr>
+            <a:r>
+              <a:rPr lang="en-US" sz="1500" dirty="0">
+                <a:solidFill>
+                  <a:srgbClr val="212121"/>
+                </a:solidFill>
+                <a:latin typeface="Calibri" pitchFamily="34" charset="0"/>
+                <a:ea typeface="Calibri" pitchFamily="34" charset="-122"/>
+                <a:cs typeface="Calibri" pitchFamily="34" charset="-120"/>
+              </a:rPr>
+              <a:t>Open the chat playground; send a test prompt</a:t>
+            </a:r>
+            <a:endParaRPr lang="en-US" sz="1500" dirty="0"/>
+          </a:p>
+          <a:p>
+            <a:pPr marL="342900" indent="-342900">
+              <a:spcAft>
+                <a:spcPts val="600"/>
+              </a:spcAft>
+              <a:buSzPct val="100000"/>
+              <a:buChar char="•"/>
+            </a:pPr>
+            <a:r>
+              <a:rPr lang="en-US" sz="1500" dirty="0">
+                <a:solidFill>
+                  <a:srgbClr val="212121"/>
+                </a:solidFill>
+                <a:latin typeface="Calibri" pitchFamily="34" charset="0"/>
+                <a:ea typeface="Calibri" pitchFamily="34" charset="-122"/>
+                <a:cs typeface="Calibri" pitchFamily="34" charset="-120"/>
+              </a:rPr>
+              <a:t>Show the Toolbox catalog and one entry</a:t>
+            </a:r>
+            <a:endParaRPr lang="en-US" sz="1500" dirty="0"/>
+          </a:p>
+          <a:p>
+            <a:pPr marL="342900" indent="-342900">
+              <a:spcAft>
+                <a:spcPts val="600"/>
+              </a:spcAft>
+              <a:buSzPct val="100000"/>
+              <a:buChar char="•"/>
+            </a:pPr>
+            <a:r>
+              <a:rPr lang="en-US" sz="1500" dirty="0">
+                <a:solidFill>
+                  <a:srgbClr val="212121"/>
+                </a:solidFill>
+                <a:latin typeface="Calibri" pitchFamily="34" charset="0"/>
+                <a:ea typeface="Calibri" pitchFamily="34" charset="-122"/>
+                <a:cs typeface="Calibri" pitchFamily="34" charset="-120"/>
+              </a:rPr>
+              <a:t>Show the Foundry IQ landing page and one pre-provisioned knowledge source</a:t>
+            </a:r>
+            <a:endParaRPr lang="en-US" sz="1500" dirty="0"/>
+          </a:p>
+        </p:txBody>
+      </p:sp>
+      <p:sp>
+        <p:nvSpPr>
+          <p:cNvPr id="6" name="Text 4"/>
+          <p:cNvSpPr/>
+          <p:nvPr/>
+        </p:nvSpPr>
+        <p:spPr>
+          <a:xfrm>
+            <a:off x="365760" y="4206240"/>
+            <a:ext cx="8412480" cy="457200"/>
+          </a:xfrm>
+          <a:prstGeom prst="rect">
+            <a:avLst/>
+          </a:prstGeom>
+          <a:noFill/>
+          <a:ln/>
+        </p:spPr>
+        <p:txBody>
+          <a:bodyPr wrap="square" rtlCol="0" anchor="ctr"/>
+          <a:lstStyle/>
+          <a:p>
+            <a:pPr indent="0" marL="0">
+              <a:buNone/>
+            </a:pPr>
+            <a:r>
+              <a:rPr lang="en-US" sz="1400" b="1" i="1" dirty="0">
+                <a:solidFill>
+                  <a:srgbClr val="1E2761"/>
+                </a:solidFill>
+                <a:latin typeface="Calibri" pitchFamily="34" charset="0"/>
+                <a:ea typeface="Calibri" pitchFamily="34" charset="-122"/>
+                <a:cs typeface="Calibri" pitchFamily="34" charset="-120"/>
+              </a:rPr>
+              <a:t>Attendees: do steps 1–4 on your own sub before the module ends.</a:t>
+            </a:r>
+            <a:endParaRPr lang="en-US" sz="1400" dirty="0"/>
+          </a:p>
+        </p:txBody>
+      </p:sp>
+    </p:spTree>
+  </p:cSld>
+  <p:clrMapOvr>
+    <a:masterClrMapping/>
+  </p:clrMapOvr>
+</p:sld>
+</file>
+
+<file path=ppt/slides/slide18.xml><?xml version="1.0" encoding="utf-8"?>
+<p:sld xmlns:a="http://schemas.openxmlformats.org/drawingml/2006/main" xmlns:r="http://schemas.openxmlformats.org/officeDocument/2006/relationships" xmlns:p="http://schemas.openxmlformats.org/presentationml/2006/main">
+  <p:cSld name="Slide 18">
     <p:bg>
       <p:bgPr>
         <a:solidFill>

--- a/decks/day1/module-2-foundry-portal.pptx
+++ b/decks/day1/module-2-foundry-portal.pptx
@@ -1070,13 +1070,13 @@
           <a:p>
             <a:r>
               <a:rPr lang="en-US" dirty="0"/>
-              <a:t>• Codifies the Publix operating norm — attendees should nod along
+              <a:t>• Codifies the IaC-first operating norm — attendees should nod along
 • Portal is fine for: exploring, playground, tracing, monitoring
 • Code is the norm for: creating anything, deploying anything, changing anything
 • az CLI = the general Azure command line
 • azd = Azure Developer CLI, higher-level (deploy an app end-to-end)
 • SDK = for programmatic operations from your code (creating agents, indexes, etc.)
-• Terraform is Publix's default IaC — out of scope for this workshop's content
+• Terraform is a common default for IaC-first teams — out of scope for this workshop's content
 • In today's lab: Part A creates the Prompt agent with the SDK, not the portal
 • Day 5 deployment: az / azd paths lead, not portal deploy</a:t>
             </a:r>
@@ -1633,7 +1633,7 @@
 • RBAC scopes at BOTH resource level and project level
 • Day 1 lab access is covered by the resource-scope assignment
 • 401 / 403 in the lab almost always = missing Foundry User at resource scope
-• If facilitator hears '401' in chat: 'check RBAC first, then endpoint, then deployment name'</a:t>
+• If instructor hears '401' in chat: 'check RBAC first, then endpoint, then deployment name'</a:t>
             </a:r>
             <a:endParaRPr lang="en-US" dirty="0"/>
           </a:p>
@@ -4758,7 +4758,7 @@
                 <a:ea typeface="Calibri" pitchFamily="34" charset="-122"/>
                 <a:cs typeface="Calibri" pitchFamily="34" charset="-120"/>
               </a:rPr>
-              <a:t>Publix operating norm: </a:t>
+              <a:t>IaC-first operating norm: </a:t>
             </a:r>
             <a:pPr indent="0" marL="0">
               <a:buNone/>

--- a/decks/day1/module-2-foundry-portal.pptx
+++ b/decks/day1/module-2-foundry-portal.pptx
@@ -1724,7 +1724,7 @@
               <a:t>• Show attendees where the project endpoint lives in the portal
 • Path (verify live — portal wording moves): Overview → Endpoints and keys
 • Have them copy it now — they'll need it in every lab
-• Format: https://&lt;project&gt;.services.ai.azure.com
+• Format: https://&lt;foundry-resource&gt;.services.ai.azure.com/api/projects/&lt;your-project&gt;
 • Never commit this to source control — it belongs in .env
 • The credential (AzureCliCredential) authenticates against this endpoint</a:t>
             </a:r>
@@ -6911,7 +6911,7 @@
                 <a:ea typeface="Consolas" pitchFamily="34" charset="-122"/>
                 <a:cs typeface="Consolas" pitchFamily="34" charset="-120"/>
               </a:rPr>
-              <a:t>https://&lt;project-name&gt;.services.ai.azure.com</a:t>
+              <a:t>https://&lt;foundry-resource&gt;.services.ai.azure.com/api/projects/&lt;your-project&gt;</a:t>
             </a:r>
             <a:endParaRPr lang="en-US" sz="1800" dirty="0"/>
           </a:p>

--- a/decks/day1/module-2-foundry-portal.pptx
+++ b/decks/day1/module-2-foundry-portal.pptx
@@ -1908,7 +1908,7 @@
             <a:r>
               <a:rPr lang="en-US" dirty="0"/>
               <a:t>• The #1 confusion in the Day 1 lab: deployment name ≠ model name
-• Model name: 'gpt-4o'
+• Model name: 'gpt-5.4-mini'
 • Deployment name: whatever *you* named the deployment in the portal
 • In MAF, you pass the DEPLOYMENT name as model= — not the model name
 • In the .env file, FOUNDRY_MODEL = the deployment name

--- a/decks/day1/module-2-foundry-portal.pptx
+++ b/decks/day1/module-2-foundry-portal.pptx
@@ -4966,7 +4966,7 @@
                 <a:ea typeface="Calibri" pitchFamily="34" charset="-122"/>
                 <a:cs typeface="Calibri" pitchFamily="34" charset="-120"/>
               </a:rPr>
-              <a:t>Missing role assignments — attendees need at least Foundry User (previously Azure AI User) at the Foundry resource scope; 401/403 usually means this</a:t>
+              <a:t>Missing role assignments — you need at least Foundry User (previously Azure AI User) at the Foundry resource scope; 401/403 usually means this</a:t>
             </a:r>
             <a:endParaRPr lang="en-US" sz="1500" dirty="0"/>
           </a:p>
@@ -5325,7 +5325,7 @@
                 <a:ea typeface="Calibri" pitchFamily="34" charset="-122"/>
                 <a:cs typeface="Calibri" pitchFamily="34" charset="-120"/>
               </a:rPr>
-              <a:t>Attendees: do steps 1–4 on your own sub before the module ends.</a:t>
+              <a:t>Try it yourself: do steps 1–4 on your own sub before the module ends.</a:t>
             </a:r>
             <a:endParaRPr lang="en-US" sz="1400" dirty="0"/>
           </a:p>

--- a/decks/day1/module-2-foundry-portal.pptx
+++ b/decks/day1/module-2-foundry-portal.pptx
@@ -1908,7 +1908,7 @@
             <a:r>
               <a:rPr lang="en-US" dirty="0"/>
               <a:t>• The #1 confusion in the Day 1 lab: deployment name ≠ model name
-• Model name: 'gpt-5.4-mini'
+• Model name: 'gpt-5.6-luna'
 • Deployment name: whatever *you* named the deployment in the portal
 • In MAF, you pass the DEPLOYMENT name as model= — not the model name
 • In the .env file, FOUNDRY_MODEL = the deployment name

--- a/decks/day1/module-2-foundry-portal.pptx
+++ b/decks/day1/module-2-foundry-portal.pptx
@@ -23,9 +23,10 @@
     <p:sldId id="271" r:id="rId17"/>
     <p:sldId id="272" r:id="rId18"/>
     <p:sldId id="273" r:id="rId19"/>
+    <p:sldId id="274" r:id="rId20"/>
   </p:sldIdLst>
   <p:notesMasterIdLst>
-    <p:notesMasterId r:id="rId20"/>
+    <p:notesMasterId r:id="rId21"/>
   </p:notesMasterIdLst>
   <p:sldSz cx="9144000" cy="5143500"/>
   <p:notesSz cx="5143500" cy="9144000"/>
@@ -611,7 +612,12 @@
           <a:p>
             <a:r>
               <a:rPr lang="en-US" dirty="0"/>
-              <a:t>Transition to portal areas we introduce today and revisit later.</a:t>
+              <a:t>• Reinforce the architecture diagram: connections = Foundry pointing at connected resources
+• Connected resources have their OWN governance boundaries
+• When a connection fails, check the target resource's policies first
+• Auth: managed identity or service principal — NO long-lived keys in production
+• Configured on the Foundry resource; projects inherit them
+• We'll wire IQ knowledge-source connections on Day 2</a:t>
             </a:r>
             <a:endParaRPr lang="en-US" dirty="0"/>
           </a:p>
@@ -699,11 +705,7 @@
           <a:p>
             <a:r>
               <a:rPr lang="en-US" dirty="0"/>
-              <a:t>• Bookmark: Toolbox = curated tool/connector catalog for agents
-• We use it lightly today (Part B of the lab) and go deep Day 2
-• Interesting fact for later: Toolbox is exposed via an MCP endpoint under the hood
-• That ties Toolbox and Day 3's MCP topic together neatly
-• Toolbox samples: web search, code interpreter, file search, SharePoint, Fabric, Graph</a:t>
+              <a:t>Transition to portal areas we introduce today and revisit later.</a:t>
             </a:r>
             <a:endParaRPr lang="en-US" dirty="0"/>
           </a:p>
@@ -791,12 +793,11 @@
           <a:p>
             <a:r>
               <a:rPr lang="en-US" dirty="0"/>
-              <a:t>• Bookmark: Foundry IQ = enterprise knowledge and grounding layer
-• Day 2 is IQ's main course — don't teach it here
-• The pitch: unified retrieval across your enterprise data
-• Alternative to building a RAG pipeline per source
-• Grounded answers with citations, without writing retrieval code
-• Preview status — call out that some parts are moving fast</a:t>
+              <a:t>• Bookmark: Toolbox = curated tool/connector catalog for agents
+• We use it lightly today (Part B of the lab) and go deep Day 2
+• Interesting fact for later: Toolbox is exposed via an MCP endpoint under the hood
+• That ties Toolbox and Day 3's MCP topic together neatly
+• Toolbox samples: web search, code interpreter, file search, SharePoint, Fabric, Graph</a:t>
             </a:r>
             <a:endParaRPr lang="en-US" dirty="0"/>
           </a:p>
@@ -884,12 +885,12 @@
           <a:p>
             <a:r>
               <a:rPr lang="en-US" dirty="0"/>
-              <a:t>• Awareness slide — Day 5 goes deep
-• Point out: attendees don't have to configure anything for Prompt or Hosted agents; tracing is on by default
-• For Path C (your own code), you enable OTel yourself — Day 5 covers this
-• A trace makes the abstract concrete: attendees literally SEE their model + tool calls
-• Best debugging tool most attendees haven't tried yet
-• Preview only — don't over-teach; they'll click into a trace in Part B</a:t>
+              <a:t>• Bookmark: Foundry IQ = enterprise knowledge and grounding layer
+• Day 2 is IQ's main course — don't teach it here
+• The pitch: unified retrieval across your enterprise data
+• Alternative to building a RAG pipeline per source
+• Grounded answers with citations, without writing retrieval code
+• Preview status — call out that some parts are moving fast</a:t>
             </a:r>
             <a:endParaRPr lang="en-US" dirty="0"/>
           </a:p>
@@ -977,12 +978,14 @@
           <a:p>
             <a:r>
               <a:rPr lang="en-US" dirty="0"/>
-              <a:t>• The two-axis mental model attendees should carry all week
-• Actions = how the agent DOES things — Toolbox, MCP, function tools
-• Knowledge = how the agent KNOWS things — Foundry IQ, RAG
-• Day 2 = Knowledge deep dive
-• Day 3 = Actions deep dive (MCP)
-• When something breaks, ask: is this an Actions problem or a Knowledge problem?</a:t>
+              <a:t>• GROUNDING FIX 2026-08-19: Prompt/Hosted tracing is GA, not preview
+• Only Workflow + external-agent tracing is preview — comes in Day 4+
+• Awareness slide — Day 5 goes deep
+• Point out: attendees don't have to configure anything for Prompt or Hosted agents; tracing is on by default
+•   BUT: they must have Application Insights connected to the project first (see pre-work checklist)
+• For Path C (your own code), you enable OTel yourself — Day 5 covers this
+• A trace makes the abstract concrete: attendees literally SEE their model + tool calls
+• Best debugging tool most attendees haven't tried yet</a:t>
             </a:r>
             <a:endParaRPr lang="en-US" dirty="0"/>
           </a:p>
@@ -1070,15 +1073,12 @@
           <a:p>
             <a:r>
               <a:rPr lang="en-US" dirty="0"/>
-              <a:t>• Codifies the IaC-first operating norm — attendees should nod along
-• Portal is fine for: exploring, playground, tracing, monitoring
-• Code is the norm for: creating anything, deploying anything, changing anything
-• az CLI = the general Azure command line
-• azd = Azure Developer CLI, higher-level (deploy an app end-to-end)
-• SDK = for programmatic operations from your code (creating agents, indexes, etc.)
-• Terraform is a common default for IaC-first teams — out of scope for this workshop's content
-• In today's lab: Part A creates the Prompt agent with the SDK, not the portal
-• Day 5 deployment: az / azd paths lead, not portal deploy</a:t>
+              <a:t>• The two-axis mental model attendees should carry all week
+• Actions = how the agent DOES things — Toolbox, MCP, function tools
+• Knowledge = how the agent KNOWS things — Foundry IQ, RAG
+• Day 2 = Knowledge deep dive
+• Day 3 = Actions deep dive (MCP)
+• When something breaks, ask: is this an Actions problem or a Knowledge problem?</a:t>
             </a:r>
             <a:endParaRPr lang="en-US" dirty="0"/>
           </a:p>
@@ -1166,12 +1166,15 @@
           <a:p>
             <a:r>
               <a:rPr lang="en-US" dirty="0"/>
-              <a:t>• Give attendees the diagnostic sequence in a fixed order:
-•   1. Quota — is your region out of capacity?
-•   2. RBAC — do you have Foundry User at the resource scope?
-•   3. Region — does the model live in your region?
-• This ordering catches ~90% of Day 1 lab failures
-• Preview features move — trust running code over screenshots</a:t>
+              <a:t>• Codifies the IaC-first operating norm — attendees should nod along
+• Portal is fine for: exploring, playground, tracing, monitoring
+• Code is the norm for: creating anything, deploying anything, changing anything
+• az CLI = the general Azure command line
+• azd = Azure Developer CLI, higher-level (deploy an app end-to-end)
+• SDK = for programmatic operations from your code (creating agents, indexes, etc.)
+• Terraform is a common default for IaC-first teams — out of scope for this workshop's content
+• In today's lab: Part A creates the Prompt agent with the SDK, not the portal
+• Day 5 deployment: az / azd paths lead, not portal deploy</a:t>
             </a:r>
             <a:endParaRPr lang="en-US" dirty="0"/>
           </a:p>
@@ -1259,12 +1262,12 @@
           <a:p>
             <a:r>
               <a:rPr lang="en-US" dirty="0"/>
-              <a:t>• Screen share the portal — this is a live demo, not a slide read
-• Move steadily, don't linger
-• Ask attendees to do steps 1–4 alongside you
-• Ask them to raise a hand (or emoji in chat) if they hit a block
-• Fix blocks in real time — do NOT let them accumulate to async time
-• Steps 5–6 (Toolbox, IQ) are demo-only for today</a:t>
+              <a:t>• Give attendees the diagnostic sequence in a fixed order:
+•   1. Quota — is your region out of capacity?
+•   2. RBAC — do you have Foundry User at the resource scope?
+•   3. Region — does the model live in your region?
+• This ordering catches ~90% of Day 1 lab failures
+• Preview features move — trust running code over screenshots</a:t>
             </a:r>
             <a:endParaRPr lang="en-US" dirty="0"/>
           </a:p>
@@ -1352,7 +1355,12 @@
           <a:p>
             <a:r>
               <a:rPr lang="en-US" dirty="0"/>
-              <a:t>Short recap. Confirm everyone has their project endpoint copied.</a:t>
+              <a:t>• Screen share the portal — this is a live demo, not a slide read
+• Move steadily, don't linger
+• Ask attendees to do steps 1–4 alongside you
+• Ask them to raise a hand (or emoji in chat) if they hit a block
+• Fix blocks in real time — do NOT let them accumulate to the lab
+• Steps 5–6 (Toolbox, IQ) are demo-only for today</a:t>
             </a:r>
             <a:endParaRPr lang="en-US" dirty="0"/>
           </a:p>
@@ -1376,6 +1384,94 @@
             <a:fld id="{F7021451-1387-4CA6-816F-3879F97B5CBC}" type="slidenum">
               <a:rPr lang="en-US"/>
               <a:t>18</a:t>
+            </a:fld>
+            <a:endParaRPr lang="en-US"/>
+          </a:p>
+        </p:txBody>
+      </p:sp>
+    </p:spTree>
+    <p:extLst>
+      <p:ext uri="{BB962C8B-B14F-4D97-AF65-F5344CB8AC3E}">
+        <p14:creationId xmlns:p14="http://schemas.microsoft.com/office/powerpoint/2010/main" val="1024086991"/>
+      </p:ext>
+    </p:extLst>
+  </p:cSld>
+  <p:clrMapOvr>
+    <a:masterClrMapping/>
+  </p:clrMapOvr>
+</p:notes>
+</file>
+
+<file path=ppt/notesSlides/notesSlide19.xml><?xml version="1.0" encoding="utf-8"?>
+<p:notes xmlns:a="http://schemas.openxmlformats.org/drawingml/2006/main" xmlns:r="http://schemas.openxmlformats.org/officeDocument/2006/relationships" xmlns:p="http://schemas.openxmlformats.org/presentationml/2006/main">
+  <p:cSld>
+    <p:spTree>
+      <p:nvGrpSpPr>
+        <p:cNvPr id="1" name=""/>
+        <p:cNvGrpSpPr/>
+        <p:nvPr/>
+      </p:nvGrpSpPr>
+      <p:grpSpPr>
+        <a:xfrm>
+          <a:off x="0" y="0"/>
+          <a:ext cx="0" cy="0"/>
+          <a:chOff x="0" y="0"/>
+          <a:chExt cx="0" cy="0"/>
+        </a:xfrm>
+      </p:grpSpPr>
+      <p:sp>
+        <p:nvSpPr>
+          <p:cNvPr id="2" name="Slide Image Placeholder 1"/>
+          <p:cNvSpPr>
+            <a:spLocks noGrp="1" noRot="1" noChangeAspect="1"/>
+          </p:cNvSpPr>
+          <p:nvPr>
+            <p:ph type="sldImg"/>
+          </p:nvPr>
+        </p:nvSpPr>
+        <p:spPr/>
+      </p:sp>
+      <p:sp>
+        <p:nvSpPr>
+          <p:cNvPr id="3" name="Notes Placeholder 2"/>
+          <p:cNvSpPr>
+            <a:spLocks noGrp="1"/>
+          </p:cNvSpPr>
+          <p:nvPr>
+            <p:ph type="body" idx="1"/>
+          </p:nvPr>
+        </p:nvSpPr>
+        <p:spPr/>
+        <p:txBody>
+          <a:bodyPr/>
+          <a:lstStyle/>
+          <a:p>
+            <a:r>
+              <a:rPr lang="en-US" dirty="0"/>
+              <a:t>Short recap. Confirm everyone has their project endpoint copied.</a:t>
+            </a:r>
+            <a:endParaRPr lang="en-US" dirty="0"/>
+          </a:p>
+        </p:txBody>
+      </p:sp>
+      <p:sp>
+        <p:nvSpPr>
+          <p:cNvPr id="4" name="Slide Number Placeholder 3"/>
+          <p:cNvSpPr>
+            <a:spLocks noGrp="1"/>
+          </p:cNvSpPr>
+          <p:nvPr>
+            <p:ph type="sldNum" sz="quarter" idx="10"/>
+          </p:nvPr>
+        </p:nvSpPr>
+        <p:spPr/>
+        <p:txBody>
+          <a:bodyPr/>
+          <a:lstStyle/>
+          <a:p>
+            <a:fld id="{F7021451-1387-4CA6-816F-3879F97B5CBC}" type="slidenum">
+              <a:rPr lang="en-US"/>
+              <a:t>19</a:t>
             </a:fld>
             <a:endParaRPr lang="en-US"/>
           </a:p>
@@ -1628,12 +1724,16 @@
           <a:p>
             <a:r>
               <a:rPr lang="en-US" dirty="0"/>
-              <a:t>• Starter RBAC for the lab: Foundry User at the Foundry resource scope
-• Foundry User was previously named Azure AI User — attendees may see either during rollout
-• RBAC scopes at BOTH resource level and project level
-• Day 1 lab access is covered by the resource-scope assignment
-• 401 / 403 in the lab almost always = missing Foundry User at resource scope
-• If instructor hears '401' in chat: 'check RBAC first, then endpoint, then deployment name'</a:t>
+              <a:t>• DEMO 2.1 · ~5 min
+• Do NOT use the project the labs will use — create a separate demo project
+• Portal: ai.azure.com → + New project → name it → SELECT App Insights checkbox
+•   Call the checkbox out explicitly — this is what the pre-work doc mentions
+• Then Deployments → + Deploy model → gpt-5.6-luna → deployment name gpt-5.6-luna
+• Then a 90s aside showing the az CLI equivalent (do NOT run live)
+• Portal walkthrough: Overview endpoint URL, Deployments, Connected resources, Agents (empty)
+• Fallback: pre-created backup project + screenshots
+• Payoff line: 'Five minutes, one project, App Insights connected. That's Part A's pre-work.'
+• POST-WORKSHOP: az cognitiveservices account delete + az group delete for the demo project (cost)</a:t>
             </a:r>
             <a:endParaRPr lang="en-US" dirty="0"/>
           </a:p>
@@ -1721,12 +1821,12 @@
           <a:p>
             <a:r>
               <a:rPr lang="en-US" dirty="0"/>
-              <a:t>• Show attendees where the project endpoint lives in the portal
-• Path (verify live — portal wording moves): Overview → Endpoints and keys
-• Have them copy it now — they'll need it in every lab
-• Format: https://&lt;foundry-resource&gt;.services.ai.azure.com/api/projects/&lt;your-project&gt;
-• Never commit this to source control — it belongs in .env
-• The credential (AzureCliCredential) authenticates against this endpoint</a:t>
+              <a:t>• Starter RBAC for the lab: Foundry User at the Foundry resource scope
+• Foundry User was previously named Azure AI User — attendees may see either during rollout
+• RBAC scopes at BOTH resource level and project level
+• Day 1 lab access is covered by the resource-scope assignment
+• 401 / 403 in the lab almost always = missing Foundry User at resource scope
+• If instructor hears '401' in chat: 'check RBAC first, then endpoint, then deployment name'</a:t>
             </a:r>
             <a:endParaRPr lang="en-US" dirty="0"/>
           </a:p>
@@ -1814,12 +1914,12 @@
           <a:p>
             <a:r>
               <a:rPr lang="en-US" dirty="0"/>
-              <a:t>• Common gotcha: attendee picks a model, hits a region availability wall
-• Not every model is available in every region
-• Not every model has capacity in every region even when available
-• Sequence: pick region → confirm model availability → confirm quota → deploy
-• If attendee can't deploy: check region and quota first, not model choice
-• Ignite 2026 will likely shift which models are where — check current state before workshop</a:t>
+              <a:t>• Show attendees where the project endpoint lives in the portal
+• Path (verify live — portal wording moves): Overview → Endpoints and keys
+• Have them copy it now — they'll need it in every lab
+• Format: https://&lt;foundry-resource&gt;.services.ai.azure.com/api/projects/&lt;your-project&gt;
+• Never commit this to source control — it belongs in .env
+• The credential (AzureCliCredential) authenticates against this endpoint</a:t>
             </a:r>
             <a:endParaRPr lang="en-US" dirty="0"/>
           </a:p>
@@ -1907,13 +2007,12 @@
           <a:p>
             <a:r>
               <a:rPr lang="en-US" dirty="0"/>
-              <a:t>• The #1 confusion in the Day 1 lab: deployment name ≠ model name
-• Model name: 'gpt-5.6-luna'
-• Deployment name: whatever *you* named the deployment in the portal
-• In MAF, you pass the DEPLOYMENT name as model= — not the model name
-• In the .env file, FOUNDRY_MODEL = the deployment name
-• Have attendees copy the exact deployment name from Portal → Deployments now
-• Rule of thumb: one deployment per (model, role) pair — don't share prod and dev</a:t>
+              <a:t>• Common gotcha: attendee picks a model, hits a region availability wall
+• Not every model is available in every region
+• Not every model has capacity in every region even when available
+• Sequence: pick region → confirm model availability → confirm quota → deploy
+• If attendee can't deploy: check region and quota first, not model choice
+• Ignite 2026 will likely shift which models are where — check current state before workshop</a:t>
             </a:r>
             <a:endParaRPr lang="en-US" dirty="0"/>
           </a:p>
@@ -2001,12 +2100,13 @@
           <a:p>
             <a:r>
               <a:rPr lang="en-US" dirty="0"/>
-              <a:t>• This slide is really a debugging tip
-• Reinforce: iterate in the playground BEFORE writing agent code
-• If a prompt doesn't work in the playground, it won't work in MAF
-• Cheap iteration loop: playground → prompt fix → playground → deploy
-• Attendees who skip this waste a lot of time debugging things that were prompt issues
-• Three playgrounds worth knowing: chat, agent, evaluation</a:t>
+              <a:t>• The #1 confusion in the Day 1 lab: deployment name ≠ model name
+• Model name: 'gpt-5.6-luna'
+• Deployment name: whatever *you* named the deployment in the portal
+• In MAF, you pass the DEPLOYMENT name as model= — not the model name
+• In the .env file, FOUNDRY_MODEL = the deployment name
+• Have attendees copy the exact deployment name from Portal → Deployments now
+• Rule of thumb: one deployment per (model, role) pair — don't share prod and dev</a:t>
             </a:r>
             <a:endParaRPr lang="en-US" dirty="0"/>
           </a:p>
@@ -2094,12 +2194,12 @@
           <a:p>
             <a:r>
               <a:rPr lang="en-US" dirty="0"/>
-              <a:t>• Reinforce the architecture diagram: connections = Foundry pointing at connected resources
-• Connected resources have their OWN governance boundaries
-• When a connection fails, check the target resource's policies first
-• Auth: managed identity or service principal — NO long-lived keys in production
-• Configured on the Foundry resource; projects inherit them
-• We'll wire IQ knowledge-source connections on Day 2</a:t>
+              <a:t>• This slide is really a debugging tip
+• Reinforce: iterate in the playground BEFORE writing agent code
+• If a prompt doesn't work in the playground, it won't work in MAF
+• Cheap iteration loop: playground → prompt fix → playground → deploy
+• Attendees who skip this waste a lot of time debugging things that were prompt issues
+• Three playgrounds worth knowing: chat, agent, evaluation</a:t>
             </a:r>
             <a:endParaRPr lang="en-US" dirty="0"/>
           </a:p>
@@ -2642,6 +2742,263 @@
     <p:bg>
       <p:bgPr>
         <a:solidFill>
+          <a:srgbClr val="FFFFFF"/>
+        </a:solidFill>
+      </p:bgPr>
+    </p:bg>
+    <p:spTree>
+      <p:nvGrpSpPr>
+        <p:cNvPr id="1" name=""/>
+        <p:cNvGrpSpPr/>
+        <p:nvPr/>
+      </p:nvGrpSpPr>
+      <p:grpSpPr>
+        <a:xfrm>
+          <a:off x="0" y="0"/>
+          <a:ext cx="0" cy="0"/>
+          <a:chOff x="0" y="0"/>
+          <a:chExt cx="0" cy="0"/>
+        </a:xfrm>
+      </p:grpSpPr>
+      <p:sp>
+        <p:nvSpPr>
+          <p:cNvPr id="2" name="Shape 0"/>
+          <p:cNvSpPr/>
+          <p:nvPr/>
+        </p:nvSpPr>
+        <p:spPr>
+          <a:xfrm>
+            <a:off x="0" y="0"/>
+            <a:ext cx="54864" cy="5143500"/>
+          </a:xfrm>
+          <a:prstGeom prst="rect">
+            <a:avLst/>
+          </a:prstGeom>
+          <a:solidFill>
+            <a:srgbClr val="1E2761"/>
+          </a:solidFill>
+          <a:ln/>
+        </p:spPr>
+      </p:sp>
+      <p:sp>
+        <p:nvSpPr>
+          <p:cNvPr id="3" name="Text 1"/>
+          <p:cNvSpPr/>
+          <p:nvPr/>
+        </p:nvSpPr>
+        <p:spPr>
+          <a:xfrm>
+            <a:off x="5669280" y="274320"/>
+            <a:ext cx="3291840" cy="274320"/>
+          </a:xfrm>
+          <a:prstGeom prst="rect">
+            <a:avLst/>
+          </a:prstGeom>
+          <a:noFill/>
+          <a:ln/>
+        </p:spPr>
+        <p:txBody>
+          <a:bodyPr wrap="square" lIns="0" tIns="0" rIns="0" bIns="0" rtlCol="0" anchor="ctr"/>
+          <a:lstStyle/>
+          <a:p>
+            <a:pPr algn="r" indent="0" marL="0">
+              <a:buNone/>
+            </a:pPr>
+            <a:r>
+              <a:rPr lang="en-US" sz="1000" dirty="0">
+                <a:solidFill>
+                  <a:srgbClr val="6B7280"/>
+                </a:solidFill>
+                <a:latin typeface="Calibri" pitchFamily="34" charset="0"/>
+                <a:ea typeface="Calibri" pitchFamily="34" charset="-122"/>
+                <a:cs typeface="Calibri" pitchFamily="34" charset="-120"/>
+              </a:rPr>
+              <a:t>Day 1 · Module 2</a:t>
+            </a:r>
+            <a:endParaRPr lang="en-US" sz="1000" dirty="0"/>
+          </a:p>
+        </p:txBody>
+      </p:sp>
+      <p:sp>
+        <p:nvSpPr>
+          <p:cNvPr id="4" name="Text 2"/>
+          <p:cNvSpPr/>
+          <p:nvPr/>
+        </p:nvSpPr>
+        <p:spPr>
+          <a:xfrm>
+            <a:off x="365760" y="320040"/>
+            <a:ext cx="6217920" cy="640080"/>
+          </a:xfrm>
+          <a:prstGeom prst="rect">
+            <a:avLst/>
+          </a:prstGeom>
+          <a:noFill/>
+          <a:ln/>
+        </p:spPr>
+        <p:txBody>
+          <a:bodyPr wrap="square" lIns="0" tIns="0" rIns="0" bIns="0" rtlCol="0" anchor="ctr"/>
+          <a:lstStyle/>
+          <a:p>
+            <a:pPr indent="0" marL="0">
+              <a:buNone/>
+            </a:pPr>
+            <a:r>
+              <a:rPr lang="en-US" sz="2800" b="1" dirty="0">
+                <a:solidFill>
+                  <a:srgbClr val="1E2761"/>
+                </a:solidFill>
+                <a:latin typeface="Calibri" pitchFamily="34" charset="0"/>
+                <a:ea typeface="Calibri" pitchFamily="34" charset="-122"/>
+                <a:cs typeface="Calibri" pitchFamily="34" charset="-120"/>
+              </a:rPr>
+              <a:t>Connections</a:t>
+            </a:r>
+            <a:endParaRPr lang="en-US" sz="2800" dirty="0"/>
+          </a:p>
+        </p:txBody>
+      </p:sp>
+      <p:sp>
+        <p:nvSpPr>
+          <p:cNvPr id="5" name="Text 3"/>
+          <p:cNvSpPr/>
+          <p:nvPr/>
+        </p:nvSpPr>
+        <p:spPr>
+          <a:xfrm>
+            <a:off x="365760" y="1097280"/>
+            <a:ext cx="8412480" cy="3749040"/>
+          </a:xfrm>
+          <a:prstGeom prst="rect">
+            <a:avLst/>
+          </a:prstGeom>
+          <a:noFill/>
+          <a:ln/>
+        </p:spPr>
+        <p:txBody>
+          <a:bodyPr wrap="square" rtlCol="0" anchor="ctr"/>
+          <a:lstStyle/>
+          <a:p>
+            <a:pPr marL="342900" indent="-342900">
+              <a:spcAft>
+                <a:spcPts val="600"/>
+              </a:spcAft>
+              <a:buSzPct val="100000"/>
+              <a:buChar char="•"/>
+            </a:pPr>
+            <a:r>
+              <a:rPr lang="en-US" sz="1500" dirty="0">
+                <a:solidFill>
+                  <a:srgbClr val="212121"/>
+                </a:solidFill>
+                <a:latin typeface="Calibri" pitchFamily="34" charset="0"/>
+                <a:ea typeface="Calibri" pitchFamily="34" charset="-122"/>
+                <a:cs typeface="Calibri" pitchFamily="34" charset="-120"/>
+              </a:rPr>
+              <a:t>How a Foundry resource references other Azure services — AI Search, Storage, Key Vault, Fabric, and more</a:t>
+            </a:r>
+            <a:endParaRPr lang="en-US" sz="1500" dirty="0"/>
+          </a:p>
+          <a:p>
+            <a:pPr marL="342900" indent="-342900">
+              <a:spcAft>
+                <a:spcPts val="600"/>
+              </a:spcAft>
+              <a:buSzPct val="100000"/>
+              <a:buChar char="•"/>
+            </a:pPr>
+            <a:r>
+              <a:rPr lang="en-US" sz="1500" dirty="0">
+                <a:solidFill>
+                  <a:srgbClr val="212121"/>
+                </a:solidFill>
+                <a:latin typeface="Calibri" pitchFamily="34" charset="0"/>
+                <a:ea typeface="Calibri" pitchFamily="34" charset="-122"/>
+                <a:cs typeface="Calibri" pitchFamily="34" charset="-120"/>
+              </a:rPr>
+              <a:t>Each connected resource is a separate Azure resource with its own networking and access policies</a:t>
+            </a:r>
+            <a:endParaRPr lang="en-US" sz="1500" dirty="0"/>
+          </a:p>
+          <a:p>
+            <a:pPr marL="342900" indent="-342900">
+              <a:spcAft>
+                <a:spcPts val="600"/>
+              </a:spcAft>
+              <a:buSzPct val="100000"/>
+              <a:buChar char="•"/>
+            </a:pPr>
+            <a:r>
+              <a:rPr lang="en-US" sz="1500" dirty="0">
+                <a:solidFill>
+                  <a:srgbClr val="212121"/>
+                </a:solidFill>
+                <a:latin typeface="Calibri" pitchFamily="34" charset="0"/>
+                <a:ea typeface="Calibri" pitchFamily="34" charset="-122"/>
+                <a:cs typeface="Calibri" pitchFamily="34" charset="-120"/>
+              </a:rPr>
+              <a:t>Configured on the Foundry resource; projects inherit them</a:t>
+            </a:r>
+            <a:endParaRPr lang="en-US" sz="1500" dirty="0"/>
+          </a:p>
+          <a:p>
+            <a:pPr marL="342900" indent="-342900">
+              <a:spcAft>
+                <a:spcPts val="600"/>
+              </a:spcAft>
+              <a:buSzPct val="100000"/>
+              <a:buChar char="•"/>
+            </a:pPr>
+            <a:r>
+              <a:rPr lang="en-US" sz="1500" dirty="0">
+                <a:solidFill>
+                  <a:srgbClr val="212121"/>
+                </a:solidFill>
+                <a:latin typeface="Calibri" pitchFamily="34" charset="0"/>
+                <a:ea typeface="Calibri" pitchFamily="34" charset="-122"/>
+                <a:cs typeface="Calibri" pitchFamily="34" charset="-120"/>
+              </a:rPr>
+              <a:t>Auth via managed identity or service principal — never long-lived keys in production</a:t>
+            </a:r>
+            <a:endParaRPr lang="en-US" sz="1500" dirty="0"/>
+          </a:p>
+          <a:p>
+            <a:pPr marL="342900" indent="-342900">
+              <a:spcAft>
+                <a:spcPts val="600"/>
+              </a:spcAft>
+              <a:buSzPct val="100000"/>
+              <a:buChar char="•"/>
+            </a:pPr>
+            <a:r>
+              <a:rPr lang="en-US" sz="1500" dirty="0">
+                <a:solidFill>
+                  <a:srgbClr val="212121"/>
+                </a:solidFill>
+                <a:latin typeface="Calibri" pitchFamily="34" charset="0"/>
+                <a:ea typeface="Calibri" pitchFamily="34" charset="-122"/>
+                <a:cs typeface="Calibri" pitchFamily="34" charset="-120"/>
+              </a:rPr>
+              <a:t>We wire connections for Foundry IQ knowledge sources on Day 2</a:t>
+            </a:r>
+            <a:endParaRPr lang="en-US" sz="1500" dirty="0"/>
+          </a:p>
+        </p:txBody>
+      </p:sp>
+    </p:spTree>
+  </p:cSld>
+  <p:clrMapOvr>
+    <a:masterClrMapping/>
+  </p:clrMapOvr>
+</p:sld>
+</file>
+
+<file path=ppt/slides/slide11.xml><?xml version="1.0" encoding="utf-8"?>
+<p:sld xmlns:a="http://schemas.openxmlformats.org/drawingml/2006/main" xmlns:r="http://schemas.openxmlformats.org/officeDocument/2006/relationships" xmlns:p="http://schemas.openxmlformats.org/presentationml/2006/main">
+  <p:cSld name="Slide 11">
+    <p:bg>
+      <p:bgPr>
+        <a:solidFill>
           <a:srgbClr val="1E2761"/>
         </a:solidFill>
       </p:bgPr>
@@ -2735,242 +3092,6 @@
               <a:t>Introductions only — Days 2–3 go deep</a:t>
             </a:r>
             <a:endParaRPr lang="en-US" sz="1800" dirty="0"/>
-          </a:p>
-        </p:txBody>
-      </p:sp>
-    </p:spTree>
-  </p:cSld>
-  <p:clrMapOvr>
-    <a:masterClrMapping/>
-  </p:clrMapOvr>
-</p:sld>
-</file>
-
-<file path=ppt/slides/slide11.xml><?xml version="1.0" encoding="utf-8"?>
-<p:sld xmlns:a="http://schemas.openxmlformats.org/drawingml/2006/main" xmlns:r="http://schemas.openxmlformats.org/officeDocument/2006/relationships" xmlns:p="http://schemas.openxmlformats.org/presentationml/2006/main">
-  <p:cSld name="Slide 11">
-    <p:bg>
-      <p:bgPr>
-        <a:solidFill>
-          <a:srgbClr val="FFFFFF"/>
-        </a:solidFill>
-      </p:bgPr>
-    </p:bg>
-    <p:spTree>
-      <p:nvGrpSpPr>
-        <p:cNvPr id="1" name=""/>
-        <p:cNvGrpSpPr/>
-        <p:nvPr/>
-      </p:nvGrpSpPr>
-      <p:grpSpPr>
-        <a:xfrm>
-          <a:off x="0" y="0"/>
-          <a:ext cx="0" cy="0"/>
-          <a:chOff x="0" y="0"/>
-          <a:chExt cx="0" cy="0"/>
-        </a:xfrm>
-      </p:grpSpPr>
-      <p:sp>
-        <p:nvSpPr>
-          <p:cNvPr id="2" name="Shape 0"/>
-          <p:cNvSpPr/>
-          <p:nvPr/>
-        </p:nvSpPr>
-        <p:spPr>
-          <a:xfrm>
-            <a:off x="0" y="0"/>
-            <a:ext cx="54864" cy="5143500"/>
-          </a:xfrm>
-          <a:prstGeom prst="rect">
-            <a:avLst/>
-          </a:prstGeom>
-          <a:solidFill>
-            <a:srgbClr val="1E2761"/>
-          </a:solidFill>
-          <a:ln/>
-        </p:spPr>
-      </p:sp>
-      <p:sp>
-        <p:nvSpPr>
-          <p:cNvPr id="3" name="Text 1"/>
-          <p:cNvSpPr/>
-          <p:nvPr/>
-        </p:nvSpPr>
-        <p:spPr>
-          <a:xfrm>
-            <a:off x="5669280" y="274320"/>
-            <a:ext cx="3291840" cy="274320"/>
-          </a:xfrm>
-          <a:prstGeom prst="rect">
-            <a:avLst/>
-          </a:prstGeom>
-          <a:noFill/>
-          <a:ln/>
-        </p:spPr>
-        <p:txBody>
-          <a:bodyPr wrap="square" lIns="0" tIns="0" rIns="0" bIns="0" rtlCol="0" anchor="ctr"/>
-          <a:lstStyle/>
-          <a:p>
-            <a:pPr algn="r" indent="0" marL="0">
-              <a:buNone/>
-            </a:pPr>
-            <a:r>
-              <a:rPr lang="en-US" sz="1000" dirty="0">
-                <a:solidFill>
-                  <a:srgbClr val="6B7280"/>
-                </a:solidFill>
-                <a:latin typeface="Calibri" pitchFamily="34" charset="0"/>
-                <a:ea typeface="Calibri" pitchFamily="34" charset="-122"/>
-                <a:cs typeface="Calibri" pitchFamily="34" charset="-120"/>
-              </a:rPr>
-              <a:t>Day 1 · Module 2</a:t>
-            </a:r>
-            <a:endParaRPr lang="en-US" sz="1000" dirty="0"/>
-          </a:p>
-        </p:txBody>
-      </p:sp>
-      <p:sp>
-        <p:nvSpPr>
-          <p:cNvPr id="4" name="Text 2"/>
-          <p:cNvSpPr/>
-          <p:nvPr/>
-        </p:nvSpPr>
-        <p:spPr>
-          <a:xfrm>
-            <a:off x="365760" y="320040"/>
-            <a:ext cx="6217920" cy="640080"/>
-          </a:xfrm>
-          <a:prstGeom prst="rect">
-            <a:avLst/>
-          </a:prstGeom>
-          <a:noFill/>
-          <a:ln/>
-        </p:spPr>
-        <p:txBody>
-          <a:bodyPr wrap="square" lIns="0" tIns="0" rIns="0" bIns="0" rtlCol="0" anchor="ctr"/>
-          <a:lstStyle/>
-          <a:p>
-            <a:pPr indent="0" marL="0">
-              <a:buNone/>
-            </a:pPr>
-            <a:r>
-              <a:rPr lang="en-US" sz="2800" b="1" dirty="0">
-                <a:solidFill>
-                  <a:srgbClr val="1E2761"/>
-                </a:solidFill>
-                <a:latin typeface="Calibri" pitchFamily="34" charset="0"/>
-                <a:ea typeface="Calibri" pitchFamily="34" charset="-122"/>
-                <a:cs typeface="Calibri" pitchFamily="34" charset="-120"/>
-              </a:rPr>
-              <a:t>Foundry Toolbox (intro)</a:t>
-            </a:r>
-            <a:endParaRPr lang="en-US" sz="2800" dirty="0"/>
-          </a:p>
-        </p:txBody>
-      </p:sp>
-      <p:sp>
-        <p:nvSpPr>
-          <p:cNvPr id="5" name="Text 3"/>
-          <p:cNvSpPr/>
-          <p:nvPr/>
-        </p:nvSpPr>
-        <p:spPr>
-          <a:xfrm>
-            <a:off x="365760" y="1097280"/>
-            <a:ext cx="8412480" cy="3749040"/>
-          </a:xfrm>
-          <a:prstGeom prst="rect">
-            <a:avLst/>
-          </a:prstGeom>
-          <a:noFill/>
-          <a:ln/>
-        </p:spPr>
-        <p:txBody>
-          <a:bodyPr wrap="square" rtlCol="0" anchor="ctr"/>
-          <a:lstStyle/>
-          <a:p>
-            <a:pPr marL="342900" indent="-342900">
-              <a:spcAft>
-                <a:spcPts val="600"/>
-              </a:spcAft>
-              <a:buSzPct val="100000"/>
-              <a:buChar char="•"/>
-            </a:pPr>
-            <a:r>
-              <a:rPr lang="en-US" sz="1500" dirty="0">
-                <a:solidFill>
-                  <a:srgbClr val="212121"/>
-                </a:solidFill>
-                <a:latin typeface="Calibri" pitchFamily="34" charset="0"/>
-                <a:ea typeface="Calibri" pitchFamily="34" charset="-122"/>
-                <a:cs typeface="Calibri" pitchFamily="34" charset="-120"/>
-              </a:rPr>
-              <a:t>Curated catalog of ready-to-use tools an agent can attach to</a:t>
-            </a:r>
-            <a:endParaRPr lang="en-US" sz="1500" dirty="0"/>
-          </a:p>
-          <a:p>
-            <a:pPr marL="342900" indent="-342900">
-              <a:spcAft>
-                <a:spcPts val="600"/>
-              </a:spcAft>
-              <a:buSzPct val="100000"/>
-              <a:buChar char="•"/>
-            </a:pPr>
-            <a:r>
-              <a:rPr lang="en-US" sz="1500" dirty="0">
-                <a:solidFill>
-                  <a:srgbClr val="212121"/>
-                </a:solidFill>
-                <a:latin typeface="Calibri" pitchFamily="34" charset="0"/>
-                <a:ea typeface="Calibri" pitchFamily="34" charset="-122"/>
-                <a:cs typeface="Calibri" pitchFamily="34" charset="-120"/>
-              </a:rPr>
-              <a:t>Includes: code interpreter, file search, Bing search, SharePoint, Fabric, Graph, custom skills</a:t>
-            </a:r>
-            <a:endParaRPr lang="en-US" sz="1500" dirty="0"/>
-          </a:p>
-          <a:p>
-            <a:pPr marL="342900" indent="-342900">
-              <a:spcAft>
-                <a:spcPts val="600"/>
-              </a:spcAft>
-              <a:buSzPct val="100000"/>
-              <a:buChar char="•"/>
-            </a:pPr>
-            <a:r>
-              <a:rPr lang="en-US" sz="1500" dirty="0">
-                <a:solidFill>
-                  <a:srgbClr val="212121"/>
-                </a:solidFill>
-                <a:latin typeface="Calibri" pitchFamily="34" charset="0"/>
-                <a:ea typeface="Calibri" pitchFamily="34" charset="-122"/>
-                <a:cs typeface="Calibri" pitchFamily="34" charset="-120"/>
-              </a:rPr>
-              <a:t>Exposed to MAF over an MCP endpoint (same protocol as Day 3)</a:t>
-            </a:r>
-            <a:endParaRPr lang="en-US" sz="1500" dirty="0"/>
-          </a:p>
-          <a:p>
-            <a:pPr marL="342900" indent="-342900">
-              <a:spcAft>
-                <a:spcPts val="600"/>
-              </a:spcAft>
-              <a:buSzPct val="100000"/>
-              <a:buChar char="•"/>
-            </a:pPr>
-            <a:r>
-              <a:rPr lang="en-US" sz="1500" dirty="0">
-                <a:solidFill>
-                  <a:srgbClr val="212121"/>
-                </a:solidFill>
-                <a:latin typeface="Calibri" pitchFamily="34" charset="0"/>
-                <a:ea typeface="Calibri" pitchFamily="34" charset="-122"/>
-                <a:cs typeface="Calibri" pitchFamily="34" charset="-120"/>
-              </a:rPr>
-              <a:t>Attach Toolbox tools to a Foundry-hosted agent from the portal, or from code</a:t>
-            </a:r>
-            <a:endParaRPr lang="en-US" sz="1500" dirty="0"/>
           </a:p>
         </p:txBody>
       </p:sp>
@@ -3098,7 +3219,7 @@
                 <a:ea typeface="Calibri" pitchFamily="34" charset="-122"/>
                 <a:cs typeface="Calibri" pitchFamily="34" charset="-120"/>
               </a:rPr>
-              <a:t>Foundry IQ (intro)</a:t>
+              <a:t>Foundry Toolbox (intro)</a:t>
             </a:r>
             <a:endParaRPr lang="en-US" sz="2800" dirty="0"/>
           </a:p>
@@ -3141,7 +3262,7 @@
                 <a:ea typeface="Calibri" pitchFamily="34" charset="-122"/>
                 <a:cs typeface="Calibri" pitchFamily="34" charset="-120"/>
               </a:rPr>
-              <a:t>The knowledge / grounding layer of Foundry</a:t>
+              <a:t>Curated catalog of ready-to-use tools an agent can attach to</a:t>
             </a:r>
             <a:endParaRPr lang="en-US" sz="1500" dirty="0"/>
           </a:p>
@@ -3162,7 +3283,7 @@
                 <a:ea typeface="Calibri" pitchFamily="34" charset="-122"/>
                 <a:cs typeface="Calibri" pitchFamily="34" charset="-120"/>
               </a:rPr>
-              <a:t>Unified retrieval across enterprise sources — AI Search indexes, SharePoint, OneLake / Fabric, and more</a:t>
+              <a:t>Includes: code interpreter, file search, Bing search, SharePoint, Fabric, Graph, custom skills</a:t>
             </a:r>
             <a:endParaRPr lang="en-US" sz="1500" dirty="0"/>
           </a:p>
@@ -3183,7 +3304,7 @@
                 <a:ea typeface="Calibri" pitchFamily="34" charset="-122"/>
                 <a:cs typeface="Calibri" pitchFamily="34" charset="-120"/>
               </a:rPr>
-              <a:t>Alternative to hand-rolling a RAG pipeline per source</a:t>
+              <a:t>Exposed to MAF over an MCP endpoint (same protocol as Day 3)</a:t>
             </a:r>
             <a:endParaRPr lang="en-US" sz="1500" dirty="0"/>
           </a:p>
@@ -3204,7 +3325,7 @@
                 <a:ea typeface="Calibri" pitchFamily="34" charset="-122"/>
                 <a:cs typeface="Calibri" pitchFamily="34" charset="-120"/>
               </a:rPr>
-              <a:t>Agents that use it get grounded answers with citations, without you writing retrieval code</a:t>
+              <a:t>Attach Toolbox tools to a Foundry-hosted agent from the portal, or from code</a:t>
             </a:r>
             <a:endParaRPr lang="en-US" sz="1500" dirty="0"/>
           </a:p>
@@ -3334,7 +3455,7 @@
                 <a:ea typeface="Calibri" pitchFamily="34" charset="-122"/>
                 <a:cs typeface="Calibri" pitchFamily="34" charset="-120"/>
               </a:rPr>
-              <a:t>Observability — preview</a:t>
+              <a:t>Foundry IQ (intro)</a:t>
             </a:r>
             <a:endParaRPr lang="en-US" sz="2800" dirty="0"/>
           </a:p>
@@ -3377,7 +3498,7 @@
                 <a:ea typeface="Calibri" pitchFamily="34" charset="-122"/>
                 <a:cs typeface="Calibri" pitchFamily="34" charset="-120"/>
               </a:rPr>
-              <a:t>Every agent run in Foundry emits a trace — no code to enable, built-in for Prompt and Hosted agents</a:t>
+              <a:t>The knowledge / grounding layer of Foundry</a:t>
             </a:r>
             <a:endParaRPr lang="en-US" sz="1500" dirty="0"/>
           </a:p>
@@ -3398,7 +3519,7 @@
                 <a:ea typeface="Calibri" pitchFamily="34" charset="-122"/>
                 <a:cs typeface="Calibri" pitchFamily="34" charset="-120"/>
               </a:rPr>
-              <a:t>A trace records: model calls, tool invocations, decisions, latency, tokens, and errors</a:t>
+              <a:t>Unified retrieval across enterprise sources — AI Search indexes, SharePoint, OneLake / Fabric, and more</a:t>
             </a:r>
             <a:endParaRPr lang="en-US" sz="1500" dirty="0"/>
           </a:p>
@@ -3419,7 +3540,7 @@
                 <a:ea typeface="Calibri" pitchFamily="34" charset="-122"/>
                 <a:cs typeface="Calibri" pitchFamily="34" charset="-120"/>
               </a:rPr>
-              <a:t>View traces in the Foundry portal (Tracing / Observability), or ship them to Application Insights</a:t>
+              <a:t>Alternative to hand-rolling a RAG pipeline per source</a:t>
             </a:r>
             <a:endParaRPr lang="en-US" sz="1500" dirty="0"/>
           </a:p>
@@ -3440,28 +3561,7 @@
                 <a:ea typeface="Calibri" pitchFamily="34" charset="-122"/>
                 <a:cs typeface="Calibri" pitchFamily="34" charset="-120"/>
               </a:rPr>
-              <a:t>OpenTelemetry semantics under the hood — same spans you'd expect from any OTel-instrumented service</a:t>
-            </a:r>
-            <a:endParaRPr lang="en-US" sz="1500" dirty="0"/>
-          </a:p>
-          <a:p>
-            <a:pPr marL="342900" indent="-342900">
-              <a:spcAft>
-                <a:spcPts val="600"/>
-              </a:spcAft>
-              <a:buSzPct val="100000"/>
-              <a:buChar char="•"/>
-            </a:pPr>
-            <a:r>
-              <a:rPr lang="en-US" sz="1500" dirty="0">
-                <a:solidFill>
-                  <a:srgbClr val="212121"/>
-                </a:solidFill>
-                <a:latin typeface="Calibri" pitchFamily="34" charset="0"/>
-                <a:ea typeface="Calibri" pitchFamily="34" charset="-122"/>
-                <a:cs typeface="Calibri" pitchFamily="34" charset="-120"/>
-              </a:rPr>
-              <a:t>You'll open a real trace in Part B of today's lab; Day 5 goes deep on production observability</a:t>
+              <a:t>Agents that use it get grounded answers with citations, without you writing retrieval code</a:t>
             </a:r>
             <a:endParaRPr lang="en-US" sz="1500" dirty="0"/>
           </a:p>
@@ -3591,6 +3691,302 @@
                 <a:ea typeface="Calibri" pitchFamily="34" charset="-122"/>
                 <a:cs typeface="Calibri" pitchFamily="34" charset="-120"/>
               </a:rPr>
+              <a:t>Observability</a:t>
+            </a:r>
+            <a:endParaRPr lang="en-US" sz="2800" dirty="0"/>
+          </a:p>
+        </p:txBody>
+      </p:sp>
+      <p:sp>
+        <p:nvSpPr>
+          <p:cNvPr id="5" name="Text 3"/>
+          <p:cNvSpPr/>
+          <p:nvPr/>
+        </p:nvSpPr>
+        <p:spPr>
+          <a:xfrm>
+            <a:off x="365760" y="1097280"/>
+            <a:ext cx="8412480" cy="3749040"/>
+          </a:xfrm>
+          <a:prstGeom prst="rect">
+            <a:avLst/>
+          </a:prstGeom>
+          <a:noFill/>
+          <a:ln/>
+        </p:spPr>
+        <p:txBody>
+          <a:bodyPr wrap="square" rtlCol="0" anchor="ctr"/>
+          <a:lstStyle/>
+          <a:p>
+            <a:pPr marL="342900" indent="-342900">
+              <a:spcAft>
+                <a:spcPts val="600"/>
+              </a:spcAft>
+              <a:buSzPct val="100000"/>
+              <a:buChar char="•"/>
+            </a:pPr>
+            <a:r>
+              <a:rPr lang="en-US" sz="1500" dirty="0">
+                <a:solidFill>
+                  <a:srgbClr val="212121"/>
+                </a:solidFill>
+                <a:latin typeface="Calibri" pitchFamily="34" charset="0"/>
+                <a:ea typeface="Calibri" pitchFamily="34" charset="-122"/>
+                <a:cs typeface="Calibri" pitchFamily="34" charset="-120"/>
+              </a:rPr>
+              <a:t>Every agent run in Foundry emits a trace — no code to enable, built-in for Prompt and Hosted agents</a:t>
+            </a:r>
+            <a:endParaRPr lang="en-US" sz="1500" dirty="0"/>
+          </a:p>
+          <a:p>
+            <a:pPr marL="342900" indent="-342900">
+              <a:spcAft>
+                <a:spcPts val="600"/>
+              </a:spcAft>
+              <a:buSzPct val="100000"/>
+              <a:buChar char="•"/>
+            </a:pPr>
+            <a:r>
+              <a:rPr lang="en-US" sz="1500" dirty="0">
+                <a:solidFill>
+                  <a:srgbClr val="212121"/>
+                </a:solidFill>
+                <a:latin typeface="Calibri" pitchFamily="34" charset="0"/>
+                <a:ea typeface="Calibri" pitchFamily="34" charset="-122"/>
+                <a:cs typeface="Calibri" pitchFamily="34" charset="-120"/>
+              </a:rPr>
+              <a:t>A trace records: model calls, tool invocations, decisions, latency, tokens, and errors</a:t>
+            </a:r>
+            <a:endParaRPr lang="en-US" sz="1500" dirty="0"/>
+          </a:p>
+          <a:p>
+            <a:pPr marL="342900" indent="-342900">
+              <a:spcAft>
+                <a:spcPts val="600"/>
+              </a:spcAft>
+              <a:buSzPct val="100000"/>
+              <a:buChar char="•"/>
+            </a:pPr>
+            <a:r>
+              <a:rPr lang="en-US" sz="1500" dirty="0">
+                <a:solidFill>
+                  <a:srgbClr val="212121"/>
+                </a:solidFill>
+                <a:latin typeface="Calibri" pitchFamily="34" charset="0"/>
+                <a:ea typeface="Calibri" pitchFamily="34" charset="-122"/>
+                <a:cs typeface="Calibri" pitchFamily="34" charset="-120"/>
+              </a:rPr>
+              <a:t>View traces in the Foundry portal (Tracing / Observability), or ship them to Application Insights</a:t>
+            </a:r>
+            <a:endParaRPr lang="en-US" sz="1500" dirty="0"/>
+          </a:p>
+          <a:p>
+            <a:pPr marL="342900" indent="-342900">
+              <a:spcAft>
+                <a:spcPts val="600"/>
+              </a:spcAft>
+              <a:buSzPct val="100000"/>
+              <a:buChar char="•"/>
+            </a:pPr>
+            <a:r>
+              <a:rPr lang="en-US" sz="1500" dirty="0">
+                <a:solidFill>
+                  <a:srgbClr val="212121"/>
+                </a:solidFill>
+                <a:latin typeface="Calibri" pitchFamily="34" charset="0"/>
+                <a:ea typeface="Calibri" pitchFamily="34" charset="-122"/>
+                <a:cs typeface="Calibri" pitchFamily="34" charset="-120"/>
+              </a:rPr>
+              <a:t>OpenTelemetry semantics under the hood — same spans you'd expect from any OTel-instrumented service</a:t>
+            </a:r>
+            <a:endParaRPr lang="en-US" sz="1500" dirty="0"/>
+          </a:p>
+          <a:p>
+            <a:pPr marL="342900" indent="-342900">
+              <a:spcAft>
+                <a:spcPts val="600"/>
+              </a:spcAft>
+              <a:buSzPct val="100000"/>
+              <a:buChar char="•"/>
+            </a:pPr>
+            <a:r>
+              <a:rPr lang="en-US" sz="1500" dirty="0">
+                <a:solidFill>
+                  <a:srgbClr val="212121"/>
+                </a:solidFill>
+                <a:latin typeface="Calibri" pitchFamily="34" charset="0"/>
+                <a:ea typeface="Calibri" pitchFamily="34" charset="-122"/>
+                <a:cs typeface="Calibri" pitchFamily="34" charset="-120"/>
+              </a:rPr>
+              <a:t>You'll open a real trace in Part B of today's lab; Day 5 goes deep on production observability</a:t>
+            </a:r>
+            <a:endParaRPr lang="en-US" sz="1500" dirty="0"/>
+          </a:p>
+        </p:txBody>
+      </p:sp>
+      <p:sp>
+        <p:nvSpPr>
+          <p:cNvPr id="6" name="Text 4"/>
+          <p:cNvSpPr/>
+          <p:nvPr/>
+        </p:nvSpPr>
+        <p:spPr>
+          <a:xfrm>
+            <a:off x="365760" y="4892040"/>
+            <a:ext cx="8412480" cy="365760"/>
+          </a:xfrm>
+          <a:prstGeom prst="rect">
+            <a:avLst/>
+          </a:prstGeom>
+          <a:noFill/>
+          <a:ln/>
+        </p:spPr>
+        <p:txBody>
+          <a:bodyPr wrap="square" rtlCol="0" anchor="ctr"/>
+          <a:lstStyle/>
+          <a:p>
+            <a:pPr indent="0" marL="0">
+              <a:buNone/>
+            </a:pPr>
+            <a:r>
+              <a:rPr lang="en-US" sz="1100" i="1" dirty="0">
+                <a:solidFill>
+                  <a:srgbClr val="6B7280"/>
+                </a:solidFill>
+                <a:latin typeface="Calibri" pitchFamily="34" charset="0"/>
+                <a:ea typeface="Calibri" pitchFamily="34" charset="-122"/>
+                <a:cs typeface="Calibri" pitchFamily="34" charset="-120"/>
+              </a:rPr>
+              <a:t>Tracing for Prompt and Hosted agents is GA. Workflow and external-agent tracing is preview — relevant Day 4+.</a:t>
+            </a:r>
+            <a:endParaRPr lang="en-US" sz="1100" dirty="0"/>
+          </a:p>
+        </p:txBody>
+      </p:sp>
+    </p:spTree>
+  </p:cSld>
+  <p:clrMapOvr>
+    <a:masterClrMapping/>
+  </p:clrMapOvr>
+</p:sld>
+</file>
+
+<file path=ppt/slides/slide15.xml><?xml version="1.0" encoding="utf-8"?>
+<p:sld xmlns:a="http://schemas.openxmlformats.org/drawingml/2006/main" xmlns:r="http://schemas.openxmlformats.org/officeDocument/2006/relationships" xmlns:p="http://schemas.openxmlformats.org/presentationml/2006/main">
+  <p:cSld name="Slide 15">
+    <p:bg>
+      <p:bgPr>
+        <a:solidFill>
+          <a:srgbClr val="FFFFFF"/>
+        </a:solidFill>
+      </p:bgPr>
+    </p:bg>
+    <p:spTree>
+      <p:nvGrpSpPr>
+        <p:cNvPr id="1" name=""/>
+        <p:cNvGrpSpPr/>
+        <p:nvPr/>
+      </p:nvGrpSpPr>
+      <p:grpSpPr>
+        <a:xfrm>
+          <a:off x="0" y="0"/>
+          <a:ext cx="0" cy="0"/>
+          <a:chOff x="0" y="0"/>
+          <a:chExt cx="0" cy="0"/>
+        </a:xfrm>
+      </p:grpSpPr>
+      <p:sp>
+        <p:nvSpPr>
+          <p:cNvPr id="2" name="Shape 0"/>
+          <p:cNvSpPr/>
+          <p:nvPr/>
+        </p:nvSpPr>
+        <p:spPr>
+          <a:xfrm>
+            <a:off x="0" y="0"/>
+            <a:ext cx="54864" cy="5143500"/>
+          </a:xfrm>
+          <a:prstGeom prst="rect">
+            <a:avLst/>
+          </a:prstGeom>
+          <a:solidFill>
+            <a:srgbClr val="1E2761"/>
+          </a:solidFill>
+          <a:ln/>
+        </p:spPr>
+      </p:sp>
+      <p:sp>
+        <p:nvSpPr>
+          <p:cNvPr id="3" name="Text 1"/>
+          <p:cNvSpPr/>
+          <p:nvPr/>
+        </p:nvSpPr>
+        <p:spPr>
+          <a:xfrm>
+            <a:off x="5669280" y="274320"/>
+            <a:ext cx="3291840" cy="274320"/>
+          </a:xfrm>
+          <a:prstGeom prst="rect">
+            <a:avLst/>
+          </a:prstGeom>
+          <a:noFill/>
+          <a:ln/>
+        </p:spPr>
+        <p:txBody>
+          <a:bodyPr wrap="square" lIns="0" tIns="0" rIns="0" bIns="0" rtlCol="0" anchor="ctr"/>
+          <a:lstStyle/>
+          <a:p>
+            <a:pPr algn="r" indent="0" marL="0">
+              <a:buNone/>
+            </a:pPr>
+            <a:r>
+              <a:rPr lang="en-US" sz="1000" dirty="0">
+                <a:solidFill>
+                  <a:srgbClr val="6B7280"/>
+                </a:solidFill>
+                <a:latin typeface="Calibri" pitchFamily="34" charset="0"/>
+                <a:ea typeface="Calibri" pitchFamily="34" charset="-122"/>
+                <a:cs typeface="Calibri" pitchFamily="34" charset="-120"/>
+              </a:rPr>
+              <a:t>Day 1 · Module 2</a:t>
+            </a:r>
+            <a:endParaRPr lang="en-US" sz="1000" dirty="0"/>
+          </a:p>
+        </p:txBody>
+      </p:sp>
+      <p:sp>
+        <p:nvSpPr>
+          <p:cNvPr id="4" name="Text 2"/>
+          <p:cNvSpPr/>
+          <p:nvPr/>
+        </p:nvSpPr>
+        <p:spPr>
+          <a:xfrm>
+            <a:off x="365760" y="320040"/>
+            <a:ext cx="6217920" cy="640080"/>
+          </a:xfrm>
+          <a:prstGeom prst="rect">
+            <a:avLst/>
+          </a:prstGeom>
+          <a:noFill/>
+          <a:ln/>
+        </p:spPr>
+        <p:txBody>
+          <a:bodyPr wrap="square" lIns="0" tIns="0" rIns="0" bIns="0" rtlCol="0" anchor="ctr"/>
+          <a:lstStyle/>
+          <a:p>
+            <a:pPr indent="0" marL="0">
+              <a:buNone/>
+            </a:pPr>
+            <a:r>
+              <a:rPr lang="en-US" sz="2800" b="1" dirty="0">
+                <a:solidFill>
+                  <a:srgbClr val="1E2761"/>
+                </a:solidFill>
+                <a:latin typeface="Calibri" pitchFamily="34" charset="0"/>
+                <a:ea typeface="Calibri" pitchFamily="34" charset="-122"/>
+                <a:cs typeface="Calibri" pitchFamily="34" charset="-120"/>
+              </a:rPr>
               <a:t>Two axes to remember</a:t>
             </a:r>
             <a:endParaRPr lang="en-US" sz="2800" dirty="0"/>
@@ -3599,7 +3995,7 @@
       </p:sp>
       <p:graphicFrame>
         <p:nvGraphicFramePr>
-          <p:cNvPr id="15" name="Table 0"/>
+          <p:cNvPr id="16" name="Table 0"/>
           <p:cNvGraphicFramePr>
             <a:graphicFrameLocks noGrp="1"/>
           </p:cNvGraphicFramePr>
@@ -4254,538 +4650,6 @@
 </p:sld>
 </file>
 
-<file path=ppt/slides/slide15.xml><?xml version="1.0" encoding="utf-8"?>
-<p:sld xmlns:a="http://schemas.openxmlformats.org/drawingml/2006/main" xmlns:r="http://schemas.openxmlformats.org/officeDocument/2006/relationships" xmlns:p="http://schemas.openxmlformats.org/presentationml/2006/main">
-  <p:cSld name="Slide 15">
-    <p:bg>
-      <p:bgPr>
-        <a:solidFill>
-          <a:srgbClr val="FFFFFF"/>
-        </a:solidFill>
-      </p:bgPr>
-    </p:bg>
-    <p:spTree>
-      <p:nvGrpSpPr>
-        <p:cNvPr id="1" name=""/>
-        <p:cNvGrpSpPr/>
-        <p:nvPr/>
-      </p:nvGrpSpPr>
-      <p:grpSpPr>
-        <a:xfrm>
-          <a:off x="0" y="0"/>
-          <a:ext cx="0" cy="0"/>
-          <a:chOff x="0" y="0"/>
-          <a:chExt cx="0" cy="0"/>
-        </a:xfrm>
-      </p:grpSpPr>
-      <p:sp>
-        <p:nvSpPr>
-          <p:cNvPr id="2" name="Shape 0"/>
-          <p:cNvSpPr/>
-          <p:nvPr/>
-        </p:nvSpPr>
-        <p:spPr>
-          <a:xfrm>
-            <a:off x="0" y="0"/>
-            <a:ext cx="54864" cy="5143500"/>
-          </a:xfrm>
-          <a:prstGeom prst="rect">
-            <a:avLst/>
-          </a:prstGeom>
-          <a:solidFill>
-            <a:srgbClr val="1E2761"/>
-          </a:solidFill>
-          <a:ln/>
-        </p:spPr>
-      </p:sp>
-      <p:sp>
-        <p:nvSpPr>
-          <p:cNvPr id="3" name="Text 1"/>
-          <p:cNvSpPr/>
-          <p:nvPr/>
-        </p:nvSpPr>
-        <p:spPr>
-          <a:xfrm>
-            <a:off x="5669280" y="274320"/>
-            <a:ext cx="3291840" cy="274320"/>
-          </a:xfrm>
-          <a:prstGeom prst="rect">
-            <a:avLst/>
-          </a:prstGeom>
-          <a:noFill/>
-          <a:ln/>
-        </p:spPr>
-        <p:txBody>
-          <a:bodyPr wrap="square" lIns="0" tIns="0" rIns="0" bIns="0" rtlCol="0" anchor="ctr"/>
-          <a:lstStyle/>
-          <a:p>
-            <a:pPr algn="r" indent="0" marL="0">
-              <a:buNone/>
-            </a:pPr>
-            <a:r>
-              <a:rPr lang="en-US" sz="1000" dirty="0">
-                <a:solidFill>
-                  <a:srgbClr val="6B7280"/>
-                </a:solidFill>
-                <a:latin typeface="Calibri" pitchFamily="34" charset="0"/>
-                <a:ea typeface="Calibri" pitchFamily="34" charset="-122"/>
-                <a:cs typeface="Calibri" pitchFamily="34" charset="-120"/>
-              </a:rPr>
-              <a:t>Day 1 · Module 2</a:t>
-            </a:r>
-            <a:endParaRPr lang="en-US" sz="1000" dirty="0"/>
-          </a:p>
-        </p:txBody>
-      </p:sp>
-      <p:sp>
-        <p:nvSpPr>
-          <p:cNvPr id="4" name="Text 2"/>
-          <p:cNvSpPr/>
-          <p:nvPr/>
-        </p:nvSpPr>
-        <p:spPr>
-          <a:xfrm>
-            <a:off x="365760" y="320040"/>
-            <a:ext cx="6217920" cy="640080"/>
-          </a:xfrm>
-          <a:prstGeom prst="rect">
-            <a:avLst/>
-          </a:prstGeom>
-          <a:noFill/>
-          <a:ln/>
-        </p:spPr>
-        <p:txBody>
-          <a:bodyPr wrap="square" lIns="0" tIns="0" rIns="0" bIns="0" rtlCol="0" anchor="ctr"/>
-          <a:lstStyle/>
-          <a:p>
-            <a:pPr indent="0" marL="0">
-              <a:buNone/>
-            </a:pPr>
-            <a:r>
-              <a:rPr lang="en-US" sz="2800" b="1" dirty="0">
-                <a:solidFill>
-                  <a:srgbClr val="1E2761"/>
-                </a:solidFill>
-                <a:latin typeface="Calibri" pitchFamily="34" charset="0"/>
-                <a:ea typeface="Calibri" pitchFamily="34" charset="-122"/>
-                <a:cs typeface="Calibri" pitchFamily="34" charset="-120"/>
-              </a:rPr>
-              <a:t>Portal for learning · CLI for production</a:t>
-            </a:r>
-            <a:endParaRPr lang="en-US" sz="2800" dirty="0"/>
-          </a:p>
-        </p:txBody>
-      </p:sp>
-      <p:sp>
-        <p:nvSpPr>
-          <p:cNvPr id="5" name="Text 3"/>
-          <p:cNvSpPr/>
-          <p:nvPr/>
-        </p:nvSpPr>
-        <p:spPr>
-          <a:xfrm>
-            <a:off x="365760" y="1051560"/>
-            <a:ext cx="8412480" cy="502920"/>
-          </a:xfrm>
-          <a:prstGeom prst="rect">
-            <a:avLst/>
-          </a:prstGeom>
-          <a:noFill/>
-          <a:ln/>
-        </p:spPr>
-        <p:txBody>
-          <a:bodyPr wrap="square" rtlCol="0" anchor="ctr"/>
-          <a:lstStyle/>
-          <a:p>
-            <a:pPr indent="0" marL="0">
-              <a:buNone/>
-            </a:pPr>
-            <a:r>
-              <a:rPr lang="en-US" sz="1400" i="1" dirty="0">
-                <a:solidFill>
-                  <a:srgbClr val="212121"/>
-                </a:solidFill>
-                <a:latin typeface="Calibri" pitchFamily="34" charset="0"/>
-                <a:ea typeface="Calibri" pitchFamily="34" charset="-122"/>
-                <a:cs typeface="Calibri" pitchFamily="34" charset="-120"/>
-              </a:rPr>
-              <a:t>The portal is a great teacher and a great debugger. For creating resources and shipping changes, real teams use code.</a:t>
-            </a:r>
-            <a:endParaRPr lang="en-US" sz="1400" dirty="0"/>
-          </a:p>
-        </p:txBody>
-      </p:sp>
-      <p:sp>
-        <p:nvSpPr>
-          <p:cNvPr id="6" name="Text 4"/>
-          <p:cNvSpPr/>
-          <p:nvPr/>
-        </p:nvSpPr>
-        <p:spPr>
-          <a:xfrm>
-            <a:off x="365760" y="1691640"/>
-            <a:ext cx="4069080" cy="365760"/>
-          </a:xfrm>
-          <a:prstGeom prst="rect">
-            <a:avLst/>
-          </a:prstGeom>
-          <a:noFill/>
-          <a:ln/>
-        </p:spPr>
-        <p:txBody>
-          <a:bodyPr wrap="square" lIns="0" tIns="0" rIns="0" bIns="0" rtlCol="0" anchor="ctr"/>
-          <a:lstStyle/>
-          <a:p>
-            <a:pPr indent="0" marL="0">
-              <a:buNone/>
-            </a:pPr>
-            <a:r>
-              <a:rPr lang="en-US" sz="2000" b="1" dirty="0">
-                <a:solidFill>
-                  <a:srgbClr val="1E2761"/>
-                </a:solidFill>
-                <a:latin typeface="Calibri" pitchFamily="34" charset="0"/>
-                <a:ea typeface="Calibri" pitchFamily="34" charset="-122"/>
-                <a:cs typeface="Calibri" pitchFamily="34" charset="-120"/>
-              </a:rPr>
-              <a:t>Use the portal for</a:t>
-            </a:r>
-            <a:endParaRPr lang="en-US" sz="2000" dirty="0"/>
-          </a:p>
-        </p:txBody>
-      </p:sp>
-      <p:sp>
-        <p:nvSpPr>
-          <p:cNvPr id="7" name="Text 5"/>
-          <p:cNvSpPr/>
-          <p:nvPr/>
-        </p:nvSpPr>
-        <p:spPr>
-          <a:xfrm>
-            <a:off x="4709160" y="1691640"/>
-            <a:ext cx="4069080" cy="365760"/>
-          </a:xfrm>
-          <a:prstGeom prst="rect">
-            <a:avLst/>
-          </a:prstGeom>
-          <a:noFill/>
-          <a:ln/>
-        </p:spPr>
-        <p:txBody>
-          <a:bodyPr wrap="square" lIns="0" tIns="0" rIns="0" bIns="0" rtlCol="0" anchor="ctr"/>
-          <a:lstStyle/>
-          <a:p>
-            <a:pPr indent="0" marL="0">
-              <a:buNone/>
-            </a:pPr>
-            <a:r>
-              <a:rPr lang="en-US" sz="2000" b="1" dirty="0">
-                <a:solidFill>
-                  <a:srgbClr val="1E2761"/>
-                </a:solidFill>
-                <a:latin typeface="Calibri" pitchFamily="34" charset="0"/>
-                <a:ea typeface="Calibri" pitchFamily="34" charset="-122"/>
-                <a:cs typeface="Calibri" pitchFamily="34" charset="-120"/>
-              </a:rPr>
-              <a:t>Use az / azd / SDK for</a:t>
-            </a:r>
-            <a:endParaRPr lang="en-US" sz="2000" dirty="0"/>
-          </a:p>
-        </p:txBody>
-      </p:sp>
-      <p:sp>
-        <p:nvSpPr>
-          <p:cNvPr id="8" name="Text 6"/>
-          <p:cNvSpPr/>
-          <p:nvPr/>
-        </p:nvSpPr>
-        <p:spPr>
-          <a:xfrm>
-            <a:off x="365760" y="2148840"/>
-            <a:ext cx="4069080" cy="2103120"/>
-          </a:xfrm>
-          <a:prstGeom prst="rect">
-            <a:avLst/>
-          </a:prstGeom>
-          <a:noFill/>
-          <a:ln/>
-        </p:spPr>
-        <p:txBody>
-          <a:bodyPr wrap="square" rtlCol="0" anchor="ctr"/>
-          <a:lstStyle/>
-          <a:p>
-            <a:pPr marL="342900" indent="-342900">
-              <a:spcAft>
-                <a:spcPts val="600"/>
-              </a:spcAft>
-              <a:buSzPct val="100000"/>
-              <a:buChar char="•"/>
-            </a:pPr>
-            <a:r>
-              <a:rPr lang="en-US" sz="1500" dirty="0">
-                <a:solidFill>
-                  <a:srgbClr val="212121"/>
-                </a:solidFill>
-                <a:latin typeface="Calibri" pitchFamily="34" charset="0"/>
-                <a:ea typeface="Calibri" pitchFamily="34" charset="-122"/>
-                <a:cs typeface="Calibri" pitchFamily="34" charset="-120"/>
-              </a:rPr>
-              <a:t>Exploring what Foundry can do</a:t>
-            </a:r>
-            <a:endParaRPr lang="en-US" sz="1500" dirty="0"/>
-          </a:p>
-          <a:p>
-            <a:pPr marL="342900" indent="-342900">
-              <a:spcAft>
-                <a:spcPts val="600"/>
-              </a:spcAft>
-              <a:buSzPct val="100000"/>
-              <a:buChar char="•"/>
-            </a:pPr>
-            <a:r>
-              <a:rPr lang="en-US" sz="1500" dirty="0">
-                <a:solidFill>
-                  <a:srgbClr val="212121"/>
-                </a:solidFill>
-                <a:latin typeface="Calibri" pitchFamily="34" charset="0"/>
-                <a:ea typeface="Calibri" pitchFamily="34" charset="-122"/>
-                <a:cs typeface="Calibri" pitchFamily="34" charset="-120"/>
-              </a:rPr>
-              <a:t>Sanity-checking a prompt in the playground</a:t>
-            </a:r>
-            <a:endParaRPr lang="en-US" sz="1500" dirty="0"/>
-          </a:p>
-          <a:p>
-            <a:pPr marL="342900" indent="-342900">
-              <a:spcAft>
-                <a:spcPts val="600"/>
-              </a:spcAft>
-              <a:buSzPct val="100000"/>
-              <a:buChar char="•"/>
-            </a:pPr>
-            <a:r>
-              <a:rPr lang="en-US" sz="1500" dirty="0">
-                <a:solidFill>
-                  <a:srgbClr val="212121"/>
-                </a:solidFill>
-                <a:latin typeface="Calibri" pitchFamily="34" charset="0"/>
-                <a:ea typeface="Calibri" pitchFamily="34" charset="-122"/>
-                <a:cs typeface="Calibri" pitchFamily="34" charset="-120"/>
-              </a:rPr>
-              <a:t>Inspecting a trace when something goes wrong</a:t>
-            </a:r>
-            <a:endParaRPr lang="en-US" sz="1500" dirty="0"/>
-          </a:p>
-          <a:p>
-            <a:pPr marL="342900" indent="-342900">
-              <a:spcAft>
-                <a:spcPts val="600"/>
-              </a:spcAft>
-              <a:buSzPct val="100000"/>
-              <a:buChar char="•"/>
-            </a:pPr>
-            <a:r>
-              <a:rPr lang="en-US" sz="1500" dirty="0">
-                <a:solidFill>
-                  <a:srgbClr val="212121"/>
-                </a:solidFill>
-                <a:latin typeface="Calibri" pitchFamily="34" charset="0"/>
-                <a:ea typeface="Calibri" pitchFamily="34" charset="-122"/>
-                <a:cs typeface="Calibri" pitchFamily="34" charset="-120"/>
-              </a:rPr>
-              <a:t>Monitoring dashboards and metrics</a:t>
-            </a:r>
-            <a:endParaRPr lang="en-US" sz="1500" dirty="0"/>
-          </a:p>
-        </p:txBody>
-      </p:sp>
-      <p:sp>
-        <p:nvSpPr>
-          <p:cNvPr id="9" name="Text 7"/>
-          <p:cNvSpPr/>
-          <p:nvPr/>
-        </p:nvSpPr>
-        <p:spPr>
-          <a:xfrm>
-            <a:off x="4709160" y="2148840"/>
-            <a:ext cx="4069080" cy="2103120"/>
-          </a:xfrm>
-          <a:prstGeom prst="rect">
-            <a:avLst/>
-          </a:prstGeom>
-          <a:noFill/>
-          <a:ln/>
-        </p:spPr>
-        <p:txBody>
-          <a:bodyPr wrap="square" rtlCol="0" anchor="ctr"/>
-          <a:lstStyle/>
-          <a:p>
-            <a:pPr marL="342900" indent="-342900">
-              <a:spcAft>
-                <a:spcPts val="600"/>
-              </a:spcAft>
-              <a:buSzPct val="100000"/>
-              <a:buChar char="•"/>
-            </a:pPr>
-            <a:r>
-              <a:rPr lang="en-US" sz="1500" dirty="0">
-                <a:solidFill>
-                  <a:srgbClr val="212121"/>
-                </a:solidFill>
-                <a:latin typeface="Calibri" pitchFamily="34" charset="0"/>
-                <a:ea typeface="Calibri" pitchFamily="34" charset="-122"/>
-                <a:cs typeface="Calibri" pitchFamily="34" charset="-120"/>
-              </a:rPr>
-              <a:t>Creating projects, deployments, agents</a:t>
-            </a:r>
-            <a:endParaRPr lang="en-US" sz="1500" dirty="0"/>
-          </a:p>
-          <a:p>
-            <a:pPr marL="342900" indent="-342900">
-              <a:spcAft>
-                <a:spcPts val="600"/>
-              </a:spcAft>
-              <a:buSzPct val="100000"/>
-              <a:buChar char="•"/>
-            </a:pPr>
-            <a:r>
-              <a:rPr lang="en-US" sz="1500" dirty="0">
-                <a:solidFill>
-                  <a:srgbClr val="212121"/>
-                </a:solidFill>
-                <a:latin typeface="Calibri" pitchFamily="34" charset="0"/>
-                <a:ea typeface="Calibri" pitchFamily="34" charset="-122"/>
-                <a:cs typeface="Calibri" pitchFamily="34" charset="-120"/>
-              </a:rPr>
-              <a:t>Wiring connections to Storage / Key Vault / AI Search</a:t>
-            </a:r>
-            <a:endParaRPr lang="en-US" sz="1500" dirty="0"/>
-          </a:p>
-          <a:p>
-            <a:pPr marL="342900" indent="-342900">
-              <a:spcAft>
-                <a:spcPts val="600"/>
-              </a:spcAft>
-              <a:buSzPct val="100000"/>
-              <a:buChar char="•"/>
-            </a:pPr>
-            <a:r>
-              <a:rPr lang="en-US" sz="1500" dirty="0">
-                <a:solidFill>
-                  <a:srgbClr val="212121"/>
-                </a:solidFill>
-                <a:latin typeface="Calibri" pitchFamily="34" charset="0"/>
-                <a:ea typeface="Calibri" pitchFamily="34" charset="-122"/>
-                <a:cs typeface="Calibri" pitchFamily="34" charset="-120"/>
-              </a:rPr>
-              <a:t>Deploying Hosted agents (zip + Foundry portal is a shortcut; azd / az is the norm)</a:t>
-            </a:r>
-            <a:endParaRPr lang="en-US" sz="1500" dirty="0"/>
-          </a:p>
-          <a:p>
-            <a:pPr marL="342900" indent="-342900">
-              <a:spcAft>
-                <a:spcPts val="600"/>
-              </a:spcAft>
-              <a:buSzPct val="100000"/>
-              <a:buChar char="•"/>
-            </a:pPr>
-            <a:r>
-              <a:rPr lang="en-US" sz="1500" dirty="0">
-                <a:solidFill>
-                  <a:srgbClr val="212121"/>
-                </a:solidFill>
-                <a:latin typeface="Calibri" pitchFamily="34" charset="0"/>
-                <a:ea typeface="Calibri" pitchFamily="34" charset="-122"/>
-                <a:cs typeface="Calibri" pitchFamily="34" charset="-120"/>
-              </a:rPr>
-              <a:t>Anything that needs a repeatable, reviewable change</a:t>
-            </a:r>
-            <a:endParaRPr lang="en-US" sz="1500" dirty="0"/>
-          </a:p>
-        </p:txBody>
-      </p:sp>
-      <p:sp>
-        <p:nvSpPr>
-          <p:cNvPr id="10" name="Shape 8"/>
-          <p:cNvSpPr/>
-          <p:nvPr/>
-        </p:nvSpPr>
-        <p:spPr>
-          <a:xfrm>
-            <a:off x="365760" y="4343400"/>
-            <a:ext cx="8412480" cy="457200"/>
-          </a:xfrm>
-          <a:prstGeom prst="rect">
-            <a:avLst/>
-          </a:prstGeom>
-          <a:solidFill>
-            <a:srgbClr val="CADCFC"/>
-          </a:solidFill>
-          <a:ln/>
-        </p:spPr>
-      </p:sp>
-      <p:sp>
-        <p:nvSpPr>
-          <p:cNvPr id="11" name="Text 9"/>
-          <p:cNvSpPr/>
-          <p:nvPr/>
-        </p:nvSpPr>
-        <p:spPr>
-          <a:xfrm>
-            <a:off x="502920" y="4370832"/>
-            <a:ext cx="8138160" cy="402336"/>
-          </a:xfrm>
-          <a:prstGeom prst="rect">
-            <a:avLst/>
-          </a:prstGeom>
-          <a:noFill/>
-          <a:ln/>
-        </p:spPr>
-        <p:txBody>
-          <a:bodyPr wrap="square" lIns="0" tIns="0" rIns="0" bIns="0" rtlCol="0" anchor="ctr"/>
-          <a:lstStyle/>
-          <a:p>
-            <a:pPr indent="0" marL="0">
-              <a:buNone/>
-            </a:pPr>
-            <a:r>
-              <a:rPr lang="en-US" sz="1200" b="1" dirty="0">
-                <a:solidFill>
-                  <a:srgbClr val="1E2761"/>
-                </a:solidFill>
-                <a:latin typeface="Calibri" pitchFamily="34" charset="0"/>
-                <a:ea typeface="Calibri" pitchFamily="34" charset="-122"/>
-                <a:cs typeface="Calibri" pitchFamily="34" charset="-120"/>
-              </a:rPr>
-              <a:t>IaC-first operating norm: </a:t>
-            </a:r>
-            <a:pPr indent="0" marL="0">
-              <a:buNone/>
-            </a:pPr>
-            <a:r>
-              <a:rPr lang="en-US" sz="1200" dirty="0">
-                <a:solidFill>
-                  <a:srgbClr val="1E2761"/>
-                </a:solidFill>
-                <a:latin typeface="Calibri" pitchFamily="34" charset="0"/>
-                <a:ea typeface="Calibri" pitchFamily="34" charset="-122"/>
-                <a:cs typeface="Calibri" pitchFamily="34" charset="-120"/>
-              </a:rPr>
-              <a:t>resource creation and programmatic operations live in code. Every lab this week reflects that.</a:t>
-            </a:r>
-            <a:endParaRPr lang="en-US" sz="1200" dirty="0"/>
-          </a:p>
-        </p:txBody>
-      </p:sp>
-    </p:spTree>
-  </p:cSld>
-  <p:clrMapOvr>
-    <a:masterClrMapping/>
-  </p:clrMapOvr>
-</p:sld>
-</file>
-
 <file path=ppt/slides/slide16.xml><?xml version="1.0" encoding="utf-8"?>
 <p:sld xmlns:a="http://schemas.openxmlformats.org/drawingml/2006/main" xmlns:r="http://schemas.openxmlformats.org/officeDocument/2006/relationships" xmlns:p="http://schemas.openxmlformats.org/presentationml/2006/main">
   <p:cSld name="Slide 16">
@@ -4902,7 +4766,7 @@
                 <a:ea typeface="Calibri" pitchFamily="34" charset="-122"/>
                 <a:cs typeface="Calibri" pitchFamily="34" charset="-120"/>
               </a:rPr>
-              <a:t>Common portal gotchas</a:t>
+              <a:t>Portal for learning · CLI for production</a:t>
             </a:r>
             <a:endParaRPr lang="en-US" sz="2800" dirty="0"/>
           </a:p>
@@ -4916,8 +4780,125 @@
         </p:nvSpPr>
         <p:spPr>
           <a:xfrm>
-            <a:off x="365760" y="1097280"/>
-            <a:ext cx="8412480" cy="3749040"/>
+            <a:off x="365760" y="1051560"/>
+            <a:ext cx="8412480" cy="502920"/>
+          </a:xfrm>
+          <a:prstGeom prst="rect">
+            <a:avLst/>
+          </a:prstGeom>
+          <a:noFill/>
+          <a:ln/>
+        </p:spPr>
+        <p:txBody>
+          <a:bodyPr wrap="square" rtlCol="0" anchor="ctr"/>
+          <a:lstStyle/>
+          <a:p>
+            <a:pPr indent="0" marL="0">
+              <a:buNone/>
+            </a:pPr>
+            <a:r>
+              <a:rPr lang="en-US" sz="1400" i="1" dirty="0">
+                <a:solidFill>
+                  <a:srgbClr val="212121"/>
+                </a:solidFill>
+                <a:latin typeface="Calibri" pitchFamily="34" charset="0"/>
+                <a:ea typeface="Calibri" pitchFamily="34" charset="-122"/>
+                <a:cs typeface="Calibri" pitchFamily="34" charset="-120"/>
+              </a:rPr>
+              <a:t>The portal is a great teacher and a great debugger. For creating resources and shipping changes, real teams use code.</a:t>
+            </a:r>
+            <a:endParaRPr lang="en-US" sz="1400" dirty="0"/>
+          </a:p>
+        </p:txBody>
+      </p:sp>
+      <p:sp>
+        <p:nvSpPr>
+          <p:cNvPr id="6" name="Text 4"/>
+          <p:cNvSpPr/>
+          <p:nvPr/>
+        </p:nvSpPr>
+        <p:spPr>
+          <a:xfrm>
+            <a:off x="365760" y="1691640"/>
+            <a:ext cx="4069080" cy="365760"/>
+          </a:xfrm>
+          <a:prstGeom prst="rect">
+            <a:avLst/>
+          </a:prstGeom>
+          <a:noFill/>
+          <a:ln/>
+        </p:spPr>
+        <p:txBody>
+          <a:bodyPr wrap="square" lIns="0" tIns="0" rIns="0" bIns="0" rtlCol="0" anchor="ctr"/>
+          <a:lstStyle/>
+          <a:p>
+            <a:pPr indent="0" marL="0">
+              <a:buNone/>
+            </a:pPr>
+            <a:r>
+              <a:rPr lang="en-US" sz="2000" b="1" dirty="0">
+                <a:solidFill>
+                  <a:srgbClr val="1E2761"/>
+                </a:solidFill>
+                <a:latin typeface="Calibri" pitchFamily="34" charset="0"/>
+                <a:ea typeface="Calibri" pitchFamily="34" charset="-122"/>
+                <a:cs typeface="Calibri" pitchFamily="34" charset="-120"/>
+              </a:rPr>
+              <a:t>Use the portal for</a:t>
+            </a:r>
+            <a:endParaRPr lang="en-US" sz="2000" dirty="0"/>
+          </a:p>
+        </p:txBody>
+      </p:sp>
+      <p:sp>
+        <p:nvSpPr>
+          <p:cNvPr id="7" name="Text 5"/>
+          <p:cNvSpPr/>
+          <p:nvPr/>
+        </p:nvSpPr>
+        <p:spPr>
+          <a:xfrm>
+            <a:off x="4709160" y="1691640"/>
+            <a:ext cx="4069080" cy="365760"/>
+          </a:xfrm>
+          <a:prstGeom prst="rect">
+            <a:avLst/>
+          </a:prstGeom>
+          <a:noFill/>
+          <a:ln/>
+        </p:spPr>
+        <p:txBody>
+          <a:bodyPr wrap="square" lIns="0" tIns="0" rIns="0" bIns="0" rtlCol="0" anchor="ctr"/>
+          <a:lstStyle/>
+          <a:p>
+            <a:pPr indent="0" marL="0">
+              <a:buNone/>
+            </a:pPr>
+            <a:r>
+              <a:rPr lang="en-US" sz="2000" b="1" dirty="0">
+                <a:solidFill>
+                  <a:srgbClr val="1E2761"/>
+                </a:solidFill>
+                <a:latin typeface="Calibri" pitchFamily="34" charset="0"/>
+                <a:ea typeface="Calibri" pitchFamily="34" charset="-122"/>
+                <a:cs typeface="Calibri" pitchFamily="34" charset="-120"/>
+              </a:rPr>
+              <a:t>Use az / azd / SDK for</a:t>
+            </a:r>
+            <a:endParaRPr lang="en-US" sz="2000" dirty="0"/>
+          </a:p>
+        </p:txBody>
+      </p:sp>
+      <p:sp>
+        <p:nvSpPr>
+          <p:cNvPr id="8" name="Text 6"/>
+          <p:cNvSpPr/>
+          <p:nvPr/>
+        </p:nvSpPr>
+        <p:spPr>
+          <a:xfrm>
+            <a:off x="365760" y="2148840"/>
+            <a:ext cx="4069080" cy="2103120"/>
           </a:xfrm>
           <a:prstGeom prst="rect">
             <a:avLst/>
@@ -4945,7 +4926,7 @@
                 <a:ea typeface="Calibri" pitchFamily="34" charset="-122"/>
                 <a:cs typeface="Calibri" pitchFamily="34" charset="-120"/>
               </a:rPr>
-              <a:t>Quota errors on deployment — request a bump in the region before Day 1</a:t>
+              <a:t>Exploring what Foundry can do</a:t>
             </a:r>
             <a:endParaRPr lang="en-US" sz="1500" dirty="0"/>
           </a:p>
@@ -4966,7 +4947,7 @@
                 <a:ea typeface="Calibri" pitchFamily="34" charset="-122"/>
                 <a:cs typeface="Calibri" pitchFamily="34" charset="-120"/>
               </a:rPr>
-              <a:t>Missing role assignments — you need at least Foundry User (previously Azure AI User) at the Foundry resource scope; 401/403 usually means this</a:t>
+              <a:t>Sanity-checking a prompt in the playground</a:t>
             </a:r>
             <a:endParaRPr lang="en-US" sz="1500" dirty="0"/>
           </a:p>
@@ -4987,7 +4968,7 @@
                 <a:ea typeface="Calibri" pitchFamily="34" charset="-122"/>
                 <a:cs typeface="Calibri" pitchFamily="34" charset="-120"/>
               </a:rPr>
-              <a:t>Region mismatch — model deployment region must be reachable by IQ / AI Search</a:t>
+              <a:t>Inspecting a trace when something goes wrong</a:t>
             </a:r>
             <a:endParaRPr lang="en-US" sz="1500" dirty="0"/>
           </a:p>
@@ -5008,9 +4989,188 @@
                 <a:ea typeface="Calibri" pitchFamily="34" charset="-122"/>
                 <a:cs typeface="Calibri" pitchFamily="34" charset="-120"/>
               </a:rPr>
-              <a:t>Preview features move — Toolbox and parts of IQ are evolving; trust running code over screenshots</a:t>
+              <a:t>Monitoring dashboards and metrics</a:t>
             </a:r>
             <a:endParaRPr lang="en-US" sz="1500" dirty="0"/>
+          </a:p>
+        </p:txBody>
+      </p:sp>
+      <p:sp>
+        <p:nvSpPr>
+          <p:cNvPr id="9" name="Text 7"/>
+          <p:cNvSpPr/>
+          <p:nvPr/>
+        </p:nvSpPr>
+        <p:spPr>
+          <a:xfrm>
+            <a:off x="4709160" y="2148840"/>
+            <a:ext cx="4069080" cy="2103120"/>
+          </a:xfrm>
+          <a:prstGeom prst="rect">
+            <a:avLst/>
+          </a:prstGeom>
+          <a:noFill/>
+          <a:ln/>
+        </p:spPr>
+        <p:txBody>
+          <a:bodyPr wrap="square" rtlCol="0" anchor="ctr"/>
+          <a:lstStyle/>
+          <a:p>
+            <a:pPr marL="342900" indent="-342900">
+              <a:spcAft>
+                <a:spcPts val="600"/>
+              </a:spcAft>
+              <a:buSzPct val="100000"/>
+              <a:buChar char="•"/>
+            </a:pPr>
+            <a:r>
+              <a:rPr lang="en-US" sz="1500" dirty="0">
+                <a:solidFill>
+                  <a:srgbClr val="212121"/>
+                </a:solidFill>
+                <a:latin typeface="Calibri" pitchFamily="34" charset="0"/>
+                <a:ea typeface="Calibri" pitchFamily="34" charset="-122"/>
+                <a:cs typeface="Calibri" pitchFamily="34" charset="-120"/>
+              </a:rPr>
+              <a:t>Creating projects, deployments, agents</a:t>
+            </a:r>
+            <a:endParaRPr lang="en-US" sz="1500" dirty="0"/>
+          </a:p>
+          <a:p>
+            <a:pPr marL="342900" indent="-342900">
+              <a:spcAft>
+                <a:spcPts val="600"/>
+              </a:spcAft>
+              <a:buSzPct val="100000"/>
+              <a:buChar char="•"/>
+            </a:pPr>
+            <a:r>
+              <a:rPr lang="en-US" sz="1500" dirty="0">
+                <a:solidFill>
+                  <a:srgbClr val="212121"/>
+                </a:solidFill>
+                <a:latin typeface="Calibri" pitchFamily="34" charset="0"/>
+                <a:ea typeface="Calibri" pitchFamily="34" charset="-122"/>
+                <a:cs typeface="Calibri" pitchFamily="34" charset="-120"/>
+              </a:rPr>
+              <a:t>Wiring connections to Storage / Key Vault / AI Search</a:t>
+            </a:r>
+            <a:endParaRPr lang="en-US" sz="1500" dirty="0"/>
+          </a:p>
+          <a:p>
+            <a:pPr marL="342900" indent="-342900">
+              <a:spcAft>
+                <a:spcPts val="600"/>
+              </a:spcAft>
+              <a:buSzPct val="100000"/>
+              <a:buChar char="•"/>
+            </a:pPr>
+            <a:r>
+              <a:rPr lang="en-US" sz="1500" dirty="0">
+                <a:solidFill>
+                  <a:srgbClr val="212121"/>
+                </a:solidFill>
+                <a:latin typeface="Calibri" pitchFamily="34" charset="0"/>
+                <a:ea typeface="Calibri" pitchFamily="34" charset="-122"/>
+                <a:cs typeface="Calibri" pitchFamily="34" charset="-120"/>
+              </a:rPr>
+              <a:t>Deploying Hosted agents (zip + Foundry portal is a shortcut; azd / az is the norm)</a:t>
+            </a:r>
+            <a:endParaRPr lang="en-US" sz="1500" dirty="0"/>
+          </a:p>
+          <a:p>
+            <a:pPr marL="342900" indent="-342900">
+              <a:spcAft>
+                <a:spcPts val="600"/>
+              </a:spcAft>
+              <a:buSzPct val="100000"/>
+              <a:buChar char="•"/>
+            </a:pPr>
+            <a:r>
+              <a:rPr lang="en-US" sz="1500" dirty="0">
+                <a:solidFill>
+                  <a:srgbClr val="212121"/>
+                </a:solidFill>
+                <a:latin typeface="Calibri" pitchFamily="34" charset="0"/>
+                <a:ea typeface="Calibri" pitchFamily="34" charset="-122"/>
+                <a:cs typeface="Calibri" pitchFamily="34" charset="-120"/>
+              </a:rPr>
+              <a:t>Anything that needs a repeatable, reviewable change</a:t>
+            </a:r>
+            <a:endParaRPr lang="en-US" sz="1500" dirty="0"/>
+          </a:p>
+        </p:txBody>
+      </p:sp>
+      <p:sp>
+        <p:nvSpPr>
+          <p:cNvPr id="10" name="Shape 8"/>
+          <p:cNvSpPr/>
+          <p:nvPr/>
+        </p:nvSpPr>
+        <p:spPr>
+          <a:xfrm>
+            <a:off x="365760" y="4343400"/>
+            <a:ext cx="8412480" cy="457200"/>
+          </a:xfrm>
+          <a:prstGeom prst="rect">
+            <a:avLst/>
+          </a:prstGeom>
+          <a:solidFill>
+            <a:srgbClr val="CADCFC"/>
+          </a:solidFill>
+          <a:ln/>
+        </p:spPr>
+      </p:sp>
+      <p:sp>
+        <p:nvSpPr>
+          <p:cNvPr id="11" name="Text 9"/>
+          <p:cNvSpPr/>
+          <p:nvPr/>
+        </p:nvSpPr>
+        <p:spPr>
+          <a:xfrm>
+            <a:off x="502920" y="4370832"/>
+            <a:ext cx="8138160" cy="402336"/>
+          </a:xfrm>
+          <a:prstGeom prst="rect">
+            <a:avLst/>
+          </a:prstGeom>
+          <a:noFill/>
+          <a:ln/>
+        </p:spPr>
+        <p:txBody>
+          <a:bodyPr wrap="square" lIns="0" tIns="0" rIns="0" bIns="0" rtlCol="0" anchor="ctr"/>
+          <a:lstStyle/>
+          <a:p>
+            <a:pPr indent="0" marL="0">
+              <a:buNone/>
+            </a:pPr>
+            <a:r>
+              <a:rPr lang="en-US" sz="1200" b="1" dirty="0">
+                <a:solidFill>
+                  <a:srgbClr val="1E2761"/>
+                </a:solidFill>
+                <a:latin typeface="Calibri" pitchFamily="34" charset="0"/>
+                <a:ea typeface="Calibri" pitchFamily="34" charset="-122"/>
+                <a:cs typeface="Calibri" pitchFamily="34" charset="-120"/>
+              </a:rPr>
+              <a:t>IaC-first operating norm: </a:t>
+            </a:r>
+            <a:pPr indent="0" marL="0">
+              <a:buNone/>
+            </a:pPr>
+            <a:r>
+              <a:rPr lang="en-US" sz="1200" dirty="0">
+                <a:solidFill>
+                  <a:srgbClr val="1E2761"/>
+                </a:solidFill>
+                <a:latin typeface="Calibri" pitchFamily="34" charset="0"/>
+                <a:ea typeface="Calibri" pitchFamily="34" charset="-122"/>
+                <a:cs typeface="Calibri" pitchFamily="34" charset="-120"/>
+              </a:rPr>
+              <a:t>resource creation and programmatic operations live in code. Every lab this week reflects that.</a:t>
+            </a:r>
+            <a:endParaRPr lang="en-US" sz="1200" dirty="0"/>
           </a:p>
         </p:txBody>
       </p:sp>
@@ -5138,7 +5298,7 @@
                 <a:ea typeface="Calibri" pitchFamily="34" charset="-122"/>
                 <a:cs typeface="Calibri" pitchFamily="34" charset="-120"/>
               </a:rPr>
-              <a:t>Live walkthrough (in the portal now)</a:t>
+              <a:t>Common portal gotchas</a:t>
             </a:r>
             <a:endParaRPr lang="en-US" sz="2800" dirty="0"/>
           </a:p>
@@ -5181,7 +5341,7 @@
                 <a:ea typeface="Calibri" pitchFamily="34" charset="-122"/>
                 <a:cs typeface="Calibri" pitchFamily="34" charset="-120"/>
               </a:rPr>
-              <a:t>Sign into ai.azure.com and open a project</a:t>
+              <a:t>Quota errors on deployment — request a bump in the region before Day 1</a:t>
             </a:r>
             <a:endParaRPr lang="en-US" sz="1500" dirty="0"/>
           </a:p>
@@ -5202,7 +5362,7 @@
                 <a:ea typeface="Calibri" pitchFamily="34" charset="-122"/>
                 <a:cs typeface="Calibri" pitchFamily="34" charset="-120"/>
               </a:rPr>
-              <a:t>Deploy a model</a:t>
+              <a:t>Missing role assignments — you need at least Foundry User (previously Azure AI User) at the Foundry resource scope; 401/403 usually means this</a:t>
             </a:r>
             <a:endParaRPr lang="en-US" sz="1500" dirty="0"/>
           </a:p>
@@ -5223,7 +5383,7 @@
                 <a:ea typeface="Calibri" pitchFamily="34" charset="-122"/>
                 <a:cs typeface="Calibri" pitchFamily="34" charset="-120"/>
               </a:rPr>
-              <a:t>Copy the project endpoint</a:t>
+              <a:t>Region mismatch — model deployment region must be reachable by IQ / AI Search</a:t>
             </a:r>
             <a:endParaRPr lang="en-US" sz="1500" dirty="0"/>
           </a:p>
@@ -5244,90 +5404,9 @@
                 <a:ea typeface="Calibri" pitchFamily="34" charset="-122"/>
                 <a:cs typeface="Calibri" pitchFamily="34" charset="-120"/>
               </a:rPr>
-              <a:t>Open the chat playground; send a test prompt</a:t>
+              <a:t>Preview features move — Toolbox and parts of IQ are evolving; trust running code over screenshots</a:t>
             </a:r>
             <a:endParaRPr lang="en-US" sz="1500" dirty="0"/>
-          </a:p>
-          <a:p>
-            <a:pPr marL="342900" indent="-342900">
-              <a:spcAft>
-                <a:spcPts val="600"/>
-              </a:spcAft>
-              <a:buSzPct val="100000"/>
-              <a:buChar char="•"/>
-            </a:pPr>
-            <a:r>
-              <a:rPr lang="en-US" sz="1500" dirty="0">
-                <a:solidFill>
-                  <a:srgbClr val="212121"/>
-                </a:solidFill>
-                <a:latin typeface="Calibri" pitchFamily="34" charset="0"/>
-                <a:ea typeface="Calibri" pitchFamily="34" charset="-122"/>
-                <a:cs typeface="Calibri" pitchFamily="34" charset="-120"/>
-              </a:rPr>
-              <a:t>Show the Toolbox catalog and one entry</a:t>
-            </a:r>
-            <a:endParaRPr lang="en-US" sz="1500" dirty="0"/>
-          </a:p>
-          <a:p>
-            <a:pPr marL="342900" indent="-342900">
-              <a:spcAft>
-                <a:spcPts val="600"/>
-              </a:spcAft>
-              <a:buSzPct val="100000"/>
-              <a:buChar char="•"/>
-            </a:pPr>
-            <a:r>
-              <a:rPr lang="en-US" sz="1500" dirty="0">
-                <a:solidFill>
-                  <a:srgbClr val="212121"/>
-                </a:solidFill>
-                <a:latin typeface="Calibri" pitchFamily="34" charset="0"/>
-                <a:ea typeface="Calibri" pitchFamily="34" charset="-122"/>
-                <a:cs typeface="Calibri" pitchFamily="34" charset="-120"/>
-              </a:rPr>
-              <a:t>Show the Foundry IQ landing page and one pre-provisioned knowledge source</a:t>
-            </a:r>
-            <a:endParaRPr lang="en-US" sz="1500" dirty="0"/>
-          </a:p>
-        </p:txBody>
-      </p:sp>
-      <p:sp>
-        <p:nvSpPr>
-          <p:cNvPr id="6" name="Text 4"/>
-          <p:cNvSpPr/>
-          <p:nvPr/>
-        </p:nvSpPr>
-        <p:spPr>
-          <a:xfrm>
-            <a:off x="365760" y="4206240"/>
-            <a:ext cx="8412480" cy="457200"/>
-          </a:xfrm>
-          <a:prstGeom prst="rect">
-            <a:avLst/>
-          </a:prstGeom>
-          <a:noFill/>
-          <a:ln/>
-        </p:spPr>
-        <p:txBody>
-          <a:bodyPr wrap="square" rtlCol="0" anchor="ctr"/>
-          <a:lstStyle/>
-          <a:p>
-            <a:pPr indent="0" marL="0">
-              <a:buNone/>
-            </a:pPr>
-            <a:r>
-              <a:rPr lang="en-US" sz="1400" b="1" i="1" dirty="0">
-                <a:solidFill>
-                  <a:srgbClr val="1E2761"/>
-                </a:solidFill>
-                <a:latin typeface="Calibri" pitchFamily="34" charset="0"/>
-                <a:ea typeface="Calibri" pitchFamily="34" charset="-122"/>
-                <a:cs typeface="Calibri" pitchFamily="34" charset="-120"/>
-              </a:rPr>
-              <a:t>Try it yourself: do steps 1–4 on your own sub before the module ends.</a:t>
-            </a:r>
-            <a:endParaRPr lang="en-US" sz="1400" dirty="0"/>
           </a:p>
         </p:txBody>
       </p:sp>
@@ -5455,6 +5534,323 @@
                 <a:ea typeface="Calibri" pitchFamily="34" charset="-122"/>
                 <a:cs typeface="Calibri" pitchFamily="34" charset="-120"/>
               </a:rPr>
+              <a:t>Live walkthrough (in the portal now)</a:t>
+            </a:r>
+            <a:endParaRPr lang="en-US" sz="2800" dirty="0"/>
+          </a:p>
+        </p:txBody>
+      </p:sp>
+      <p:sp>
+        <p:nvSpPr>
+          <p:cNvPr id="5" name="Text 3"/>
+          <p:cNvSpPr/>
+          <p:nvPr/>
+        </p:nvSpPr>
+        <p:spPr>
+          <a:xfrm>
+            <a:off x="365760" y="1097280"/>
+            <a:ext cx="8412480" cy="3749040"/>
+          </a:xfrm>
+          <a:prstGeom prst="rect">
+            <a:avLst/>
+          </a:prstGeom>
+          <a:noFill/>
+          <a:ln/>
+        </p:spPr>
+        <p:txBody>
+          <a:bodyPr wrap="square" rtlCol="0" anchor="ctr"/>
+          <a:lstStyle/>
+          <a:p>
+            <a:pPr marL="342900" indent="-342900">
+              <a:spcAft>
+                <a:spcPts val="600"/>
+              </a:spcAft>
+              <a:buSzPct val="100000"/>
+              <a:buChar char="•"/>
+            </a:pPr>
+            <a:r>
+              <a:rPr lang="en-US" sz="1500" dirty="0">
+                <a:solidFill>
+                  <a:srgbClr val="212121"/>
+                </a:solidFill>
+                <a:latin typeface="Calibri" pitchFamily="34" charset="0"/>
+                <a:ea typeface="Calibri" pitchFamily="34" charset="-122"/>
+                <a:cs typeface="Calibri" pitchFamily="34" charset="-120"/>
+              </a:rPr>
+              <a:t>Sign into ai.azure.com and open a project</a:t>
+            </a:r>
+            <a:endParaRPr lang="en-US" sz="1500" dirty="0"/>
+          </a:p>
+          <a:p>
+            <a:pPr marL="342900" indent="-342900">
+              <a:spcAft>
+                <a:spcPts val="600"/>
+              </a:spcAft>
+              <a:buSzPct val="100000"/>
+              <a:buChar char="•"/>
+            </a:pPr>
+            <a:r>
+              <a:rPr lang="en-US" sz="1500" dirty="0">
+                <a:solidFill>
+                  <a:srgbClr val="212121"/>
+                </a:solidFill>
+                <a:latin typeface="Calibri" pitchFamily="34" charset="0"/>
+                <a:ea typeface="Calibri" pitchFamily="34" charset="-122"/>
+                <a:cs typeface="Calibri" pitchFamily="34" charset="-120"/>
+              </a:rPr>
+              <a:t>Deploy a model</a:t>
+            </a:r>
+            <a:endParaRPr lang="en-US" sz="1500" dirty="0"/>
+          </a:p>
+          <a:p>
+            <a:pPr marL="342900" indent="-342900">
+              <a:spcAft>
+                <a:spcPts val="600"/>
+              </a:spcAft>
+              <a:buSzPct val="100000"/>
+              <a:buChar char="•"/>
+            </a:pPr>
+            <a:r>
+              <a:rPr lang="en-US" sz="1500" dirty="0">
+                <a:solidFill>
+                  <a:srgbClr val="212121"/>
+                </a:solidFill>
+                <a:latin typeface="Calibri" pitchFamily="34" charset="0"/>
+                <a:ea typeface="Calibri" pitchFamily="34" charset="-122"/>
+                <a:cs typeface="Calibri" pitchFamily="34" charset="-120"/>
+              </a:rPr>
+              <a:t>Copy the project endpoint</a:t>
+            </a:r>
+            <a:endParaRPr lang="en-US" sz="1500" dirty="0"/>
+          </a:p>
+          <a:p>
+            <a:pPr marL="342900" indent="-342900">
+              <a:spcAft>
+                <a:spcPts val="600"/>
+              </a:spcAft>
+              <a:buSzPct val="100000"/>
+              <a:buChar char="•"/>
+            </a:pPr>
+            <a:r>
+              <a:rPr lang="en-US" sz="1500" dirty="0">
+                <a:solidFill>
+                  <a:srgbClr val="212121"/>
+                </a:solidFill>
+                <a:latin typeface="Calibri" pitchFamily="34" charset="0"/>
+                <a:ea typeface="Calibri" pitchFamily="34" charset="-122"/>
+                <a:cs typeface="Calibri" pitchFamily="34" charset="-120"/>
+              </a:rPr>
+              <a:t>Open the chat playground; send a test prompt</a:t>
+            </a:r>
+            <a:endParaRPr lang="en-US" sz="1500" dirty="0"/>
+          </a:p>
+          <a:p>
+            <a:pPr marL="342900" indent="-342900">
+              <a:spcAft>
+                <a:spcPts val="600"/>
+              </a:spcAft>
+              <a:buSzPct val="100000"/>
+              <a:buChar char="•"/>
+            </a:pPr>
+            <a:r>
+              <a:rPr lang="en-US" sz="1500" dirty="0">
+                <a:solidFill>
+                  <a:srgbClr val="212121"/>
+                </a:solidFill>
+                <a:latin typeface="Calibri" pitchFamily="34" charset="0"/>
+                <a:ea typeface="Calibri" pitchFamily="34" charset="-122"/>
+                <a:cs typeface="Calibri" pitchFamily="34" charset="-120"/>
+              </a:rPr>
+              <a:t>Show the Toolbox catalog and one entry</a:t>
+            </a:r>
+            <a:endParaRPr lang="en-US" sz="1500" dirty="0"/>
+          </a:p>
+          <a:p>
+            <a:pPr marL="342900" indent="-342900">
+              <a:spcAft>
+                <a:spcPts val="600"/>
+              </a:spcAft>
+              <a:buSzPct val="100000"/>
+              <a:buChar char="•"/>
+            </a:pPr>
+            <a:r>
+              <a:rPr lang="en-US" sz="1500" dirty="0">
+                <a:solidFill>
+                  <a:srgbClr val="212121"/>
+                </a:solidFill>
+                <a:latin typeface="Calibri" pitchFamily="34" charset="0"/>
+                <a:ea typeface="Calibri" pitchFamily="34" charset="-122"/>
+                <a:cs typeface="Calibri" pitchFamily="34" charset="-120"/>
+              </a:rPr>
+              <a:t>Show the Foundry IQ landing page and one pre-provisioned knowledge source</a:t>
+            </a:r>
+            <a:endParaRPr lang="en-US" sz="1500" dirty="0"/>
+          </a:p>
+        </p:txBody>
+      </p:sp>
+      <p:sp>
+        <p:nvSpPr>
+          <p:cNvPr id="6" name="Text 4"/>
+          <p:cNvSpPr/>
+          <p:nvPr/>
+        </p:nvSpPr>
+        <p:spPr>
+          <a:xfrm>
+            <a:off x="365760" y="4206240"/>
+            <a:ext cx="8412480" cy="457200"/>
+          </a:xfrm>
+          <a:prstGeom prst="rect">
+            <a:avLst/>
+          </a:prstGeom>
+          <a:noFill/>
+          <a:ln/>
+        </p:spPr>
+        <p:txBody>
+          <a:bodyPr wrap="square" rtlCol="0" anchor="ctr"/>
+          <a:lstStyle/>
+          <a:p>
+            <a:pPr indent="0" marL="0">
+              <a:buNone/>
+            </a:pPr>
+            <a:r>
+              <a:rPr lang="en-US" sz="1400" b="1" i="1" dirty="0">
+                <a:solidFill>
+                  <a:srgbClr val="1E2761"/>
+                </a:solidFill>
+                <a:latin typeface="Calibri" pitchFamily="34" charset="0"/>
+                <a:ea typeface="Calibri" pitchFamily="34" charset="-122"/>
+                <a:cs typeface="Calibri" pitchFamily="34" charset="-120"/>
+              </a:rPr>
+              <a:t>Try it yourself: do steps 1–4 on your own sub before the module ends.</a:t>
+            </a:r>
+            <a:endParaRPr lang="en-US" sz="1400" dirty="0"/>
+          </a:p>
+        </p:txBody>
+      </p:sp>
+    </p:spTree>
+  </p:cSld>
+  <p:clrMapOvr>
+    <a:masterClrMapping/>
+  </p:clrMapOvr>
+</p:sld>
+</file>
+
+<file path=ppt/slides/slide19.xml><?xml version="1.0" encoding="utf-8"?>
+<p:sld xmlns:a="http://schemas.openxmlformats.org/drawingml/2006/main" xmlns:r="http://schemas.openxmlformats.org/officeDocument/2006/relationships" xmlns:p="http://schemas.openxmlformats.org/presentationml/2006/main">
+  <p:cSld name="Slide 19">
+    <p:bg>
+      <p:bgPr>
+        <a:solidFill>
+          <a:srgbClr val="FFFFFF"/>
+        </a:solidFill>
+      </p:bgPr>
+    </p:bg>
+    <p:spTree>
+      <p:nvGrpSpPr>
+        <p:cNvPr id="1" name=""/>
+        <p:cNvGrpSpPr/>
+        <p:nvPr/>
+      </p:nvGrpSpPr>
+      <p:grpSpPr>
+        <a:xfrm>
+          <a:off x="0" y="0"/>
+          <a:ext cx="0" cy="0"/>
+          <a:chOff x="0" y="0"/>
+          <a:chExt cx="0" cy="0"/>
+        </a:xfrm>
+      </p:grpSpPr>
+      <p:sp>
+        <p:nvSpPr>
+          <p:cNvPr id="2" name="Shape 0"/>
+          <p:cNvSpPr/>
+          <p:nvPr/>
+        </p:nvSpPr>
+        <p:spPr>
+          <a:xfrm>
+            <a:off x="0" y="0"/>
+            <a:ext cx="54864" cy="5143500"/>
+          </a:xfrm>
+          <a:prstGeom prst="rect">
+            <a:avLst/>
+          </a:prstGeom>
+          <a:solidFill>
+            <a:srgbClr val="1E2761"/>
+          </a:solidFill>
+          <a:ln/>
+        </p:spPr>
+      </p:sp>
+      <p:sp>
+        <p:nvSpPr>
+          <p:cNvPr id="3" name="Text 1"/>
+          <p:cNvSpPr/>
+          <p:nvPr/>
+        </p:nvSpPr>
+        <p:spPr>
+          <a:xfrm>
+            <a:off x="5669280" y="274320"/>
+            <a:ext cx="3291840" cy="274320"/>
+          </a:xfrm>
+          <a:prstGeom prst="rect">
+            <a:avLst/>
+          </a:prstGeom>
+          <a:noFill/>
+          <a:ln/>
+        </p:spPr>
+        <p:txBody>
+          <a:bodyPr wrap="square" lIns="0" tIns="0" rIns="0" bIns="0" rtlCol="0" anchor="ctr"/>
+          <a:lstStyle/>
+          <a:p>
+            <a:pPr algn="r" indent="0" marL="0">
+              <a:buNone/>
+            </a:pPr>
+            <a:r>
+              <a:rPr lang="en-US" sz="1000" dirty="0">
+                <a:solidFill>
+                  <a:srgbClr val="6B7280"/>
+                </a:solidFill>
+                <a:latin typeface="Calibri" pitchFamily="34" charset="0"/>
+                <a:ea typeface="Calibri" pitchFamily="34" charset="-122"/>
+                <a:cs typeface="Calibri" pitchFamily="34" charset="-120"/>
+              </a:rPr>
+              <a:t>Day 1 · Module 2</a:t>
+            </a:r>
+            <a:endParaRPr lang="en-US" sz="1000" dirty="0"/>
+          </a:p>
+        </p:txBody>
+      </p:sp>
+      <p:sp>
+        <p:nvSpPr>
+          <p:cNvPr id="4" name="Text 2"/>
+          <p:cNvSpPr/>
+          <p:nvPr/>
+        </p:nvSpPr>
+        <p:spPr>
+          <a:xfrm>
+            <a:off x="365760" y="320040"/>
+            <a:ext cx="6217920" cy="640080"/>
+          </a:xfrm>
+          <a:prstGeom prst="rect">
+            <a:avLst/>
+          </a:prstGeom>
+          <a:noFill/>
+          <a:ln/>
+        </p:spPr>
+        <p:txBody>
+          <a:bodyPr wrap="square" lIns="0" tIns="0" rIns="0" bIns="0" rtlCol="0" anchor="ctr"/>
+          <a:lstStyle/>
+          <a:p>
+            <a:pPr indent="0" marL="0">
+              <a:buNone/>
+            </a:pPr>
+            <a:r>
+              <a:rPr lang="en-US" sz="2800" b="1" dirty="0">
+                <a:solidFill>
+                  <a:srgbClr val="1E2761"/>
+                </a:solidFill>
+                <a:latin typeface="Calibri" pitchFamily="34" charset="0"/>
+                <a:ea typeface="Calibri" pitchFamily="34" charset="-122"/>
+                <a:cs typeface="Calibri" pitchFamily="34" charset="-120"/>
+              </a:rPr>
               <a:t>Takeaways</a:t>
             </a:r>
             <a:endParaRPr lang="en-US" sz="2800" dirty="0"/>
@@ -6177,7 +6573,7 @@
     <p:bg>
       <p:bgPr>
         <a:solidFill>
-          <a:srgbClr val="FFFFFF"/>
+          <a:srgbClr val="CADCFC"/>
         </a:solidFill>
       </p:bgPr>
     </p:bg>
@@ -6204,7 +6600,7 @@
         <p:spPr>
           <a:xfrm>
             <a:off x="0" y="0"/>
-            <a:ext cx="54864" cy="5143500"/>
+            <a:ext cx="146304" cy="5143500"/>
           </a:xfrm>
           <a:prstGeom prst="rect">
             <a:avLst/>
@@ -6248,7 +6644,7 @@
                 <a:ea typeface="Calibri" pitchFamily="34" charset="-122"/>
                 <a:cs typeface="Calibri" pitchFamily="34" charset="-120"/>
               </a:rPr>
-              <a:t>Day 1 · Module 2</a:t>
+              <a:t>Day 1 · Module 2 · Demo</a:t>
             </a:r>
             <a:endParaRPr lang="en-US" sz="1000" dirty="0"/>
           </a:p>
@@ -6262,8 +6658,8 @@
         </p:nvSpPr>
         <p:spPr>
           <a:xfrm>
-            <a:off x="365760" y="320040"/>
-            <a:ext cx="6217920" cy="640080"/>
+            <a:off x="548640" y="1051560"/>
+            <a:ext cx="5486400" cy="502920"/>
           </a:xfrm>
           <a:prstGeom prst="rect">
             <a:avLst/>
@@ -6279,7 +6675,7 @@
               <a:buNone/>
             </a:pPr>
             <a:r>
-              <a:rPr lang="en-US" sz="2800" b="1" dirty="0">
+              <a:rPr lang="en-US" sz="3200" b="1" spc="800" kern="0" dirty="0">
                 <a:solidFill>
                   <a:srgbClr val="1E2761"/>
                 </a:solidFill>
@@ -6287,9 +6683,9 @@
                 <a:ea typeface="Calibri" pitchFamily="34" charset="-122"/>
                 <a:cs typeface="Calibri" pitchFamily="34" charset="-120"/>
               </a:rPr>
-              <a:t>What lives where · starter RBAC</a:t>
-            </a:r>
-            <a:endParaRPr lang="en-US" sz="2800" dirty="0"/>
+              <a:t>DEMO</a:t>
+            </a:r>
+            <a:endParaRPr lang="en-US" sz="3200" dirty="0"/>
           </a:p>
         </p:txBody>
       </p:sp>
@@ -6301,8 +6697,8 @@
         </p:nvSpPr>
         <p:spPr>
           <a:xfrm>
-            <a:off x="365760" y="1097280"/>
-            <a:ext cx="4069080" cy="365760"/>
+            <a:off x="548640" y="1691640"/>
+            <a:ext cx="8046720" cy="914400"/>
           </a:xfrm>
           <a:prstGeom prst="rect">
             <a:avLst/>
@@ -6318,7 +6714,7 @@
               <a:buNone/>
             </a:pPr>
             <a:r>
-              <a:rPr lang="en-US" sz="2000" b="1" dirty="0">
+              <a:rPr lang="en-US" sz="3000" b="1" dirty="0">
                 <a:solidFill>
                   <a:srgbClr val="1E2761"/>
                 </a:solidFill>
@@ -6326,9 +6722,9 @@
                 <a:ea typeface="Calibri" pitchFamily="34" charset="-122"/>
                 <a:cs typeface="Calibri" pitchFamily="34" charset="-120"/>
               </a:rPr>
-              <a:t>Foundry resource level</a:t>
-            </a:r>
-            <a:endParaRPr lang="en-US" sz="2000" dirty="0"/>
+              <a:t>Create a Foundry project, live</a:t>
+            </a:r>
+            <a:endParaRPr lang="en-US" sz="3000" dirty="0"/>
           </a:p>
         </p:txBody>
       </p:sp>
@@ -6340,8 +6736,8 @@
         </p:nvSpPr>
         <p:spPr>
           <a:xfrm>
-            <a:off x="4709160" y="1097280"/>
-            <a:ext cx="4069080" cy="365760"/>
+            <a:off x="6583680" y="1051560"/>
+            <a:ext cx="2194560" cy="502920"/>
           </a:xfrm>
           <a:prstGeom prst="rect">
             <a:avLst/>
@@ -6353,54 +6749,53 @@
           <a:bodyPr wrap="square" lIns="0" tIns="0" rIns="0" bIns="0" rtlCol="0" anchor="ctr"/>
           <a:lstStyle/>
           <a:p>
+            <a:pPr algn="r" indent="0" marL="0">
+              <a:buNone/>
+            </a:pPr>
+            <a:r>
+              <a:rPr lang="en-US" sz="1800" i="1" dirty="0">
+                <a:solidFill>
+                  <a:srgbClr val="6B7280"/>
+                </a:solidFill>
+                <a:latin typeface="Calibri" pitchFamily="34" charset="0"/>
+                <a:ea typeface="Calibri" pitchFamily="34" charset="-122"/>
+                <a:cs typeface="Calibri" pitchFamily="34" charset="-120"/>
+              </a:rPr>
+              <a:t>~5 min</a:t>
+            </a:r>
+            <a:endParaRPr lang="en-US" sz="1800" dirty="0"/>
+          </a:p>
+        </p:txBody>
+      </p:sp>
+      <p:sp>
+        <p:nvSpPr>
+          <p:cNvPr id="7" name="Text 5"/>
+          <p:cNvSpPr/>
+          <p:nvPr/>
+        </p:nvSpPr>
+        <p:spPr>
+          <a:xfrm>
+            <a:off x="548640" y="2788920"/>
+            <a:ext cx="8046720" cy="1371600"/>
+          </a:xfrm>
+          <a:prstGeom prst="rect">
+            <a:avLst/>
+          </a:prstGeom>
+          <a:noFill/>
+          <a:ln/>
+        </p:spPr>
+        <p:txBody>
+          <a:bodyPr wrap="square" lIns="0" tIns="0" rIns="0" bIns="0" rtlCol="0" anchor="ctr"/>
+          <a:lstStyle/>
+          <a:p>
             <a:pPr indent="0" marL="0">
-              <a:buNone/>
-            </a:pPr>
-            <a:r>
-              <a:rPr lang="en-US" sz="2000" b="1" dirty="0">
-                <a:solidFill>
-                  <a:srgbClr val="1E2761"/>
-                </a:solidFill>
-                <a:latin typeface="Calibri" pitchFamily="34" charset="0"/>
-                <a:ea typeface="Calibri" pitchFamily="34" charset="-122"/>
-                <a:cs typeface="Calibri" pitchFamily="34" charset="-120"/>
-              </a:rPr>
-              <a:t>Project level</a:t>
-            </a:r>
-            <a:endParaRPr lang="en-US" sz="2000" dirty="0"/>
-          </a:p>
-        </p:txBody>
-      </p:sp>
-      <p:sp>
-        <p:nvSpPr>
-          <p:cNvPr id="7" name="Text 5"/>
-          <p:cNvSpPr/>
-          <p:nvPr/>
-        </p:nvSpPr>
-        <p:spPr>
-          <a:xfrm>
-            <a:off x="365760" y="1554480"/>
-            <a:ext cx="4069080" cy="3291840"/>
-          </a:xfrm>
-          <a:prstGeom prst="rect">
-            <a:avLst/>
-          </a:prstGeom>
-          <a:noFill/>
-          <a:ln/>
-        </p:spPr>
-        <p:txBody>
-          <a:bodyPr wrap="square" rtlCol="0" anchor="ctr"/>
-          <a:lstStyle/>
-          <a:p>
-            <a:pPr marL="342900" indent="-342900">
               <a:spcAft>
                 <a:spcPts val="600"/>
               </a:spcAft>
-              <a:buSzPct val="100000"/>
-              <a:buChar char="•"/>
-            </a:pPr>
-            <a:r>
-              <a:rPr lang="en-US" sz="1500" dirty="0">
+              <a:buNone/>
+            </a:pPr>
+            <a:r>
+              <a:rPr lang="en-US" sz="1600" dirty="0">
                 <a:solidFill>
                   <a:srgbClr val="212121"/>
                 </a:solidFill>
@@ -6408,72 +6803,9 @@
                 <a:ea typeface="Calibri" pitchFamily="34" charset="-122"/>
                 <a:cs typeface="Calibri" pitchFamily="34" charset="-120"/>
               </a:rPr>
-              <a:t>Model deployments</a:t>
-            </a:r>
-            <a:endParaRPr lang="en-US" sz="1500" dirty="0"/>
-          </a:p>
-          <a:p>
-            <a:pPr marL="342900" indent="-342900">
-              <a:spcAft>
-                <a:spcPts val="600"/>
-              </a:spcAft>
-              <a:buSzPct val="100000"/>
-              <a:buChar char="•"/>
-            </a:pPr>
-            <a:r>
-              <a:rPr lang="en-US" sz="1500" dirty="0">
-                <a:solidFill>
-                  <a:srgbClr val="212121"/>
-                </a:solidFill>
-                <a:latin typeface="Calibri" pitchFamily="34" charset="0"/>
-                <a:ea typeface="Calibri" pitchFamily="34" charset="-122"/>
-                <a:cs typeface="Calibri" pitchFamily="34" charset="-120"/>
-              </a:rPr>
-              <a:t>Security &amp; networking</a:t>
-            </a:r>
-            <a:endParaRPr lang="en-US" sz="1500" dirty="0"/>
-          </a:p>
-          <a:p>
-            <a:pPr marL="342900" indent="-342900">
-              <a:spcAft>
-                <a:spcPts val="600"/>
-              </a:spcAft>
-              <a:buSzPct val="100000"/>
-              <a:buChar char="•"/>
-            </a:pPr>
-            <a:r>
-              <a:rPr lang="en-US" sz="1500" dirty="0">
-                <a:solidFill>
-                  <a:srgbClr val="212121"/>
-                </a:solidFill>
-                <a:latin typeface="Calibri" pitchFamily="34" charset="0"/>
-                <a:ea typeface="Calibri" pitchFamily="34" charset="-122"/>
-                <a:cs typeface="Calibri" pitchFamily="34" charset="-120"/>
-              </a:rPr>
-              <a:t>Connections to connected resources</a:t>
-            </a:r>
-            <a:endParaRPr lang="en-US" sz="1500" dirty="0"/>
-          </a:p>
-          <a:p>
-            <a:pPr marL="342900" indent="-342900">
-              <a:spcAft>
-                <a:spcPts val="600"/>
-              </a:spcAft>
-              <a:buSzPct val="100000"/>
-              <a:buChar char="•"/>
-            </a:pPr>
-            <a:r>
-              <a:rPr lang="en-US" sz="1500" dirty="0">
-                <a:solidFill>
-                  <a:srgbClr val="212121"/>
-                </a:solidFill>
-                <a:latin typeface="Calibri" pitchFamily="34" charset="0"/>
-                <a:ea typeface="Calibri" pitchFamily="34" charset="-122"/>
-                <a:cs typeface="Calibri" pitchFamily="34" charset="-120"/>
-              </a:rPr>
-              <a:t>Resource-scoped RBAC roles (Foundry User, Foundry Owner)</a:t>
-            </a:r>
-            <a:endParaRPr lang="en-US" sz="1500" dirty="0"/>
+              <a:t>Portal path from + New project → App Insights checkbox → gpt-5.6-luna deployment → project endpoint visible. Then a 90-second look at the az CLI equivalent for the IaC-first path. Attendees who haven't done pre-work realize this is a 5-minute click-through, not a day of Azure ceremony.</a:t>
+            </a:r>
+            <a:endParaRPr lang="en-US" sz="1600" dirty="0"/>
           </a:p>
         </p:txBody>
       </p:sp>
@@ -6485,134 +6817,8 @@
         </p:nvSpPr>
         <p:spPr>
           <a:xfrm>
-            <a:off x="4709160" y="1554480"/>
-            <a:ext cx="4069080" cy="3291840"/>
-          </a:xfrm>
-          <a:prstGeom prst="rect">
-            <a:avLst/>
-          </a:prstGeom>
-          <a:noFill/>
-          <a:ln/>
-        </p:spPr>
-        <p:txBody>
-          <a:bodyPr wrap="square" rtlCol="0" anchor="ctr"/>
-          <a:lstStyle/>
-          <a:p>
-            <a:pPr marL="342900" indent="-342900">
-              <a:spcAft>
-                <a:spcPts val="600"/>
-              </a:spcAft>
-              <a:buSzPct val="100000"/>
-              <a:buChar char="•"/>
-            </a:pPr>
-            <a:r>
-              <a:rPr lang="en-US" sz="1500" dirty="0">
-                <a:solidFill>
-                  <a:srgbClr val="212121"/>
-                </a:solidFill>
-                <a:latin typeface="Calibri" pitchFamily="34" charset="0"/>
-                <a:ea typeface="Calibri" pitchFamily="34" charset="-122"/>
-                <a:cs typeface="Calibri" pitchFamily="34" charset="-120"/>
-              </a:rPr>
-              <a:t>Agents (Prompt agents, Hosted agents)</a:t>
-            </a:r>
-            <a:endParaRPr lang="en-US" sz="1500" dirty="0"/>
-          </a:p>
-          <a:p>
-            <a:pPr marL="342900" indent="-342900">
-              <a:spcAft>
-                <a:spcPts val="600"/>
-              </a:spcAft>
-              <a:buSzPct val="100000"/>
-              <a:buChar char="•"/>
-            </a:pPr>
-            <a:r>
-              <a:rPr lang="en-US" sz="1500" dirty="0">
-                <a:solidFill>
-                  <a:srgbClr val="212121"/>
-                </a:solidFill>
-                <a:latin typeface="Calibri" pitchFamily="34" charset="0"/>
-                <a:ea typeface="Calibri" pitchFamily="34" charset="-122"/>
-                <a:cs typeface="Calibri" pitchFamily="34" charset="-120"/>
-              </a:rPr>
-              <a:t>Files</a:t>
-            </a:r>
-            <a:endParaRPr lang="en-US" sz="1500" dirty="0"/>
-          </a:p>
-          <a:p>
-            <a:pPr marL="342900" indent="-342900">
-              <a:spcAft>
-                <a:spcPts val="600"/>
-              </a:spcAft>
-              <a:buSzPct val="100000"/>
-              <a:buChar char="•"/>
-            </a:pPr>
-            <a:r>
-              <a:rPr lang="en-US" sz="1500" dirty="0">
-                <a:solidFill>
-                  <a:srgbClr val="212121"/>
-                </a:solidFill>
-                <a:latin typeface="Calibri" pitchFamily="34" charset="0"/>
-                <a:ea typeface="Calibri" pitchFamily="34" charset="-122"/>
-                <a:cs typeface="Calibri" pitchFamily="34" charset="-120"/>
-              </a:rPr>
-              <a:t>Evaluations</a:t>
-            </a:r>
-            <a:endParaRPr lang="en-US" sz="1500" dirty="0"/>
-          </a:p>
-          <a:p>
-            <a:pPr marL="342900" indent="-342900">
-              <a:spcAft>
-                <a:spcPts val="600"/>
-              </a:spcAft>
-              <a:buSzPct val="100000"/>
-              <a:buChar char="•"/>
-            </a:pPr>
-            <a:r>
-              <a:rPr lang="en-US" sz="1500" dirty="0">
-                <a:solidFill>
-                  <a:srgbClr val="212121"/>
-                </a:solidFill>
-                <a:latin typeface="Calibri" pitchFamily="34" charset="0"/>
-                <a:ea typeface="Calibri" pitchFamily="34" charset="-122"/>
-                <a:cs typeface="Calibri" pitchFamily="34" charset="-120"/>
-              </a:rPr>
-              <a:t>Project-scoped RBAC assignments</a:t>
-            </a:r>
-            <a:endParaRPr lang="en-US" sz="1500" dirty="0"/>
-          </a:p>
-        </p:txBody>
-      </p:sp>
-      <p:sp>
-        <p:nvSpPr>
-          <p:cNvPr id="9" name="Shape 7"/>
-          <p:cNvSpPr/>
-          <p:nvPr/>
-        </p:nvSpPr>
-        <p:spPr>
-          <a:xfrm>
-            <a:off x="365760" y="4160520"/>
-            <a:ext cx="8412480" cy="548640"/>
-          </a:xfrm>
-          <a:prstGeom prst="rect">
-            <a:avLst/>
-          </a:prstGeom>
-          <a:solidFill>
-            <a:srgbClr val="CADCFC"/>
-          </a:solidFill>
-          <a:ln/>
-        </p:spPr>
-      </p:sp>
-      <p:sp>
-        <p:nvSpPr>
-          <p:cNvPr id="10" name="Text 8"/>
-          <p:cNvSpPr/>
-          <p:nvPr/>
-        </p:nvSpPr>
-        <p:spPr>
-          <a:xfrm>
-            <a:off x="502920" y="4206240"/>
-            <a:ext cx="8138160" cy="457200"/>
+            <a:off x="548640" y="4434840"/>
+            <a:ext cx="8046720" cy="320040"/>
           </a:xfrm>
           <a:prstGeom prst="rect">
             <a:avLst/>
@@ -6628,59 +6834,17 @@
               <a:buNone/>
             </a:pPr>
             <a:r>
-              <a:rPr lang="en-US" sz="1200" b="1" dirty="0">
-                <a:solidFill>
-                  <a:srgbClr val="1E2761"/>
-                </a:solidFill>
-                <a:latin typeface="Calibri" pitchFamily="34" charset="0"/>
-                <a:ea typeface="Calibri" pitchFamily="34" charset="-122"/>
-                <a:cs typeface="Calibri" pitchFamily="34" charset="-120"/>
-              </a:rPr>
-              <a:t>Starter RBAC: </a:t>
-            </a:r>
-            <a:pPr indent="0" marL="0">
-              <a:buNone/>
-            </a:pPr>
-            <a:r>
-              <a:rPr lang="en-US" sz="1200" dirty="0">
-                <a:solidFill>
-                  <a:srgbClr val="1E2761"/>
-                </a:solidFill>
-                <a:latin typeface="Calibri" pitchFamily="34" charset="0"/>
-                <a:ea typeface="Calibri" pitchFamily="34" charset="-122"/>
-                <a:cs typeface="Calibri" pitchFamily="34" charset="-120"/>
-              </a:rPr>
-              <a:t>assign every developer </a:t>
-            </a:r>
-            <a:pPr indent="0" marL="0">
-              <a:buNone/>
-            </a:pPr>
-            <a:r>
-              <a:rPr lang="en-US" sz="1200" b="1" dirty="0">
-                <a:solidFill>
-                  <a:srgbClr val="1E2761"/>
-                </a:solidFill>
-                <a:latin typeface="Calibri" pitchFamily="34" charset="0"/>
-                <a:ea typeface="Calibri" pitchFamily="34" charset="-122"/>
-                <a:cs typeface="Calibri" pitchFamily="34" charset="-120"/>
-              </a:rPr>
-              <a:t>Foundry User</a:t>
-            </a:r>
-            <a:pPr indent="0" marL="0">
-              <a:buNone/>
-            </a:pPr>
-            <a:r>
-              <a:rPr lang="en-US" sz="1200" dirty="0">
-                <a:solidFill>
-                  <a:srgbClr val="1E2761"/>
-                </a:solidFill>
-                <a:latin typeface="Calibri" pitchFamily="34" charset="0"/>
-                <a:ea typeface="Calibri" pitchFamily="34" charset="-122"/>
-                <a:cs typeface="Calibri" pitchFamily="34" charset="-120"/>
-              </a:rPr>
-              <a:t> at the Foundry resource scope. That covers Day 1 lab access. Fine-grained project-scoped roles come later.</a:t>
-            </a:r>
-            <a:endParaRPr lang="en-US" sz="1200" dirty="0"/>
+              <a:rPr lang="en-US" sz="1100" i="1" dirty="0">
+                <a:solidFill>
+                  <a:srgbClr val="6B7280"/>
+                </a:solidFill>
+                <a:latin typeface="Calibri" pitchFamily="34" charset="0"/>
+                <a:ea typeface="Calibri" pitchFamily="34" charset="-122"/>
+                <a:cs typeface="Calibri" pitchFamily="34" charset="-120"/>
+              </a:rPr>
+              <a:t>Runbook: demos/day1/module-2-demo-1-create-project.md</a:t>
+            </a:r>
+            <a:endParaRPr lang="en-US" sz="1100" dirty="0"/>
           </a:p>
         </p:txBody>
       </p:sp>
@@ -6808,7 +6972,7 @@
                 <a:ea typeface="Calibri" pitchFamily="34" charset="-122"/>
                 <a:cs typeface="Calibri" pitchFamily="34" charset="-120"/>
               </a:rPr>
-              <a:t>Project endpoints</a:t>
+              <a:t>What lives where · starter RBAC</a:t>
             </a:r>
             <a:endParaRPr lang="en-US" sz="2800" dirty="0"/>
           </a:p>
@@ -6822,8 +6986,8 @@
         </p:nvSpPr>
         <p:spPr>
           <a:xfrm>
-            <a:off x="365760" y="1051560"/>
-            <a:ext cx="8412480" cy="365760"/>
+            <a:off x="365760" y="1097280"/>
+            <a:ext cx="4069080" cy="365760"/>
           </a:xfrm>
           <a:prstGeom prst="rect">
             <a:avLst/>
@@ -6832,62 +6996,37 @@
           <a:ln/>
         </p:spPr>
         <p:txBody>
-          <a:bodyPr wrap="square" rtlCol="0" anchor="ctr"/>
+          <a:bodyPr wrap="square" lIns="0" tIns="0" rIns="0" bIns="0" rtlCol="0" anchor="ctr"/>
           <a:lstStyle/>
           <a:p>
             <a:pPr indent="0" marL="0">
               <a:buNone/>
             </a:pPr>
             <a:r>
-              <a:rPr lang="en-US" sz="1500" dirty="0">
-                <a:solidFill>
-                  <a:srgbClr val="212121"/>
-                </a:solidFill>
-                <a:latin typeface="Calibri" pitchFamily="34" charset="0"/>
-                <a:ea typeface="Calibri" pitchFamily="34" charset="-122"/>
-                <a:cs typeface="Calibri" pitchFamily="34" charset="-120"/>
-              </a:rPr>
-              <a:t>Every Foundry project has an endpoint like:</a:t>
-            </a:r>
-            <a:endParaRPr lang="en-US" sz="1500" dirty="0"/>
-          </a:p>
-        </p:txBody>
-      </p:sp>
-      <p:sp>
-        <p:nvSpPr>
-          <p:cNvPr id="6" name="Shape 4"/>
-          <p:cNvSpPr/>
-          <p:nvPr/>
-        </p:nvSpPr>
-        <p:spPr>
-          <a:xfrm>
-            <a:off x="365760" y="1417320"/>
-            <a:ext cx="8412480" cy="548640"/>
-          </a:xfrm>
-          <a:prstGeom prst="rect">
-            <a:avLst/>
-          </a:prstGeom>
-          <a:solidFill>
-            <a:srgbClr val="F3F4F6"/>
-          </a:solidFill>
-          <a:ln w="6350">
-            <a:solidFill>
-              <a:srgbClr val="D1D5DB"/>
-            </a:solidFill>
-            <a:prstDash val="solid"/>
-          </a:ln>
-        </p:spPr>
-      </p:sp>
-      <p:sp>
-        <p:nvSpPr>
-          <p:cNvPr id="7" name="Text 5"/>
-          <p:cNvSpPr/>
-          <p:nvPr/>
-        </p:nvSpPr>
-        <p:spPr>
-          <a:xfrm>
-            <a:off x="502920" y="1508760"/>
-            <a:ext cx="8138160" cy="365760"/>
+              <a:rPr lang="en-US" sz="2000" b="1" dirty="0">
+                <a:solidFill>
+                  <a:srgbClr val="1E2761"/>
+                </a:solidFill>
+                <a:latin typeface="Calibri" pitchFamily="34" charset="0"/>
+                <a:ea typeface="Calibri" pitchFamily="34" charset="-122"/>
+                <a:cs typeface="Calibri" pitchFamily="34" charset="-120"/>
+              </a:rPr>
+              <a:t>Foundry resource level</a:t>
+            </a:r>
+            <a:endParaRPr lang="en-US" sz="2000" dirty="0"/>
+          </a:p>
+        </p:txBody>
+      </p:sp>
+      <p:sp>
+        <p:nvSpPr>
+          <p:cNvPr id="6" name="Text 4"/>
+          <p:cNvSpPr/>
+          <p:nvPr/>
+        </p:nvSpPr>
+        <p:spPr>
+          <a:xfrm>
+            <a:off x="4709160" y="1097280"/>
+            <a:ext cx="4069080" cy="365760"/>
           </a:xfrm>
           <a:prstGeom prst="rect">
             <a:avLst/>
@@ -6896,24 +7035,130 @@
           <a:ln/>
         </p:spPr>
         <p:txBody>
-          <a:bodyPr wrap="square" lIns="0" tIns="0" rIns="0" bIns="0" rtlCol="0" anchor="t"/>
+          <a:bodyPr wrap="square" lIns="0" tIns="0" rIns="0" bIns="0" rtlCol="0" anchor="ctr"/>
           <a:lstStyle/>
           <a:p>
             <a:pPr indent="0" marL="0">
               <a:buNone/>
             </a:pPr>
             <a:r>
-              <a:rPr lang="en-US" sz="1800" dirty="0">
+              <a:rPr lang="en-US" sz="2000" b="1" dirty="0">
+                <a:solidFill>
+                  <a:srgbClr val="1E2761"/>
+                </a:solidFill>
+                <a:latin typeface="Calibri" pitchFamily="34" charset="0"/>
+                <a:ea typeface="Calibri" pitchFamily="34" charset="-122"/>
+                <a:cs typeface="Calibri" pitchFamily="34" charset="-120"/>
+              </a:rPr>
+              <a:t>Project level</a:t>
+            </a:r>
+            <a:endParaRPr lang="en-US" sz="2000" dirty="0"/>
+          </a:p>
+        </p:txBody>
+      </p:sp>
+      <p:sp>
+        <p:nvSpPr>
+          <p:cNvPr id="7" name="Text 5"/>
+          <p:cNvSpPr/>
+          <p:nvPr/>
+        </p:nvSpPr>
+        <p:spPr>
+          <a:xfrm>
+            <a:off x="365760" y="1554480"/>
+            <a:ext cx="4069080" cy="3291840"/>
+          </a:xfrm>
+          <a:prstGeom prst="rect">
+            <a:avLst/>
+          </a:prstGeom>
+          <a:noFill/>
+          <a:ln/>
+        </p:spPr>
+        <p:txBody>
+          <a:bodyPr wrap="square" rtlCol="0" anchor="ctr"/>
+          <a:lstStyle/>
+          <a:p>
+            <a:pPr marL="342900" indent="-342900">
+              <a:spcAft>
+                <a:spcPts val="600"/>
+              </a:spcAft>
+              <a:buSzPct val="100000"/>
+              <a:buChar char="•"/>
+            </a:pPr>
+            <a:r>
+              <a:rPr lang="en-US" sz="1500" dirty="0">
                 <a:solidFill>
                   <a:srgbClr val="212121"/>
                 </a:solidFill>
-                <a:latin typeface="Consolas" pitchFamily="34" charset="0"/>
-                <a:ea typeface="Consolas" pitchFamily="34" charset="-122"/>
-                <a:cs typeface="Consolas" pitchFamily="34" charset="-120"/>
-              </a:rPr>
-              <a:t>https://&lt;foundry-resource&gt;.services.ai.azure.com/api/projects/&lt;your-project&gt;</a:t>
-            </a:r>
-            <a:endParaRPr lang="en-US" sz="1800" dirty="0"/>
+                <a:latin typeface="Calibri" pitchFamily="34" charset="0"/>
+                <a:ea typeface="Calibri" pitchFamily="34" charset="-122"/>
+                <a:cs typeface="Calibri" pitchFamily="34" charset="-120"/>
+              </a:rPr>
+              <a:t>Model deployments</a:t>
+            </a:r>
+            <a:endParaRPr lang="en-US" sz="1500" dirty="0"/>
+          </a:p>
+          <a:p>
+            <a:pPr marL="342900" indent="-342900">
+              <a:spcAft>
+                <a:spcPts val="600"/>
+              </a:spcAft>
+              <a:buSzPct val="100000"/>
+              <a:buChar char="•"/>
+            </a:pPr>
+            <a:r>
+              <a:rPr lang="en-US" sz="1500" dirty="0">
+                <a:solidFill>
+                  <a:srgbClr val="212121"/>
+                </a:solidFill>
+                <a:latin typeface="Calibri" pitchFamily="34" charset="0"/>
+                <a:ea typeface="Calibri" pitchFamily="34" charset="-122"/>
+                <a:cs typeface="Calibri" pitchFamily="34" charset="-120"/>
+              </a:rPr>
+              <a:t>Security &amp; networking</a:t>
+            </a:r>
+            <a:endParaRPr lang="en-US" sz="1500" dirty="0"/>
+          </a:p>
+          <a:p>
+            <a:pPr marL="342900" indent="-342900">
+              <a:spcAft>
+                <a:spcPts val="600"/>
+              </a:spcAft>
+              <a:buSzPct val="100000"/>
+              <a:buChar char="•"/>
+            </a:pPr>
+            <a:r>
+              <a:rPr lang="en-US" sz="1500" dirty="0">
+                <a:solidFill>
+                  <a:srgbClr val="212121"/>
+                </a:solidFill>
+                <a:latin typeface="Calibri" pitchFamily="34" charset="0"/>
+                <a:ea typeface="Calibri" pitchFamily="34" charset="-122"/>
+                <a:cs typeface="Calibri" pitchFamily="34" charset="-120"/>
+              </a:rPr>
+              <a:t>Connections to connected resources</a:t>
+            </a:r>
+            <a:endParaRPr lang="en-US" sz="1500" dirty="0"/>
+          </a:p>
+          <a:p>
+            <a:pPr marL="342900" indent="-342900">
+              <a:spcAft>
+                <a:spcPts val="600"/>
+              </a:spcAft>
+              <a:buSzPct val="100000"/>
+              <a:buChar char="•"/>
+            </a:pPr>
+            <a:r>
+              <a:rPr lang="en-US" sz="1500" dirty="0">
+                <a:solidFill>
+                  <a:srgbClr val="212121"/>
+                </a:solidFill>
+                <a:latin typeface="Calibri" pitchFamily="34" charset="0"/>
+                <a:ea typeface="Calibri" pitchFamily="34" charset="-122"/>
+                <a:cs typeface="Calibri" pitchFamily="34" charset="-120"/>
+              </a:rPr>
+              <a:t>Resource-scoped RBAC roles (Foundry User, Foundry Owner)</a:t>
+            </a:r>
+            <a:endParaRPr lang="en-US" sz="1500" dirty="0"/>
           </a:p>
         </p:txBody>
       </p:sp>
@@ -6925,8 +7170,8 @@
         </p:nvSpPr>
         <p:spPr>
           <a:xfrm>
-            <a:off x="365760" y="2194560"/>
-            <a:ext cx="8412480" cy="1371600"/>
+            <a:off x="4709160" y="1554480"/>
+            <a:ext cx="4069080" cy="3291840"/>
           </a:xfrm>
           <a:prstGeom prst="rect">
             <a:avLst/>
@@ -6936,23 +7181,191 @@
         </p:spPr>
         <p:txBody>
           <a:bodyPr wrap="square" rtlCol="0" anchor="ctr"/>
+          <a:lstStyle/>
+          <a:p>
+            <a:pPr marL="342900" indent="-342900">
+              <a:spcAft>
+                <a:spcPts val="600"/>
+              </a:spcAft>
+              <a:buSzPct val="100000"/>
+              <a:buChar char="•"/>
+            </a:pPr>
+            <a:r>
+              <a:rPr lang="en-US" sz="1500" dirty="0">
+                <a:solidFill>
+                  <a:srgbClr val="212121"/>
+                </a:solidFill>
+                <a:latin typeface="Calibri" pitchFamily="34" charset="0"/>
+                <a:ea typeface="Calibri" pitchFamily="34" charset="-122"/>
+                <a:cs typeface="Calibri" pitchFamily="34" charset="-120"/>
+              </a:rPr>
+              <a:t>Agents (Prompt agents, Hosted agents)</a:t>
+            </a:r>
+            <a:endParaRPr lang="en-US" sz="1500" dirty="0"/>
+          </a:p>
+          <a:p>
+            <a:pPr marL="342900" indent="-342900">
+              <a:spcAft>
+                <a:spcPts val="600"/>
+              </a:spcAft>
+              <a:buSzPct val="100000"/>
+              <a:buChar char="•"/>
+            </a:pPr>
+            <a:r>
+              <a:rPr lang="en-US" sz="1500" dirty="0">
+                <a:solidFill>
+                  <a:srgbClr val="212121"/>
+                </a:solidFill>
+                <a:latin typeface="Calibri" pitchFamily="34" charset="0"/>
+                <a:ea typeface="Calibri" pitchFamily="34" charset="-122"/>
+                <a:cs typeface="Calibri" pitchFamily="34" charset="-120"/>
+              </a:rPr>
+              <a:t>Files</a:t>
+            </a:r>
+            <a:endParaRPr lang="en-US" sz="1500" dirty="0"/>
+          </a:p>
+          <a:p>
+            <a:pPr marL="342900" indent="-342900">
+              <a:spcAft>
+                <a:spcPts val="600"/>
+              </a:spcAft>
+              <a:buSzPct val="100000"/>
+              <a:buChar char="•"/>
+            </a:pPr>
+            <a:r>
+              <a:rPr lang="en-US" sz="1500" dirty="0">
+                <a:solidFill>
+                  <a:srgbClr val="212121"/>
+                </a:solidFill>
+                <a:latin typeface="Calibri" pitchFamily="34" charset="0"/>
+                <a:ea typeface="Calibri" pitchFamily="34" charset="-122"/>
+                <a:cs typeface="Calibri" pitchFamily="34" charset="-120"/>
+              </a:rPr>
+              <a:t>Evaluations</a:t>
+            </a:r>
+            <a:endParaRPr lang="en-US" sz="1500" dirty="0"/>
+          </a:p>
+          <a:p>
+            <a:pPr marL="342900" indent="-342900">
+              <a:spcAft>
+                <a:spcPts val="600"/>
+              </a:spcAft>
+              <a:buSzPct val="100000"/>
+              <a:buChar char="•"/>
+            </a:pPr>
+            <a:r>
+              <a:rPr lang="en-US" sz="1500" dirty="0">
+                <a:solidFill>
+                  <a:srgbClr val="212121"/>
+                </a:solidFill>
+                <a:latin typeface="Calibri" pitchFamily="34" charset="0"/>
+                <a:ea typeface="Calibri" pitchFamily="34" charset="-122"/>
+                <a:cs typeface="Calibri" pitchFamily="34" charset="-120"/>
+              </a:rPr>
+              <a:t>Project-scoped RBAC assignments</a:t>
+            </a:r>
+            <a:endParaRPr lang="en-US" sz="1500" dirty="0"/>
+          </a:p>
+        </p:txBody>
+      </p:sp>
+      <p:sp>
+        <p:nvSpPr>
+          <p:cNvPr id="9" name="Shape 7"/>
+          <p:cNvSpPr/>
+          <p:nvPr/>
+        </p:nvSpPr>
+        <p:spPr>
+          <a:xfrm>
+            <a:off x="365760" y="4160520"/>
+            <a:ext cx="8412480" cy="548640"/>
+          </a:xfrm>
+          <a:prstGeom prst="rect">
+            <a:avLst/>
+          </a:prstGeom>
+          <a:solidFill>
+            <a:srgbClr val="CADCFC"/>
+          </a:solidFill>
+          <a:ln/>
+        </p:spPr>
+      </p:sp>
+      <p:sp>
+        <p:nvSpPr>
+          <p:cNvPr id="10" name="Text 8"/>
+          <p:cNvSpPr/>
+          <p:nvPr/>
+        </p:nvSpPr>
+        <p:spPr>
+          <a:xfrm>
+            <a:off x="502920" y="4206240"/>
+            <a:ext cx="8138160" cy="457200"/>
+          </a:xfrm>
+          <a:prstGeom prst="rect">
+            <a:avLst/>
+          </a:prstGeom>
+          <a:noFill/>
+          <a:ln/>
+        </p:spPr>
+        <p:txBody>
+          <a:bodyPr wrap="square" lIns="0" tIns="0" rIns="0" bIns="0" rtlCol="0" anchor="ctr"/>
           <a:lstStyle/>
           <a:p>
             <a:pPr indent="0" marL="0">
               <a:buNone/>
             </a:pPr>
             <a:r>
-              <a:rPr lang="en-US" sz="1500" dirty="0">
-                <a:solidFill>
-                  <a:srgbClr val="212121"/>
-                </a:solidFill>
-                <a:latin typeface="Calibri" pitchFamily="34" charset="0"/>
-                <a:ea typeface="Calibri" pitchFamily="34" charset="-122"/>
-                <a:cs typeface="Calibri" pitchFamily="34" charset="-120"/>
-              </a:rPr>
-              <a:t>Set this as FOUNDRY_PROJECT_ENDPOINT in every lab's .env. MAF connects with this endpoint plus a credential — AzureCliCredential in dev, managed identity in production.</a:t>
-            </a:r>
-            <a:endParaRPr lang="en-US" sz="1500" dirty="0"/>
+              <a:rPr lang="en-US" sz="1200" b="1" dirty="0">
+                <a:solidFill>
+                  <a:srgbClr val="1E2761"/>
+                </a:solidFill>
+                <a:latin typeface="Calibri" pitchFamily="34" charset="0"/>
+                <a:ea typeface="Calibri" pitchFamily="34" charset="-122"/>
+                <a:cs typeface="Calibri" pitchFamily="34" charset="-120"/>
+              </a:rPr>
+              <a:t>Starter RBAC: </a:t>
+            </a:r>
+            <a:pPr indent="0" marL="0">
+              <a:buNone/>
+            </a:pPr>
+            <a:r>
+              <a:rPr lang="en-US" sz="1200" dirty="0">
+                <a:solidFill>
+                  <a:srgbClr val="1E2761"/>
+                </a:solidFill>
+                <a:latin typeface="Calibri" pitchFamily="34" charset="0"/>
+                <a:ea typeface="Calibri" pitchFamily="34" charset="-122"/>
+                <a:cs typeface="Calibri" pitchFamily="34" charset="-120"/>
+              </a:rPr>
+              <a:t>assign every developer </a:t>
+            </a:r>
+            <a:pPr indent="0" marL="0">
+              <a:buNone/>
+            </a:pPr>
+            <a:r>
+              <a:rPr lang="en-US" sz="1200" b="1" dirty="0">
+                <a:solidFill>
+                  <a:srgbClr val="1E2761"/>
+                </a:solidFill>
+                <a:latin typeface="Calibri" pitchFamily="34" charset="0"/>
+                <a:ea typeface="Calibri" pitchFamily="34" charset="-122"/>
+                <a:cs typeface="Calibri" pitchFamily="34" charset="-120"/>
+              </a:rPr>
+              <a:t>Foundry User</a:t>
+            </a:r>
+            <a:pPr indent="0" marL="0">
+              <a:buNone/>
+            </a:pPr>
+            <a:r>
+              <a:rPr lang="en-US" sz="1200" dirty="0">
+                <a:solidFill>
+                  <a:srgbClr val="1E2761"/>
+                </a:solidFill>
+                <a:latin typeface="Calibri" pitchFamily="34" charset="0"/>
+                <a:ea typeface="Calibri" pitchFamily="34" charset="-122"/>
+                <a:cs typeface="Calibri" pitchFamily="34" charset="-120"/>
+              </a:rPr>
+              <a:t> at the Foundry resource scope. That covers Day 1 lab access. Fine-grained project-scoped roles come later.</a:t>
+            </a:r>
+            <a:endParaRPr lang="en-US" sz="1200" dirty="0"/>
           </a:p>
         </p:txBody>
       </p:sp>
@@ -7080,7 +7493,7 @@
                 <a:ea typeface="Calibri" pitchFamily="34" charset="-122"/>
                 <a:cs typeface="Calibri" pitchFamily="34" charset="-120"/>
               </a:rPr>
-              <a:t>Model catalog</a:t>
+              <a:t>Project endpoints</a:t>
             </a:r>
             <a:endParaRPr lang="en-US" sz="2800" dirty="0"/>
           </a:p>
@@ -7094,8 +7507,8 @@
         </p:nvSpPr>
         <p:spPr>
           <a:xfrm>
-            <a:off x="365760" y="1097280"/>
-            <a:ext cx="8412480" cy="3749040"/>
+            <a:off x="365760" y="1051560"/>
+            <a:ext cx="8412480" cy="365760"/>
           </a:xfrm>
           <a:prstGeom prst="rect">
             <a:avLst/>
@@ -7107,12 +7520,8 @@
           <a:bodyPr wrap="square" rtlCol="0" anchor="ctr"/>
           <a:lstStyle/>
           <a:p>
-            <a:pPr marL="342900" indent="-342900">
-              <a:spcAft>
-                <a:spcPts val="600"/>
-              </a:spcAft>
-              <a:buSzPct val="100000"/>
-              <a:buChar char="•"/>
+            <a:pPr indent="0" marL="0">
+              <a:buNone/>
             </a:pPr>
             <a:r>
               <a:rPr lang="en-US" sz="1500" dirty="0">
@@ -7123,17 +7532,99 @@
                 <a:ea typeface="Calibri" pitchFamily="34" charset="-122"/>
                 <a:cs typeface="Calibri" pitchFamily="34" charset="-120"/>
               </a:rPr>
-              <a:t>Browse frontier models (OpenAI, Meta, Mistral, others by region)</a:t>
+              <a:t>Every Foundry project has an endpoint like:</a:t>
             </a:r>
             <a:endParaRPr lang="en-US" sz="1500" dirty="0"/>
           </a:p>
-          <a:p>
-            <a:pPr marL="342900" indent="-342900">
-              <a:spcAft>
-                <a:spcPts val="600"/>
-              </a:spcAft>
-              <a:buSzPct val="100000"/>
-              <a:buChar char="•"/>
+        </p:txBody>
+      </p:sp>
+      <p:sp>
+        <p:nvSpPr>
+          <p:cNvPr id="6" name="Shape 4"/>
+          <p:cNvSpPr/>
+          <p:nvPr/>
+        </p:nvSpPr>
+        <p:spPr>
+          <a:xfrm>
+            <a:off x="365760" y="1417320"/>
+            <a:ext cx="8412480" cy="548640"/>
+          </a:xfrm>
+          <a:prstGeom prst="rect">
+            <a:avLst/>
+          </a:prstGeom>
+          <a:solidFill>
+            <a:srgbClr val="F3F4F6"/>
+          </a:solidFill>
+          <a:ln w="6350">
+            <a:solidFill>
+              <a:srgbClr val="D1D5DB"/>
+            </a:solidFill>
+            <a:prstDash val="solid"/>
+          </a:ln>
+        </p:spPr>
+      </p:sp>
+      <p:sp>
+        <p:nvSpPr>
+          <p:cNvPr id="7" name="Text 5"/>
+          <p:cNvSpPr/>
+          <p:nvPr/>
+        </p:nvSpPr>
+        <p:spPr>
+          <a:xfrm>
+            <a:off x="502920" y="1508760"/>
+            <a:ext cx="8138160" cy="365760"/>
+          </a:xfrm>
+          <a:prstGeom prst="rect">
+            <a:avLst/>
+          </a:prstGeom>
+          <a:noFill/>
+          <a:ln/>
+        </p:spPr>
+        <p:txBody>
+          <a:bodyPr wrap="square" lIns="0" tIns="0" rIns="0" bIns="0" rtlCol="0" anchor="t"/>
+          <a:lstStyle/>
+          <a:p>
+            <a:pPr indent="0" marL="0">
+              <a:buNone/>
+            </a:pPr>
+            <a:r>
+              <a:rPr lang="en-US" sz="1800" dirty="0">
+                <a:solidFill>
+                  <a:srgbClr val="212121"/>
+                </a:solidFill>
+                <a:latin typeface="Consolas" pitchFamily="34" charset="0"/>
+                <a:ea typeface="Consolas" pitchFamily="34" charset="-122"/>
+                <a:cs typeface="Consolas" pitchFamily="34" charset="-120"/>
+              </a:rPr>
+              <a:t>https://&lt;foundry-resource&gt;.services.ai.azure.com/api/projects/&lt;your-project&gt;</a:t>
+            </a:r>
+            <a:endParaRPr lang="en-US" sz="1800" dirty="0"/>
+          </a:p>
+        </p:txBody>
+      </p:sp>
+      <p:sp>
+        <p:nvSpPr>
+          <p:cNvPr id="8" name="Text 6"/>
+          <p:cNvSpPr/>
+          <p:nvPr/>
+        </p:nvSpPr>
+        <p:spPr>
+          <a:xfrm>
+            <a:off x="365760" y="2194560"/>
+            <a:ext cx="8412480" cy="1371600"/>
+          </a:xfrm>
+          <a:prstGeom prst="rect">
+            <a:avLst/>
+          </a:prstGeom>
+          <a:noFill/>
+          <a:ln/>
+        </p:spPr>
+        <p:txBody>
+          <a:bodyPr wrap="square" rtlCol="0" anchor="ctr"/>
+          <a:lstStyle/>
+          <a:p>
+            <a:pPr indent="0" marL="0">
+              <a:buNone/>
             </a:pPr>
             <a:r>
               <a:rPr lang="en-US" sz="1500" dirty="0">
@@ -7144,49 +7635,7 @@
                 <a:ea typeface="Calibri" pitchFamily="34" charset="-122"/>
                 <a:cs typeface="Calibri" pitchFamily="34" charset="-120"/>
               </a:rPr>
-              <a:t>Filter by capability — chat, embeddings, vision, etc.</a:t>
-            </a:r>
-            <a:endParaRPr lang="en-US" sz="1500" dirty="0"/>
-          </a:p>
-          <a:p>
-            <a:pPr marL="342900" indent="-342900">
-              <a:spcAft>
-                <a:spcPts val="600"/>
-              </a:spcAft>
-              <a:buSzPct val="100000"/>
-              <a:buChar char="•"/>
-            </a:pPr>
-            <a:r>
-              <a:rPr lang="en-US" sz="1500" dirty="0">
-                <a:solidFill>
-                  <a:srgbClr val="212121"/>
-                </a:solidFill>
-                <a:latin typeface="Calibri" pitchFamily="34" charset="0"/>
-                <a:ea typeface="Calibri" pitchFamily="34" charset="-122"/>
-                <a:cs typeface="Calibri" pitchFamily="34" charset="-120"/>
-              </a:rPr>
-              <a:t>See region availability, pricing tier, context window</a:t>
-            </a:r>
-            <a:endParaRPr lang="en-US" sz="1500" dirty="0"/>
-          </a:p>
-          <a:p>
-            <a:pPr marL="342900" indent="-342900">
-              <a:spcAft>
-                <a:spcPts val="600"/>
-              </a:spcAft>
-              <a:buSzPct val="100000"/>
-              <a:buChar char="•"/>
-            </a:pPr>
-            <a:r>
-              <a:rPr lang="en-US" sz="1500" dirty="0">
-                <a:solidFill>
-                  <a:srgbClr val="212121"/>
-                </a:solidFill>
-                <a:latin typeface="Calibri" pitchFamily="34" charset="0"/>
-                <a:ea typeface="Calibri" pitchFamily="34" charset="-122"/>
-                <a:cs typeface="Calibri" pitchFamily="34" charset="-120"/>
-              </a:rPr>
-              <a:t>Not every model is available in every region — check region and quota first</a:t>
+              <a:t>Set this as FOUNDRY_PROJECT_ENDPOINT in every lab's .env. MAF connects with this endpoint plus a credential — AzureCliCredential in dev, managed identity in production.</a:t>
             </a:r>
             <a:endParaRPr lang="en-US" sz="1500" dirty="0"/>
           </a:p>
@@ -7316,7 +7765,7 @@
                 <a:ea typeface="Calibri" pitchFamily="34" charset="-122"/>
                 <a:cs typeface="Calibri" pitchFamily="34" charset="-120"/>
               </a:rPr>
-              <a:t>Model deployments</a:t>
+              <a:t>Model catalog</a:t>
             </a:r>
             <a:endParaRPr lang="en-US" sz="2800" dirty="0"/>
           </a:p>
@@ -7351,7 +7800,7 @@
               <a:buChar char="•"/>
             </a:pPr>
             <a:r>
-              <a:rPr lang="en-US" sz="1400" dirty="0">
+              <a:rPr lang="en-US" sz="1500" dirty="0">
                 <a:solidFill>
                   <a:srgbClr val="212121"/>
                 </a:solidFill>
@@ -7359,9 +7808,9 @@
                 <a:ea typeface="Calibri" pitchFamily="34" charset="-122"/>
                 <a:cs typeface="Calibri" pitchFamily="34" charset="-120"/>
               </a:rPr>
-              <a:t>A deployment is a named, callable instance of a specific model</a:t>
-            </a:r>
-            <a:endParaRPr lang="en-US" sz="1400" dirty="0"/>
+              <a:t>Browse frontier models (OpenAI, Meta, Mistral, others by region)</a:t>
+            </a:r>
+            <a:endParaRPr lang="en-US" sz="1500" dirty="0"/>
           </a:p>
           <a:p>
             <a:pPr marL="342900" indent="-342900">
@@ -7372,7 +7821,7 @@
               <a:buChar char="•"/>
             </a:pPr>
             <a:r>
-              <a:rPr lang="en-US" sz="1400" dirty="0">
+              <a:rPr lang="en-US" sz="1500" dirty="0">
                 <a:solidFill>
                   <a:srgbClr val="212121"/>
                 </a:solidFill>
@@ -7380,93 +7829,9 @@
                 <a:ea typeface="Calibri" pitchFamily="34" charset="-122"/>
                 <a:cs typeface="Calibri" pitchFamily="34" charset="-120"/>
               </a:rPr>
-              <a:t>Each deployment has:</a:t>
-            </a:r>
-            <a:endParaRPr lang="en-US" sz="1400" dirty="0"/>
-          </a:p>
-          <a:p>
-            <a:pPr lvl="1" marL="685800" indent="-342900">
-              <a:spcAft>
-                <a:spcPts val="600"/>
-              </a:spcAft>
-              <a:buSzPct val="100000"/>
-              <a:buChar char="•"/>
-            </a:pPr>
-            <a:r>
-              <a:rPr lang="en-US" sz="1400" dirty="0">
-                <a:solidFill>
-                  <a:srgbClr val="212121"/>
-                </a:solidFill>
-                <a:latin typeface="Calibri" pitchFamily="34" charset="0"/>
-                <a:ea typeface="Calibri" pitchFamily="34" charset="-122"/>
-                <a:cs typeface="Calibri" pitchFamily="34" charset="-120"/>
-              </a:rPr>
-              <a:t>Deployment name — what you pass to MAF as model=…</a:t>
-            </a:r>
-            <a:endParaRPr lang="en-US" sz="1400" dirty="0"/>
-          </a:p>
-          <a:p>
-            <a:pPr lvl="1" marL="685800" indent="-342900">
-              <a:spcAft>
-                <a:spcPts val="600"/>
-              </a:spcAft>
-              <a:buSzPct val="100000"/>
-              <a:buChar char="•"/>
-            </a:pPr>
-            <a:r>
-              <a:rPr lang="en-US" sz="1400" dirty="0">
-                <a:solidFill>
-                  <a:srgbClr val="212121"/>
-                </a:solidFill>
-                <a:latin typeface="Calibri" pitchFamily="34" charset="0"/>
-                <a:ea typeface="Calibri" pitchFamily="34" charset="-122"/>
-                <a:cs typeface="Calibri" pitchFamily="34" charset="-120"/>
-              </a:rPr>
-              <a:t>Model version</a:t>
-            </a:r>
-            <a:endParaRPr lang="en-US" sz="1400" dirty="0"/>
-          </a:p>
-          <a:p>
-            <a:pPr lvl="1" marL="685800" indent="-342900">
-              <a:spcAft>
-                <a:spcPts val="600"/>
-              </a:spcAft>
-              <a:buSzPct val="100000"/>
-              <a:buChar char="•"/>
-            </a:pPr>
-            <a:r>
-              <a:rPr lang="en-US" sz="1400" dirty="0">
-                <a:solidFill>
-                  <a:srgbClr val="212121"/>
-                </a:solidFill>
-                <a:latin typeface="Calibri" pitchFamily="34" charset="0"/>
-                <a:ea typeface="Calibri" pitchFamily="34" charset="-122"/>
-                <a:cs typeface="Calibri" pitchFamily="34" charset="-120"/>
-              </a:rPr>
-              <a:t>Capacity — tokens per minute</a:t>
-            </a:r>
-            <a:endParaRPr lang="en-US" sz="1400" dirty="0"/>
-          </a:p>
-          <a:p>
-            <a:pPr lvl="1" marL="685800" indent="-342900">
-              <a:spcAft>
-                <a:spcPts val="600"/>
-              </a:spcAft>
-              <a:buSzPct val="100000"/>
-              <a:buChar char="•"/>
-            </a:pPr>
-            <a:r>
-              <a:rPr lang="en-US" sz="1400" dirty="0">
-                <a:solidFill>
-                  <a:srgbClr val="212121"/>
-                </a:solidFill>
-                <a:latin typeface="Calibri" pitchFamily="34" charset="0"/>
-                <a:ea typeface="Calibri" pitchFamily="34" charset="-122"/>
-                <a:cs typeface="Calibri" pitchFamily="34" charset="-120"/>
-              </a:rPr>
-              <a:t>Region — inherited from the project</a:t>
-            </a:r>
-            <a:endParaRPr lang="en-US" sz="1400" dirty="0"/>
+              <a:t>Filter by capability — chat, embeddings, vision, etc.</a:t>
+            </a:r>
+            <a:endParaRPr lang="en-US" sz="1500" dirty="0"/>
           </a:p>
           <a:p>
             <a:pPr marL="342900" indent="-342900">
@@ -7477,7 +7842,7 @@
               <a:buChar char="•"/>
             </a:pPr>
             <a:r>
-              <a:rPr lang="en-US" sz="1400" dirty="0">
+              <a:rPr lang="en-US" sz="1500" dirty="0">
                 <a:solidFill>
                   <a:srgbClr val="212121"/>
                 </a:solidFill>
@@ -7485,9 +7850,30 @@
                 <a:ea typeface="Calibri" pitchFamily="34" charset="-122"/>
                 <a:cs typeface="Calibri" pitchFamily="34" charset="-120"/>
               </a:rPr>
-              <a:t>Rule of thumb: one deployment per (model, role) pair. Don't share prod and dev.</a:t>
-            </a:r>
-            <a:endParaRPr lang="en-US" sz="1400" dirty="0"/>
+              <a:t>See region availability, pricing tier, context window</a:t>
+            </a:r>
+            <a:endParaRPr lang="en-US" sz="1500" dirty="0"/>
+          </a:p>
+          <a:p>
+            <a:pPr marL="342900" indent="-342900">
+              <a:spcAft>
+                <a:spcPts val="600"/>
+              </a:spcAft>
+              <a:buSzPct val="100000"/>
+              <a:buChar char="•"/>
+            </a:pPr>
+            <a:r>
+              <a:rPr lang="en-US" sz="1500" dirty="0">
+                <a:solidFill>
+                  <a:srgbClr val="212121"/>
+                </a:solidFill>
+                <a:latin typeface="Calibri" pitchFamily="34" charset="0"/>
+                <a:ea typeface="Calibri" pitchFamily="34" charset="-122"/>
+                <a:cs typeface="Calibri" pitchFamily="34" charset="-120"/>
+              </a:rPr>
+              <a:t>Not every model is available in every region — check region and quota first</a:t>
+            </a:r>
+            <a:endParaRPr lang="en-US" sz="1500" dirty="0"/>
           </a:p>
         </p:txBody>
       </p:sp>
@@ -7615,7 +8001,7 @@
                 <a:ea typeface="Calibri" pitchFamily="34" charset="-122"/>
                 <a:cs typeface="Calibri" pitchFamily="34" charset="-120"/>
               </a:rPr>
-              <a:t>Playgrounds</a:t>
+              <a:t>Model deployments</a:t>
             </a:r>
             <a:endParaRPr lang="en-US" sz="2800" dirty="0"/>
           </a:p>
@@ -7650,7 +8036,7 @@
               <a:buChar char="•"/>
             </a:pPr>
             <a:r>
-              <a:rPr lang="en-US" sz="1500" dirty="0">
+              <a:rPr lang="en-US" sz="1400" dirty="0">
                 <a:solidFill>
                   <a:srgbClr val="212121"/>
                 </a:solidFill>
@@ -7658,9 +8044,9 @@
                 <a:ea typeface="Calibri" pitchFamily="34" charset="-122"/>
                 <a:cs typeface="Calibri" pitchFamily="34" charset="-120"/>
               </a:rPr>
-              <a:t>Chat playground — test a deployed model interactively</a:t>
-            </a:r>
-            <a:endParaRPr lang="en-US" sz="1500" dirty="0"/>
+              <a:t>A deployment is a named, callable instance of a specific model</a:t>
+            </a:r>
+            <a:endParaRPr lang="en-US" sz="1400" dirty="0"/>
           </a:p>
           <a:p>
             <a:pPr marL="342900" indent="-342900">
@@ -7671,7 +8057,7 @@
               <a:buChar char="•"/>
             </a:pPr>
             <a:r>
-              <a:rPr lang="en-US" sz="1500" dirty="0">
+              <a:rPr lang="en-US" sz="1400" dirty="0">
                 <a:solidFill>
                   <a:srgbClr val="212121"/>
                 </a:solidFill>
@@ -7679,9 +8065,93 @@
                 <a:ea typeface="Calibri" pitchFamily="34" charset="-122"/>
                 <a:cs typeface="Calibri" pitchFamily="34" charset="-120"/>
               </a:rPr>
-              <a:t>Agent playground — test a Prompt agent or Hosted agent you've created in Foundry</a:t>
-            </a:r>
-            <a:endParaRPr lang="en-US" sz="1500" dirty="0"/>
+              <a:t>Each deployment has:</a:t>
+            </a:r>
+            <a:endParaRPr lang="en-US" sz="1400" dirty="0"/>
+          </a:p>
+          <a:p>
+            <a:pPr lvl="1" marL="685800" indent="-342900">
+              <a:spcAft>
+                <a:spcPts val="600"/>
+              </a:spcAft>
+              <a:buSzPct val="100000"/>
+              <a:buChar char="•"/>
+            </a:pPr>
+            <a:r>
+              <a:rPr lang="en-US" sz="1400" dirty="0">
+                <a:solidFill>
+                  <a:srgbClr val="212121"/>
+                </a:solidFill>
+                <a:latin typeface="Calibri" pitchFamily="34" charset="0"/>
+                <a:ea typeface="Calibri" pitchFamily="34" charset="-122"/>
+                <a:cs typeface="Calibri" pitchFamily="34" charset="-120"/>
+              </a:rPr>
+              <a:t>Deployment name — what you pass to MAF as model=…</a:t>
+            </a:r>
+            <a:endParaRPr lang="en-US" sz="1400" dirty="0"/>
+          </a:p>
+          <a:p>
+            <a:pPr lvl="1" marL="685800" indent="-342900">
+              <a:spcAft>
+                <a:spcPts val="600"/>
+              </a:spcAft>
+              <a:buSzPct val="100000"/>
+              <a:buChar char="•"/>
+            </a:pPr>
+            <a:r>
+              <a:rPr lang="en-US" sz="1400" dirty="0">
+                <a:solidFill>
+                  <a:srgbClr val="212121"/>
+                </a:solidFill>
+                <a:latin typeface="Calibri" pitchFamily="34" charset="0"/>
+                <a:ea typeface="Calibri" pitchFamily="34" charset="-122"/>
+                <a:cs typeface="Calibri" pitchFamily="34" charset="-120"/>
+              </a:rPr>
+              <a:t>Model version</a:t>
+            </a:r>
+            <a:endParaRPr lang="en-US" sz="1400" dirty="0"/>
+          </a:p>
+          <a:p>
+            <a:pPr lvl="1" marL="685800" indent="-342900">
+              <a:spcAft>
+                <a:spcPts val="600"/>
+              </a:spcAft>
+              <a:buSzPct val="100000"/>
+              <a:buChar char="•"/>
+            </a:pPr>
+            <a:r>
+              <a:rPr lang="en-US" sz="1400" dirty="0">
+                <a:solidFill>
+                  <a:srgbClr val="212121"/>
+                </a:solidFill>
+                <a:latin typeface="Calibri" pitchFamily="34" charset="0"/>
+                <a:ea typeface="Calibri" pitchFamily="34" charset="-122"/>
+                <a:cs typeface="Calibri" pitchFamily="34" charset="-120"/>
+              </a:rPr>
+              <a:t>Capacity — tokens per minute</a:t>
+            </a:r>
+            <a:endParaRPr lang="en-US" sz="1400" dirty="0"/>
+          </a:p>
+          <a:p>
+            <a:pPr lvl="1" marL="685800" indent="-342900">
+              <a:spcAft>
+                <a:spcPts val="600"/>
+              </a:spcAft>
+              <a:buSzPct val="100000"/>
+              <a:buChar char="•"/>
+            </a:pPr>
+            <a:r>
+              <a:rPr lang="en-US" sz="1400" dirty="0">
+                <a:solidFill>
+                  <a:srgbClr val="212121"/>
+                </a:solidFill>
+                <a:latin typeface="Calibri" pitchFamily="34" charset="0"/>
+                <a:ea typeface="Calibri" pitchFamily="34" charset="-122"/>
+                <a:cs typeface="Calibri" pitchFamily="34" charset="-120"/>
+              </a:rPr>
+              <a:t>Region — inherited from the project</a:t>
+            </a:r>
+            <a:endParaRPr lang="en-US" sz="1400" dirty="0"/>
           </a:p>
           <a:p>
             <a:pPr marL="342900" indent="-342900">
@@ -7692,7 +8162,7 @@
               <a:buChar char="•"/>
             </a:pPr>
             <a:r>
-              <a:rPr lang="en-US" sz="1500" dirty="0">
+              <a:rPr lang="en-US" sz="1400" dirty="0">
                 <a:solidFill>
                   <a:srgbClr val="212121"/>
                 </a:solidFill>
@@ -7700,51 +8170,9 @@
                 <a:ea typeface="Calibri" pitchFamily="34" charset="-122"/>
                 <a:cs typeface="Calibri" pitchFamily="34" charset="-120"/>
               </a:rPr>
-              <a:t>Prompt flow / evaluation playgrounds — for testing eval configurations</a:t>
-            </a:r>
-            <a:endParaRPr lang="en-US" sz="1500" dirty="0"/>
-          </a:p>
-          <a:p>
-            <a:pPr marL="342900" indent="-342900">
-              <a:spcAft>
-                <a:spcPts val="600"/>
-              </a:spcAft>
-              <a:buSzPct val="100000"/>
-              <a:buChar char="•"/>
-            </a:pPr>
-            <a:r>
-              <a:rPr lang="en-US" sz="1500" dirty="0">
-                <a:solidFill>
-                  <a:srgbClr val="212121"/>
-                </a:solidFill>
-                <a:latin typeface="Calibri" pitchFamily="34" charset="0"/>
-                <a:ea typeface="Calibri" pitchFamily="34" charset="-122"/>
-                <a:cs typeface="Calibri" pitchFamily="34" charset="-120"/>
-              </a:rPr>
-              <a:t>Use playgrounds to sanity-check before writing agent code</a:t>
-            </a:r>
-            <a:endParaRPr lang="en-US" sz="1500" dirty="0"/>
-          </a:p>
-          <a:p>
-            <a:pPr marL="342900" indent="-342900">
-              <a:spcAft>
-                <a:spcPts val="600"/>
-              </a:spcAft>
-              <a:buSzPct val="100000"/>
-              <a:buChar char="•"/>
-            </a:pPr>
-            <a:r>
-              <a:rPr lang="en-US" sz="1500" dirty="0">
-                <a:solidFill>
-                  <a:srgbClr val="212121"/>
-                </a:solidFill>
-                <a:latin typeface="Calibri" pitchFamily="34" charset="0"/>
-                <a:ea typeface="Calibri" pitchFamily="34" charset="-122"/>
-                <a:cs typeface="Calibri" pitchFamily="34" charset="-120"/>
-              </a:rPr>
-              <a:t>If it doesn't work in the playground, it won't work in MAF either</a:t>
-            </a:r>
-            <a:endParaRPr lang="en-US" sz="1500" dirty="0"/>
+              <a:t>Rule of thumb: one deployment per (model, role) pair. Don't share prod and dev.</a:t>
+            </a:r>
+            <a:endParaRPr lang="en-US" sz="1400" dirty="0"/>
           </a:p>
         </p:txBody>
       </p:sp>
@@ -7872,7 +8300,7 @@
                 <a:ea typeface="Calibri" pitchFamily="34" charset="-122"/>
                 <a:cs typeface="Calibri" pitchFamily="34" charset="-120"/>
               </a:rPr>
-              <a:t>Connections</a:t>
+              <a:t>Playgrounds</a:t>
             </a:r>
             <a:endParaRPr lang="en-US" sz="2800" dirty="0"/>
           </a:p>
@@ -7915,7 +8343,7 @@
                 <a:ea typeface="Calibri" pitchFamily="34" charset="-122"/>
                 <a:cs typeface="Calibri" pitchFamily="34" charset="-120"/>
               </a:rPr>
-              <a:t>How a Foundry resource references other Azure services — AI Search, Storage, Key Vault, Fabric, and more</a:t>
+              <a:t>Chat playground — test a deployed model interactively</a:t>
             </a:r>
             <a:endParaRPr lang="en-US" sz="1500" dirty="0"/>
           </a:p>
@@ -7936,7 +8364,7 @@
                 <a:ea typeface="Calibri" pitchFamily="34" charset="-122"/>
                 <a:cs typeface="Calibri" pitchFamily="34" charset="-120"/>
               </a:rPr>
-              <a:t>Each connected resource is a separate Azure resource with its own networking and access policies</a:t>
+              <a:t>Agent playground — test a Prompt agent or Hosted agent you've created in Foundry</a:t>
             </a:r>
             <a:endParaRPr lang="en-US" sz="1500" dirty="0"/>
           </a:p>
@@ -7957,7 +8385,7 @@
                 <a:ea typeface="Calibri" pitchFamily="34" charset="-122"/>
                 <a:cs typeface="Calibri" pitchFamily="34" charset="-120"/>
               </a:rPr>
-              <a:t>Configured on the Foundry resource; projects inherit them</a:t>
+              <a:t>Prompt flow / evaluation playgrounds — for testing eval configurations</a:t>
             </a:r>
             <a:endParaRPr lang="en-US" sz="1500" dirty="0"/>
           </a:p>
@@ -7978,7 +8406,7 @@
                 <a:ea typeface="Calibri" pitchFamily="34" charset="-122"/>
                 <a:cs typeface="Calibri" pitchFamily="34" charset="-120"/>
               </a:rPr>
-              <a:t>Auth via managed identity or service principal — never long-lived keys in production</a:t>
+              <a:t>Use playgrounds to sanity-check before writing agent code</a:t>
             </a:r>
             <a:endParaRPr lang="en-US" sz="1500" dirty="0"/>
           </a:p>
@@ -7999,7 +8427,7 @@
                 <a:ea typeface="Calibri" pitchFamily="34" charset="-122"/>
                 <a:cs typeface="Calibri" pitchFamily="34" charset="-120"/>
               </a:rPr>
-              <a:t>We wire connections for Foundry IQ knowledge sources on Day 2</a:t>
+              <a:t>If it doesn't work in the playground, it won't work in MAF either</a:t>
             </a:r>
             <a:endParaRPr lang="en-US" sz="1500" dirty="0"/>
           </a:p>

--- a/decks/day1/module-2-foundry-portal.pptx
+++ b/decks/day1/module-2-foundry-portal.pptx
@@ -7553,11 +7553,11 @@
             <a:avLst/>
           </a:prstGeom>
           <a:solidFill>
-            <a:srgbClr val="F3F4F6"/>
+            <a:srgbClr val="1D1E22"/>
           </a:solidFill>
-          <a:ln w="6350">
+          <a:ln w="9525">
             <a:solidFill>
-              <a:srgbClr val="D1D5DB"/>
+              <a:srgbClr val="2A2B2E"/>
             </a:solidFill>
             <a:prstDash val="solid"/>
           </a:ln>
@@ -7581,7 +7581,9 @@
           <a:ln/>
         </p:spPr>
         <p:txBody>
-          <a:bodyPr wrap="square" lIns="0" tIns="0" rIns="0" bIns="0" rtlCol="0" anchor="t"/>
+          <a:bodyPr wrap="square" lIns="0" tIns="0" rIns="0" bIns="0" rtlCol="0" anchor="t">
+            <a:normAutofit/>
+          </a:bodyPr>
           <a:lstStyle/>
           <a:p>
             <a:pPr indent="0" marL="0">
@@ -7590,7 +7592,7 @@
             <a:r>
               <a:rPr lang="en-US" sz="1800" dirty="0">
                 <a:solidFill>
-                  <a:srgbClr val="212121"/>
+                  <a:srgbClr val="FFFFFF"/>
                 </a:solidFill>
                 <a:latin typeface="Consolas" pitchFamily="34" charset="0"/>
                 <a:ea typeface="Consolas" pitchFamily="34" charset="-122"/>
